--- a/docs/PROGRESS_SLIDES_2026-05-13.pptx
+++ b/docs/PROGRESS_SLIDES_2026-05-13.pptx
@@ -11,9 +11,6 @@
     <p:sldId id="259" r:id="rId10"/>
     <p:sldId id="260" r:id="rId11"/>
     <p:sldId id="261" r:id="rId12"/>
-    <p:sldId id="262" r:id="rId13"/>
-    <p:sldId id="263" r:id="rId14"/>
-    <p:sldId id="264" r:id="rId15"/>
   </p:sldIdLst>
   <p:sldSz cx="9144000" cy="5143500" type="screen4x3"/>
   <p:notesSz cx="6858000" cy="9144000"/>
@@ -4254,8 +4251,8 @@
         </p:nvSpPr>
         <p:spPr>
           <a:xfrm>
-            <a:off x="457200" y="2377440"/>
-            <a:ext cx="4160520" cy="1143000"/>
+            <a:off x="457200" y="2514600"/>
+            <a:ext cx="4160520" cy="1508760"/>
           </a:xfrm>
           <a:prstGeom prst="rect">
             <a:avLst/>
@@ -4299,8 +4296,8 @@
         </p:nvSpPr>
         <p:spPr>
           <a:xfrm>
-            <a:off x="457200" y="2377440"/>
-            <a:ext cx="73152" cy="1143000"/>
+            <a:off x="457200" y="2514600"/>
+            <a:ext cx="73152" cy="1508760"/>
           </a:xfrm>
           <a:prstGeom prst="rect">
             <a:avLst/>
@@ -4342,7 +4339,7 @@
         </p:nvSpPr>
         <p:spPr>
           <a:xfrm>
-            <a:off x="850392" y="2514600"/>
+            <a:off x="850392" y="2651760"/>
             <a:ext cx="3538728" cy="320040"/>
           </a:xfrm>
           <a:prstGeom prst="rect">
@@ -4364,7 +4361,7 @@
                 </a:solidFill>
                 <a:latin typeface="Calibri"/>
               </a:rPr>
-              <a:t>Three-agent swarm</a:t>
+              <a:t>Three-agent swarm, end-to-end</a:t>
             </a:r>
           </a:p>
         </p:txBody>
@@ -4377,8 +4374,8 @@
         </p:nvSpPr>
         <p:spPr>
           <a:xfrm>
-            <a:off x="850392" y="2834640"/>
-            <a:ext cx="3538728" cy="640080"/>
+            <a:off x="850392" y="2971800"/>
+            <a:ext cx="3538728" cy="1005840"/>
           </a:xfrm>
           <a:prstGeom prst="rect">
             <a:avLst/>
@@ -4399,7 +4396,7 @@
                 </a:solidFill>
                 <a:latin typeface="Calibri"/>
               </a:rPr>
-              <a:t>Researcher → Verifier (four prompt strategies) → Adjudicator. Coordinator owns retries and writes every stage to SQLite.</a:t>
+              <a:t>Researcher proposes, Verifier tries to disprove, Adjudicator decides on retry exhaustion. One pair (P2/NL) has needed the Adjudicator. Average runtime ~32s.</a:t>
             </a:r>
           </a:p>
         </p:txBody>
@@ -4412,8 +4409,8 @@
         </p:nvSpPr>
         <p:spPr>
           <a:xfrm>
-            <a:off x="4754880" y="2377440"/>
-            <a:ext cx="4160520" cy="1143000"/>
+            <a:off x="4754880" y="2514600"/>
+            <a:ext cx="4160520" cy="1508760"/>
           </a:xfrm>
           <a:prstGeom prst="rect">
             <a:avLst/>
@@ -4457,8 +4454,8 @@
         </p:nvSpPr>
         <p:spPr>
           <a:xfrm>
-            <a:off x="4754880" y="2377440"/>
-            <a:ext cx="73152" cy="1143000"/>
+            <a:off x="4754880" y="2514600"/>
+            <a:ext cx="73152" cy="1508760"/>
           </a:xfrm>
           <a:prstGeom prst="rect">
             <a:avLst/>
@@ -4500,7 +4497,7 @@
         </p:nvSpPr>
         <p:spPr>
           <a:xfrm>
-            <a:off x="5148072" y="2514600"/>
+            <a:off x="5148072" y="2651760"/>
             <a:ext cx="3538728" cy="320040"/>
           </a:xfrm>
           <a:prstGeom prst="rect">
@@ -4522,7 +4519,7 @@
                 </a:solidFill>
                 <a:latin typeface="Calibri"/>
               </a:rPr>
-              <a:t>Live dashboard</a:t>
+              <a:t>Live dashboard with full audit trail</a:t>
             </a:r>
           </a:p>
         </p:txBody>
@@ -4535,8 +4532,8 @@
         </p:nvSpPr>
         <p:spPr>
           <a:xfrm>
-            <a:off x="5148072" y="2834640"/>
-            <a:ext cx="3538728" cy="640080"/>
+            <a:off x="5148072" y="2971800"/>
+            <a:ext cx="3538728" cy="1005840"/>
           </a:xfrm>
           <a:prstGeom prst="rect">
             <a:avLst/>
@@ -4557,109 +4554,21 @@
                 </a:solidFill>
                 <a:latin typeface="Calibri"/>
               </a:rPr>
-              <a:t>Nine-page Streamlit app: Run Console, Results, Questions, Verifier Strategies, Hand-marks, Models, Costs, Prompts.</a:t>
-            </a:r>
-          </a:p>
-        </p:txBody>
-      </p:sp>
-      <p:sp>
-        <p:nvSpPr>
-          <p:cNvPr id="33" name="Rectangle 32"/>
-          <p:cNvSpPr/>
-          <p:nvPr/>
-        </p:nvSpPr>
-        <p:spPr>
-          <a:xfrm>
-            <a:off x="457200" y="3657600"/>
-            <a:ext cx="4160520" cy="1143000"/>
-          </a:xfrm>
-          <a:prstGeom prst="rect">
-            <a:avLst/>
-          </a:prstGeom>
-          <a:solidFill>
-            <a:srgbClr val="FFFFFF"/>
-          </a:solidFill>
-          <a:ln w="6350">
-            <a:solidFill>
-              <a:srgbClr val="E2E8F0"/>
-            </a:solidFill>
-          </a:ln>
-        </p:spPr>
-        <p:style>
-          <a:lnRef idx="1">
-            <a:schemeClr val="accent1"/>
-          </a:lnRef>
-          <a:fillRef idx="3">
-            <a:schemeClr val="accent1"/>
-          </a:fillRef>
-          <a:effectRef idx="2">
-            <a:schemeClr val="accent1"/>
-          </a:effectRef>
-          <a:fontRef idx="minor">
-            <a:schemeClr val="lt1"/>
-          </a:fontRef>
-        </p:style>
-        <p:txBody>
-          <a:bodyPr rtlCol="0" anchor="ctr"/>
-          <a:lstStyle/>
-          <a:p>
-            <a:pPr algn="ctr"/>
-          </a:p>
-        </p:txBody>
-      </p:sp>
-      <p:sp>
-        <p:nvSpPr>
-          <p:cNvPr id="34" name="Rectangle 33"/>
-          <p:cNvSpPr/>
-          <p:nvPr/>
-        </p:nvSpPr>
-        <p:spPr>
-          <a:xfrm>
-            <a:off x="457200" y="3657600"/>
-            <a:ext cx="73152" cy="1143000"/>
-          </a:xfrm>
-          <a:prstGeom prst="rect">
-            <a:avLst/>
-          </a:prstGeom>
-          <a:solidFill>
-            <a:srgbClr val="0F766E"/>
-          </a:solidFill>
-          <a:ln>
-            <a:noFill/>
-          </a:ln>
-        </p:spPr>
-        <p:style>
-          <a:lnRef idx="1">
-            <a:schemeClr val="accent1"/>
-          </a:lnRef>
-          <a:fillRef idx="3">
-            <a:schemeClr val="accent1"/>
-          </a:fillRef>
-          <a:effectRef idx="2">
-            <a:schemeClr val="accent1"/>
-          </a:effectRef>
-          <a:fontRef idx="minor">
-            <a:schemeClr val="lt1"/>
-          </a:fontRef>
-        </p:style>
-        <p:txBody>
-          <a:bodyPr rtlCol="0" anchor="ctr"/>
-          <a:lstStyle/>
-          <a:p>
-            <a:pPr algn="ctr"/>
-          </a:p>
-        </p:txBody>
-      </p:sp>
-      <p:sp>
-        <p:nvSpPr>
-          <p:cNvPr id="35" name="TextBox 34"/>
+              <a:t>Nine Streamlit pages over the SQLite store. Every LLM call logs tokens, latency, cost, prompt version. Hand-marks lock to a commit SHA so D9 is automatic.</a:t>
+            </a:r>
+          </a:p>
+        </p:txBody>
+      </p:sp>
+      <p:sp>
+        <p:nvSpPr>
+          <p:cNvPr id="33" name="TextBox 32"/>
           <p:cNvSpPr txBox="1"/>
           <p:nvPr/>
         </p:nvSpPr>
         <p:spPr>
           <a:xfrm>
-            <a:off x="850392" y="3794760"/>
-            <a:ext cx="3538728" cy="320040"/>
+            <a:off x="457200" y="4850892"/>
+            <a:ext cx="8229600" cy="182880"/>
           </a:xfrm>
           <a:prstGeom prst="rect">
             <a:avLst/>
@@ -4674,241 +4583,13 @@
           <a:p>
             <a:pPr algn="l"/>
             <a:r>
-              <a:rPr sz="1400" b="1">
-                <a:solidFill>
-                  <a:srgbClr val="1A202C"/>
+              <a:rPr sz="800" b="0">
+                <a:solidFill>
+                  <a:srgbClr val="718096"/>
                 </a:solidFill>
                 <a:latin typeface="Calibri"/>
               </a:rPr>
-              <a:t>Audit-trail discipline</a:t>
-            </a:r>
-          </a:p>
-        </p:txBody>
-      </p:sp>
-      <p:sp>
-        <p:nvSpPr>
-          <p:cNvPr id="36" name="TextBox 35"/>
-          <p:cNvSpPr txBox="1"/>
-          <p:nvPr/>
-        </p:nvSpPr>
-        <p:spPr>
-          <a:xfrm>
-            <a:off x="850392" y="4114800"/>
-            <a:ext cx="3538728" cy="640080"/>
-          </a:xfrm>
-          <a:prstGeom prst="rect">
-            <a:avLst/>
-          </a:prstGeom>
-          <a:noFill/>
-        </p:spPr>
-        <p:txBody>
-          <a:bodyPr wrap="square" lIns="0" rIns="0" tIns="0" bIns="0">
-            <a:spAutoFit/>
-          </a:bodyPr>
-          <a:lstStyle/>
-          <a:p>
-            <a:pPr algn="l"/>
-            <a:r>
-              <a:rPr sz="1100" b="0">
-                <a:solidFill>
-                  <a:srgbClr val="2D3748"/>
-                </a:solidFill>
-                <a:latin typeface="Calibri"/>
-              </a:rPr>
-              <a:t>Every LLM call logs tokens, latency, cost, prompt version. Hand-marks lock to a commit SHA. Reproducible from logs alone.</a:t>
-            </a:r>
-          </a:p>
-        </p:txBody>
-      </p:sp>
-      <p:sp>
-        <p:nvSpPr>
-          <p:cNvPr id="37" name="Rectangle 36"/>
-          <p:cNvSpPr/>
-          <p:nvPr/>
-        </p:nvSpPr>
-        <p:spPr>
-          <a:xfrm>
-            <a:off x="4754880" y="3657600"/>
-            <a:ext cx="4160520" cy="1143000"/>
-          </a:xfrm>
-          <a:prstGeom prst="rect">
-            <a:avLst/>
-          </a:prstGeom>
-          <a:solidFill>
-            <a:srgbClr val="FFFFFF"/>
-          </a:solidFill>
-          <a:ln w="6350">
-            <a:solidFill>
-              <a:srgbClr val="E2E8F0"/>
-            </a:solidFill>
-          </a:ln>
-        </p:spPr>
-        <p:style>
-          <a:lnRef idx="1">
-            <a:schemeClr val="accent1"/>
-          </a:lnRef>
-          <a:fillRef idx="3">
-            <a:schemeClr val="accent1"/>
-          </a:fillRef>
-          <a:effectRef idx="2">
-            <a:schemeClr val="accent1"/>
-          </a:effectRef>
-          <a:fontRef idx="minor">
-            <a:schemeClr val="lt1"/>
-          </a:fontRef>
-        </p:style>
-        <p:txBody>
-          <a:bodyPr rtlCol="0" anchor="ctr"/>
-          <a:lstStyle/>
-          <a:p>
-            <a:pPr algn="ctr"/>
-          </a:p>
-        </p:txBody>
-      </p:sp>
-      <p:sp>
-        <p:nvSpPr>
-          <p:cNvPr id="38" name="Rectangle 37"/>
-          <p:cNvSpPr/>
-          <p:nvPr/>
-        </p:nvSpPr>
-        <p:spPr>
-          <a:xfrm>
-            <a:off x="4754880" y="3657600"/>
-            <a:ext cx="73152" cy="1143000"/>
-          </a:xfrm>
-          <a:prstGeom prst="rect">
-            <a:avLst/>
-          </a:prstGeom>
-          <a:solidFill>
-            <a:srgbClr val="38A169"/>
-          </a:solidFill>
-          <a:ln>
-            <a:noFill/>
-          </a:ln>
-        </p:spPr>
-        <p:style>
-          <a:lnRef idx="1">
-            <a:schemeClr val="accent1"/>
-          </a:lnRef>
-          <a:fillRef idx="3">
-            <a:schemeClr val="accent1"/>
-          </a:fillRef>
-          <a:effectRef idx="2">
-            <a:schemeClr val="accent1"/>
-          </a:effectRef>
-          <a:fontRef idx="minor">
-            <a:schemeClr val="lt1"/>
-          </a:fontRef>
-        </p:style>
-        <p:txBody>
-          <a:bodyPr rtlCol="0" anchor="ctr"/>
-          <a:lstStyle/>
-          <a:p>
-            <a:pPr algn="ctr"/>
-          </a:p>
-        </p:txBody>
-      </p:sp>
-      <p:sp>
-        <p:nvSpPr>
-          <p:cNvPr id="39" name="TextBox 38"/>
-          <p:cNvSpPr txBox="1"/>
-          <p:nvPr/>
-        </p:nvSpPr>
-        <p:spPr>
-          <a:xfrm>
-            <a:off x="5148072" y="3794760"/>
-            <a:ext cx="3538728" cy="320040"/>
-          </a:xfrm>
-          <a:prstGeom prst="rect">
-            <a:avLst/>
-          </a:prstGeom>
-          <a:noFill/>
-        </p:spPr>
-        <p:txBody>
-          <a:bodyPr wrap="square" lIns="0" rIns="0" tIns="0" bIns="0">
-            <a:spAutoFit/>
-          </a:bodyPr>
-          <a:lstStyle/>
-          <a:p>
-            <a:pPr algn="l"/>
-            <a:r>
-              <a:rPr sz="1400" b="1">
-                <a:solidFill>
-                  <a:srgbClr val="1A202C"/>
-                </a:solidFill>
-                <a:latin typeface="Calibri"/>
-              </a:rPr>
-              <a:t>In-app hand-marking</a:t>
-            </a:r>
-          </a:p>
-        </p:txBody>
-      </p:sp>
-      <p:sp>
-        <p:nvSpPr>
-          <p:cNvPr id="40" name="TextBox 39"/>
-          <p:cNvSpPr txBox="1"/>
-          <p:nvPr/>
-        </p:nvSpPr>
-        <p:spPr>
-          <a:xfrm>
-            <a:off x="5148072" y="4114800"/>
-            <a:ext cx="3538728" cy="640080"/>
-          </a:xfrm>
-          <a:prstGeom prst="rect">
-            <a:avLst/>
-          </a:prstGeom>
-          <a:noFill/>
-        </p:spPr>
-        <p:txBody>
-          <a:bodyPr wrap="square" lIns="0" rIns="0" tIns="0" bIns="0">
-            <a:spAutoFit/>
-          </a:bodyPr>
-          <a:lstStyle/>
-          <a:p>
-            <a:pPr algn="l"/>
-            <a:r>
-              <a:rPr sz="1100" b="0">
-                <a:solidFill>
-                  <a:srgbClr val="2D3748"/>
-                </a:solidFill>
-                <a:latin typeface="Calibri"/>
-              </a:rPr>
-              <a:t>Add a hand-mark from the dashboard. The page writes the CSV, commits the change, and syncs the DB so D9 is satisfied automatically.</a:t>
-            </a:r>
-          </a:p>
-        </p:txBody>
-      </p:sp>
-      <p:sp>
-        <p:nvSpPr>
-          <p:cNvPr id="41" name="TextBox 40"/>
-          <p:cNvSpPr txBox="1"/>
-          <p:nvPr/>
-        </p:nvSpPr>
-        <p:spPr>
-          <a:xfrm>
-            <a:off x="457200" y="4850892"/>
-            <a:ext cx="8229600" cy="182880"/>
-          </a:xfrm>
-          <a:prstGeom prst="rect">
-            <a:avLst/>
-          </a:prstGeom>
-          <a:noFill/>
-        </p:spPr>
-        <p:txBody>
-          <a:bodyPr wrap="square" lIns="0" rIns="0" tIns="0" bIns="0">
-            <a:spAutoFit/>
-          </a:bodyPr>
-          <a:lstStyle/>
-          <a:p>
-            <a:pPr algn="l"/>
-            <a:r>
-              <a:rPr sz="800" b="0">
-                <a:solidFill>
-                  <a:srgbClr val="718096"/>
-                </a:solidFill>
-                <a:latin typeface="Calibri"/>
-              </a:rPr>
-              <a:t>ODMI Agent Swarm  ·  Benjy Bream  ·  King's College London  ·  2 / 9</a:t>
+              <a:t>ODMI Agent Swarm  ·  Benjy Bream  ·  King's College London  ·  2 / 6</a:t>
             </a:r>
           </a:p>
         </p:txBody>
@@ -5749,7 +5430,7 @@
                 </a:solidFill>
                 <a:latin typeface="Calibri"/>
               </a:rPr>
-              <a:t>ODMI Agent Swarm  ·  Benjy Bream  ·  King's College London  ·  3 / 9</a:t>
+              <a:t>ODMI Agent Swarm  ·  Benjy Bream  ·  King's College London  ·  3 / 6</a:t>
             </a:r>
           </a:p>
         </p:txBody>
@@ -5845,7 +5526,7 @@
                 </a:solidFill>
                 <a:latin typeface="Calibri"/>
               </a:rPr>
-              <a:t>METHODOLOGY</a:t>
+              <a:t>FINALISED PAIRS · SUCCESS VS FAILURE</a:t>
             </a:r>
           </a:p>
         </p:txBody>
@@ -5880,7 +5561,7 @@
                 </a:solidFill>
                 <a:latin typeface="Calibri"/>
               </a:rPr>
-              <a:t>How we will measure it</a:t>
+              <a:t>Results so far, per country</a:t>
             </a:r>
           </a:p>
         </p:txBody>
@@ -5894,7 +5575,7 @@
         <p:spPr>
           <a:xfrm>
             <a:off x="457200" y="1280160"/>
-            <a:ext cx="2697480" cy="1371600"/>
+            <a:ext cx="8229600" cy="3108960"/>
           </a:xfrm>
           <a:prstGeom prst="rect">
             <a:avLst/>
@@ -5930,163 +5611,20 @@
           </a:p>
         </p:txBody>
       </p:sp>
-      <p:sp>
-        <p:nvSpPr>
-          <p:cNvPr id="6" name="TextBox 5"/>
-          <p:cNvSpPr txBox="1"/>
-          <p:nvPr/>
-        </p:nvSpPr>
-        <p:spPr>
-          <a:xfrm>
-            <a:off x="640080" y="1417320"/>
-            <a:ext cx="2331720" cy="365760"/>
-          </a:xfrm>
-          <a:prstGeom prst="rect">
-            <a:avLst/>
-          </a:prstGeom>
-          <a:noFill/>
-        </p:spPr>
-        <p:txBody>
-          <a:bodyPr wrap="square" lIns="0" rIns="0" tIns="0" bIns="0">
-            <a:spAutoFit/>
-          </a:bodyPr>
-          <a:lstStyle/>
-          <a:p>
-            <a:pPr algn="l"/>
-            <a:r>
-              <a:rPr sz="2000" b="1">
-                <a:solidFill>
-                  <a:srgbClr val="0F766E"/>
-                </a:solidFill>
-                <a:latin typeface="Calibri"/>
-              </a:rPr>
-              <a:t>0 – 3</a:t>
-            </a:r>
-          </a:p>
-        </p:txBody>
-      </p:sp>
-      <p:sp>
-        <p:nvSpPr>
-          <p:cNvPr id="7" name="TextBox 6"/>
-          <p:cNvSpPr txBox="1"/>
-          <p:nvPr/>
-        </p:nvSpPr>
-        <p:spPr>
-          <a:xfrm>
-            <a:off x="640080" y="1783080"/>
-            <a:ext cx="2331720" cy="274320"/>
-          </a:xfrm>
-          <a:prstGeom prst="rect">
-            <a:avLst/>
-          </a:prstGeom>
-          <a:noFill/>
-        </p:spPr>
-        <p:txBody>
-          <a:bodyPr wrap="square" lIns="0" rIns="0" tIns="0" bIns="0">
-            <a:spAutoFit/>
-          </a:bodyPr>
-          <a:lstStyle/>
-          <a:p>
-            <a:pPr algn="l"/>
-            <a:r>
-              <a:rPr sz="1300" b="1">
-                <a:solidFill>
-                  <a:srgbClr val="1A202C"/>
-                </a:solidFill>
-                <a:latin typeface="Calibri"/>
-              </a:rPr>
-              <a:t>Evidence Accessibility</a:t>
-            </a:r>
-          </a:p>
-        </p:txBody>
-      </p:sp>
-      <p:sp>
-        <p:nvSpPr>
-          <p:cNvPr id="8" name="TextBox 7"/>
-          <p:cNvSpPr txBox="1"/>
-          <p:nvPr/>
-        </p:nvSpPr>
-        <p:spPr>
-          <a:xfrm>
-            <a:off x="640080" y="2029968"/>
-            <a:ext cx="2331720" cy="228600"/>
-          </a:xfrm>
-          <a:prstGeom prst="rect">
-            <a:avLst/>
-          </a:prstGeom>
-          <a:noFill/>
-        </p:spPr>
-        <p:txBody>
-          <a:bodyPr wrap="square" lIns="0" rIns="0" tIns="0" bIns="0">
-            <a:spAutoFit/>
-          </a:bodyPr>
-          <a:lstStyle/>
-          <a:p>
-            <a:pPr algn="l"/>
-            <a:r>
-              <a:rPr sz="1000" b="0">
-                <a:solidFill>
-                  <a:srgbClr val="718096"/>
-                </a:solidFill>
-                <a:latin typeface="Calibri"/>
-              </a:rPr>
-              <a:t>EA</a:t>
-            </a:r>
-          </a:p>
-        </p:txBody>
-      </p:sp>
-      <p:sp>
-        <p:nvSpPr>
-          <p:cNvPr id="9" name="TextBox 8"/>
-          <p:cNvSpPr txBox="1"/>
-          <p:nvPr/>
-        </p:nvSpPr>
-        <p:spPr>
-          <a:xfrm>
-            <a:off x="640080" y="2240280"/>
-            <a:ext cx="2331720" cy="365760"/>
-          </a:xfrm>
-          <a:prstGeom prst="rect">
-            <a:avLst/>
-          </a:prstGeom>
-          <a:noFill/>
-        </p:spPr>
-        <p:txBody>
-          <a:bodyPr wrap="square" lIns="0" rIns="0" tIns="0" bIns="0">
-            <a:spAutoFit/>
-          </a:bodyPr>
-          <a:lstStyle/>
-          <a:p>
-            <a:pPr algn="l"/>
-            <a:r>
-              <a:rPr sz="1000" b="0">
-                <a:solidFill>
-                  <a:srgbClr val="2D3748"/>
-                </a:solidFill>
-                <a:latin typeface="Calibri"/>
-              </a:rPr>
-              <a:t>Findable on the open web for this country?</a:t>
-            </a:r>
-          </a:p>
-        </p:txBody>
-      </p:sp>
-      <p:sp>
-        <p:nvSpPr>
-          <p:cNvPr id="10" name="Rectangle 9"/>
-          <p:cNvSpPr/>
-          <p:nvPr/>
-        </p:nvSpPr>
-        <p:spPr>
-          <a:xfrm>
-            <a:off x="3264408" y="1280160"/>
-            <a:ext cx="2697480" cy="1371600"/>
-          </a:xfrm>
-          <a:prstGeom prst="rect">
-            <a:avLst/>
-          </a:prstGeom>
-          <a:solidFill>
-            <a:srgbClr val="FFFFFF"/>
-          </a:solidFill>
+      <p:cxnSp>
+        <p:nvCxnSpPr>
+          <p:cNvPr id="6" name="Connector 5"/>
+          <p:cNvCxnSpPr/>
+          <p:nvPr/>
+        </p:nvCxnSpPr>
+        <p:spPr>
+          <a:xfrm>
+            <a:off x="1143000" y="1645920"/>
+            <a:ext cx="0" cy="2194560"/>
+          </a:xfrm>
+          <a:prstGeom prst="line">
+            <a:avLst/>
+          </a:prstGeom>
           <a:ln w="6350">
             <a:solidFill>
               <a:srgbClr val="E2E8F0"/>
@@ -6094,6 +5632,217 @@
           </a:ln>
         </p:spPr>
         <p:style>
+          <a:lnRef idx="2">
+            <a:schemeClr val="accent1"/>
+          </a:lnRef>
+          <a:fillRef idx="0">
+            <a:schemeClr val="accent1"/>
+          </a:fillRef>
+          <a:effectRef idx="1">
+            <a:schemeClr val="accent1"/>
+          </a:effectRef>
+          <a:fontRef idx="minor">
+            <a:schemeClr val="tx1"/>
+          </a:fontRef>
+        </p:style>
+      </p:cxnSp>
+      <p:cxnSp>
+        <p:nvCxnSpPr>
+          <p:cNvPr id="7" name="Connector 6"/>
+          <p:cNvCxnSpPr/>
+          <p:nvPr/>
+        </p:nvCxnSpPr>
+        <p:spPr>
+          <a:xfrm>
+            <a:off x="1143000" y="3840480"/>
+            <a:ext cx="7086600" cy="0"/>
+          </a:xfrm>
+          <a:prstGeom prst="line">
+            <a:avLst/>
+          </a:prstGeom>
+          <a:ln w="6350">
+            <a:solidFill>
+              <a:srgbClr val="E2E8F0"/>
+            </a:solidFill>
+          </a:ln>
+        </p:spPr>
+        <p:style>
+          <a:lnRef idx="2">
+            <a:schemeClr val="accent1"/>
+          </a:lnRef>
+          <a:fillRef idx="0">
+            <a:schemeClr val="accent1"/>
+          </a:fillRef>
+          <a:effectRef idx="1">
+            <a:schemeClr val="accent1"/>
+          </a:effectRef>
+          <a:fontRef idx="minor">
+            <a:schemeClr val="tx1"/>
+          </a:fontRef>
+        </p:style>
+      </p:cxnSp>
+      <p:sp>
+        <p:nvSpPr>
+          <p:cNvPr id="8" name="TextBox 7"/>
+          <p:cNvSpPr txBox="1"/>
+          <p:nvPr/>
+        </p:nvSpPr>
+        <p:spPr>
+          <a:xfrm>
+            <a:off x="685800" y="3749040"/>
+            <a:ext cx="411480" cy="182880"/>
+          </a:xfrm>
+          <a:prstGeom prst="rect">
+            <a:avLst/>
+          </a:prstGeom>
+          <a:noFill/>
+        </p:spPr>
+        <p:txBody>
+          <a:bodyPr wrap="square" lIns="0" rIns="0" tIns="0" bIns="0">
+            <a:spAutoFit/>
+          </a:bodyPr>
+          <a:lstStyle/>
+          <a:p>
+            <a:pPr algn="r"/>
+            <a:r>
+              <a:rPr sz="900" b="0">
+                <a:solidFill>
+                  <a:srgbClr val="718096"/>
+                </a:solidFill>
+                <a:latin typeface="Calibri"/>
+              </a:rPr>
+              <a:t>0</a:t>
+            </a:r>
+          </a:p>
+        </p:txBody>
+      </p:sp>
+      <p:sp>
+        <p:nvSpPr>
+          <p:cNvPr id="9" name="TextBox 8"/>
+          <p:cNvSpPr txBox="1"/>
+          <p:nvPr/>
+        </p:nvSpPr>
+        <p:spPr>
+          <a:xfrm>
+            <a:off x="685800" y="3017520"/>
+            <a:ext cx="411480" cy="182880"/>
+          </a:xfrm>
+          <a:prstGeom prst="rect">
+            <a:avLst/>
+          </a:prstGeom>
+          <a:noFill/>
+        </p:spPr>
+        <p:txBody>
+          <a:bodyPr wrap="square" lIns="0" rIns="0" tIns="0" bIns="0">
+            <a:spAutoFit/>
+          </a:bodyPr>
+          <a:lstStyle/>
+          <a:p>
+            <a:pPr algn="r"/>
+            <a:r>
+              <a:rPr sz="900" b="0">
+                <a:solidFill>
+                  <a:srgbClr val="718096"/>
+                </a:solidFill>
+                <a:latin typeface="Calibri"/>
+              </a:rPr>
+              <a:t>1</a:t>
+            </a:r>
+          </a:p>
+        </p:txBody>
+      </p:sp>
+      <p:sp>
+        <p:nvSpPr>
+          <p:cNvPr id="10" name="TextBox 9"/>
+          <p:cNvSpPr txBox="1"/>
+          <p:nvPr/>
+        </p:nvSpPr>
+        <p:spPr>
+          <a:xfrm>
+            <a:off x="685800" y="2286000"/>
+            <a:ext cx="411480" cy="182880"/>
+          </a:xfrm>
+          <a:prstGeom prst="rect">
+            <a:avLst/>
+          </a:prstGeom>
+          <a:noFill/>
+        </p:spPr>
+        <p:txBody>
+          <a:bodyPr wrap="square" lIns="0" rIns="0" tIns="0" bIns="0">
+            <a:spAutoFit/>
+          </a:bodyPr>
+          <a:lstStyle/>
+          <a:p>
+            <a:pPr algn="r"/>
+            <a:r>
+              <a:rPr sz="900" b="0">
+                <a:solidFill>
+                  <a:srgbClr val="718096"/>
+                </a:solidFill>
+                <a:latin typeface="Calibri"/>
+              </a:rPr>
+              <a:t>2</a:t>
+            </a:r>
+          </a:p>
+        </p:txBody>
+      </p:sp>
+      <p:sp>
+        <p:nvSpPr>
+          <p:cNvPr id="11" name="TextBox 10"/>
+          <p:cNvSpPr txBox="1"/>
+          <p:nvPr/>
+        </p:nvSpPr>
+        <p:spPr>
+          <a:xfrm>
+            <a:off x="685800" y="1554480"/>
+            <a:ext cx="411480" cy="182880"/>
+          </a:xfrm>
+          <a:prstGeom prst="rect">
+            <a:avLst/>
+          </a:prstGeom>
+          <a:noFill/>
+        </p:spPr>
+        <p:txBody>
+          <a:bodyPr wrap="square" lIns="0" rIns="0" tIns="0" bIns="0">
+            <a:spAutoFit/>
+          </a:bodyPr>
+          <a:lstStyle/>
+          <a:p>
+            <a:pPr algn="r"/>
+            <a:r>
+              <a:rPr sz="900" b="0">
+                <a:solidFill>
+                  <a:srgbClr val="718096"/>
+                </a:solidFill>
+                <a:latin typeface="Calibri"/>
+              </a:rPr>
+              <a:t>3</a:t>
+            </a:r>
+          </a:p>
+        </p:txBody>
+      </p:sp>
+      <p:sp>
+        <p:nvSpPr>
+          <p:cNvPr id="12" name="Rectangle 11"/>
+          <p:cNvSpPr/>
+          <p:nvPr/>
+        </p:nvSpPr>
+        <p:spPr>
+          <a:xfrm>
+            <a:off x="1584769" y="1645920"/>
+            <a:ext cx="968121" cy="2194560"/>
+          </a:xfrm>
+          <a:prstGeom prst="rect">
+            <a:avLst/>
+          </a:prstGeom>
+          <a:solidFill>
+            <a:srgbClr val="38A169"/>
+          </a:solidFill>
+          <a:ln>
+            <a:noFill/>
+          </a:ln>
+        </p:spPr>
+        <p:style>
           <a:lnRef idx="1">
             <a:schemeClr val="accent1"/>
           </a:lnRef>
@@ -6117,14 +5866,14 @@
       </p:sp>
       <p:sp>
         <p:nvSpPr>
-          <p:cNvPr id="11" name="TextBox 10"/>
+          <p:cNvPr id="13" name="TextBox 12"/>
           <p:cNvSpPr txBox="1"/>
           <p:nvPr/>
         </p:nvSpPr>
         <p:spPr>
           <a:xfrm>
-            <a:off x="3447288" y="1417320"/>
-            <a:ext cx="2331720" cy="365760"/>
+            <a:off x="1219009" y="3913632"/>
+            <a:ext cx="1699641" cy="228600"/>
           </a:xfrm>
           <a:prstGeom prst="rect">
             <a:avLst/>
@@ -6137,29 +5886,29 @@
           </a:bodyPr>
           <a:lstStyle/>
           <a:p>
-            <a:pPr algn="l"/>
-            <a:r>
-              <a:rPr sz="2000" b="1">
-                <a:solidFill>
-                  <a:srgbClr val="1E3A5F"/>
+            <a:pPr algn="ctr"/>
+            <a:r>
+              <a:rPr sz="1200" b="1">
+                <a:solidFill>
+                  <a:srgbClr val="1A202C"/>
                 </a:solidFill>
                 <a:latin typeface="Calibri"/>
               </a:rPr>
-              <a:t>0 – 3</a:t>
-            </a:r>
-          </a:p>
-        </p:txBody>
-      </p:sp>
-      <p:sp>
-        <p:nvSpPr>
-          <p:cNvPr id="12" name="TextBox 11"/>
+              <a:t>DE</a:t>
+            </a:r>
+          </a:p>
+        </p:txBody>
+      </p:sp>
+      <p:sp>
+        <p:nvSpPr>
+          <p:cNvPr id="14" name="TextBox 13"/>
           <p:cNvSpPr txBox="1"/>
           <p:nvPr/>
         </p:nvSpPr>
         <p:spPr>
           <a:xfrm>
-            <a:off x="3447288" y="1783080"/>
-            <a:ext cx="2331720" cy="274320"/>
+            <a:off x="1219009" y="4114800"/>
+            <a:ext cx="1699641" cy="201168"/>
           </a:xfrm>
           <a:prstGeom prst="rect">
             <a:avLst/>
@@ -6172,85 +5921,15 @@
           </a:bodyPr>
           <a:lstStyle/>
           <a:p>
-            <a:pPr algn="l"/>
-            <a:r>
-              <a:rPr sz="1300" b="1">
-                <a:solidFill>
-                  <a:srgbClr val="1A202C"/>
+            <a:pPr algn="ctr"/>
+            <a:r>
+              <a:rPr sz="900" b="0">
+                <a:solidFill>
+                  <a:srgbClr val="718096"/>
                 </a:solidFill>
                 <a:latin typeface="Calibri"/>
               </a:rPr>
-              <a:t>Answer Determinism</a:t>
-            </a:r>
-          </a:p>
-        </p:txBody>
-      </p:sp>
-      <p:sp>
-        <p:nvSpPr>
-          <p:cNvPr id="13" name="TextBox 12"/>
-          <p:cNvSpPr txBox="1"/>
-          <p:nvPr/>
-        </p:nvSpPr>
-        <p:spPr>
-          <a:xfrm>
-            <a:off x="3447288" y="2029968"/>
-            <a:ext cx="2331720" cy="228600"/>
-          </a:xfrm>
-          <a:prstGeom prst="rect">
-            <a:avLst/>
-          </a:prstGeom>
-          <a:noFill/>
-        </p:spPr>
-        <p:txBody>
-          <a:bodyPr wrap="square" lIns="0" rIns="0" tIns="0" bIns="0">
-            <a:spAutoFit/>
-          </a:bodyPr>
-          <a:lstStyle/>
-          <a:p>
-            <a:pPr algn="l"/>
-            <a:r>
-              <a:rPr sz="1000" b="0">
-                <a:solidFill>
-                  <a:srgbClr val="718096"/>
-                </a:solidFill>
-                <a:latin typeface="Calibri"/>
-              </a:rPr>
-              <a:t>AD</a:t>
-            </a:r>
-          </a:p>
-        </p:txBody>
-      </p:sp>
-      <p:sp>
-        <p:nvSpPr>
-          <p:cNvPr id="14" name="TextBox 13"/>
-          <p:cNvSpPr txBox="1"/>
-          <p:nvPr/>
-        </p:nvSpPr>
-        <p:spPr>
-          <a:xfrm>
-            <a:off x="3447288" y="2240280"/>
-            <a:ext cx="2331720" cy="365760"/>
-          </a:xfrm>
-          <a:prstGeom prst="rect">
-            <a:avLst/>
-          </a:prstGeom>
-          <a:noFill/>
-        </p:spPr>
-        <p:txBody>
-          <a:bodyPr wrap="square" lIns="0" rIns="0" tIns="0" bIns="0">
-            <a:spAutoFit/>
-          </a:bodyPr>
-          <a:lstStyle/>
-          <a:p>
-            <a:pPr algn="l"/>
-            <a:r>
-              <a:rPr sz="1000" b="0">
-                <a:solidFill>
-                  <a:srgbClr val="2D3748"/>
-                </a:solidFill>
-                <a:latin typeface="Calibri"/>
-              </a:rPr>
-              <a:t>Could two evaluators agree from the same evidence?</a:t>
+              <a:t>3 / 3</a:t>
             </a:r>
           </a:p>
         </p:txBody>
@@ -6263,19 +5942,17 @@
         </p:nvSpPr>
         <p:spPr>
           <a:xfrm>
-            <a:off x="6071616" y="1280160"/>
-            <a:ext cx="2697480" cy="1371600"/>
+            <a:off x="3344989" y="1645920"/>
+            <a:ext cx="968121" cy="2194560"/>
           </a:xfrm>
           <a:prstGeom prst="rect">
             <a:avLst/>
           </a:prstGeom>
           <a:solidFill>
-            <a:srgbClr val="FFFFFF"/>
+            <a:srgbClr val="38A169"/>
           </a:solidFill>
-          <a:ln w="6350">
-            <a:solidFill>
-              <a:srgbClr val="E2E8F0"/>
-            </a:solidFill>
+          <a:ln>
+            <a:noFill/>
           </a:ln>
         </p:spPr>
         <p:style>
@@ -6308,8 +5985,8 @@
         </p:nvSpPr>
         <p:spPr>
           <a:xfrm>
-            <a:off x="6254496" y="1417320"/>
-            <a:ext cx="2331720" cy="365760"/>
+            <a:off x="2979229" y="3913632"/>
+            <a:ext cx="1699641" cy="228600"/>
           </a:xfrm>
           <a:prstGeom prst="rect">
             <a:avLst/>
@@ -6322,15 +5999,15 @@
           </a:bodyPr>
           <a:lstStyle/>
           <a:p>
-            <a:pPr algn="l"/>
-            <a:r>
-              <a:rPr sz="2000" b="1">
-                <a:solidFill>
-                  <a:srgbClr val="14B8A6"/>
+            <a:pPr algn="ctr"/>
+            <a:r>
+              <a:rPr sz="1200" b="1">
+                <a:solidFill>
+                  <a:srgbClr val="1A202C"/>
                 </a:solidFill>
                 <a:latin typeface="Calibri"/>
               </a:rPr>
-              <a:t>0 – 3</a:t>
+              <a:t>FR</a:t>
             </a:r>
           </a:p>
         </p:txBody>
@@ -6343,8 +6020,8 @@
         </p:nvSpPr>
         <p:spPr>
           <a:xfrm>
-            <a:off x="6254496" y="1783080"/>
-            <a:ext cx="2331720" cy="274320"/>
+            <a:off x="2979229" y="4114800"/>
+            <a:ext cx="1699641" cy="201168"/>
           </a:xfrm>
           <a:prstGeom prst="rect">
             <a:avLst/>
@@ -6357,145 +6034,38 @@
           </a:bodyPr>
           <a:lstStyle/>
           <a:p>
-            <a:pPr algn="l"/>
-            <a:r>
-              <a:rPr sz="1300" b="1">
-                <a:solidFill>
-                  <a:srgbClr val="1A202C"/>
+            <a:pPr algn="ctr"/>
+            <a:r>
+              <a:rPr sz="900" b="0">
+                <a:solidFill>
+                  <a:srgbClr val="718096"/>
                 </a:solidFill>
                 <a:latin typeface="Calibri"/>
               </a:rPr>
-              <a:t>Source Complexity</a:t>
-            </a:r>
-          </a:p>
-        </p:txBody>
-      </p:sp>
-      <p:sp>
-        <p:nvSpPr>
-          <p:cNvPr id="18" name="TextBox 17"/>
-          <p:cNvSpPr txBox="1"/>
-          <p:nvPr/>
-        </p:nvSpPr>
-        <p:spPr>
-          <a:xfrm>
-            <a:off x="6254496" y="2029968"/>
-            <a:ext cx="2331720" cy="228600"/>
-          </a:xfrm>
-          <a:prstGeom prst="rect">
-            <a:avLst/>
-          </a:prstGeom>
-          <a:noFill/>
-        </p:spPr>
-        <p:txBody>
-          <a:bodyPr wrap="square" lIns="0" rIns="0" tIns="0" bIns="0">
-            <a:spAutoFit/>
-          </a:bodyPr>
-          <a:lstStyle/>
-          <a:p>
-            <a:pPr algn="l"/>
-            <a:r>
-              <a:rPr sz="1000" b="0">
-                <a:solidFill>
-                  <a:srgbClr val="718096"/>
-                </a:solidFill>
-                <a:latin typeface="Calibri"/>
-              </a:rPr>
-              <a:t>SC</a:t>
-            </a:r>
-          </a:p>
-        </p:txBody>
-      </p:sp>
-      <p:sp>
-        <p:nvSpPr>
-          <p:cNvPr id="19" name="TextBox 18"/>
-          <p:cNvSpPr txBox="1"/>
-          <p:nvPr/>
-        </p:nvSpPr>
-        <p:spPr>
-          <a:xfrm>
-            <a:off x="6254496" y="2240280"/>
-            <a:ext cx="2331720" cy="365760"/>
-          </a:xfrm>
-          <a:prstGeom prst="rect">
-            <a:avLst/>
-          </a:prstGeom>
-          <a:noFill/>
-        </p:spPr>
-        <p:txBody>
-          <a:bodyPr wrap="square" lIns="0" rIns="0" tIns="0" bIns="0">
-            <a:spAutoFit/>
-          </a:bodyPr>
-          <a:lstStyle/>
-          <a:p>
-            <a:pPr algn="l"/>
-            <a:r>
-              <a:rPr sz="1000" b="0">
-                <a:solidFill>
-                  <a:srgbClr val="2D3748"/>
-                </a:solidFill>
-                <a:latin typeface="Calibri"/>
-              </a:rPr>
-              <a:t>One source or four cross-referenced ones?</a:t>
-            </a:r>
-          </a:p>
-        </p:txBody>
-      </p:sp>
-      <p:sp>
-        <p:nvSpPr>
-          <p:cNvPr id="20" name="TextBox 19"/>
-          <p:cNvSpPr txBox="1"/>
-          <p:nvPr/>
-        </p:nvSpPr>
-        <p:spPr>
-          <a:xfrm>
-            <a:off x="457200" y="2788920"/>
-            <a:ext cx="8229600" cy="274320"/>
-          </a:xfrm>
-          <a:prstGeom prst="rect">
-            <a:avLst/>
-          </a:prstGeom>
-          <a:noFill/>
-        </p:spPr>
-        <p:txBody>
-          <a:bodyPr wrap="square" lIns="0" rIns="0" tIns="0" bIns="0">
-            <a:spAutoFit/>
-          </a:bodyPr>
-          <a:lstStyle/>
-          <a:p>
-            <a:pPr algn="l"/>
-            <a:r>
-              <a:rPr sz="1100" b="1">
-                <a:solidFill>
-                  <a:srgbClr val="1A202C"/>
-                </a:solidFill>
-                <a:latin typeface="Calibri"/>
-              </a:rPr>
-              <a:t>Composite 0–9 → tiers: Highly Likely (7–9) · Likely (5–6) · Unlikely (3–4) · Very Unlikely (0–2).</a:t>
-            </a:r>
-          </a:p>
-        </p:txBody>
-      </p:sp>
-      <p:sp>
-        <p:nvSpPr>
-          <p:cNvPr id="21" name="Rectangle 20"/>
+              <a:t>3 / 3</a:t>
+            </a:r>
+          </a:p>
+        </p:txBody>
+      </p:sp>
+      <p:sp>
+        <p:nvSpPr>
+          <p:cNvPr id="18" name="Rectangle 17"/>
           <p:cNvSpPr/>
           <p:nvPr/>
         </p:nvSpPr>
         <p:spPr>
           <a:xfrm>
-            <a:off x="457200" y="3337560"/>
-            <a:ext cx="8229600" cy="1280160"/>
+            <a:off x="5105209" y="1645920"/>
+            <a:ext cx="968121" cy="2194560"/>
           </a:xfrm>
           <a:prstGeom prst="rect">
             <a:avLst/>
           </a:prstGeom>
           <a:solidFill>
-            <a:srgbClr val="F7FAFC"/>
+            <a:srgbClr val="38A169"/>
           </a:solidFill>
-          <a:ln w="6350">
-            <a:solidFill>
-              <a:srgbClr val="E2E8F0"/>
-            </a:solidFill>
+          <a:ln>
+            <a:noFill/>
           </a:ln>
         </p:spPr>
         <p:style>
@@ -6522,14 +6092,14 @@
       </p:sp>
       <p:sp>
         <p:nvSpPr>
-          <p:cNvPr id="22" name="TextBox 21"/>
+          <p:cNvPr id="19" name="TextBox 18"/>
           <p:cNvSpPr txBox="1"/>
           <p:nvPr/>
         </p:nvSpPr>
         <p:spPr>
           <a:xfrm>
-            <a:off x="640080" y="3447288"/>
-            <a:ext cx="7863840" cy="274320"/>
+            <a:off x="4739449" y="3913632"/>
+            <a:ext cx="1699641" cy="228600"/>
           </a:xfrm>
           <a:prstGeom prst="rect">
             <a:avLst/>
@@ -6542,29 +6112,29 @@
           </a:bodyPr>
           <a:lstStyle/>
           <a:p>
-            <a:pPr algn="l"/>
-            <a:r>
-              <a:rPr sz="900" b="1">
-                <a:solidFill>
-                  <a:srgbClr val="0D9488"/>
+            <a:pPr algn="ctr"/>
+            <a:r>
+              <a:rPr sz="1200" b="1">
+                <a:solidFill>
+                  <a:srgbClr val="1A202C"/>
                 </a:solidFill>
                 <a:latin typeface="Calibri"/>
               </a:rPr>
-              <a:t>HEADLINE RESEARCH QUESTION (RQ5)</a:t>
-            </a:r>
-          </a:p>
-        </p:txBody>
-      </p:sp>
-      <p:sp>
-        <p:nvSpPr>
-          <p:cNvPr id="23" name="TextBox 22"/>
+              <a:t>NL</a:t>
+            </a:r>
+          </a:p>
+        </p:txBody>
+      </p:sp>
+      <p:sp>
+        <p:nvSpPr>
+          <p:cNvPr id="20" name="TextBox 19"/>
           <p:cNvSpPr txBox="1"/>
           <p:nvPr/>
         </p:nvSpPr>
         <p:spPr>
           <a:xfrm>
-            <a:off x="640080" y="3721608"/>
-            <a:ext cx="7863840" cy="822960"/>
+            <a:off x="4739449" y="4114800"/>
+            <a:ext cx="1699641" cy="201168"/>
           </a:xfrm>
           <a:prstGeom prst="rect">
             <a:avLst/>
@@ -6577,29 +6147,72 @@
           </a:bodyPr>
           <a:lstStyle/>
           <a:p>
-            <a:pPr algn="l"/>
-            <a:r>
-              <a:rPr sz="1100" b="0">
-                <a:solidFill>
-                  <a:srgbClr val="2D3748"/>
+            <a:pPr algn="ctr"/>
+            <a:r>
+              <a:rPr sz="900" b="0">
+                <a:solidFill>
+                  <a:srgbClr val="718096"/>
                 </a:solidFill>
                 <a:latin typeface="Calibri"/>
               </a:rPr>
-              <a:t>Trade-off between answer quality and computational cost across rubric profiles. Every LLM call logs input tokens, output tokens, wall-clock, and $. The output is a cost–accuracy surface stratified by rubric tier × ODMI dimension × country. Optimisation conditions: prompt compression, retrieval scope, Verifier strategy, and the Haiku / Sonnet / Opus model family.</a:t>
-            </a:r>
-          </a:p>
-        </p:txBody>
-      </p:sp>
-      <p:sp>
-        <p:nvSpPr>
-          <p:cNvPr id="24" name="TextBox 23"/>
+              <a:t>3 / 3</a:t>
+            </a:r>
+          </a:p>
+        </p:txBody>
+      </p:sp>
+      <p:sp>
+        <p:nvSpPr>
+          <p:cNvPr id="21" name="Rectangle 20"/>
+          <p:cNvSpPr/>
+          <p:nvPr/>
+        </p:nvSpPr>
+        <p:spPr>
+          <a:xfrm>
+            <a:off x="6865429" y="2377440"/>
+            <a:ext cx="968121" cy="1463040"/>
+          </a:xfrm>
+          <a:prstGeom prst="rect">
+            <a:avLst/>
+          </a:prstGeom>
+          <a:solidFill>
+            <a:srgbClr val="38A169"/>
+          </a:solidFill>
+          <a:ln>
+            <a:noFill/>
+          </a:ln>
+        </p:spPr>
+        <p:style>
+          <a:lnRef idx="1">
+            <a:schemeClr val="accent1"/>
+          </a:lnRef>
+          <a:fillRef idx="3">
+            <a:schemeClr val="accent1"/>
+          </a:fillRef>
+          <a:effectRef idx="2">
+            <a:schemeClr val="accent1"/>
+          </a:effectRef>
+          <a:fontRef idx="minor">
+            <a:schemeClr val="lt1"/>
+          </a:fontRef>
+        </p:style>
+        <p:txBody>
+          <a:bodyPr rtlCol="0" anchor="ctr"/>
+          <a:lstStyle/>
+          <a:p>
+            <a:pPr algn="ctr"/>
+          </a:p>
+        </p:txBody>
+      </p:sp>
+      <p:sp>
+        <p:nvSpPr>
+          <p:cNvPr id="22" name="TextBox 21"/>
           <p:cNvSpPr txBox="1"/>
           <p:nvPr/>
         </p:nvSpPr>
         <p:spPr>
           <a:xfrm>
-            <a:off x="457200" y="4850892"/>
-            <a:ext cx="8229600" cy="182880"/>
+            <a:off x="6499669" y="3913632"/>
+            <a:ext cx="1699641" cy="228600"/>
           </a:xfrm>
           <a:prstGeom prst="rect">
             <a:avLst/>
@@ -6612,15 +6225,319 @@
           </a:bodyPr>
           <a:lstStyle/>
           <a:p>
-            <a:pPr algn="l"/>
-            <a:r>
-              <a:rPr sz="800" b="0">
-                <a:solidFill>
-                  <a:srgbClr val="718096"/>
+            <a:pPr algn="ctr"/>
+            <a:r>
+              <a:rPr sz="1200" b="1">
+                <a:solidFill>
+                  <a:srgbClr val="1A202C"/>
                 </a:solidFill>
                 <a:latin typeface="Calibri"/>
               </a:rPr>
-              <a:t>ODMI Agent Swarm  ·  Benjy Bream  ·  King's College London  ·  4 / 9</a:t>
+              <a:t>RO</a:t>
+            </a:r>
+          </a:p>
+        </p:txBody>
+      </p:sp>
+      <p:sp>
+        <p:nvSpPr>
+          <p:cNvPr id="23" name="TextBox 22"/>
+          <p:cNvSpPr txBox="1"/>
+          <p:nvPr/>
+        </p:nvSpPr>
+        <p:spPr>
+          <a:xfrm>
+            <a:off x="6499669" y="4114800"/>
+            <a:ext cx="1699641" cy="201168"/>
+          </a:xfrm>
+          <a:prstGeom prst="rect">
+            <a:avLst/>
+          </a:prstGeom>
+          <a:noFill/>
+        </p:spPr>
+        <p:txBody>
+          <a:bodyPr wrap="square" lIns="0" rIns="0" tIns="0" bIns="0">
+            <a:spAutoFit/>
+          </a:bodyPr>
+          <a:lstStyle/>
+          <a:p>
+            <a:pPr algn="ctr"/>
+            <a:r>
+              <a:rPr sz="900" b="0">
+                <a:solidFill>
+                  <a:srgbClr val="718096"/>
+                </a:solidFill>
+                <a:latin typeface="Calibri"/>
+              </a:rPr>
+              <a:t>2 / 2</a:t>
+            </a:r>
+          </a:p>
+        </p:txBody>
+      </p:sp>
+      <p:sp>
+        <p:nvSpPr>
+          <p:cNvPr id="24" name="Rectangle 23"/>
+          <p:cNvSpPr/>
+          <p:nvPr/>
+        </p:nvSpPr>
+        <p:spPr>
+          <a:xfrm>
+            <a:off x="1188720" y="4069080"/>
+            <a:ext cx="164592" cy="164592"/>
+          </a:xfrm>
+          <a:prstGeom prst="rect">
+            <a:avLst/>
+          </a:prstGeom>
+          <a:solidFill>
+            <a:srgbClr val="38A169"/>
+          </a:solidFill>
+          <a:ln>
+            <a:noFill/>
+          </a:ln>
+        </p:spPr>
+        <p:style>
+          <a:lnRef idx="1">
+            <a:schemeClr val="accent1"/>
+          </a:lnRef>
+          <a:fillRef idx="3">
+            <a:schemeClr val="accent1"/>
+          </a:fillRef>
+          <a:effectRef idx="2">
+            <a:schemeClr val="accent1"/>
+          </a:effectRef>
+          <a:fontRef idx="minor">
+            <a:schemeClr val="lt1"/>
+          </a:fontRef>
+        </p:style>
+        <p:txBody>
+          <a:bodyPr rtlCol="0" anchor="ctr"/>
+          <a:lstStyle/>
+          <a:p>
+            <a:pPr algn="ctr"/>
+          </a:p>
+        </p:txBody>
+      </p:sp>
+      <p:sp>
+        <p:nvSpPr>
+          <p:cNvPr id="25" name="TextBox 24"/>
+          <p:cNvSpPr txBox="1"/>
+          <p:nvPr/>
+        </p:nvSpPr>
+        <p:spPr>
+          <a:xfrm>
+            <a:off x="1417320" y="4050792"/>
+            <a:ext cx="3291840" cy="228600"/>
+          </a:xfrm>
+          <a:prstGeom prst="rect">
+            <a:avLst/>
+          </a:prstGeom>
+          <a:noFill/>
+        </p:spPr>
+        <p:txBody>
+          <a:bodyPr wrap="square" lIns="0" rIns="0" tIns="0" bIns="0">
+            <a:spAutoFit/>
+          </a:bodyPr>
+          <a:lstStyle/>
+          <a:p>
+            <a:pPr algn="l"/>
+            <a:r>
+              <a:rPr sz="1000" b="0">
+                <a:solidFill>
+                  <a:srgbClr val="2D3748"/>
+                </a:solidFill>
+                <a:latin typeface="Calibri"/>
+              </a:rPr>
+              <a:t>Accepted (Verifier or Adjudicator)</a:t>
+            </a:r>
+          </a:p>
+        </p:txBody>
+      </p:sp>
+      <p:sp>
+        <p:nvSpPr>
+          <p:cNvPr id="26" name="Rectangle 25"/>
+          <p:cNvSpPr/>
+          <p:nvPr/>
+        </p:nvSpPr>
+        <p:spPr>
+          <a:xfrm>
+            <a:off x="4389120" y="4069080"/>
+            <a:ext cx="164592" cy="164592"/>
+          </a:xfrm>
+          <a:prstGeom prst="rect">
+            <a:avLst/>
+          </a:prstGeom>
+          <a:solidFill>
+            <a:srgbClr val="C53030"/>
+          </a:solidFill>
+          <a:ln>
+            <a:noFill/>
+          </a:ln>
+        </p:spPr>
+        <p:style>
+          <a:lnRef idx="1">
+            <a:schemeClr val="accent1"/>
+          </a:lnRef>
+          <a:fillRef idx="3">
+            <a:schemeClr val="accent1"/>
+          </a:fillRef>
+          <a:effectRef idx="2">
+            <a:schemeClr val="accent1"/>
+          </a:effectRef>
+          <a:fontRef idx="minor">
+            <a:schemeClr val="lt1"/>
+          </a:fontRef>
+        </p:style>
+        <p:txBody>
+          <a:bodyPr rtlCol="0" anchor="ctr"/>
+          <a:lstStyle/>
+          <a:p>
+            <a:pPr algn="ctr"/>
+          </a:p>
+        </p:txBody>
+      </p:sp>
+      <p:sp>
+        <p:nvSpPr>
+          <p:cNvPr id="27" name="TextBox 26"/>
+          <p:cNvSpPr txBox="1"/>
+          <p:nvPr/>
+        </p:nvSpPr>
+        <p:spPr>
+          <a:xfrm>
+            <a:off x="4617720" y="4050792"/>
+            <a:ext cx="3657600" cy="228600"/>
+          </a:xfrm>
+          <a:prstGeom prst="rect">
+            <a:avLst/>
+          </a:prstGeom>
+          <a:noFill/>
+        </p:spPr>
+        <p:txBody>
+          <a:bodyPr wrap="square" lIns="0" rIns="0" tIns="0" bIns="0">
+            <a:spAutoFit/>
+          </a:bodyPr>
+          <a:lstStyle/>
+          <a:p>
+            <a:pPr algn="l"/>
+            <a:r>
+              <a:rPr sz="1000" b="0">
+                <a:solidFill>
+                  <a:srgbClr val="2D3748"/>
+                </a:solidFill>
+                <a:latin typeface="Calibri"/>
+              </a:rPr>
+              <a:t>Rejected or escalated</a:t>
+            </a:r>
+          </a:p>
+        </p:txBody>
+      </p:sp>
+      <p:sp>
+        <p:nvSpPr>
+          <p:cNvPr id="28" name="Rectangle 27"/>
+          <p:cNvSpPr/>
+          <p:nvPr/>
+        </p:nvSpPr>
+        <p:spPr>
+          <a:xfrm>
+            <a:off x="457200" y="4553712"/>
+            <a:ext cx="73152" cy="548640"/>
+          </a:xfrm>
+          <a:prstGeom prst="rect">
+            <a:avLst/>
+          </a:prstGeom>
+          <a:solidFill>
+            <a:srgbClr val="D69E2E"/>
+          </a:solidFill>
+          <a:ln>
+            <a:noFill/>
+          </a:ln>
+        </p:spPr>
+        <p:style>
+          <a:lnRef idx="1">
+            <a:schemeClr val="accent1"/>
+          </a:lnRef>
+          <a:fillRef idx="3">
+            <a:schemeClr val="accent1"/>
+          </a:fillRef>
+          <a:effectRef idx="2">
+            <a:schemeClr val="accent1"/>
+          </a:effectRef>
+          <a:fontRef idx="minor">
+            <a:schemeClr val="lt1"/>
+          </a:fontRef>
+        </p:style>
+        <p:txBody>
+          <a:bodyPr rtlCol="0" anchor="ctr"/>
+          <a:lstStyle/>
+          <a:p>
+            <a:pPr algn="ctr"/>
+          </a:p>
+        </p:txBody>
+      </p:sp>
+      <p:sp>
+        <p:nvSpPr>
+          <p:cNvPr id="29" name="TextBox 28"/>
+          <p:cNvSpPr txBox="1"/>
+          <p:nvPr/>
+        </p:nvSpPr>
+        <p:spPr>
+          <a:xfrm>
+            <a:off x="640080" y="4590288"/>
+            <a:ext cx="7955280" cy="502920"/>
+          </a:xfrm>
+          <a:prstGeom prst="rect">
+            <a:avLst/>
+          </a:prstGeom>
+          <a:noFill/>
+        </p:spPr>
+        <p:txBody>
+          <a:bodyPr wrap="square" lIns="0" rIns="0" tIns="0" bIns="0">
+            <a:spAutoFit/>
+          </a:bodyPr>
+          <a:lstStyle/>
+          <a:p>
+            <a:pPr algn="l"/>
+            <a:r>
+              <a:rPr sz="1000" b="0">
+                <a:solidFill>
+                  <a:srgbClr val="2D3748"/>
+                </a:solidFill>
+                <a:latin typeface="Calibri"/>
+              </a:rPr>
+              <a:t>Caveat: every pair so far is a Policy-dimension question on a high-resource country. The Verifier has not yet been asked to disprove a known-wrong Researcher answer. The 100% accept rate is consistent with the swarm working — and with it being too lenient.</a:t>
+            </a:r>
+          </a:p>
+        </p:txBody>
+      </p:sp>
+      <p:sp>
+        <p:nvSpPr>
+          <p:cNvPr id="30" name="TextBox 29"/>
+          <p:cNvSpPr txBox="1"/>
+          <p:nvPr/>
+        </p:nvSpPr>
+        <p:spPr>
+          <a:xfrm>
+            <a:off x="457200" y="4850892"/>
+            <a:ext cx="8229600" cy="182880"/>
+          </a:xfrm>
+          <a:prstGeom prst="rect">
+            <a:avLst/>
+          </a:prstGeom>
+          <a:noFill/>
+        </p:spPr>
+        <p:txBody>
+          <a:bodyPr wrap="square" lIns="0" rIns="0" tIns="0" bIns="0">
+            <a:spAutoFit/>
+          </a:bodyPr>
+          <a:lstStyle/>
+          <a:p>
+            <a:pPr algn="l"/>
+            <a:r>
+              <a:rPr sz="800" b="0">
+                <a:solidFill>
+                  <a:srgbClr val="718096"/>
+                </a:solidFill>
+                <a:latin typeface="Calibri"/>
+              </a:rPr>
+              <a:t>ODMI Agent Swarm  ·  Benjy Bream  ·  King's College London  ·  4 / 6</a:t>
             </a:r>
           </a:p>
         </p:txBody>
@@ -6716,7 +6633,7 @@
                 </a:solidFill>
                 <a:latin typeface="Calibri"/>
               </a:rPr>
-              <a:t>FINALISED PAIRS · SUCCESS VS FAILURE</a:t>
+              <a:t>WHAT I'LL DEMO LIVE</a:t>
             </a:r>
           </a:p>
         </p:txBody>
@@ -6751,7 +6668,7 @@
                 </a:solidFill>
                 <a:latin typeface="Calibri"/>
               </a:rPr>
-              <a:t>Results so far, per country</a:t>
+              <a:t>Best bits of the dashboard</a:t>
             </a:r>
           </a:p>
         </p:txBody>
@@ -6764,8 +6681,8 @@
         </p:nvSpPr>
         <p:spPr>
           <a:xfrm>
-            <a:off x="457200" y="1280160"/>
-            <a:ext cx="8229600" cy="3108960"/>
+            <a:off x="457200" y="1234440"/>
+            <a:ext cx="4160520" cy="1691640"/>
           </a:xfrm>
           <a:prstGeom prst="rect">
             <a:avLst/>
@@ -6801,20 +6718,188 @@
           </a:p>
         </p:txBody>
       </p:sp>
-      <p:cxnSp>
-        <p:nvCxnSpPr>
-          <p:cNvPr id="6" name="Connector 5"/>
-          <p:cNvCxnSpPr/>
-          <p:nvPr/>
-        </p:nvCxnSpPr>
-        <p:spPr>
-          <a:xfrm>
-            <a:off x="1143000" y="1645920"/>
-            <a:ext cx="0" cy="2194560"/>
-          </a:xfrm>
-          <a:prstGeom prst="line">
-            <a:avLst/>
-          </a:prstGeom>
+      <p:sp>
+        <p:nvSpPr>
+          <p:cNvPr id="6" name="Rectangle 5"/>
+          <p:cNvSpPr/>
+          <p:nvPr/>
+        </p:nvSpPr>
+        <p:spPr>
+          <a:xfrm>
+            <a:off x="457200" y="1234440"/>
+            <a:ext cx="73152" cy="1691640"/>
+          </a:xfrm>
+          <a:prstGeom prst="rect">
+            <a:avLst/>
+          </a:prstGeom>
+          <a:solidFill>
+            <a:srgbClr val="0D9488"/>
+          </a:solidFill>
+          <a:ln>
+            <a:noFill/>
+          </a:ln>
+        </p:spPr>
+        <p:style>
+          <a:lnRef idx="1">
+            <a:schemeClr val="accent1"/>
+          </a:lnRef>
+          <a:fillRef idx="3">
+            <a:schemeClr val="accent1"/>
+          </a:fillRef>
+          <a:effectRef idx="2">
+            <a:schemeClr val="accent1"/>
+          </a:effectRef>
+          <a:fontRef idx="minor">
+            <a:schemeClr val="lt1"/>
+          </a:fontRef>
+        </p:style>
+        <p:txBody>
+          <a:bodyPr rtlCol="0" anchor="ctr"/>
+          <a:lstStyle/>
+          <a:p>
+            <a:pPr algn="ctr"/>
+          </a:p>
+        </p:txBody>
+      </p:sp>
+      <p:sp>
+        <p:nvSpPr>
+          <p:cNvPr id="7" name="Oval 6"/>
+          <p:cNvSpPr/>
+          <p:nvPr/>
+        </p:nvSpPr>
+        <p:spPr>
+          <a:xfrm>
+            <a:off x="731520" y="1463040"/>
+            <a:ext cx="502920" cy="502920"/>
+          </a:xfrm>
+          <a:prstGeom prst="ellipse">
+            <a:avLst/>
+          </a:prstGeom>
+          <a:solidFill>
+            <a:srgbClr val="0D9488"/>
+          </a:solidFill>
+          <a:ln>
+            <a:noFill/>
+          </a:ln>
+        </p:spPr>
+        <p:style>
+          <a:lnRef idx="1">
+            <a:schemeClr val="accent1"/>
+          </a:lnRef>
+          <a:fillRef idx="3">
+            <a:schemeClr val="accent1"/>
+          </a:fillRef>
+          <a:effectRef idx="2">
+            <a:schemeClr val="accent1"/>
+          </a:effectRef>
+          <a:fontRef idx="minor">
+            <a:schemeClr val="lt1"/>
+          </a:fontRef>
+        </p:style>
+        <p:txBody>
+          <a:bodyPr rtlCol="0" anchor="ctr"/>
+          <a:lstStyle/>
+          <a:p>
+            <a:pPr algn="ctr"/>
+            <a:r>
+              <a:rPr sz="1800" b="1">
+                <a:solidFill>
+                  <a:srgbClr val="FFFFFF"/>
+                </a:solidFill>
+                <a:latin typeface="Calibri"/>
+              </a:rPr>
+              <a:t>▶</a:t>
+            </a:r>
+          </a:p>
+        </p:txBody>
+      </p:sp>
+      <p:sp>
+        <p:nvSpPr>
+          <p:cNvPr id="8" name="TextBox 7"/>
+          <p:cNvSpPr txBox="1"/>
+          <p:nvPr/>
+        </p:nvSpPr>
+        <p:spPr>
+          <a:xfrm>
+            <a:off x="1371600" y="1490472"/>
+            <a:ext cx="3063240" cy="365760"/>
+          </a:xfrm>
+          <a:prstGeom prst="rect">
+            <a:avLst/>
+          </a:prstGeom>
+          <a:noFill/>
+        </p:spPr>
+        <p:txBody>
+          <a:bodyPr wrap="square" lIns="0" rIns="0" tIns="0" bIns="0">
+            <a:spAutoFit/>
+          </a:bodyPr>
+          <a:lstStyle/>
+          <a:p>
+            <a:pPr algn="l"/>
+            <a:r>
+              <a:rPr sz="1500" b="1">
+                <a:solidFill>
+                  <a:srgbClr val="1A202C"/>
+                </a:solidFill>
+                <a:latin typeface="Calibri"/>
+              </a:rPr>
+              <a:t>Run Console</a:t>
+            </a:r>
+          </a:p>
+        </p:txBody>
+      </p:sp>
+      <p:sp>
+        <p:nvSpPr>
+          <p:cNvPr id="9" name="TextBox 8"/>
+          <p:cNvSpPr txBox="1"/>
+          <p:nvPr/>
+        </p:nvSpPr>
+        <p:spPr>
+          <a:xfrm>
+            <a:off x="1371600" y="1874520"/>
+            <a:ext cx="3063240" cy="960120"/>
+          </a:xfrm>
+          <a:prstGeom prst="rect">
+            <a:avLst/>
+          </a:prstGeom>
+          <a:noFill/>
+        </p:spPr>
+        <p:txBody>
+          <a:bodyPr wrap="square" lIns="0" rIns="0" tIns="0" bIns="0">
+            <a:spAutoFit/>
+          </a:bodyPr>
+          <a:lstStyle/>
+          <a:p>
+            <a:pPr algn="l"/>
+            <a:r>
+              <a:rPr sz="1050" b="0">
+                <a:solidFill>
+                  <a:srgbClr val="2D3748"/>
+                </a:solidFill>
+                <a:latin typeface="Calibri"/>
+              </a:rPr>
+              <a:t>Multiselect questions × countries, pick the Verifier strategy and the model triple, dispatch a batch. Cost is estimated before the run starts.</a:t>
+            </a:r>
+          </a:p>
+        </p:txBody>
+      </p:sp>
+      <p:sp>
+        <p:nvSpPr>
+          <p:cNvPr id="10" name="Rectangle 9"/>
+          <p:cNvSpPr/>
+          <p:nvPr/>
+        </p:nvSpPr>
+        <p:spPr>
+          <a:xfrm>
+            <a:off x="4754880" y="1234440"/>
+            <a:ext cx="4160520" cy="1691640"/>
+          </a:xfrm>
+          <a:prstGeom prst="rect">
+            <a:avLst/>
+          </a:prstGeom>
+          <a:solidFill>
+            <a:srgbClr val="FFFFFF"/>
+          </a:solidFill>
           <a:ln w="6350">
             <a:solidFill>
               <a:srgbClr val="E2E8F0"/>
@@ -6822,34 +6907,209 @@
           </a:ln>
         </p:spPr>
         <p:style>
-          <a:lnRef idx="2">
+          <a:lnRef idx="1">
             <a:schemeClr val="accent1"/>
           </a:lnRef>
-          <a:fillRef idx="0">
+          <a:fillRef idx="3">
             <a:schemeClr val="accent1"/>
           </a:fillRef>
-          <a:effectRef idx="1">
+          <a:effectRef idx="2">
             <a:schemeClr val="accent1"/>
           </a:effectRef>
           <a:fontRef idx="minor">
-            <a:schemeClr val="tx1"/>
+            <a:schemeClr val="lt1"/>
           </a:fontRef>
         </p:style>
-      </p:cxnSp>
-      <p:cxnSp>
-        <p:nvCxnSpPr>
-          <p:cNvPr id="7" name="Connector 6"/>
-          <p:cNvCxnSpPr/>
-          <p:nvPr/>
-        </p:nvCxnSpPr>
-        <p:spPr>
-          <a:xfrm>
-            <a:off x="1143000" y="3840480"/>
-            <a:ext cx="7086600" cy="0"/>
-          </a:xfrm>
-          <a:prstGeom prst="line">
-            <a:avLst/>
-          </a:prstGeom>
+        <p:txBody>
+          <a:bodyPr rtlCol="0" anchor="ctr"/>
+          <a:lstStyle/>
+          <a:p>
+            <a:pPr algn="ctr"/>
+          </a:p>
+        </p:txBody>
+      </p:sp>
+      <p:sp>
+        <p:nvSpPr>
+          <p:cNvPr id="11" name="Rectangle 10"/>
+          <p:cNvSpPr/>
+          <p:nvPr/>
+        </p:nvSpPr>
+        <p:spPr>
+          <a:xfrm>
+            <a:off x="4754880" y="1234440"/>
+            <a:ext cx="73152" cy="1691640"/>
+          </a:xfrm>
+          <a:prstGeom prst="rect">
+            <a:avLst/>
+          </a:prstGeom>
+          <a:solidFill>
+            <a:srgbClr val="1E3A5F"/>
+          </a:solidFill>
+          <a:ln>
+            <a:noFill/>
+          </a:ln>
+        </p:spPr>
+        <p:style>
+          <a:lnRef idx="1">
+            <a:schemeClr val="accent1"/>
+          </a:lnRef>
+          <a:fillRef idx="3">
+            <a:schemeClr val="accent1"/>
+          </a:fillRef>
+          <a:effectRef idx="2">
+            <a:schemeClr val="accent1"/>
+          </a:effectRef>
+          <a:fontRef idx="minor">
+            <a:schemeClr val="lt1"/>
+          </a:fontRef>
+        </p:style>
+        <p:txBody>
+          <a:bodyPr rtlCol="0" anchor="ctr"/>
+          <a:lstStyle/>
+          <a:p>
+            <a:pPr algn="ctr"/>
+          </a:p>
+        </p:txBody>
+      </p:sp>
+      <p:sp>
+        <p:nvSpPr>
+          <p:cNvPr id="12" name="Oval 11"/>
+          <p:cNvSpPr/>
+          <p:nvPr/>
+        </p:nvSpPr>
+        <p:spPr>
+          <a:xfrm>
+            <a:off x="5029200" y="1463040"/>
+            <a:ext cx="502920" cy="502920"/>
+          </a:xfrm>
+          <a:prstGeom prst="ellipse">
+            <a:avLst/>
+          </a:prstGeom>
+          <a:solidFill>
+            <a:srgbClr val="1E3A5F"/>
+          </a:solidFill>
+          <a:ln>
+            <a:noFill/>
+          </a:ln>
+        </p:spPr>
+        <p:style>
+          <a:lnRef idx="1">
+            <a:schemeClr val="accent1"/>
+          </a:lnRef>
+          <a:fillRef idx="3">
+            <a:schemeClr val="accent1"/>
+          </a:fillRef>
+          <a:effectRef idx="2">
+            <a:schemeClr val="accent1"/>
+          </a:effectRef>
+          <a:fontRef idx="minor">
+            <a:schemeClr val="lt1"/>
+          </a:fontRef>
+        </p:style>
+        <p:txBody>
+          <a:bodyPr rtlCol="0" anchor="ctr"/>
+          <a:lstStyle/>
+          <a:p>
+            <a:pPr algn="ctr"/>
+            <a:r>
+              <a:rPr sz="1800" b="1">
+                <a:solidFill>
+                  <a:srgbClr val="FFFFFF"/>
+                </a:solidFill>
+                <a:latin typeface="Calibri"/>
+              </a:rPr>
+              <a:t>📋</a:t>
+            </a:r>
+          </a:p>
+        </p:txBody>
+      </p:sp>
+      <p:sp>
+        <p:nvSpPr>
+          <p:cNvPr id="13" name="TextBox 12"/>
+          <p:cNvSpPr txBox="1"/>
+          <p:nvPr/>
+        </p:nvSpPr>
+        <p:spPr>
+          <a:xfrm>
+            <a:off x="5669280" y="1490472"/>
+            <a:ext cx="3063240" cy="365760"/>
+          </a:xfrm>
+          <a:prstGeom prst="rect">
+            <a:avLst/>
+          </a:prstGeom>
+          <a:noFill/>
+        </p:spPr>
+        <p:txBody>
+          <a:bodyPr wrap="square" lIns="0" rIns="0" tIns="0" bIns="0">
+            <a:spAutoFit/>
+          </a:bodyPr>
+          <a:lstStyle/>
+          <a:p>
+            <a:pPr algn="l"/>
+            <a:r>
+              <a:rPr sz="1500" b="1">
+                <a:solidFill>
+                  <a:srgbClr val="1A202C"/>
+                </a:solidFill>
+                <a:latin typeface="Calibri"/>
+              </a:rPr>
+              <a:t>Results · Cards view</a:t>
+            </a:r>
+          </a:p>
+        </p:txBody>
+      </p:sp>
+      <p:sp>
+        <p:nvSpPr>
+          <p:cNvPr id="14" name="TextBox 13"/>
+          <p:cNvSpPr txBox="1"/>
+          <p:nvPr/>
+        </p:nvSpPr>
+        <p:spPr>
+          <a:xfrm>
+            <a:off x="5669280" y="1874520"/>
+            <a:ext cx="3063240" cy="960120"/>
+          </a:xfrm>
+          <a:prstGeom prst="rect">
+            <a:avLst/>
+          </a:prstGeom>
+          <a:noFill/>
+        </p:spPr>
+        <p:txBody>
+          <a:bodyPr wrap="square" lIns="0" rIns="0" tIns="0" bIns="0">
+            <a:spAutoFit/>
+          </a:bodyPr>
+          <a:lstStyle/>
+          <a:p>
+            <a:pPr algn="l"/>
+            <a:r>
+              <a:rPr sz="1050" b="0">
+                <a:solidFill>
+                  <a:srgbClr val="2D3748"/>
+                </a:solidFill>
+                <a:latin typeface="Calibri"/>
+              </a:rPr>
+              <a:t>One bordered card per finalised pair. Question, answer, evidence quote, and a clickable source URL — all on the same screen, scannable.</a:t>
+            </a:r>
+          </a:p>
+        </p:txBody>
+      </p:sp>
+      <p:sp>
+        <p:nvSpPr>
+          <p:cNvPr id="15" name="Rectangle 14"/>
+          <p:cNvSpPr/>
+          <p:nvPr/>
+        </p:nvSpPr>
+        <p:spPr>
+          <a:xfrm>
+            <a:off x="457200" y="3063240"/>
+            <a:ext cx="4160520" cy="1691640"/>
+          </a:xfrm>
+          <a:prstGeom prst="rect">
+            <a:avLst/>
+          </a:prstGeom>
+          <a:solidFill>
+            <a:srgbClr val="FFFFFF"/>
+          </a:solidFill>
           <a:ln w="6350">
             <a:solidFill>
               <a:srgbClr val="E2E8F0"/>
@@ -6857,30 +7117,132 @@
           </a:ln>
         </p:spPr>
         <p:style>
-          <a:lnRef idx="2">
+          <a:lnRef idx="1">
             <a:schemeClr val="accent1"/>
           </a:lnRef>
-          <a:fillRef idx="0">
+          <a:fillRef idx="3">
             <a:schemeClr val="accent1"/>
           </a:fillRef>
-          <a:effectRef idx="1">
+          <a:effectRef idx="2">
             <a:schemeClr val="accent1"/>
           </a:effectRef>
           <a:fontRef idx="minor">
-            <a:schemeClr val="tx1"/>
+            <a:schemeClr val="lt1"/>
           </a:fontRef>
         </p:style>
-      </p:cxnSp>
-      <p:sp>
-        <p:nvSpPr>
-          <p:cNvPr id="8" name="TextBox 7"/>
+        <p:txBody>
+          <a:bodyPr rtlCol="0" anchor="ctr"/>
+          <a:lstStyle/>
+          <a:p>
+            <a:pPr algn="ctr"/>
+          </a:p>
+        </p:txBody>
+      </p:sp>
+      <p:sp>
+        <p:nvSpPr>
+          <p:cNvPr id="16" name="Rectangle 15"/>
+          <p:cNvSpPr/>
+          <p:nvPr/>
+        </p:nvSpPr>
+        <p:spPr>
+          <a:xfrm>
+            <a:off x="457200" y="3063240"/>
+            <a:ext cx="73152" cy="1691640"/>
+          </a:xfrm>
+          <a:prstGeom prst="rect">
+            <a:avLst/>
+          </a:prstGeom>
+          <a:solidFill>
+            <a:srgbClr val="0F766E"/>
+          </a:solidFill>
+          <a:ln>
+            <a:noFill/>
+          </a:ln>
+        </p:spPr>
+        <p:style>
+          <a:lnRef idx="1">
+            <a:schemeClr val="accent1"/>
+          </a:lnRef>
+          <a:fillRef idx="3">
+            <a:schemeClr val="accent1"/>
+          </a:fillRef>
+          <a:effectRef idx="2">
+            <a:schemeClr val="accent1"/>
+          </a:effectRef>
+          <a:fontRef idx="minor">
+            <a:schemeClr val="lt1"/>
+          </a:fontRef>
+        </p:style>
+        <p:txBody>
+          <a:bodyPr rtlCol="0" anchor="ctr"/>
+          <a:lstStyle/>
+          <a:p>
+            <a:pPr algn="ctr"/>
+          </a:p>
+        </p:txBody>
+      </p:sp>
+      <p:sp>
+        <p:nvSpPr>
+          <p:cNvPr id="17" name="Oval 16"/>
+          <p:cNvSpPr/>
+          <p:nvPr/>
+        </p:nvSpPr>
+        <p:spPr>
+          <a:xfrm>
+            <a:off x="731520" y="3291840"/>
+            <a:ext cx="502920" cy="502920"/>
+          </a:xfrm>
+          <a:prstGeom prst="ellipse">
+            <a:avLst/>
+          </a:prstGeom>
+          <a:solidFill>
+            <a:srgbClr val="0F766E"/>
+          </a:solidFill>
+          <a:ln>
+            <a:noFill/>
+          </a:ln>
+        </p:spPr>
+        <p:style>
+          <a:lnRef idx="1">
+            <a:schemeClr val="accent1"/>
+          </a:lnRef>
+          <a:fillRef idx="3">
+            <a:schemeClr val="accent1"/>
+          </a:fillRef>
+          <a:effectRef idx="2">
+            <a:schemeClr val="accent1"/>
+          </a:effectRef>
+          <a:fontRef idx="minor">
+            <a:schemeClr val="lt1"/>
+          </a:fontRef>
+        </p:style>
+        <p:txBody>
+          <a:bodyPr rtlCol="0" anchor="ctr"/>
+          <a:lstStyle/>
+          <a:p>
+            <a:pPr algn="ctr"/>
+            <a:r>
+              <a:rPr sz="1800" b="1">
+                <a:solidFill>
+                  <a:srgbClr val="FFFFFF"/>
+                </a:solidFill>
+                <a:latin typeface="Calibri"/>
+              </a:rPr>
+              <a:t>✍</a:t>
+            </a:r>
+          </a:p>
+        </p:txBody>
+      </p:sp>
+      <p:sp>
+        <p:nvSpPr>
+          <p:cNvPr id="18" name="TextBox 17"/>
           <p:cNvSpPr txBox="1"/>
           <p:nvPr/>
         </p:nvSpPr>
         <p:spPr>
           <a:xfrm>
-            <a:off x="685800" y="3749040"/>
-            <a:ext cx="411480" cy="182880"/>
+            <a:off x="1371600" y="3319272"/>
+            <a:ext cx="3063240" cy="365760"/>
           </a:xfrm>
           <a:prstGeom prst="rect">
             <a:avLst/>
@@ -6893,29 +7255,29 @@
           </a:bodyPr>
           <a:lstStyle/>
           <a:p>
-            <a:pPr algn="r"/>
-            <a:r>
-              <a:rPr sz="900" b="0">
-                <a:solidFill>
-                  <a:srgbClr val="718096"/>
+            <a:pPr algn="l"/>
+            <a:r>
+              <a:rPr sz="1500" b="1">
+                <a:solidFill>
+                  <a:srgbClr val="1A202C"/>
                 </a:solidFill>
                 <a:latin typeface="Calibri"/>
               </a:rPr>
-              <a:t>0</a:t>
-            </a:r>
-          </a:p>
-        </p:txBody>
-      </p:sp>
-      <p:sp>
-        <p:nvSpPr>
-          <p:cNvPr id="9" name="TextBox 8"/>
+              <a:t>In-app hand-marking</a:t>
+            </a:r>
+          </a:p>
+        </p:txBody>
+      </p:sp>
+      <p:sp>
+        <p:nvSpPr>
+          <p:cNvPr id="19" name="TextBox 18"/>
           <p:cNvSpPr txBox="1"/>
           <p:nvPr/>
         </p:nvSpPr>
         <p:spPr>
           <a:xfrm>
-            <a:off x="685800" y="3017520"/>
-            <a:ext cx="411480" cy="182880"/>
+            <a:off x="1371600" y="3703320"/>
+            <a:ext cx="3063240" cy="960120"/>
           </a:xfrm>
           <a:prstGeom prst="rect">
             <a:avLst/>
@@ -6928,99 +7290,74 @@
           </a:bodyPr>
           <a:lstStyle/>
           <a:p>
-            <a:pPr algn="r"/>
-            <a:r>
-              <a:rPr sz="900" b="0">
-                <a:solidFill>
-                  <a:srgbClr val="718096"/>
+            <a:pPr algn="l"/>
+            <a:r>
+              <a:rPr sz="1050" b="0">
+                <a:solidFill>
+                  <a:srgbClr val="2D3748"/>
                 </a:solidFill>
                 <a:latin typeface="Calibri"/>
               </a:rPr>
-              <a:t>1</a:t>
-            </a:r>
-          </a:p>
-        </p:txBody>
-      </p:sp>
-      <p:sp>
-        <p:nvSpPr>
-          <p:cNvPr id="10" name="TextBox 9"/>
-          <p:cNvSpPr txBox="1"/>
-          <p:nvPr/>
-        </p:nvSpPr>
-        <p:spPr>
-          <a:xfrm>
-            <a:off x="685800" y="2286000"/>
-            <a:ext cx="411480" cy="182880"/>
-          </a:xfrm>
-          <a:prstGeom prst="rect">
-            <a:avLst/>
-          </a:prstGeom>
-          <a:noFill/>
-        </p:spPr>
-        <p:txBody>
-          <a:bodyPr wrap="square" lIns="0" rIns="0" tIns="0" bIns="0">
-            <a:spAutoFit/>
-          </a:bodyPr>
-          <a:lstStyle/>
-          <a:p>
-            <a:pPr algn="r"/>
-            <a:r>
-              <a:rPr sz="900" b="0">
-                <a:solidFill>
-                  <a:srgbClr val="718096"/>
-                </a:solidFill>
-                <a:latin typeface="Calibri"/>
-              </a:rPr>
-              <a:t>2</a:t>
-            </a:r>
-          </a:p>
-        </p:txBody>
-      </p:sp>
-      <p:sp>
-        <p:nvSpPr>
-          <p:cNvPr id="11" name="TextBox 10"/>
-          <p:cNvSpPr txBox="1"/>
-          <p:nvPr/>
-        </p:nvSpPr>
-        <p:spPr>
-          <a:xfrm>
-            <a:off x="685800" y="1554480"/>
-            <a:ext cx="411480" cy="182880"/>
-          </a:xfrm>
-          <a:prstGeom prst="rect">
-            <a:avLst/>
-          </a:prstGeom>
-          <a:noFill/>
-        </p:spPr>
-        <p:txBody>
-          <a:bodyPr wrap="square" lIns="0" rIns="0" tIns="0" bIns="0">
-            <a:spAutoFit/>
-          </a:bodyPr>
-          <a:lstStyle/>
-          <a:p>
-            <a:pPr algn="r"/>
-            <a:r>
-              <a:rPr sz="900" b="0">
-                <a:solidFill>
-                  <a:srgbClr val="718096"/>
-                </a:solidFill>
-                <a:latin typeface="Calibri"/>
-              </a:rPr>
-              <a:t>3</a:t>
-            </a:r>
-          </a:p>
-        </p:txBody>
-      </p:sp>
-      <p:sp>
-        <p:nvSpPr>
-          <p:cNvPr id="12" name="Rectangle 11"/>
+              <a:t>Pick a question, slide three score sliders, hit Save. The page writes the CSV, commits it, and stamps the SHA into the DB so D9 is automatic.</a:t>
+            </a:r>
+          </a:p>
+        </p:txBody>
+      </p:sp>
+      <p:sp>
+        <p:nvSpPr>
+          <p:cNvPr id="20" name="Rectangle 19"/>
           <p:cNvSpPr/>
           <p:nvPr/>
         </p:nvSpPr>
         <p:spPr>
           <a:xfrm>
-            <a:off x="1584769" y="1645920"/>
-            <a:ext cx="968121" cy="2194560"/>
+            <a:off x="4754880" y="3063240"/>
+            <a:ext cx="4160520" cy="1691640"/>
+          </a:xfrm>
+          <a:prstGeom prst="rect">
+            <a:avLst/>
+          </a:prstGeom>
+          <a:solidFill>
+            <a:srgbClr val="FFFFFF"/>
+          </a:solidFill>
+          <a:ln w="6350">
+            <a:solidFill>
+              <a:srgbClr val="E2E8F0"/>
+            </a:solidFill>
+          </a:ln>
+        </p:spPr>
+        <p:style>
+          <a:lnRef idx="1">
+            <a:schemeClr val="accent1"/>
+          </a:lnRef>
+          <a:fillRef idx="3">
+            <a:schemeClr val="accent1"/>
+          </a:fillRef>
+          <a:effectRef idx="2">
+            <a:schemeClr val="accent1"/>
+          </a:effectRef>
+          <a:fontRef idx="minor">
+            <a:schemeClr val="lt1"/>
+          </a:fontRef>
+        </p:style>
+        <p:txBody>
+          <a:bodyPr rtlCol="0" anchor="ctr"/>
+          <a:lstStyle/>
+          <a:p>
+            <a:pPr algn="ctr"/>
+          </a:p>
+        </p:txBody>
+      </p:sp>
+      <p:sp>
+        <p:nvSpPr>
+          <p:cNvPr id="21" name="Rectangle 20"/>
+          <p:cNvSpPr/>
+          <p:nvPr/>
+        </p:nvSpPr>
+        <p:spPr>
+          <a:xfrm>
+            <a:off x="4754880" y="3063240"/>
+            <a:ext cx="73152" cy="1691640"/>
           </a:xfrm>
           <a:prstGeom prst="rect">
             <a:avLst/>
@@ -7056,86 +7393,16 @@
       </p:sp>
       <p:sp>
         <p:nvSpPr>
-          <p:cNvPr id="13" name="TextBox 12"/>
-          <p:cNvSpPr txBox="1"/>
-          <p:nvPr/>
-        </p:nvSpPr>
-        <p:spPr>
-          <a:xfrm>
-            <a:off x="1219009" y="3913632"/>
-            <a:ext cx="1699641" cy="228600"/>
-          </a:xfrm>
-          <a:prstGeom prst="rect">
-            <a:avLst/>
-          </a:prstGeom>
-          <a:noFill/>
-        </p:spPr>
-        <p:txBody>
-          <a:bodyPr wrap="square" lIns="0" rIns="0" tIns="0" bIns="0">
-            <a:spAutoFit/>
-          </a:bodyPr>
-          <a:lstStyle/>
-          <a:p>
-            <a:pPr algn="ctr"/>
-            <a:r>
-              <a:rPr sz="1200" b="1">
-                <a:solidFill>
-                  <a:srgbClr val="1A202C"/>
-                </a:solidFill>
-                <a:latin typeface="Calibri"/>
-              </a:rPr>
-              <a:t>DE</a:t>
-            </a:r>
-          </a:p>
-        </p:txBody>
-      </p:sp>
-      <p:sp>
-        <p:nvSpPr>
-          <p:cNvPr id="14" name="TextBox 13"/>
-          <p:cNvSpPr txBox="1"/>
-          <p:nvPr/>
-        </p:nvSpPr>
-        <p:spPr>
-          <a:xfrm>
-            <a:off x="1219009" y="4114800"/>
-            <a:ext cx="1699641" cy="201168"/>
-          </a:xfrm>
-          <a:prstGeom prst="rect">
-            <a:avLst/>
-          </a:prstGeom>
-          <a:noFill/>
-        </p:spPr>
-        <p:txBody>
-          <a:bodyPr wrap="square" lIns="0" rIns="0" tIns="0" bIns="0">
-            <a:spAutoFit/>
-          </a:bodyPr>
-          <a:lstStyle/>
-          <a:p>
-            <a:pPr algn="ctr"/>
-            <a:r>
-              <a:rPr sz="900" b="0">
-                <a:solidFill>
-                  <a:srgbClr val="718096"/>
-                </a:solidFill>
-                <a:latin typeface="Calibri"/>
-              </a:rPr>
-              <a:t>3 / 3</a:t>
-            </a:r>
-          </a:p>
-        </p:txBody>
-      </p:sp>
-      <p:sp>
-        <p:nvSpPr>
-          <p:cNvPr id="15" name="Rectangle 14"/>
+          <p:cNvPr id="22" name="Oval 21"/>
           <p:cNvSpPr/>
           <p:nvPr/>
         </p:nvSpPr>
         <p:spPr>
           <a:xfrm>
-            <a:off x="3344989" y="1645920"/>
-            <a:ext cx="968121" cy="2194560"/>
-          </a:xfrm>
-          <a:prstGeom prst="rect">
+            <a:off x="5029200" y="3291840"/>
+            <a:ext cx="502920" cy="502920"/>
+          </a:xfrm>
+          <a:prstGeom prst="ellipse">
             <a:avLst/>
           </a:prstGeom>
           <a:solidFill>
@@ -7164,19 +7431,28 @@
           <a:lstStyle/>
           <a:p>
             <a:pPr algn="ctr"/>
-          </a:p>
-        </p:txBody>
-      </p:sp>
-      <p:sp>
-        <p:nvSpPr>
-          <p:cNvPr id="16" name="TextBox 15"/>
+            <a:r>
+              <a:rPr sz="1800" b="1">
+                <a:solidFill>
+                  <a:srgbClr val="FFFFFF"/>
+                </a:solidFill>
+                <a:latin typeface="Calibri"/>
+              </a:rPr>
+              <a:t>📊</a:t>
+            </a:r>
+          </a:p>
+        </p:txBody>
+      </p:sp>
+      <p:sp>
+        <p:nvSpPr>
+          <p:cNvPr id="23" name="TextBox 22"/>
           <p:cNvSpPr txBox="1"/>
           <p:nvPr/>
         </p:nvSpPr>
         <p:spPr>
           <a:xfrm>
-            <a:off x="2979229" y="3913632"/>
-            <a:ext cx="1699641" cy="228600"/>
+            <a:off x="5669280" y="3319272"/>
+            <a:ext cx="3063240" cy="365760"/>
           </a:xfrm>
           <a:prstGeom prst="rect">
             <a:avLst/>
@@ -7189,29 +7465,29 @@
           </a:bodyPr>
           <a:lstStyle/>
           <a:p>
-            <a:pPr algn="ctr"/>
-            <a:r>
-              <a:rPr sz="1200" b="1">
+            <a:pPr algn="l"/>
+            <a:r>
+              <a:rPr sz="1500" b="1">
                 <a:solidFill>
                   <a:srgbClr val="1A202C"/>
                 </a:solidFill>
                 <a:latin typeface="Calibri"/>
               </a:rPr>
-              <a:t>FR</a:t>
-            </a:r>
-          </a:p>
-        </p:txBody>
-      </p:sp>
-      <p:sp>
-        <p:nvSpPr>
-          <p:cNvPr id="17" name="TextBox 16"/>
+              <a:t>Country chart + cost tracking</a:t>
+            </a:r>
+          </a:p>
+        </p:txBody>
+      </p:sp>
+      <p:sp>
+        <p:nvSpPr>
+          <p:cNvPr id="24" name="TextBox 23"/>
           <p:cNvSpPr txBox="1"/>
           <p:nvPr/>
         </p:nvSpPr>
         <p:spPr>
           <a:xfrm>
-            <a:off x="2979229" y="4114800"/>
-            <a:ext cx="1699641" cy="201168"/>
+            <a:off x="5669280" y="3703320"/>
+            <a:ext cx="3063240" cy="960120"/>
           </a:xfrm>
           <a:prstGeom prst="rect">
             <a:avLst/>
@@ -7224,72 +7500,29 @@
           </a:bodyPr>
           <a:lstStyle/>
           <a:p>
-            <a:pPr algn="ctr"/>
-            <a:r>
-              <a:rPr sz="900" b="0">
-                <a:solidFill>
-                  <a:srgbClr val="718096"/>
+            <a:pPr algn="l"/>
+            <a:r>
+              <a:rPr sz="1050" b="0">
+                <a:solidFill>
+                  <a:srgbClr val="2D3748"/>
                 </a:solidFill>
                 <a:latin typeface="Calibri"/>
               </a:rPr>
-              <a:t>3 / 3</a:t>
-            </a:r>
-          </a:p>
-        </p:txBody>
-      </p:sp>
-      <p:sp>
-        <p:nvSpPr>
-          <p:cNvPr id="18" name="Rectangle 17"/>
-          <p:cNvSpPr/>
-          <p:nvPr/>
-        </p:nvSpPr>
-        <p:spPr>
-          <a:xfrm>
-            <a:off x="5105209" y="1645920"/>
-            <a:ext cx="968121" cy="2194560"/>
-          </a:xfrm>
-          <a:prstGeom prst="rect">
-            <a:avLst/>
-          </a:prstGeom>
-          <a:solidFill>
-            <a:srgbClr val="38A169"/>
-          </a:solidFill>
-          <a:ln>
-            <a:noFill/>
-          </a:ln>
-        </p:spPr>
-        <p:style>
-          <a:lnRef idx="1">
-            <a:schemeClr val="accent1"/>
-          </a:lnRef>
-          <a:fillRef idx="3">
-            <a:schemeClr val="accent1"/>
-          </a:fillRef>
-          <a:effectRef idx="2">
-            <a:schemeClr val="accent1"/>
-          </a:effectRef>
-          <a:fontRef idx="minor">
-            <a:schemeClr val="lt1"/>
-          </a:fontRef>
-        </p:style>
-        <p:txBody>
-          <a:bodyPr rtlCol="0" anchor="ctr"/>
-          <a:lstStyle/>
-          <a:p>
-            <a:pPr algn="ctr"/>
-          </a:p>
-        </p:txBody>
-      </p:sp>
-      <p:sp>
-        <p:nvSpPr>
-          <p:cNvPr id="19" name="TextBox 18"/>
+              <a:t>Live stacked bar of accept vs reject per country on the Home page. Costs page shows the rolling 5-hour spend and the per-model breakdown.</a:t>
+            </a:r>
+          </a:p>
+        </p:txBody>
+      </p:sp>
+      <p:sp>
+        <p:nvSpPr>
+          <p:cNvPr id="25" name="TextBox 24"/>
           <p:cNvSpPr txBox="1"/>
           <p:nvPr/>
         </p:nvSpPr>
         <p:spPr>
           <a:xfrm>
-            <a:off x="4739449" y="3913632"/>
-            <a:ext cx="1699641" cy="228600"/>
+            <a:off x="457200" y="4850892"/>
+            <a:ext cx="8229600" cy="182880"/>
           </a:xfrm>
           <a:prstGeom prst="rect">
             <a:avLst/>
@@ -7302,432 +7535,15 @@
           </a:bodyPr>
           <a:lstStyle/>
           <a:p>
-            <a:pPr algn="ctr"/>
-            <a:r>
-              <a:rPr sz="1200" b="1">
-                <a:solidFill>
-                  <a:srgbClr val="1A202C"/>
+            <a:pPr algn="l"/>
+            <a:r>
+              <a:rPr sz="800" b="0">
+                <a:solidFill>
+                  <a:srgbClr val="718096"/>
                 </a:solidFill>
                 <a:latin typeface="Calibri"/>
               </a:rPr>
-              <a:t>NL</a:t>
-            </a:r>
-          </a:p>
-        </p:txBody>
-      </p:sp>
-      <p:sp>
-        <p:nvSpPr>
-          <p:cNvPr id="20" name="TextBox 19"/>
-          <p:cNvSpPr txBox="1"/>
-          <p:nvPr/>
-        </p:nvSpPr>
-        <p:spPr>
-          <a:xfrm>
-            <a:off x="4739449" y="4114800"/>
-            <a:ext cx="1699641" cy="201168"/>
-          </a:xfrm>
-          <a:prstGeom prst="rect">
-            <a:avLst/>
-          </a:prstGeom>
-          <a:noFill/>
-        </p:spPr>
-        <p:txBody>
-          <a:bodyPr wrap="square" lIns="0" rIns="0" tIns="0" bIns="0">
-            <a:spAutoFit/>
-          </a:bodyPr>
-          <a:lstStyle/>
-          <a:p>
-            <a:pPr algn="ctr"/>
-            <a:r>
-              <a:rPr sz="900" b="0">
-                <a:solidFill>
-                  <a:srgbClr val="718096"/>
-                </a:solidFill>
-                <a:latin typeface="Calibri"/>
-              </a:rPr>
-              <a:t>3 / 3</a:t>
-            </a:r>
-          </a:p>
-        </p:txBody>
-      </p:sp>
-      <p:sp>
-        <p:nvSpPr>
-          <p:cNvPr id="21" name="Rectangle 20"/>
-          <p:cNvSpPr/>
-          <p:nvPr/>
-        </p:nvSpPr>
-        <p:spPr>
-          <a:xfrm>
-            <a:off x="6865429" y="2377440"/>
-            <a:ext cx="968121" cy="1463040"/>
-          </a:xfrm>
-          <a:prstGeom prst="rect">
-            <a:avLst/>
-          </a:prstGeom>
-          <a:solidFill>
-            <a:srgbClr val="38A169"/>
-          </a:solidFill>
-          <a:ln>
-            <a:noFill/>
-          </a:ln>
-        </p:spPr>
-        <p:style>
-          <a:lnRef idx="1">
-            <a:schemeClr val="accent1"/>
-          </a:lnRef>
-          <a:fillRef idx="3">
-            <a:schemeClr val="accent1"/>
-          </a:fillRef>
-          <a:effectRef idx="2">
-            <a:schemeClr val="accent1"/>
-          </a:effectRef>
-          <a:fontRef idx="minor">
-            <a:schemeClr val="lt1"/>
-          </a:fontRef>
-        </p:style>
-        <p:txBody>
-          <a:bodyPr rtlCol="0" anchor="ctr"/>
-          <a:lstStyle/>
-          <a:p>
-            <a:pPr algn="ctr"/>
-          </a:p>
-        </p:txBody>
-      </p:sp>
-      <p:sp>
-        <p:nvSpPr>
-          <p:cNvPr id="22" name="TextBox 21"/>
-          <p:cNvSpPr txBox="1"/>
-          <p:nvPr/>
-        </p:nvSpPr>
-        <p:spPr>
-          <a:xfrm>
-            <a:off x="6499669" y="3913632"/>
-            <a:ext cx="1699641" cy="228600"/>
-          </a:xfrm>
-          <a:prstGeom prst="rect">
-            <a:avLst/>
-          </a:prstGeom>
-          <a:noFill/>
-        </p:spPr>
-        <p:txBody>
-          <a:bodyPr wrap="square" lIns="0" rIns="0" tIns="0" bIns="0">
-            <a:spAutoFit/>
-          </a:bodyPr>
-          <a:lstStyle/>
-          <a:p>
-            <a:pPr algn="ctr"/>
-            <a:r>
-              <a:rPr sz="1200" b="1">
-                <a:solidFill>
-                  <a:srgbClr val="1A202C"/>
-                </a:solidFill>
-                <a:latin typeface="Calibri"/>
-              </a:rPr>
-              <a:t>RO</a:t>
-            </a:r>
-          </a:p>
-        </p:txBody>
-      </p:sp>
-      <p:sp>
-        <p:nvSpPr>
-          <p:cNvPr id="23" name="TextBox 22"/>
-          <p:cNvSpPr txBox="1"/>
-          <p:nvPr/>
-        </p:nvSpPr>
-        <p:spPr>
-          <a:xfrm>
-            <a:off x="6499669" y="4114800"/>
-            <a:ext cx="1699641" cy="201168"/>
-          </a:xfrm>
-          <a:prstGeom prst="rect">
-            <a:avLst/>
-          </a:prstGeom>
-          <a:noFill/>
-        </p:spPr>
-        <p:txBody>
-          <a:bodyPr wrap="square" lIns="0" rIns="0" tIns="0" bIns="0">
-            <a:spAutoFit/>
-          </a:bodyPr>
-          <a:lstStyle/>
-          <a:p>
-            <a:pPr algn="ctr"/>
-            <a:r>
-              <a:rPr sz="900" b="0">
-                <a:solidFill>
-                  <a:srgbClr val="718096"/>
-                </a:solidFill>
-                <a:latin typeface="Calibri"/>
-              </a:rPr>
-              <a:t>2 / 2</a:t>
-            </a:r>
-          </a:p>
-        </p:txBody>
-      </p:sp>
-      <p:sp>
-        <p:nvSpPr>
-          <p:cNvPr id="24" name="Rectangle 23"/>
-          <p:cNvSpPr/>
-          <p:nvPr/>
-        </p:nvSpPr>
-        <p:spPr>
-          <a:xfrm>
-            <a:off x="1188720" y="4069080"/>
-            <a:ext cx="164592" cy="164592"/>
-          </a:xfrm>
-          <a:prstGeom prst="rect">
-            <a:avLst/>
-          </a:prstGeom>
-          <a:solidFill>
-            <a:srgbClr val="38A169"/>
-          </a:solidFill>
-          <a:ln>
-            <a:noFill/>
-          </a:ln>
-        </p:spPr>
-        <p:style>
-          <a:lnRef idx="1">
-            <a:schemeClr val="accent1"/>
-          </a:lnRef>
-          <a:fillRef idx="3">
-            <a:schemeClr val="accent1"/>
-          </a:fillRef>
-          <a:effectRef idx="2">
-            <a:schemeClr val="accent1"/>
-          </a:effectRef>
-          <a:fontRef idx="minor">
-            <a:schemeClr val="lt1"/>
-          </a:fontRef>
-        </p:style>
-        <p:txBody>
-          <a:bodyPr rtlCol="0" anchor="ctr"/>
-          <a:lstStyle/>
-          <a:p>
-            <a:pPr algn="ctr"/>
-          </a:p>
-        </p:txBody>
-      </p:sp>
-      <p:sp>
-        <p:nvSpPr>
-          <p:cNvPr id="25" name="TextBox 24"/>
-          <p:cNvSpPr txBox="1"/>
-          <p:nvPr/>
-        </p:nvSpPr>
-        <p:spPr>
-          <a:xfrm>
-            <a:off x="1417320" y="4050792"/>
-            <a:ext cx="3291840" cy="228600"/>
-          </a:xfrm>
-          <a:prstGeom prst="rect">
-            <a:avLst/>
-          </a:prstGeom>
-          <a:noFill/>
-        </p:spPr>
-        <p:txBody>
-          <a:bodyPr wrap="square" lIns="0" rIns="0" tIns="0" bIns="0">
-            <a:spAutoFit/>
-          </a:bodyPr>
-          <a:lstStyle/>
-          <a:p>
-            <a:pPr algn="l"/>
-            <a:r>
-              <a:rPr sz="1000" b="0">
-                <a:solidFill>
-                  <a:srgbClr val="2D3748"/>
-                </a:solidFill>
-                <a:latin typeface="Calibri"/>
-              </a:rPr>
-              <a:t>Accepted (Verifier or Adjudicator)</a:t>
-            </a:r>
-          </a:p>
-        </p:txBody>
-      </p:sp>
-      <p:sp>
-        <p:nvSpPr>
-          <p:cNvPr id="26" name="Rectangle 25"/>
-          <p:cNvSpPr/>
-          <p:nvPr/>
-        </p:nvSpPr>
-        <p:spPr>
-          <a:xfrm>
-            <a:off x="4389120" y="4069080"/>
-            <a:ext cx="164592" cy="164592"/>
-          </a:xfrm>
-          <a:prstGeom prst="rect">
-            <a:avLst/>
-          </a:prstGeom>
-          <a:solidFill>
-            <a:srgbClr val="C53030"/>
-          </a:solidFill>
-          <a:ln>
-            <a:noFill/>
-          </a:ln>
-        </p:spPr>
-        <p:style>
-          <a:lnRef idx="1">
-            <a:schemeClr val="accent1"/>
-          </a:lnRef>
-          <a:fillRef idx="3">
-            <a:schemeClr val="accent1"/>
-          </a:fillRef>
-          <a:effectRef idx="2">
-            <a:schemeClr val="accent1"/>
-          </a:effectRef>
-          <a:fontRef idx="minor">
-            <a:schemeClr val="lt1"/>
-          </a:fontRef>
-        </p:style>
-        <p:txBody>
-          <a:bodyPr rtlCol="0" anchor="ctr"/>
-          <a:lstStyle/>
-          <a:p>
-            <a:pPr algn="ctr"/>
-          </a:p>
-        </p:txBody>
-      </p:sp>
-      <p:sp>
-        <p:nvSpPr>
-          <p:cNvPr id="27" name="TextBox 26"/>
-          <p:cNvSpPr txBox="1"/>
-          <p:nvPr/>
-        </p:nvSpPr>
-        <p:spPr>
-          <a:xfrm>
-            <a:off x="4617720" y="4050792"/>
-            <a:ext cx="3657600" cy="228600"/>
-          </a:xfrm>
-          <a:prstGeom prst="rect">
-            <a:avLst/>
-          </a:prstGeom>
-          <a:noFill/>
-        </p:spPr>
-        <p:txBody>
-          <a:bodyPr wrap="square" lIns="0" rIns="0" tIns="0" bIns="0">
-            <a:spAutoFit/>
-          </a:bodyPr>
-          <a:lstStyle/>
-          <a:p>
-            <a:pPr algn="l"/>
-            <a:r>
-              <a:rPr sz="1000" b="0">
-                <a:solidFill>
-                  <a:srgbClr val="2D3748"/>
-                </a:solidFill>
-                <a:latin typeface="Calibri"/>
-              </a:rPr>
-              <a:t>Rejected or escalated</a:t>
-            </a:r>
-          </a:p>
-        </p:txBody>
-      </p:sp>
-      <p:sp>
-        <p:nvSpPr>
-          <p:cNvPr id="28" name="Rectangle 27"/>
-          <p:cNvSpPr/>
-          <p:nvPr/>
-        </p:nvSpPr>
-        <p:spPr>
-          <a:xfrm>
-            <a:off x="457200" y="4553712"/>
-            <a:ext cx="73152" cy="548640"/>
-          </a:xfrm>
-          <a:prstGeom prst="rect">
-            <a:avLst/>
-          </a:prstGeom>
-          <a:solidFill>
-            <a:srgbClr val="D69E2E"/>
-          </a:solidFill>
-          <a:ln>
-            <a:noFill/>
-          </a:ln>
-        </p:spPr>
-        <p:style>
-          <a:lnRef idx="1">
-            <a:schemeClr val="accent1"/>
-          </a:lnRef>
-          <a:fillRef idx="3">
-            <a:schemeClr val="accent1"/>
-          </a:fillRef>
-          <a:effectRef idx="2">
-            <a:schemeClr val="accent1"/>
-          </a:effectRef>
-          <a:fontRef idx="minor">
-            <a:schemeClr val="lt1"/>
-          </a:fontRef>
-        </p:style>
-        <p:txBody>
-          <a:bodyPr rtlCol="0" anchor="ctr"/>
-          <a:lstStyle/>
-          <a:p>
-            <a:pPr algn="ctr"/>
-          </a:p>
-        </p:txBody>
-      </p:sp>
-      <p:sp>
-        <p:nvSpPr>
-          <p:cNvPr id="29" name="TextBox 28"/>
-          <p:cNvSpPr txBox="1"/>
-          <p:nvPr/>
-        </p:nvSpPr>
-        <p:spPr>
-          <a:xfrm>
-            <a:off x="640080" y="4590288"/>
-            <a:ext cx="7955280" cy="502920"/>
-          </a:xfrm>
-          <a:prstGeom prst="rect">
-            <a:avLst/>
-          </a:prstGeom>
-          <a:noFill/>
-        </p:spPr>
-        <p:txBody>
-          <a:bodyPr wrap="square" lIns="0" rIns="0" tIns="0" bIns="0">
-            <a:spAutoFit/>
-          </a:bodyPr>
-          <a:lstStyle/>
-          <a:p>
-            <a:pPr algn="l"/>
-            <a:r>
-              <a:rPr sz="1000" b="0">
-                <a:solidFill>
-                  <a:srgbClr val="2D3748"/>
-                </a:solidFill>
-                <a:latin typeface="Calibri"/>
-              </a:rPr>
-              <a:t>Caveat: every pair so far is a Policy-dimension question on a high-resource country. The Verifier has not yet been asked to disprove a known-wrong Researcher answer. The 100% accept rate is consistent with the swarm working — and with it being too lenient.</a:t>
-            </a:r>
-          </a:p>
-        </p:txBody>
-      </p:sp>
-      <p:sp>
-        <p:nvSpPr>
-          <p:cNvPr id="30" name="TextBox 29"/>
-          <p:cNvSpPr txBox="1"/>
-          <p:nvPr/>
-        </p:nvSpPr>
-        <p:spPr>
-          <a:xfrm>
-            <a:off x="457200" y="4850892"/>
-            <a:ext cx="8229600" cy="182880"/>
-          </a:xfrm>
-          <a:prstGeom prst="rect">
-            <a:avLst/>
-          </a:prstGeom>
-          <a:noFill/>
-        </p:spPr>
-        <p:txBody>
-          <a:bodyPr wrap="square" lIns="0" rIns="0" tIns="0" bIns="0">
-            <a:spAutoFit/>
-          </a:bodyPr>
-          <a:lstStyle/>
-          <a:p>
-            <a:pPr algn="l"/>
-            <a:r>
-              <a:rPr sz="800" b="0">
-                <a:solidFill>
-                  <a:srgbClr val="718096"/>
-                </a:solidFill>
-                <a:latin typeface="Calibri"/>
-              </a:rPr>
-              <a:t>ODMI Agent Swarm  ·  Benjy Bream  ·  King's College London  ·  5 / 9</a:t>
+              <a:t>ODMI Agent Swarm  ·  Benjy Bream  ·  King's College London  ·  5 / 6</a:t>
             </a:r>
           </a:p>
         </p:txBody>
@@ -7823,7 +7639,7 @@
                 </a:solidFill>
                 <a:latin typeface="Calibri"/>
               </a:rPr>
-              <a:t>WHAT'S LOCKED, WHAT'S STILL TO SETTLE</a:t>
+              <a:t>SHORT TERM AND LONG TERM</a:t>
             </a:r>
           </a:p>
         </p:txBody>
@@ -7858,7 +7674,7 @@
                 </a:solidFill>
                 <a:latin typeface="Calibri"/>
               </a:rPr>
-              <a:t>Decisions taken and open questions</a:t>
+              <a:t>Where this goes next</a:t>
             </a:r>
           </a:p>
         </p:txBody>
@@ -7871,8 +7687,8 @@
         </p:nvSpPr>
         <p:spPr>
           <a:xfrm>
-            <a:off x="457200" y="1280160"/>
-            <a:ext cx="4160520" cy="3383280"/>
+            <a:off x="457200" y="1234440"/>
+            <a:ext cx="4160520" cy="3520440"/>
           </a:xfrm>
           <a:prstGeom prst="rect">
             <a:avLst/>
@@ -7916,7 +7732,7 @@
         </p:nvSpPr>
         <p:spPr>
           <a:xfrm>
-            <a:off x="457200" y="1280160"/>
+            <a:off x="457200" y="1234440"/>
             <a:ext cx="4160520" cy="411480"/>
           </a:xfrm>
           <a:prstGeom prst="rect">
@@ -7959,8 +7775,8 @@
         </p:nvSpPr>
         <p:spPr>
           <a:xfrm>
-            <a:off x="640080" y="1371600"/>
-            <a:ext cx="3794760" cy="274320"/>
+            <a:off x="685800" y="1325880"/>
+            <a:ext cx="3703320" cy="274320"/>
           </a:xfrm>
           <a:prstGeom prst="rect">
             <a:avLst/>
@@ -7981,7 +7797,7 @@
                 </a:solidFill>
                 <a:latin typeface="Calibri"/>
               </a:rPr>
-              <a:t>LOCKED DECISIONS</a:t>
+              <a:t>NEXT TWO WEEKS</a:t>
             </a:r>
           </a:p>
         </p:txBody>
@@ -7994,8 +7810,8 @@
         </p:nvSpPr>
         <p:spPr>
           <a:xfrm>
-            <a:off x="640080" y="1783080"/>
-            <a:ext cx="411480" cy="228600"/>
+            <a:off x="1051560" y="1737360"/>
+            <a:ext cx="3520440" cy="256032"/>
           </a:xfrm>
           <a:prstGeom prst="rect">
             <a:avLst/>
@@ -8010,13 +7826,13 @@
           <a:p>
             <a:pPr algn="l"/>
             <a:r>
-              <a:rPr sz="1000" b="1">
-                <a:solidFill>
-                  <a:srgbClr val="0F766E"/>
+              <a:rPr sz="1100" b="1">
+                <a:solidFill>
+                  <a:srgbClr val="1A202C"/>
                 </a:solidFill>
                 <a:latin typeface="Calibri"/>
               </a:rPr>
-              <a:t>D1</a:t>
+              <a:t>Hand-mark the Phase A pilot</a:t>
             </a:r>
           </a:p>
         </p:txBody>
@@ -8029,8 +7845,8 @@
         </p:nvSpPr>
         <p:spPr>
           <a:xfrm>
-            <a:off x="1097280" y="1783080"/>
-            <a:ext cx="3337560" cy="274320"/>
+            <a:off x="1051560" y="1993392"/>
+            <a:ext cx="3520440" cy="682752"/>
           </a:xfrm>
           <a:prstGeom prst="rect">
             <a:avLst/>
@@ -8051,21 +7867,64 @@
                 </a:solidFill>
                 <a:latin typeface="Calibri"/>
               </a:rPr>
-              <a:t>LLM access via CLIProxyAPI on Claude Max — no Anthropic billing.</a:t>
-            </a:r>
-          </a:p>
-        </p:txBody>
-      </p:sp>
-      <p:sp>
-        <p:nvSpPr>
-          <p:cNvPr id="10" name="TextBox 9"/>
+              <a:t>10 France questions across all four rubric tiers. Submit from the dashboard; D9 lock happens on save.</a:t>
+            </a:r>
+          </a:p>
+        </p:txBody>
+      </p:sp>
+      <p:sp>
+        <p:nvSpPr>
+          <p:cNvPr id="10" name="Rectangle 9"/>
+          <p:cNvSpPr/>
+          <p:nvPr/>
+        </p:nvSpPr>
+        <p:spPr>
+          <a:xfrm>
+            <a:off x="640080" y="1810512"/>
+            <a:ext cx="164592" cy="164592"/>
+          </a:xfrm>
+          <a:prstGeom prst="rect">
+            <a:avLst/>
+          </a:prstGeom>
+          <a:solidFill>
+            <a:srgbClr val="0D9488"/>
+          </a:solidFill>
+          <a:ln>
+            <a:noFill/>
+          </a:ln>
+        </p:spPr>
+        <p:style>
+          <a:lnRef idx="1">
+            <a:schemeClr val="accent1"/>
+          </a:lnRef>
+          <a:fillRef idx="3">
+            <a:schemeClr val="accent1"/>
+          </a:fillRef>
+          <a:effectRef idx="2">
+            <a:schemeClr val="accent1"/>
+          </a:effectRef>
+          <a:fontRef idx="minor">
+            <a:schemeClr val="lt1"/>
+          </a:fontRef>
+        </p:style>
+        <p:txBody>
+          <a:bodyPr rtlCol="0" anchor="ctr"/>
+          <a:lstStyle/>
+          <a:p>
+            <a:pPr algn="ctr"/>
+          </a:p>
+        </p:txBody>
+      </p:sp>
+      <p:sp>
+        <p:nvSpPr>
+          <p:cNvPr id="11" name="TextBox 10"/>
           <p:cNvSpPr txBox="1"/>
           <p:nvPr/>
         </p:nvSpPr>
         <p:spPr>
           <a:xfrm>
-            <a:off x="640080" y="2093976"/>
-            <a:ext cx="411480" cy="228600"/>
+            <a:off x="1051560" y="2712720"/>
+            <a:ext cx="3520440" cy="256032"/>
           </a:xfrm>
           <a:prstGeom prst="rect">
             <a:avLst/>
@@ -8080,27 +7939,27 @@
           <a:p>
             <a:pPr algn="l"/>
             <a:r>
-              <a:rPr sz="1000" b="1">
-                <a:solidFill>
-                  <a:srgbClr val="0F766E"/>
+              <a:rPr sz="1100" b="1">
+                <a:solidFill>
+                  <a:srgbClr val="1A202C"/>
                 </a:solidFill>
                 <a:latin typeface="Calibri"/>
               </a:rPr>
-              <a:t>D2</a:t>
-            </a:r>
-          </a:p>
-        </p:txBody>
-      </p:sp>
-      <p:sp>
-        <p:nvSpPr>
-          <p:cNvPr id="11" name="TextBox 10"/>
+              <a:t>Baseline + strategy comparison</a:t>
+            </a:r>
+          </a:p>
+        </p:txBody>
+      </p:sp>
+      <p:sp>
+        <p:nvSpPr>
+          <p:cNvPr id="12" name="TextBox 11"/>
           <p:cNvSpPr txBox="1"/>
           <p:nvPr/>
         </p:nvSpPr>
         <p:spPr>
           <a:xfrm>
-            <a:off x="1097280" y="2093976"/>
-            <a:ext cx="3337560" cy="274320"/>
+            <a:off x="1051560" y="2968752"/>
+            <a:ext cx="3520440" cy="682752"/>
           </a:xfrm>
           <a:prstGeom prst="rect">
             <a:avLst/>
@@ -8121,21 +7980,64 @@
                 </a:solidFill>
                 <a:latin typeface="Calibri"/>
               </a:rPr>
-              <a:t>SQLite as the single, hand-portable evaluation store.</a:t>
-            </a:r>
-          </a:p>
-        </p:txBody>
-      </p:sp>
-      <p:sp>
-        <p:nvSpPr>
-          <p:cNvPr id="12" name="TextBox 11"/>
+              <a:t>Run the swarm on the locked 10 with all four Verifier strategies. First real accuracy and rejection numbers.</a:t>
+            </a:r>
+          </a:p>
+        </p:txBody>
+      </p:sp>
+      <p:sp>
+        <p:nvSpPr>
+          <p:cNvPr id="13" name="Rectangle 12"/>
+          <p:cNvSpPr/>
+          <p:nvPr/>
+        </p:nvSpPr>
+        <p:spPr>
+          <a:xfrm>
+            <a:off x="640080" y="2785872"/>
+            <a:ext cx="164592" cy="164592"/>
+          </a:xfrm>
+          <a:prstGeom prst="rect">
+            <a:avLst/>
+          </a:prstGeom>
+          <a:solidFill>
+            <a:srgbClr val="0D9488"/>
+          </a:solidFill>
+          <a:ln>
+            <a:noFill/>
+          </a:ln>
+        </p:spPr>
+        <p:style>
+          <a:lnRef idx="1">
+            <a:schemeClr val="accent1"/>
+          </a:lnRef>
+          <a:fillRef idx="3">
+            <a:schemeClr val="accent1"/>
+          </a:fillRef>
+          <a:effectRef idx="2">
+            <a:schemeClr val="accent1"/>
+          </a:effectRef>
+          <a:fontRef idx="minor">
+            <a:schemeClr val="lt1"/>
+          </a:fontRef>
+        </p:style>
+        <p:txBody>
+          <a:bodyPr rtlCol="0" anchor="ctr"/>
+          <a:lstStyle/>
+          <a:p>
+            <a:pPr algn="ctr"/>
+          </a:p>
+        </p:txBody>
+      </p:sp>
+      <p:sp>
+        <p:nvSpPr>
+          <p:cNvPr id="14" name="TextBox 13"/>
           <p:cNvSpPr txBox="1"/>
           <p:nvPr/>
         </p:nvSpPr>
         <p:spPr>
           <a:xfrm>
-            <a:off x="640080" y="2404872"/>
-            <a:ext cx="411480" cy="228600"/>
+            <a:off x="1051560" y="3688080"/>
+            <a:ext cx="3520440" cy="256032"/>
           </a:xfrm>
           <a:prstGeom prst="rect">
             <a:avLst/>
@@ -8150,27 +8052,27 @@
           <a:p>
             <a:pPr algn="l"/>
             <a:r>
-              <a:rPr sz="1000" b="1">
-                <a:solidFill>
-                  <a:srgbClr val="0F766E"/>
+              <a:rPr sz="1100" b="1">
+                <a:solidFill>
+                  <a:srgbClr val="1A202C"/>
                 </a:solidFill>
                 <a:latin typeface="Calibri"/>
               </a:rPr>
-              <a:t>D7</a:t>
-            </a:r>
-          </a:p>
-        </p:txBody>
-      </p:sp>
-      <p:sp>
-        <p:nvSpPr>
-          <p:cNvPr id="13" name="TextBox 12"/>
+              <a:t>First analysis pass</a:t>
+            </a:r>
+          </a:p>
+        </p:txBody>
+      </p:sp>
+      <p:sp>
+        <p:nvSpPr>
+          <p:cNvPr id="15" name="TextBox 14"/>
           <p:cNvSpPr txBox="1"/>
           <p:nvPr/>
         </p:nvSpPr>
         <p:spPr>
           <a:xfrm>
-            <a:off x="1097280" y="2404872"/>
-            <a:ext cx="3337560" cy="274320"/>
+            <a:off x="1051560" y="3944112"/>
+            <a:ext cx="3520440" cy="682752"/>
           </a:xfrm>
           <a:prstGeom prst="rect">
             <a:avLst/>
@@ -8191,441 +8093,64 @@
                 </a:solidFill>
                 <a:latin typeface="Calibri"/>
               </a:rPr>
-              <a:t>Phased rollout: FR → 6-country matrix → all 36 EU countries.</a:t>
-            </a:r>
-          </a:p>
-        </p:txBody>
-      </p:sp>
-      <p:sp>
-        <p:nvSpPr>
-          <p:cNvPr id="14" name="TextBox 13"/>
-          <p:cNvSpPr txBox="1"/>
-          <p:nvPr/>
-        </p:nvSpPr>
-        <p:spPr>
-          <a:xfrm>
-            <a:off x="640080" y="2715768"/>
-            <a:ext cx="411480" cy="228600"/>
-          </a:xfrm>
-          <a:prstGeom prst="rect">
-            <a:avLst/>
-          </a:prstGeom>
-          <a:noFill/>
-        </p:spPr>
-        <p:txBody>
-          <a:bodyPr wrap="square" lIns="0" rIns="0" tIns="0" bIns="0">
-            <a:spAutoFit/>
-          </a:bodyPr>
-          <a:lstStyle/>
-          <a:p>
-            <a:pPr algn="l"/>
-            <a:r>
-              <a:rPr sz="1000" b="1">
-                <a:solidFill>
-                  <a:srgbClr val="0F766E"/>
-                </a:solidFill>
-                <a:latin typeface="Calibri"/>
-              </a:rPr>
-              <a:t>D8</a:t>
-            </a:r>
-          </a:p>
-        </p:txBody>
-      </p:sp>
-      <p:sp>
-        <p:nvSpPr>
-          <p:cNvPr id="15" name="TextBox 14"/>
-          <p:cNvSpPr txBox="1"/>
-          <p:nvPr/>
-        </p:nvSpPr>
-        <p:spPr>
-          <a:xfrm>
-            <a:off x="1097280" y="2715768"/>
-            <a:ext cx="3337560" cy="274320"/>
-          </a:xfrm>
-          <a:prstGeom prst="rect">
-            <a:avLst/>
-          </a:prstGeom>
-          <a:noFill/>
-        </p:spPr>
-        <p:txBody>
-          <a:bodyPr wrap="square" lIns="0" rIns="0" tIns="0" bIns="0">
-            <a:spAutoFit/>
-          </a:bodyPr>
-          <a:lstStyle/>
-          <a:p>
-            <a:pPr algn="l"/>
-            <a:r>
-              <a:rPr sz="1000" b="0">
-                <a:solidFill>
-                  <a:srgbClr val="2D3748"/>
-                </a:solidFill>
-                <a:latin typeface="Calibri"/>
-              </a:rPr>
-              <a:t>Rubric is analytical, not a runtime classifier.</a:t>
-            </a:r>
-          </a:p>
-        </p:txBody>
-      </p:sp>
-      <p:sp>
-        <p:nvSpPr>
-          <p:cNvPr id="16" name="TextBox 15"/>
-          <p:cNvSpPr txBox="1"/>
-          <p:nvPr/>
-        </p:nvSpPr>
-        <p:spPr>
-          <a:xfrm>
-            <a:off x="640080" y="3026664"/>
-            <a:ext cx="411480" cy="228600"/>
-          </a:xfrm>
-          <a:prstGeom prst="rect">
-            <a:avLst/>
-          </a:prstGeom>
-          <a:noFill/>
-        </p:spPr>
-        <p:txBody>
-          <a:bodyPr wrap="square" lIns="0" rIns="0" tIns="0" bIns="0">
-            <a:spAutoFit/>
-          </a:bodyPr>
-          <a:lstStyle/>
-          <a:p>
-            <a:pPr algn="l"/>
-            <a:r>
-              <a:rPr sz="1000" b="1">
-                <a:solidFill>
-                  <a:srgbClr val="0F766E"/>
-                </a:solidFill>
-                <a:latin typeface="Calibri"/>
-              </a:rPr>
-              <a:t>D9</a:t>
-            </a:r>
-          </a:p>
-        </p:txBody>
-      </p:sp>
-      <p:sp>
-        <p:nvSpPr>
-          <p:cNvPr id="17" name="TextBox 16"/>
-          <p:cNvSpPr txBox="1"/>
-          <p:nvPr/>
-        </p:nvSpPr>
-        <p:spPr>
-          <a:xfrm>
-            <a:off x="1097280" y="3026664"/>
-            <a:ext cx="3337560" cy="274320"/>
-          </a:xfrm>
-          <a:prstGeom prst="rect">
-            <a:avLst/>
-          </a:prstGeom>
-          <a:noFill/>
-        </p:spPr>
-        <p:txBody>
-          <a:bodyPr wrap="square" lIns="0" rIns="0" tIns="0" bIns="0">
-            <a:spAutoFit/>
-          </a:bodyPr>
-          <a:lstStyle/>
-          <a:p>
-            <a:pPr algn="l"/>
-            <a:r>
-              <a:rPr sz="1000" b="0">
-                <a:solidFill>
-                  <a:srgbClr val="2D3748"/>
-                </a:solidFill>
-                <a:latin typeface="Calibri"/>
-              </a:rPr>
-              <a:t>Hand-marks are locked by git commit before any swarm run.</a:t>
-            </a:r>
-          </a:p>
-        </p:txBody>
-      </p:sp>
-      <p:sp>
-        <p:nvSpPr>
-          <p:cNvPr id="18" name="TextBox 17"/>
-          <p:cNvSpPr txBox="1"/>
-          <p:nvPr/>
-        </p:nvSpPr>
-        <p:spPr>
-          <a:xfrm>
-            <a:off x="640080" y="3337560"/>
-            <a:ext cx="411480" cy="228600"/>
-          </a:xfrm>
-          <a:prstGeom prst="rect">
-            <a:avLst/>
-          </a:prstGeom>
-          <a:noFill/>
-        </p:spPr>
-        <p:txBody>
-          <a:bodyPr wrap="square" lIns="0" rIns="0" tIns="0" bIns="0">
-            <a:spAutoFit/>
-          </a:bodyPr>
-          <a:lstStyle/>
-          <a:p>
-            <a:pPr algn="l"/>
-            <a:r>
-              <a:rPr sz="1000" b="1">
-                <a:solidFill>
-                  <a:srgbClr val="0F766E"/>
-                </a:solidFill>
-                <a:latin typeface="Calibri"/>
-              </a:rPr>
-              <a:t>D12</a:t>
-            </a:r>
-          </a:p>
-        </p:txBody>
-      </p:sp>
-      <p:sp>
-        <p:nvSpPr>
-          <p:cNvPr id="19" name="TextBox 18"/>
-          <p:cNvSpPr txBox="1"/>
-          <p:nvPr/>
-        </p:nvSpPr>
-        <p:spPr>
-          <a:xfrm>
-            <a:off x="1097280" y="3337560"/>
-            <a:ext cx="3337560" cy="274320"/>
-          </a:xfrm>
-          <a:prstGeom prst="rect">
-            <a:avLst/>
-          </a:prstGeom>
-          <a:noFill/>
-        </p:spPr>
-        <p:txBody>
-          <a:bodyPr wrap="square" lIns="0" rIns="0" tIns="0" bIns="0">
-            <a:spAutoFit/>
-          </a:bodyPr>
-          <a:lstStyle/>
-          <a:p>
-            <a:pPr algn="l"/>
-            <a:r>
-              <a:rPr sz="1000" b="0">
-                <a:solidFill>
-                  <a:srgbClr val="2D3748"/>
-                </a:solidFill>
-                <a:latin typeface="Calibri"/>
-              </a:rPr>
-              <a:t>Tokens, latency, cost are first-class research dimensions.</a:t>
-            </a:r>
-          </a:p>
-        </p:txBody>
-      </p:sp>
-      <p:sp>
-        <p:nvSpPr>
-          <p:cNvPr id="20" name="TextBox 19"/>
-          <p:cNvSpPr txBox="1"/>
-          <p:nvPr/>
-        </p:nvSpPr>
-        <p:spPr>
-          <a:xfrm>
-            <a:off x="640080" y="3648456"/>
-            <a:ext cx="411480" cy="228600"/>
-          </a:xfrm>
-          <a:prstGeom prst="rect">
-            <a:avLst/>
-          </a:prstGeom>
-          <a:noFill/>
-        </p:spPr>
-        <p:txBody>
-          <a:bodyPr wrap="square" lIns="0" rIns="0" tIns="0" bIns="0">
-            <a:spAutoFit/>
-          </a:bodyPr>
-          <a:lstStyle/>
-          <a:p>
-            <a:pPr algn="l"/>
-            <a:r>
-              <a:rPr sz="1000" b="1">
-                <a:solidFill>
-                  <a:srgbClr val="0F766E"/>
-                </a:solidFill>
-                <a:latin typeface="Calibri"/>
-              </a:rPr>
-              <a:t>D15</a:t>
-            </a:r>
-          </a:p>
-        </p:txBody>
-      </p:sp>
-      <p:sp>
-        <p:nvSpPr>
-          <p:cNvPr id="21" name="TextBox 20"/>
-          <p:cNvSpPr txBox="1"/>
-          <p:nvPr/>
-        </p:nvSpPr>
-        <p:spPr>
-          <a:xfrm>
-            <a:off x="1097280" y="3648456"/>
-            <a:ext cx="3337560" cy="274320"/>
-          </a:xfrm>
-          <a:prstGeom prst="rect">
-            <a:avLst/>
-          </a:prstGeom>
-          <a:noFill/>
-        </p:spPr>
-        <p:txBody>
-          <a:bodyPr wrap="square" lIns="0" rIns="0" tIns="0" bIns="0">
-            <a:spAutoFit/>
-          </a:bodyPr>
-          <a:lstStyle/>
-          <a:p>
-            <a:pPr algn="l"/>
-            <a:r>
-              <a:rPr sz="1000" b="0">
-                <a:solidFill>
-                  <a:srgbClr val="2D3748"/>
-                </a:solidFill>
-                <a:latin typeface="Calibri"/>
-              </a:rPr>
-              <a:t>Verifier prompt strategies as an experimental variable.</a:t>
-            </a:r>
-          </a:p>
-        </p:txBody>
-      </p:sp>
-      <p:sp>
-        <p:nvSpPr>
-          <p:cNvPr id="22" name="TextBox 21"/>
-          <p:cNvSpPr txBox="1"/>
-          <p:nvPr/>
-        </p:nvSpPr>
-        <p:spPr>
-          <a:xfrm>
-            <a:off x="640080" y="3959352"/>
-            <a:ext cx="411480" cy="228600"/>
-          </a:xfrm>
-          <a:prstGeom prst="rect">
-            <a:avLst/>
-          </a:prstGeom>
-          <a:noFill/>
-        </p:spPr>
-        <p:txBody>
-          <a:bodyPr wrap="square" lIns="0" rIns="0" tIns="0" bIns="0">
-            <a:spAutoFit/>
-          </a:bodyPr>
-          <a:lstStyle/>
-          <a:p>
-            <a:pPr algn="l"/>
-            <a:r>
-              <a:rPr sz="1000" b="1">
-                <a:solidFill>
-                  <a:srgbClr val="0F766E"/>
-                </a:solidFill>
-                <a:latin typeface="Calibri"/>
-              </a:rPr>
-              <a:t>D16</a:t>
-            </a:r>
-          </a:p>
-        </p:txBody>
-      </p:sp>
-      <p:sp>
-        <p:nvSpPr>
-          <p:cNvPr id="23" name="TextBox 22"/>
-          <p:cNvSpPr txBox="1"/>
-          <p:nvPr/>
-        </p:nvSpPr>
-        <p:spPr>
-          <a:xfrm>
-            <a:off x="1097280" y="3959352"/>
-            <a:ext cx="3337560" cy="274320"/>
-          </a:xfrm>
-          <a:prstGeom prst="rect">
-            <a:avLst/>
-          </a:prstGeom>
-          <a:noFill/>
-        </p:spPr>
-        <p:txBody>
-          <a:bodyPr wrap="square" lIns="0" rIns="0" tIns="0" bIns="0">
-            <a:spAutoFit/>
-          </a:bodyPr>
-          <a:lstStyle/>
-          <a:p>
-            <a:pPr algn="l"/>
-            <a:r>
-              <a:rPr sz="1000" b="0">
-                <a:solidFill>
-                  <a:srgbClr val="2D3748"/>
-                </a:solidFill>
-                <a:latin typeface="Calibri"/>
-              </a:rPr>
-              <a:t>Adjudicator fires at retry exhaustion; threshold 0.6.</a:t>
-            </a:r>
-          </a:p>
-        </p:txBody>
-      </p:sp>
-      <p:sp>
-        <p:nvSpPr>
-          <p:cNvPr id="24" name="TextBox 23"/>
-          <p:cNvSpPr txBox="1"/>
-          <p:nvPr/>
-        </p:nvSpPr>
-        <p:spPr>
-          <a:xfrm>
-            <a:off x="640080" y="4270248"/>
-            <a:ext cx="411480" cy="228600"/>
-          </a:xfrm>
-          <a:prstGeom prst="rect">
-            <a:avLst/>
-          </a:prstGeom>
-          <a:noFill/>
-        </p:spPr>
-        <p:txBody>
-          <a:bodyPr wrap="square" lIns="0" rIns="0" tIns="0" bIns="0">
-            <a:spAutoFit/>
-          </a:bodyPr>
-          <a:lstStyle/>
-          <a:p>
-            <a:pPr algn="l"/>
-            <a:r>
-              <a:rPr sz="1000" b="1">
-                <a:solidFill>
-                  <a:srgbClr val="0F766E"/>
-                </a:solidFill>
-                <a:latin typeface="Calibri"/>
-              </a:rPr>
-              <a:t>D18</a:t>
-            </a:r>
-          </a:p>
-        </p:txBody>
-      </p:sp>
-      <p:sp>
-        <p:nvSpPr>
-          <p:cNvPr id="25" name="TextBox 24"/>
-          <p:cNvSpPr txBox="1"/>
-          <p:nvPr/>
-        </p:nvSpPr>
-        <p:spPr>
-          <a:xfrm>
-            <a:off x="1097280" y="4270248"/>
-            <a:ext cx="3337560" cy="274320"/>
-          </a:xfrm>
-          <a:prstGeom prst="rect">
-            <a:avLst/>
-          </a:prstGeom>
-          <a:noFill/>
-        </p:spPr>
-        <p:txBody>
-          <a:bodyPr wrap="square" lIns="0" rIns="0" tIns="0" bIns="0">
-            <a:spAutoFit/>
-          </a:bodyPr>
-          <a:lstStyle/>
-          <a:p>
-            <a:pPr algn="l"/>
-            <a:r>
-              <a:rPr sz="1000" b="0">
-                <a:solidFill>
-                  <a:srgbClr val="2D3748"/>
-                </a:solidFill>
-                <a:latin typeface="Calibri"/>
-              </a:rPr>
-              <a:t>Haiku / Sonnet / Opus / tiered as a third family of experiments.</a:t>
-            </a:r>
-          </a:p>
-        </p:txBody>
-      </p:sp>
-      <p:sp>
-        <p:nvSpPr>
-          <p:cNvPr id="26" name="Rectangle 25"/>
+              <a:t>Accuracy and cost stratified by rubric tier × ODMI dimension. Draft methodology + early-results in the dissertation.</a:t>
+            </a:r>
+          </a:p>
+        </p:txBody>
+      </p:sp>
+      <p:sp>
+        <p:nvSpPr>
+          <p:cNvPr id="16" name="Rectangle 15"/>
           <p:cNvSpPr/>
           <p:nvPr/>
         </p:nvSpPr>
         <p:spPr>
           <a:xfrm>
-            <a:off x="4800600" y="1280160"/>
-            <a:ext cx="4160520" cy="3383280"/>
+            <a:off x="640080" y="3761232"/>
+            <a:ext cx="164592" cy="164592"/>
+          </a:xfrm>
+          <a:prstGeom prst="rect">
+            <a:avLst/>
+          </a:prstGeom>
+          <a:solidFill>
+            <a:srgbClr val="0D9488"/>
+          </a:solidFill>
+          <a:ln>
+            <a:noFill/>
+          </a:ln>
+        </p:spPr>
+        <p:style>
+          <a:lnRef idx="1">
+            <a:schemeClr val="accent1"/>
+          </a:lnRef>
+          <a:fillRef idx="3">
+            <a:schemeClr val="accent1"/>
+          </a:fillRef>
+          <a:effectRef idx="2">
+            <a:schemeClr val="accent1"/>
+          </a:effectRef>
+          <a:fontRef idx="minor">
+            <a:schemeClr val="lt1"/>
+          </a:fontRef>
+        </p:style>
+        <p:txBody>
+          <a:bodyPr rtlCol="0" anchor="ctr"/>
+          <a:lstStyle/>
+          <a:p>
+            <a:pPr algn="ctr"/>
+          </a:p>
+        </p:txBody>
+      </p:sp>
+      <p:sp>
+        <p:nvSpPr>
+          <p:cNvPr id="17" name="Rectangle 16"/>
+          <p:cNvSpPr/>
+          <p:nvPr/>
+        </p:nvSpPr>
+        <p:spPr>
+          <a:xfrm>
+            <a:off x="4800600" y="1234440"/>
+            <a:ext cx="4160520" cy="3520440"/>
           </a:xfrm>
           <a:prstGeom prst="rect">
             <a:avLst/>
@@ -8663,13 +8188,13 @@
       </p:sp>
       <p:sp>
         <p:nvSpPr>
-          <p:cNvPr id="27" name="Rectangle 26"/>
+          <p:cNvPr id="18" name="Rectangle 17"/>
           <p:cNvSpPr/>
           <p:nvPr/>
         </p:nvSpPr>
         <p:spPr>
           <a:xfrm>
-            <a:off x="4800600" y="1280160"/>
+            <a:off x="4800600" y="1234440"/>
             <a:ext cx="4160520" cy="411480"/>
           </a:xfrm>
           <a:prstGeom prst="rect">
@@ -8706,14 +8231,14 @@
       </p:sp>
       <p:sp>
         <p:nvSpPr>
-          <p:cNvPr id="28" name="TextBox 27"/>
+          <p:cNvPr id="19" name="TextBox 18"/>
           <p:cNvSpPr txBox="1"/>
           <p:nvPr/>
         </p:nvSpPr>
         <p:spPr>
           <a:xfrm>
-            <a:off x="4983480" y="1371600"/>
-            <a:ext cx="3794760" cy="274320"/>
+            <a:off x="5029200" y="1325880"/>
+            <a:ext cx="3703320" cy="274320"/>
           </a:xfrm>
           <a:prstGeom prst="rect">
             <a:avLst/>
@@ -8734,21 +8259,21 @@
                 </a:solidFill>
                 <a:latin typeface="Calibri"/>
               </a:rPr>
-              <a:t>OPEN QUESTIONS</a:t>
-            </a:r>
-          </a:p>
-        </p:txBody>
-      </p:sp>
-      <p:sp>
-        <p:nvSpPr>
-          <p:cNvPr id="29" name="TextBox 28"/>
+              <a:t>TOWARDS 2 AUGUST 2026</a:t>
+            </a:r>
+          </a:p>
+        </p:txBody>
+      </p:sp>
+      <p:sp>
+        <p:nvSpPr>
+          <p:cNvPr id="20" name="TextBox 19"/>
           <p:cNvSpPr txBox="1"/>
           <p:nvPr/>
         </p:nvSpPr>
         <p:spPr>
           <a:xfrm>
-            <a:off x="4983480" y="1783080"/>
-            <a:ext cx="411480" cy="228600"/>
+            <a:off x="5394960" y="1737360"/>
+            <a:ext cx="3520440" cy="256032"/>
           </a:xfrm>
           <a:prstGeom prst="rect">
             <a:avLst/>
@@ -8763,27 +8288,27 @@
           <a:p>
             <a:pPr algn="l"/>
             <a:r>
-              <a:rPr sz="1000" b="1">
-                <a:solidFill>
-                  <a:srgbClr val="1E3A5F"/>
+              <a:rPr sz="1100" b="1">
+                <a:solidFill>
+                  <a:srgbClr val="1A202C"/>
                 </a:solidFill>
                 <a:latin typeface="Calibri"/>
               </a:rPr>
-              <a:t>Q1</a:t>
-            </a:r>
-          </a:p>
-        </p:txBody>
-      </p:sp>
-      <p:sp>
-        <p:nvSpPr>
-          <p:cNvPr id="30" name="TextBox 29"/>
+              <a:t>Phase B — six-country matrix</a:t>
+            </a:r>
+          </a:p>
+        </p:txBody>
+      </p:sp>
+      <p:sp>
+        <p:nvSpPr>
+          <p:cNvPr id="21" name="TextBox 20"/>
           <p:cNvSpPr txBox="1"/>
           <p:nvPr/>
         </p:nvSpPr>
         <p:spPr>
           <a:xfrm>
-            <a:off x="5440680" y="1783080"/>
-            <a:ext cx="3337560" cy="320040"/>
+            <a:off x="5394960" y="1993392"/>
+            <a:ext cx="3520440" cy="682752"/>
           </a:xfrm>
           <a:prstGeom prst="rect">
             <a:avLst/>
@@ -8804,3004 +8329,21 @@
                 </a:solidFill>
                 <a:latin typeface="Calibri"/>
               </a:rPr>
-              <a:t>Final per-tier hand-mark sample size.</a:t>
-            </a:r>
-          </a:p>
-        </p:txBody>
-      </p:sp>
-      <p:sp>
-        <p:nvSpPr>
-          <p:cNvPr id="31" name="TextBox 30"/>
-          <p:cNvSpPr txBox="1"/>
-          <p:nvPr/>
-        </p:nvSpPr>
-        <p:spPr>
-          <a:xfrm>
-            <a:off x="4983480" y="2148840"/>
-            <a:ext cx="411480" cy="228600"/>
-          </a:xfrm>
-          <a:prstGeom prst="rect">
-            <a:avLst/>
-          </a:prstGeom>
-          <a:noFill/>
-        </p:spPr>
-        <p:txBody>
-          <a:bodyPr wrap="square" lIns="0" rIns="0" tIns="0" bIns="0">
-            <a:spAutoFit/>
-          </a:bodyPr>
-          <a:lstStyle/>
-          <a:p>
-            <a:pPr algn="l"/>
-            <a:r>
-              <a:rPr sz="1000" b="1">
-                <a:solidFill>
-                  <a:srgbClr val="1E3A5F"/>
-                </a:solidFill>
-                <a:latin typeface="Calibri"/>
-              </a:rPr>
-              <a:t>Q4</a:t>
-            </a:r>
-          </a:p>
-        </p:txBody>
-      </p:sp>
-      <p:sp>
-        <p:nvSpPr>
-          <p:cNvPr id="32" name="TextBox 31"/>
-          <p:cNvSpPr txBox="1"/>
-          <p:nvPr/>
-        </p:nvSpPr>
-        <p:spPr>
-          <a:xfrm>
-            <a:off x="5440680" y="2148840"/>
-            <a:ext cx="3337560" cy="320040"/>
-          </a:xfrm>
-          <a:prstGeom prst="rect">
-            <a:avLst/>
-          </a:prstGeom>
-          <a:noFill/>
-        </p:spPr>
-        <p:txBody>
-          <a:bodyPr wrap="square" lIns="0" rIns="0" tIns="0" bIns="0">
-            <a:spAutoFit/>
-          </a:bodyPr>
-          <a:lstStyle/>
-          <a:p>
-            <a:pPr algn="l"/>
-            <a:r>
-              <a:rPr sz="1000" b="0">
-                <a:solidFill>
-                  <a:srgbClr val="2D3748"/>
-                </a:solidFill>
-                <a:latin typeface="Calibri"/>
-              </a:rPr>
-              <a:t>Language-confidence table for Phase B's six countries.</a:t>
-            </a:r>
-          </a:p>
-        </p:txBody>
-      </p:sp>
-      <p:sp>
-        <p:nvSpPr>
-          <p:cNvPr id="33" name="TextBox 32"/>
-          <p:cNvSpPr txBox="1"/>
-          <p:nvPr/>
-        </p:nvSpPr>
-        <p:spPr>
-          <a:xfrm>
-            <a:off x="4983480" y="2514600"/>
-            <a:ext cx="411480" cy="228600"/>
-          </a:xfrm>
-          <a:prstGeom prst="rect">
-            <a:avLst/>
-          </a:prstGeom>
-          <a:noFill/>
-        </p:spPr>
-        <p:txBody>
-          <a:bodyPr wrap="square" lIns="0" rIns="0" tIns="0" bIns="0">
-            <a:spAutoFit/>
-          </a:bodyPr>
-          <a:lstStyle/>
-          <a:p>
-            <a:pPr algn="l"/>
-            <a:r>
-              <a:rPr sz="1000" b="1">
-                <a:solidFill>
-                  <a:srgbClr val="1E3A5F"/>
-                </a:solidFill>
-                <a:latin typeface="Calibri"/>
-              </a:rPr>
-              <a:t>Q10</a:t>
-            </a:r>
-          </a:p>
-        </p:txBody>
-      </p:sp>
-      <p:sp>
-        <p:nvSpPr>
-          <p:cNvPr id="34" name="TextBox 33"/>
-          <p:cNvSpPr txBox="1"/>
-          <p:nvPr/>
-        </p:nvSpPr>
-        <p:spPr>
-          <a:xfrm>
-            <a:off x="5440680" y="2514600"/>
-            <a:ext cx="3337560" cy="320040"/>
-          </a:xfrm>
-          <a:prstGeom prst="rect">
-            <a:avLst/>
-          </a:prstGeom>
-          <a:noFill/>
-        </p:spPr>
-        <p:txBody>
-          <a:bodyPr wrap="square" lIns="0" rIns="0" tIns="0" bIns="0">
-            <a:spAutoFit/>
-          </a:bodyPr>
-          <a:lstStyle/>
-          <a:p>
-            <a:pPr algn="l"/>
-            <a:r>
-              <a:rPr sz="1000" b="0">
-                <a:solidFill>
-                  <a:srgbClr val="2D3748"/>
-                </a:solidFill>
-                <a:latin typeface="Calibri"/>
-              </a:rPr>
-              <a:t>Trusted-domain JSON list per country.</a:t>
-            </a:r>
-          </a:p>
-        </p:txBody>
-      </p:sp>
-      <p:sp>
-        <p:nvSpPr>
-          <p:cNvPr id="35" name="TextBox 34"/>
-          <p:cNvSpPr txBox="1"/>
-          <p:nvPr/>
-        </p:nvSpPr>
-        <p:spPr>
-          <a:xfrm>
-            <a:off x="4983480" y="2880360"/>
-            <a:ext cx="411480" cy="228600"/>
-          </a:xfrm>
-          <a:prstGeom prst="rect">
-            <a:avLst/>
-          </a:prstGeom>
-          <a:noFill/>
-        </p:spPr>
-        <p:txBody>
-          <a:bodyPr wrap="square" lIns="0" rIns="0" tIns="0" bIns="0">
-            <a:spAutoFit/>
-          </a:bodyPr>
-          <a:lstStyle/>
-          <a:p>
-            <a:pPr algn="l"/>
-            <a:r>
-              <a:rPr sz="1000" b="1">
-                <a:solidFill>
-                  <a:srgbClr val="1E3A5F"/>
-                </a:solidFill>
-                <a:latin typeface="Calibri"/>
-              </a:rPr>
-              <a:t>Q12</a:t>
-            </a:r>
-          </a:p>
-        </p:txBody>
-      </p:sp>
-      <p:sp>
-        <p:nvSpPr>
-          <p:cNvPr id="36" name="TextBox 35"/>
-          <p:cNvSpPr txBox="1"/>
-          <p:nvPr/>
-        </p:nvSpPr>
-        <p:spPr>
-          <a:xfrm>
-            <a:off x="5440680" y="2880360"/>
-            <a:ext cx="3337560" cy="320040"/>
-          </a:xfrm>
-          <a:prstGeom prst="rect">
-            <a:avLst/>
-          </a:prstGeom>
-          <a:noFill/>
-        </p:spPr>
-        <p:txBody>
-          <a:bodyPr wrap="square" lIns="0" rIns="0" tIns="0" bIns="0">
-            <a:spAutoFit/>
-          </a:bodyPr>
-          <a:lstStyle/>
-          <a:p>
-            <a:pPr algn="l"/>
-            <a:r>
-              <a:rPr sz="1000" b="0">
-                <a:solidFill>
-                  <a:srgbClr val="2D3748"/>
-                </a:solidFill>
-                <a:latin typeface="Calibri"/>
-              </a:rPr>
-              <a:t>Default Verifier strategy after comparison.</a:t>
-            </a:r>
-          </a:p>
-        </p:txBody>
-      </p:sp>
-      <p:sp>
-        <p:nvSpPr>
-          <p:cNvPr id="37" name="TextBox 36"/>
-          <p:cNvSpPr txBox="1"/>
-          <p:nvPr/>
-        </p:nvSpPr>
-        <p:spPr>
-          <a:xfrm>
-            <a:off x="4983480" y="3246120"/>
-            <a:ext cx="411480" cy="228600"/>
-          </a:xfrm>
-          <a:prstGeom prst="rect">
-            <a:avLst/>
-          </a:prstGeom>
-          <a:noFill/>
-        </p:spPr>
-        <p:txBody>
-          <a:bodyPr wrap="square" lIns="0" rIns="0" tIns="0" bIns="0">
-            <a:spAutoFit/>
-          </a:bodyPr>
-          <a:lstStyle/>
-          <a:p>
-            <a:pPr algn="l"/>
-            <a:r>
-              <a:rPr sz="1000" b="1">
-                <a:solidFill>
-                  <a:srgbClr val="1E3A5F"/>
-                </a:solidFill>
-                <a:latin typeface="Calibri"/>
-              </a:rPr>
-              <a:t>Q13</a:t>
-            </a:r>
-          </a:p>
-        </p:txBody>
-      </p:sp>
-      <p:sp>
-        <p:nvSpPr>
-          <p:cNvPr id="38" name="TextBox 37"/>
-          <p:cNvSpPr txBox="1"/>
-          <p:nvPr/>
-        </p:nvSpPr>
-        <p:spPr>
-          <a:xfrm>
-            <a:off x="5440680" y="3246120"/>
-            <a:ext cx="3337560" cy="320040"/>
-          </a:xfrm>
-          <a:prstGeom prst="rect">
-            <a:avLst/>
-          </a:prstGeom>
-          <a:noFill/>
-        </p:spPr>
-        <p:txBody>
-          <a:bodyPr wrap="square" lIns="0" rIns="0" tIns="0" bIns="0">
-            <a:spAutoFit/>
-          </a:bodyPr>
-          <a:lstStyle/>
-          <a:p>
-            <a:pPr algn="l"/>
-            <a:r>
-              <a:rPr sz="1000" b="0">
-                <a:solidFill>
-                  <a:srgbClr val="2D3748"/>
-                </a:solidFill>
-                <a:latin typeface="Calibri"/>
-              </a:rPr>
-              <a:t>Recalibration of the Adjudicator's 0.6 threshold.</a:t>
-            </a:r>
-          </a:p>
-        </p:txBody>
-      </p:sp>
-      <p:sp>
-        <p:nvSpPr>
-          <p:cNvPr id="39" name="TextBox 38"/>
-          <p:cNvSpPr txBox="1"/>
-          <p:nvPr/>
-        </p:nvSpPr>
-        <p:spPr>
-          <a:xfrm>
-            <a:off x="4983480" y="3611880"/>
-            <a:ext cx="411480" cy="228600"/>
-          </a:xfrm>
-          <a:prstGeom prst="rect">
-            <a:avLst/>
-          </a:prstGeom>
-          <a:noFill/>
-        </p:spPr>
-        <p:txBody>
-          <a:bodyPr wrap="square" lIns="0" rIns="0" tIns="0" bIns="0">
-            <a:spAutoFit/>
-          </a:bodyPr>
-          <a:lstStyle/>
-          <a:p>
-            <a:pPr algn="l"/>
-            <a:r>
-              <a:rPr sz="1000" b="1">
-                <a:solidFill>
-                  <a:srgbClr val="1E3A5F"/>
-                </a:solidFill>
-                <a:latin typeface="Calibri"/>
-              </a:rPr>
-              <a:t>Q14</a:t>
-            </a:r>
-          </a:p>
-        </p:txBody>
-      </p:sp>
-      <p:sp>
-        <p:nvSpPr>
-          <p:cNvPr id="40" name="TextBox 39"/>
-          <p:cNvSpPr txBox="1"/>
-          <p:nvPr/>
-        </p:nvSpPr>
-        <p:spPr>
-          <a:xfrm>
-            <a:off x="5440680" y="3611880"/>
-            <a:ext cx="3337560" cy="320040"/>
-          </a:xfrm>
-          <a:prstGeom prst="rect">
-            <a:avLst/>
-          </a:prstGeom>
-          <a:noFill/>
-        </p:spPr>
-        <p:txBody>
-          <a:bodyPr wrap="square" lIns="0" rIns="0" tIns="0" bIns="0">
-            <a:spAutoFit/>
-          </a:bodyPr>
-          <a:lstStyle/>
-          <a:p>
-            <a:pPr algn="l"/>
-            <a:r>
-              <a:rPr sz="1000" b="0">
-                <a:solidFill>
-                  <a:srgbClr val="2D3748"/>
-                </a:solidFill>
-                <a:latin typeface="Calibri"/>
-              </a:rPr>
-              <a:t>Injected-hallucination arm for strategy comparison.</a:t>
-            </a:r>
-          </a:p>
-        </p:txBody>
-      </p:sp>
-      <p:sp>
-        <p:nvSpPr>
-          <p:cNvPr id="41" name="TextBox 40"/>
-          <p:cNvSpPr txBox="1"/>
-          <p:nvPr/>
-        </p:nvSpPr>
-        <p:spPr>
-          <a:xfrm>
-            <a:off x="4983480" y="3977640"/>
-            <a:ext cx="411480" cy="228600"/>
-          </a:xfrm>
-          <a:prstGeom prst="rect">
-            <a:avLst/>
-          </a:prstGeom>
-          <a:noFill/>
-        </p:spPr>
-        <p:txBody>
-          <a:bodyPr wrap="square" lIns="0" rIns="0" tIns="0" bIns="0">
-            <a:spAutoFit/>
-          </a:bodyPr>
-          <a:lstStyle/>
-          <a:p>
-            <a:pPr algn="l"/>
-            <a:r>
-              <a:rPr sz="1000" b="1">
-                <a:solidFill>
-                  <a:srgbClr val="1E3A5F"/>
-                </a:solidFill>
-                <a:latin typeface="Calibri"/>
-              </a:rPr>
-              <a:t>Q15</a:t>
-            </a:r>
-          </a:p>
-        </p:txBody>
-      </p:sp>
-      <p:sp>
-        <p:nvSpPr>
-          <p:cNvPr id="42" name="TextBox 41"/>
-          <p:cNvSpPr txBox="1"/>
-          <p:nvPr/>
-        </p:nvSpPr>
-        <p:spPr>
-          <a:xfrm>
-            <a:off x="5440680" y="3977640"/>
-            <a:ext cx="3337560" cy="320040"/>
-          </a:xfrm>
-          <a:prstGeom prst="rect">
-            <a:avLst/>
-          </a:prstGeom>
-          <a:noFill/>
-        </p:spPr>
-        <p:txBody>
-          <a:bodyPr wrap="square" lIns="0" rIns="0" tIns="0" bIns="0">
-            <a:spAutoFit/>
-          </a:bodyPr>
-          <a:lstStyle/>
-          <a:p>
-            <a:pPr algn="l"/>
-            <a:r>
-              <a:rPr sz="1000" b="0">
-                <a:solidFill>
-                  <a:srgbClr val="2D3748"/>
-                </a:solidFill>
-                <a:latin typeface="Calibri"/>
-              </a:rPr>
-              <a:t>Model mix for the tiered condition (Researcher / Verifier / Adjudicator).</a:t>
-            </a:r>
-          </a:p>
-        </p:txBody>
-      </p:sp>
-      <p:sp>
-        <p:nvSpPr>
-          <p:cNvPr id="43" name="TextBox 42"/>
-          <p:cNvSpPr txBox="1"/>
-          <p:nvPr/>
-        </p:nvSpPr>
-        <p:spPr>
-          <a:xfrm>
-            <a:off x="457200" y="4850892"/>
-            <a:ext cx="8229600" cy="182880"/>
-          </a:xfrm>
-          <a:prstGeom prst="rect">
-            <a:avLst/>
-          </a:prstGeom>
-          <a:noFill/>
-        </p:spPr>
-        <p:txBody>
-          <a:bodyPr wrap="square" lIns="0" rIns="0" tIns="0" bIns="0">
-            <a:spAutoFit/>
-          </a:bodyPr>
-          <a:lstStyle/>
-          <a:p>
-            <a:pPr algn="l"/>
-            <a:r>
-              <a:rPr sz="800" b="0">
-                <a:solidFill>
-                  <a:srgbClr val="718096"/>
-                </a:solidFill>
-                <a:latin typeface="Calibri"/>
-              </a:rPr>
-              <a:t>ODMI Agent Swarm  ·  Benjy Bream  ·  King's College London  ·  6 / 9</a:t>
-            </a:r>
-          </a:p>
-        </p:txBody>
-      </p:sp>
-    </p:spTree>
-  </p:cSld>
-  <p:clrMapOvr>
-    <a:masterClrMapping/>
-  </p:clrMapOvr>
-</p:sld>
-</file>
-
-<file path=ppt/slides/slide7.xml><?xml version="1.0" encoding="utf-8"?>
-<p:sld xmlns:a="http://schemas.openxmlformats.org/drawingml/2006/main" xmlns:p="http://schemas.openxmlformats.org/presentationml/2006/main" xmlns:r="http://schemas.openxmlformats.org/officeDocument/2006/relationships">
-  <p:cSld>
-    <p:spTree>
-      <p:nvGrpSpPr>
-        <p:cNvPr id="1" name=""/>
-        <p:cNvGrpSpPr/>
-        <p:nvPr/>
-      </p:nvGrpSpPr>
-      <p:grpSpPr/>
-      <p:sp>
-        <p:nvSpPr>
-          <p:cNvPr id="2" name="Rectangle 1"/>
+              <a:t>FR, DE, NL, RO, HU, EE. Cost–accuracy surface comes out of the Haiku / Sonnet / Opus / tiered model experiments.</a:t>
+            </a:r>
+          </a:p>
+        </p:txBody>
+      </p:sp>
+      <p:sp>
+        <p:nvSpPr>
+          <p:cNvPr id="22" name="Rectangle 21"/>
           <p:cNvSpPr/>
           <p:nvPr/>
         </p:nvSpPr>
         <p:spPr>
           <a:xfrm>
-            <a:off x="0" y="0"/>
-            <a:ext cx="9144000" cy="960120"/>
-          </a:xfrm>
-          <a:prstGeom prst="rect">
-            <a:avLst/>
-          </a:prstGeom>
-          <a:solidFill>
-            <a:srgbClr val="1A202C"/>
-          </a:solidFill>
-          <a:ln>
-            <a:noFill/>
-          </a:ln>
-        </p:spPr>
-        <p:style>
-          <a:lnRef idx="1">
-            <a:schemeClr val="accent1"/>
-          </a:lnRef>
-          <a:fillRef idx="3">
-            <a:schemeClr val="accent1"/>
-          </a:fillRef>
-          <a:effectRef idx="2">
-            <a:schemeClr val="accent1"/>
-          </a:effectRef>
-          <a:fontRef idx="minor">
-            <a:schemeClr val="lt1"/>
-          </a:fontRef>
-        </p:style>
-        <p:txBody>
-          <a:bodyPr rtlCol="0" anchor="ctr"/>
-          <a:lstStyle/>
-          <a:p>
-            <a:pPr algn="ctr"/>
-          </a:p>
-        </p:txBody>
-      </p:sp>
-      <p:sp>
-        <p:nvSpPr>
-          <p:cNvPr id="3" name="TextBox 2"/>
-          <p:cNvSpPr txBox="1"/>
-          <p:nvPr/>
-        </p:nvSpPr>
-        <p:spPr>
-          <a:xfrm>
-            <a:off x="457200" y="164592"/>
-            <a:ext cx="7772400" cy="228600"/>
-          </a:xfrm>
-          <a:prstGeom prst="rect">
-            <a:avLst/>
-          </a:prstGeom>
-          <a:noFill/>
-        </p:spPr>
-        <p:txBody>
-          <a:bodyPr wrap="square" lIns="0" rIns="0" tIns="0" bIns="0">
-            <a:spAutoFit/>
-          </a:bodyPr>
-          <a:lstStyle/>
-          <a:p>
-            <a:pPr algn="l"/>
-            <a:r>
-              <a:rPr sz="900" b="1">
-                <a:solidFill>
-                  <a:srgbClr val="14B8A6"/>
-                </a:solidFill>
-                <a:latin typeface="Calibri"/>
-              </a:rPr>
-              <a:t>NEXT TWO WEEKS</a:t>
-            </a:r>
-          </a:p>
-        </p:txBody>
-      </p:sp>
-      <p:sp>
-        <p:nvSpPr>
-          <p:cNvPr id="4" name="TextBox 3"/>
-          <p:cNvSpPr txBox="1"/>
-          <p:nvPr/>
-        </p:nvSpPr>
-        <p:spPr>
-          <a:xfrm>
-            <a:off x="457200" y="384048"/>
-            <a:ext cx="7772400" cy="502920"/>
-          </a:xfrm>
-          <a:prstGeom prst="rect">
-            <a:avLst/>
-          </a:prstGeom>
-          <a:noFill/>
-        </p:spPr>
-        <p:txBody>
-          <a:bodyPr wrap="square" lIns="0" rIns="0" tIns="0" bIns="0">
-            <a:spAutoFit/>
-          </a:bodyPr>
-          <a:lstStyle/>
-          <a:p>
-            <a:pPr algn="l"/>
-            <a:r>
-              <a:rPr sz="2400" b="1">
-                <a:solidFill>
-                  <a:srgbClr val="FFFFFF"/>
-                </a:solidFill>
-                <a:latin typeface="Calibri"/>
-              </a:rPr>
-              <a:t>Short-term next steps</a:t>
-            </a:r>
-          </a:p>
-        </p:txBody>
-      </p:sp>
-      <p:sp>
-        <p:nvSpPr>
-          <p:cNvPr id="5" name="Rectangle 4"/>
-          <p:cNvSpPr/>
-          <p:nvPr/>
-        </p:nvSpPr>
-        <p:spPr>
-          <a:xfrm>
-            <a:off x="457200" y="1234440"/>
-            <a:ext cx="8229600" cy="594360"/>
-          </a:xfrm>
-          <a:prstGeom prst="rect">
-            <a:avLst/>
-          </a:prstGeom>
-          <a:solidFill>
-            <a:srgbClr val="F7FAFC"/>
-          </a:solidFill>
-          <a:ln w="6350">
-            <a:solidFill>
-              <a:srgbClr val="E2E8F0"/>
-            </a:solidFill>
-          </a:ln>
-        </p:spPr>
-        <p:style>
-          <a:lnRef idx="1">
-            <a:schemeClr val="accent1"/>
-          </a:lnRef>
-          <a:fillRef idx="3">
-            <a:schemeClr val="accent1"/>
-          </a:fillRef>
-          <a:effectRef idx="2">
-            <a:schemeClr val="accent1"/>
-          </a:effectRef>
-          <a:fontRef idx="minor">
-            <a:schemeClr val="lt1"/>
-          </a:fontRef>
-        </p:style>
-        <p:txBody>
-          <a:bodyPr rtlCol="0" anchor="ctr"/>
-          <a:lstStyle/>
-          <a:p>
-            <a:pPr algn="ctr"/>
-          </a:p>
-        </p:txBody>
-      </p:sp>
-      <p:sp>
-        <p:nvSpPr>
-          <p:cNvPr id="6" name="Oval 5"/>
-          <p:cNvSpPr/>
-          <p:nvPr/>
-        </p:nvSpPr>
-        <p:spPr>
-          <a:xfrm>
-            <a:off x="640080" y="1303020"/>
-            <a:ext cx="457200" cy="457200"/>
-          </a:xfrm>
-          <a:prstGeom prst="ellipse">
-            <a:avLst/>
-          </a:prstGeom>
-          <a:solidFill>
-            <a:srgbClr val="1A202C"/>
-          </a:solidFill>
-          <a:ln>
-            <a:noFill/>
-          </a:ln>
-        </p:spPr>
-        <p:style>
-          <a:lnRef idx="1">
-            <a:schemeClr val="accent1"/>
-          </a:lnRef>
-          <a:fillRef idx="3">
-            <a:schemeClr val="accent1"/>
-          </a:fillRef>
-          <a:effectRef idx="2">
-            <a:schemeClr val="accent1"/>
-          </a:effectRef>
-          <a:fontRef idx="minor">
-            <a:schemeClr val="lt1"/>
-          </a:fontRef>
-        </p:style>
-        <p:txBody>
-          <a:bodyPr rtlCol="0" anchor="ctr"/>
-          <a:lstStyle/>
-          <a:p>
-            <a:pPr algn="ctr"/>
-            <a:r>
-              <a:rPr sz="1600" b="1">
-                <a:solidFill>
-                  <a:srgbClr val="FFFFFF"/>
-                </a:solidFill>
-                <a:latin typeface="Calibri"/>
-              </a:rPr>
-              <a:t>1</a:t>
-            </a:r>
-          </a:p>
-        </p:txBody>
-      </p:sp>
-      <p:sp>
-        <p:nvSpPr>
-          <p:cNvPr id="7" name="TextBox 6"/>
-          <p:cNvSpPr txBox="1"/>
-          <p:nvPr/>
-        </p:nvSpPr>
-        <p:spPr>
-          <a:xfrm>
-            <a:off x="1234440" y="1399032"/>
-            <a:ext cx="7223760" cy="274320"/>
-          </a:xfrm>
-          <a:prstGeom prst="rect">
-            <a:avLst/>
-          </a:prstGeom>
-          <a:noFill/>
-        </p:spPr>
-        <p:txBody>
-          <a:bodyPr wrap="square" lIns="0" rIns="0" tIns="0" bIns="0">
-            <a:spAutoFit/>
-          </a:bodyPr>
-          <a:lstStyle/>
-          <a:p>
-            <a:pPr algn="l"/>
-            <a:r>
-              <a:rPr sz="1300" b="1">
-                <a:solidFill>
-                  <a:srgbClr val="1A202C"/>
-                </a:solidFill>
-                <a:latin typeface="Calibri"/>
-              </a:rPr>
-              <a:t>Hand-mark the Phase A pilot</a:t>
-            </a:r>
-          </a:p>
-        </p:txBody>
-      </p:sp>
-      <p:sp>
-        <p:nvSpPr>
-          <p:cNvPr id="8" name="TextBox 7"/>
-          <p:cNvSpPr txBox="1"/>
-          <p:nvPr/>
-        </p:nvSpPr>
-        <p:spPr>
-          <a:xfrm>
-            <a:off x="1234440" y="1691640"/>
-            <a:ext cx="7223760" cy="45720"/>
-          </a:xfrm>
-          <a:prstGeom prst="rect">
-            <a:avLst/>
-          </a:prstGeom>
-          <a:noFill/>
-        </p:spPr>
-        <p:txBody>
-          <a:bodyPr wrap="square" lIns="0" rIns="0" tIns="0" bIns="0">
-            <a:spAutoFit/>
-          </a:bodyPr>
-          <a:lstStyle/>
-          <a:p>
-            <a:pPr algn="l"/>
-            <a:r>
-              <a:rPr sz="1050" b="0">
-                <a:solidFill>
-                  <a:srgbClr val="2D3748"/>
-                </a:solidFill>
-                <a:latin typeface="Calibri"/>
-              </a:rPr>
-              <a:t>10 France questions across all four rubric tiers. Submit from the dashboard; D9 lock happens on save.</a:t>
-            </a:r>
-          </a:p>
-        </p:txBody>
-      </p:sp>
-      <p:sp>
-        <p:nvSpPr>
-          <p:cNvPr id="9" name="TextBox 8"/>
-          <p:cNvSpPr txBox="1"/>
-          <p:nvPr/>
-        </p:nvSpPr>
-        <p:spPr>
-          <a:xfrm>
-            <a:off x="7909560" y="1399032"/>
-            <a:ext cx="640080" cy="228600"/>
-          </a:xfrm>
-          <a:prstGeom prst="rect">
-            <a:avLst/>
-          </a:prstGeom>
-          <a:noFill/>
-        </p:spPr>
-        <p:txBody>
-          <a:bodyPr wrap="square" lIns="0" rIns="0" tIns="0" bIns="0">
-            <a:spAutoFit/>
-          </a:bodyPr>
-          <a:lstStyle/>
-          <a:p>
-            <a:pPr algn="r"/>
-            <a:r>
-              <a:rPr sz="900" b="1">
-                <a:solidFill>
-                  <a:srgbClr val="14B8A6"/>
-                </a:solidFill>
-                <a:latin typeface="Calibri"/>
-              </a:rPr>
-              <a:t>NOW</a:t>
-            </a:r>
-          </a:p>
-        </p:txBody>
-      </p:sp>
-      <p:sp>
-        <p:nvSpPr>
-          <p:cNvPr id="10" name="Rectangle 9"/>
-          <p:cNvSpPr/>
-          <p:nvPr/>
-        </p:nvSpPr>
-        <p:spPr>
-          <a:xfrm>
-            <a:off x="457200" y="1920240"/>
-            <a:ext cx="8229600" cy="594360"/>
-          </a:xfrm>
-          <a:prstGeom prst="rect">
-            <a:avLst/>
-          </a:prstGeom>
-          <a:solidFill>
-            <a:srgbClr val="F7FAFC"/>
-          </a:solidFill>
-          <a:ln w="6350">
-            <a:solidFill>
-              <a:srgbClr val="E2E8F0"/>
-            </a:solidFill>
-          </a:ln>
-        </p:spPr>
-        <p:style>
-          <a:lnRef idx="1">
-            <a:schemeClr val="accent1"/>
-          </a:lnRef>
-          <a:fillRef idx="3">
-            <a:schemeClr val="accent1"/>
-          </a:fillRef>
-          <a:effectRef idx="2">
-            <a:schemeClr val="accent1"/>
-          </a:effectRef>
-          <a:fontRef idx="minor">
-            <a:schemeClr val="lt1"/>
-          </a:fontRef>
-        </p:style>
-        <p:txBody>
-          <a:bodyPr rtlCol="0" anchor="ctr"/>
-          <a:lstStyle/>
-          <a:p>
-            <a:pPr algn="ctr"/>
-          </a:p>
-        </p:txBody>
-      </p:sp>
-      <p:sp>
-        <p:nvSpPr>
-          <p:cNvPr id="11" name="Oval 10"/>
-          <p:cNvSpPr/>
-          <p:nvPr/>
-        </p:nvSpPr>
-        <p:spPr>
-          <a:xfrm>
-            <a:off x="640080" y="1988820"/>
-            <a:ext cx="457200" cy="457200"/>
-          </a:xfrm>
-          <a:prstGeom prst="ellipse">
-            <a:avLst/>
-          </a:prstGeom>
-          <a:solidFill>
-            <a:srgbClr val="1A202C"/>
-          </a:solidFill>
-          <a:ln>
-            <a:noFill/>
-          </a:ln>
-        </p:spPr>
-        <p:style>
-          <a:lnRef idx="1">
-            <a:schemeClr val="accent1"/>
-          </a:lnRef>
-          <a:fillRef idx="3">
-            <a:schemeClr val="accent1"/>
-          </a:fillRef>
-          <a:effectRef idx="2">
-            <a:schemeClr val="accent1"/>
-          </a:effectRef>
-          <a:fontRef idx="minor">
-            <a:schemeClr val="lt1"/>
-          </a:fontRef>
-        </p:style>
-        <p:txBody>
-          <a:bodyPr rtlCol="0" anchor="ctr"/>
-          <a:lstStyle/>
-          <a:p>
-            <a:pPr algn="ctr"/>
-            <a:r>
-              <a:rPr sz="1600" b="1">
-                <a:solidFill>
-                  <a:srgbClr val="FFFFFF"/>
-                </a:solidFill>
-                <a:latin typeface="Calibri"/>
-              </a:rPr>
-              <a:t>2</a:t>
-            </a:r>
-          </a:p>
-        </p:txBody>
-      </p:sp>
-      <p:sp>
-        <p:nvSpPr>
-          <p:cNvPr id="12" name="TextBox 11"/>
-          <p:cNvSpPr txBox="1"/>
-          <p:nvPr/>
-        </p:nvSpPr>
-        <p:spPr>
-          <a:xfrm>
-            <a:off x="1234440" y="2084832"/>
-            <a:ext cx="7223760" cy="274320"/>
-          </a:xfrm>
-          <a:prstGeom prst="rect">
-            <a:avLst/>
-          </a:prstGeom>
-          <a:noFill/>
-        </p:spPr>
-        <p:txBody>
-          <a:bodyPr wrap="square" lIns="0" rIns="0" tIns="0" bIns="0">
-            <a:spAutoFit/>
-          </a:bodyPr>
-          <a:lstStyle/>
-          <a:p>
-            <a:pPr algn="l"/>
-            <a:r>
-              <a:rPr sz="1300" b="1">
-                <a:solidFill>
-                  <a:srgbClr val="1A202C"/>
-                </a:solidFill>
-                <a:latin typeface="Calibri"/>
-              </a:rPr>
-              <a:t>Baseline run on the pilot</a:t>
-            </a:r>
-          </a:p>
-        </p:txBody>
-      </p:sp>
-      <p:sp>
-        <p:nvSpPr>
-          <p:cNvPr id="13" name="TextBox 12"/>
-          <p:cNvSpPr txBox="1"/>
-          <p:nvPr/>
-        </p:nvSpPr>
-        <p:spPr>
-          <a:xfrm>
-            <a:off x="1234440" y="2377440"/>
-            <a:ext cx="7223760" cy="45720"/>
-          </a:xfrm>
-          <a:prstGeom prst="rect">
-            <a:avLst/>
-          </a:prstGeom>
-          <a:noFill/>
-        </p:spPr>
-        <p:txBody>
-          <a:bodyPr wrap="square" lIns="0" rIns="0" tIns="0" bIns="0">
-            <a:spAutoFit/>
-          </a:bodyPr>
-          <a:lstStyle/>
-          <a:p>
-            <a:pPr algn="l"/>
-            <a:r>
-              <a:rPr sz="1050" b="0">
-                <a:solidFill>
-                  <a:srgbClr val="2D3748"/>
-                </a:solidFill>
-                <a:latin typeface="Calibri"/>
-              </a:rPr>
-              <a:t>Full swarm on the 10 with verifier-disprove and all-Sonnet. First real accuracy-by-tier numbers.</a:t>
-            </a:r>
-          </a:p>
-        </p:txBody>
-      </p:sp>
-      <p:sp>
-        <p:nvSpPr>
-          <p:cNvPr id="14" name="TextBox 13"/>
-          <p:cNvSpPr txBox="1"/>
-          <p:nvPr/>
-        </p:nvSpPr>
-        <p:spPr>
-          <a:xfrm>
-            <a:off x="7909560" y="2084832"/>
-            <a:ext cx="640080" cy="228600"/>
-          </a:xfrm>
-          <a:prstGeom prst="rect">
-            <a:avLst/>
-          </a:prstGeom>
-          <a:noFill/>
-        </p:spPr>
-        <p:txBody>
-          <a:bodyPr wrap="square" lIns="0" rIns="0" tIns="0" bIns="0">
-            <a:spAutoFit/>
-          </a:bodyPr>
-          <a:lstStyle/>
-          <a:p>
-            <a:pPr algn="r"/>
-            <a:r>
-              <a:rPr sz="900" b="1">
-                <a:solidFill>
-                  <a:srgbClr val="14B8A6"/>
-                </a:solidFill>
-                <a:latin typeface="Calibri"/>
-              </a:rPr>
-              <a:t>NOW</a:t>
-            </a:r>
-          </a:p>
-        </p:txBody>
-      </p:sp>
-      <p:sp>
-        <p:nvSpPr>
-          <p:cNvPr id="15" name="Rectangle 14"/>
-          <p:cNvSpPr/>
-          <p:nvPr/>
-        </p:nvSpPr>
-        <p:spPr>
-          <a:xfrm>
-            <a:off x="457200" y="2606040"/>
-            <a:ext cx="8229600" cy="594360"/>
-          </a:xfrm>
-          <a:prstGeom prst="rect">
-            <a:avLst/>
-          </a:prstGeom>
-          <a:solidFill>
-            <a:srgbClr val="F7FAFC"/>
-          </a:solidFill>
-          <a:ln w="6350">
-            <a:solidFill>
-              <a:srgbClr val="E2E8F0"/>
-            </a:solidFill>
-          </a:ln>
-        </p:spPr>
-        <p:style>
-          <a:lnRef idx="1">
-            <a:schemeClr val="accent1"/>
-          </a:lnRef>
-          <a:fillRef idx="3">
-            <a:schemeClr val="accent1"/>
-          </a:fillRef>
-          <a:effectRef idx="2">
-            <a:schemeClr val="accent1"/>
-          </a:effectRef>
-          <a:fontRef idx="minor">
-            <a:schemeClr val="lt1"/>
-          </a:fontRef>
-        </p:style>
-        <p:txBody>
-          <a:bodyPr rtlCol="0" anchor="ctr"/>
-          <a:lstStyle/>
-          <a:p>
-            <a:pPr algn="ctr"/>
-          </a:p>
-        </p:txBody>
-      </p:sp>
-      <p:sp>
-        <p:nvSpPr>
-          <p:cNvPr id="16" name="Oval 15"/>
-          <p:cNvSpPr/>
-          <p:nvPr/>
-        </p:nvSpPr>
-        <p:spPr>
-          <a:xfrm>
-            <a:off x="640080" y="2674620"/>
-            <a:ext cx="457200" cy="457200"/>
-          </a:xfrm>
-          <a:prstGeom prst="ellipse">
-            <a:avLst/>
-          </a:prstGeom>
-          <a:solidFill>
-            <a:srgbClr val="1A202C"/>
-          </a:solidFill>
-          <a:ln>
-            <a:noFill/>
-          </a:ln>
-        </p:spPr>
-        <p:style>
-          <a:lnRef idx="1">
-            <a:schemeClr val="accent1"/>
-          </a:lnRef>
-          <a:fillRef idx="3">
-            <a:schemeClr val="accent1"/>
-          </a:fillRef>
-          <a:effectRef idx="2">
-            <a:schemeClr val="accent1"/>
-          </a:effectRef>
-          <a:fontRef idx="minor">
-            <a:schemeClr val="lt1"/>
-          </a:fontRef>
-        </p:style>
-        <p:txBody>
-          <a:bodyPr rtlCol="0" anchor="ctr"/>
-          <a:lstStyle/>
-          <a:p>
-            <a:pPr algn="ctr"/>
-            <a:r>
-              <a:rPr sz="1600" b="1">
-                <a:solidFill>
-                  <a:srgbClr val="FFFFFF"/>
-                </a:solidFill>
-                <a:latin typeface="Calibri"/>
-              </a:rPr>
-              <a:t>3</a:t>
-            </a:r>
-          </a:p>
-        </p:txBody>
-      </p:sp>
-      <p:sp>
-        <p:nvSpPr>
-          <p:cNvPr id="17" name="TextBox 16"/>
-          <p:cNvSpPr txBox="1"/>
-          <p:nvPr/>
-        </p:nvSpPr>
-        <p:spPr>
-          <a:xfrm>
-            <a:off x="1234440" y="2770632"/>
-            <a:ext cx="7223760" cy="274320"/>
-          </a:xfrm>
-          <a:prstGeom prst="rect">
-            <a:avLst/>
-          </a:prstGeom>
-          <a:noFill/>
-        </p:spPr>
-        <p:txBody>
-          <a:bodyPr wrap="square" lIns="0" rIns="0" tIns="0" bIns="0">
-            <a:spAutoFit/>
-          </a:bodyPr>
-          <a:lstStyle/>
-          <a:p>
-            <a:pPr algn="l"/>
-            <a:r>
-              <a:rPr sz="1300" b="1">
-                <a:solidFill>
-                  <a:srgbClr val="1A202C"/>
-                </a:solidFill>
-                <a:latin typeface="Calibri"/>
-              </a:rPr>
-              <a:t>Verifier strategy comparison</a:t>
-            </a:r>
-          </a:p>
-        </p:txBody>
-      </p:sp>
-      <p:sp>
-        <p:nvSpPr>
-          <p:cNvPr id="18" name="TextBox 17"/>
-          <p:cNvSpPr txBox="1"/>
-          <p:nvPr/>
-        </p:nvSpPr>
-        <p:spPr>
-          <a:xfrm>
-            <a:off x="1234440" y="3063240"/>
-            <a:ext cx="7223760" cy="45720"/>
-          </a:xfrm>
-          <a:prstGeom prst="rect">
-            <a:avLst/>
-          </a:prstGeom>
-          <a:noFill/>
-        </p:spPr>
-        <p:txBody>
-          <a:bodyPr wrap="square" lIns="0" rIns="0" tIns="0" bIns="0">
-            <a:spAutoFit/>
-          </a:bodyPr>
-          <a:lstStyle/>
-          <a:p>
-            <a:pPr algn="l"/>
-            <a:r>
-              <a:rPr sz="1050" b="0">
-                <a:solidFill>
-                  <a:srgbClr val="2D3748"/>
-                </a:solidFill>
-                <a:latin typeface="Calibri"/>
-              </a:rPr>
-              <a:t>Run the other three strategies (negation, steelman, blind) on the same Researcher rows.</a:t>
-            </a:r>
-          </a:p>
-        </p:txBody>
-      </p:sp>
-      <p:sp>
-        <p:nvSpPr>
-          <p:cNvPr id="19" name="TextBox 18"/>
-          <p:cNvSpPr txBox="1"/>
-          <p:nvPr/>
-        </p:nvSpPr>
-        <p:spPr>
-          <a:xfrm>
-            <a:off x="7909560" y="2770632"/>
-            <a:ext cx="640080" cy="228600"/>
-          </a:xfrm>
-          <a:prstGeom prst="rect">
-            <a:avLst/>
-          </a:prstGeom>
-          <a:noFill/>
-        </p:spPr>
-        <p:txBody>
-          <a:bodyPr wrap="square" lIns="0" rIns="0" tIns="0" bIns="0">
-            <a:spAutoFit/>
-          </a:bodyPr>
-          <a:lstStyle/>
-          <a:p>
-            <a:pPr algn="r"/>
-            <a:r>
-              <a:rPr sz="900" b="1">
-                <a:solidFill>
-                  <a:srgbClr val="0D9488"/>
-                </a:solidFill>
-                <a:latin typeface="Calibri"/>
-              </a:rPr>
-              <a:t>NEXT</a:t>
-            </a:r>
-          </a:p>
-        </p:txBody>
-      </p:sp>
-      <p:sp>
-        <p:nvSpPr>
-          <p:cNvPr id="20" name="Rectangle 19"/>
-          <p:cNvSpPr/>
-          <p:nvPr/>
-        </p:nvSpPr>
-        <p:spPr>
-          <a:xfrm>
-            <a:off x="457200" y="3291840"/>
-            <a:ext cx="8229600" cy="594360"/>
-          </a:xfrm>
-          <a:prstGeom prst="rect">
-            <a:avLst/>
-          </a:prstGeom>
-          <a:solidFill>
-            <a:srgbClr val="F7FAFC"/>
-          </a:solidFill>
-          <a:ln w="6350">
-            <a:solidFill>
-              <a:srgbClr val="E2E8F0"/>
-            </a:solidFill>
-          </a:ln>
-        </p:spPr>
-        <p:style>
-          <a:lnRef idx="1">
-            <a:schemeClr val="accent1"/>
-          </a:lnRef>
-          <a:fillRef idx="3">
-            <a:schemeClr val="accent1"/>
-          </a:fillRef>
-          <a:effectRef idx="2">
-            <a:schemeClr val="accent1"/>
-          </a:effectRef>
-          <a:fontRef idx="minor">
-            <a:schemeClr val="lt1"/>
-          </a:fontRef>
-        </p:style>
-        <p:txBody>
-          <a:bodyPr rtlCol="0" anchor="ctr"/>
-          <a:lstStyle/>
-          <a:p>
-            <a:pPr algn="ctr"/>
-          </a:p>
-        </p:txBody>
-      </p:sp>
-      <p:sp>
-        <p:nvSpPr>
-          <p:cNvPr id="21" name="Oval 20"/>
-          <p:cNvSpPr/>
-          <p:nvPr/>
-        </p:nvSpPr>
-        <p:spPr>
-          <a:xfrm>
-            <a:off x="640080" y="3360420"/>
-            <a:ext cx="457200" cy="457200"/>
-          </a:xfrm>
-          <a:prstGeom prst="ellipse">
-            <a:avLst/>
-          </a:prstGeom>
-          <a:solidFill>
-            <a:srgbClr val="1A202C"/>
-          </a:solidFill>
-          <a:ln>
-            <a:noFill/>
-          </a:ln>
-        </p:spPr>
-        <p:style>
-          <a:lnRef idx="1">
-            <a:schemeClr val="accent1"/>
-          </a:lnRef>
-          <a:fillRef idx="3">
-            <a:schemeClr val="accent1"/>
-          </a:fillRef>
-          <a:effectRef idx="2">
-            <a:schemeClr val="accent1"/>
-          </a:effectRef>
-          <a:fontRef idx="minor">
-            <a:schemeClr val="lt1"/>
-          </a:fontRef>
-        </p:style>
-        <p:txBody>
-          <a:bodyPr rtlCol="0" anchor="ctr"/>
-          <a:lstStyle/>
-          <a:p>
-            <a:pPr algn="ctr"/>
-            <a:r>
-              <a:rPr sz="1600" b="1">
-                <a:solidFill>
-                  <a:srgbClr val="FFFFFF"/>
-                </a:solidFill>
-                <a:latin typeface="Calibri"/>
-              </a:rPr>
-              <a:t>4</a:t>
-            </a:r>
-          </a:p>
-        </p:txBody>
-      </p:sp>
-      <p:sp>
-        <p:nvSpPr>
-          <p:cNvPr id="22" name="TextBox 21"/>
-          <p:cNvSpPr txBox="1"/>
-          <p:nvPr/>
-        </p:nvSpPr>
-        <p:spPr>
-          <a:xfrm>
-            <a:off x="1234440" y="3456432"/>
-            <a:ext cx="7223760" cy="274320"/>
-          </a:xfrm>
-          <a:prstGeom prst="rect">
-            <a:avLst/>
-          </a:prstGeom>
-          <a:noFill/>
-        </p:spPr>
-        <p:txBody>
-          <a:bodyPr wrap="square" lIns="0" rIns="0" tIns="0" bIns="0">
-            <a:spAutoFit/>
-          </a:bodyPr>
-          <a:lstStyle/>
-          <a:p>
-            <a:pPr algn="l"/>
-            <a:r>
-              <a:rPr sz="1300" b="1">
-                <a:solidFill>
-                  <a:srgbClr val="1A202C"/>
-                </a:solidFill>
-                <a:latin typeface="Calibri"/>
-              </a:rPr>
-              <a:t>Family-1 cost experiments</a:t>
-            </a:r>
-          </a:p>
-        </p:txBody>
-      </p:sp>
-      <p:sp>
-        <p:nvSpPr>
-          <p:cNvPr id="23" name="TextBox 22"/>
-          <p:cNvSpPr txBox="1"/>
-          <p:nvPr/>
-        </p:nvSpPr>
-        <p:spPr>
-          <a:xfrm>
-            <a:off x="1234440" y="3749040"/>
-            <a:ext cx="7223760" cy="45720"/>
-          </a:xfrm>
-          <a:prstGeom prst="rect">
-            <a:avLst/>
-          </a:prstGeom>
-          <a:noFill/>
-        </p:spPr>
-        <p:txBody>
-          <a:bodyPr wrap="square" lIns="0" rIns="0" tIns="0" bIns="0">
-            <a:spAutoFit/>
-          </a:bodyPr>
-          <a:lstStyle/>
-          <a:p>
-            <a:pPr algn="l"/>
-            <a:r>
-              <a:rPr sz="1050" b="0">
-                <a:solidFill>
-                  <a:srgbClr val="2D3748"/>
-                </a:solidFill>
-                <a:latin typeface="Calibri"/>
-              </a:rPr>
-              <a:t>Prompt-compressed and retrieval-tight variants on the same pilot, comparing cost surface against the baseline.</a:t>
-            </a:r>
-          </a:p>
-        </p:txBody>
-      </p:sp>
-      <p:sp>
-        <p:nvSpPr>
-          <p:cNvPr id="24" name="TextBox 23"/>
-          <p:cNvSpPr txBox="1"/>
-          <p:nvPr/>
-        </p:nvSpPr>
-        <p:spPr>
-          <a:xfrm>
-            <a:off x="7909560" y="3456432"/>
-            <a:ext cx="640080" cy="228600"/>
-          </a:xfrm>
-          <a:prstGeom prst="rect">
-            <a:avLst/>
-          </a:prstGeom>
-          <a:noFill/>
-        </p:spPr>
-        <p:txBody>
-          <a:bodyPr wrap="square" lIns="0" rIns="0" tIns="0" bIns="0">
-            <a:spAutoFit/>
-          </a:bodyPr>
-          <a:lstStyle/>
-          <a:p>
-            <a:pPr algn="r"/>
-            <a:r>
-              <a:rPr sz="900" b="1">
-                <a:solidFill>
-                  <a:srgbClr val="0D9488"/>
-                </a:solidFill>
-                <a:latin typeface="Calibri"/>
-              </a:rPr>
-              <a:t>NEXT</a:t>
-            </a:r>
-          </a:p>
-        </p:txBody>
-      </p:sp>
-      <p:sp>
-        <p:nvSpPr>
-          <p:cNvPr id="25" name="Rectangle 24"/>
-          <p:cNvSpPr/>
-          <p:nvPr/>
-        </p:nvSpPr>
-        <p:spPr>
-          <a:xfrm>
-            <a:off x="457200" y="3977640"/>
-            <a:ext cx="8229600" cy="594360"/>
-          </a:xfrm>
-          <a:prstGeom prst="rect">
-            <a:avLst/>
-          </a:prstGeom>
-          <a:solidFill>
-            <a:srgbClr val="F7FAFC"/>
-          </a:solidFill>
-          <a:ln w="6350">
-            <a:solidFill>
-              <a:srgbClr val="E2E8F0"/>
-            </a:solidFill>
-          </a:ln>
-        </p:spPr>
-        <p:style>
-          <a:lnRef idx="1">
-            <a:schemeClr val="accent1"/>
-          </a:lnRef>
-          <a:fillRef idx="3">
-            <a:schemeClr val="accent1"/>
-          </a:fillRef>
-          <a:effectRef idx="2">
-            <a:schemeClr val="accent1"/>
-          </a:effectRef>
-          <a:fontRef idx="minor">
-            <a:schemeClr val="lt1"/>
-          </a:fontRef>
-        </p:style>
-        <p:txBody>
-          <a:bodyPr rtlCol="0" anchor="ctr"/>
-          <a:lstStyle/>
-          <a:p>
-            <a:pPr algn="ctr"/>
-          </a:p>
-        </p:txBody>
-      </p:sp>
-      <p:sp>
-        <p:nvSpPr>
-          <p:cNvPr id="26" name="Oval 25"/>
-          <p:cNvSpPr/>
-          <p:nvPr/>
-        </p:nvSpPr>
-        <p:spPr>
-          <a:xfrm>
-            <a:off x="640080" y="4046220"/>
-            <a:ext cx="457200" cy="457200"/>
-          </a:xfrm>
-          <a:prstGeom prst="ellipse">
-            <a:avLst/>
-          </a:prstGeom>
-          <a:solidFill>
-            <a:srgbClr val="1A202C"/>
-          </a:solidFill>
-          <a:ln>
-            <a:noFill/>
-          </a:ln>
-        </p:spPr>
-        <p:style>
-          <a:lnRef idx="1">
-            <a:schemeClr val="accent1"/>
-          </a:lnRef>
-          <a:fillRef idx="3">
-            <a:schemeClr val="accent1"/>
-          </a:fillRef>
-          <a:effectRef idx="2">
-            <a:schemeClr val="accent1"/>
-          </a:effectRef>
-          <a:fontRef idx="minor">
-            <a:schemeClr val="lt1"/>
-          </a:fontRef>
-        </p:style>
-        <p:txBody>
-          <a:bodyPr rtlCol="0" anchor="ctr"/>
-          <a:lstStyle/>
-          <a:p>
-            <a:pPr algn="ctr"/>
-            <a:r>
-              <a:rPr sz="1600" b="1">
-                <a:solidFill>
-                  <a:srgbClr val="FFFFFF"/>
-                </a:solidFill>
-                <a:latin typeface="Calibri"/>
-              </a:rPr>
-              <a:t>5</a:t>
-            </a:r>
-          </a:p>
-        </p:txBody>
-      </p:sp>
-      <p:sp>
-        <p:nvSpPr>
-          <p:cNvPr id="27" name="TextBox 26"/>
-          <p:cNvSpPr txBox="1"/>
-          <p:nvPr/>
-        </p:nvSpPr>
-        <p:spPr>
-          <a:xfrm>
-            <a:off x="1234440" y="4142232"/>
-            <a:ext cx="7223760" cy="274320"/>
-          </a:xfrm>
-          <a:prstGeom prst="rect">
-            <a:avLst/>
-          </a:prstGeom>
-          <a:noFill/>
-        </p:spPr>
-        <p:txBody>
-          <a:bodyPr wrap="square" lIns="0" rIns="0" tIns="0" bIns="0">
-            <a:spAutoFit/>
-          </a:bodyPr>
-          <a:lstStyle/>
-          <a:p>
-            <a:pPr algn="l"/>
-            <a:r>
-              <a:rPr sz="1300" b="1">
-                <a:solidFill>
-                  <a:srgbClr val="1A202C"/>
-                </a:solidFill>
-                <a:latin typeface="Calibri"/>
-              </a:rPr>
-              <a:t>First analysis pass</a:t>
-            </a:r>
-          </a:p>
-        </p:txBody>
-      </p:sp>
-      <p:sp>
-        <p:nvSpPr>
-          <p:cNvPr id="28" name="TextBox 27"/>
-          <p:cNvSpPr txBox="1"/>
-          <p:nvPr/>
-        </p:nvSpPr>
-        <p:spPr>
-          <a:xfrm>
-            <a:off x="1234440" y="4434840"/>
-            <a:ext cx="7223760" cy="45720"/>
-          </a:xfrm>
-          <a:prstGeom prst="rect">
-            <a:avLst/>
-          </a:prstGeom>
-          <a:noFill/>
-        </p:spPr>
-        <p:txBody>
-          <a:bodyPr wrap="square" lIns="0" rIns="0" tIns="0" bIns="0">
-            <a:spAutoFit/>
-          </a:bodyPr>
-          <a:lstStyle/>
-          <a:p>
-            <a:pPr algn="l"/>
-            <a:r>
-              <a:rPr sz="1050" b="0">
-                <a:solidFill>
-                  <a:srgbClr val="2D3748"/>
-                </a:solidFill>
-                <a:latin typeface="Calibri"/>
-              </a:rPr>
-              <a:t>Accuracy and cost stratified by rubric tier × ODMI dimension. Draft methodology + early-results sections in REPORT_PRELIM.md.</a:t>
-            </a:r>
-          </a:p>
-        </p:txBody>
-      </p:sp>
-      <p:sp>
-        <p:nvSpPr>
-          <p:cNvPr id="29" name="TextBox 28"/>
-          <p:cNvSpPr txBox="1"/>
-          <p:nvPr/>
-        </p:nvSpPr>
-        <p:spPr>
-          <a:xfrm>
-            <a:off x="7909560" y="4142232"/>
-            <a:ext cx="640080" cy="228600"/>
-          </a:xfrm>
-          <a:prstGeom prst="rect">
-            <a:avLst/>
-          </a:prstGeom>
-          <a:noFill/>
-        </p:spPr>
-        <p:txBody>
-          <a:bodyPr wrap="square" lIns="0" rIns="0" tIns="0" bIns="0">
-            <a:spAutoFit/>
-          </a:bodyPr>
-          <a:lstStyle/>
-          <a:p>
-            <a:pPr algn="r"/>
-            <a:r>
-              <a:rPr sz="900" b="1">
-                <a:solidFill>
-                  <a:srgbClr val="0F766E"/>
-                </a:solidFill>
-                <a:latin typeface="Calibri"/>
-              </a:rPr>
-              <a:t>THEN</a:t>
-            </a:r>
-          </a:p>
-        </p:txBody>
-      </p:sp>
-      <p:sp>
-        <p:nvSpPr>
-          <p:cNvPr id="30" name="TextBox 29"/>
-          <p:cNvSpPr txBox="1"/>
-          <p:nvPr/>
-        </p:nvSpPr>
-        <p:spPr>
-          <a:xfrm>
-            <a:off x="457200" y="4850892"/>
-            <a:ext cx="8229600" cy="182880"/>
-          </a:xfrm>
-          <a:prstGeom prst="rect">
-            <a:avLst/>
-          </a:prstGeom>
-          <a:noFill/>
-        </p:spPr>
-        <p:txBody>
-          <a:bodyPr wrap="square" lIns="0" rIns="0" tIns="0" bIns="0">
-            <a:spAutoFit/>
-          </a:bodyPr>
-          <a:lstStyle/>
-          <a:p>
-            <a:pPr algn="l"/>
-            <a:r>
-              <a:rPr sz="800" b="0">
-                <a:solidFill>
-                  <a:srgbClr val="718096"/>
-                </a:solidFill>
-                <a:latin typeface="Calibri"/>
-              </a:rPr>
-              <a:t>ODMI Agent Swarm  ·  Benjy Bream  ·  King's College London  ·  7 / 9</a:t>
-            </a:r>
-          </a:p>
-        </p:txBody>
-      </p:sp>
-    </p:spTree>
-  </p:cSld>
-  <p:clrMapOvr>
-    <a:masterClrMapping/>
-  </p:clrMapOvr>
-</p:sld>
-</file>
-
-<file path=ppt/slides/slide8.xml><?xml version="1.0" encoding="utf-8"?>
-<p:sld xmlns:a="http://schemas.openxmlformats.org/drawingml/2006/main" xmlns:p="http://schemas.openxmlformats.org/presentationml/2006/main" xmlns:r="http://schemas.openxmlformats.org/officeDocument/2006/relationships">
-  <p:cSld>
-    <p:spTree>
-      <p:nvGrpSpPr>
-        <p:cNvPr id="1" name=""/>
-        <p:cNvGrpSpPr/>
-        <p:nvPr/>
-      </p:nvGrpSpPr>
-      <p:grpSpPr/>
-      <p:sp>
-        <p:nvSpPr>
-          <p:cNvPr id="2" name="Rectangle 1"/>
-          <p:cNvSpPr/>
-          <p:nvPr/>
-        </p:nvSpPr>
-        <p:spPr>
-          <a:xfrm>
-            <a:off x="0" y="0"/>
-            <a:ext cx="9144000" cy="960120"/>
-          </a:xfrm>
-          <a:prstGeom prst="rect">
-            <a:avLst/>
-          </a:prstGeom>
-          <a:solidFill>
-            <a:srgbClr val="1A202C"/>
-          </a:solidFill>
-          <a:ln>
-            <a:noFill/>
-          </a:ln>
-        </p:spPr>
-        <p:style>
-          <a:lnRef idx="1">
-            <a:schemeClr val="accent1"/>
-          </a:lnRef>
-          <a:fillRef idx="3">
-            <a:schemeClr val="accent1"/>
-          </a:fillRef>
-          <a:effectRef idx="2">
-            <a:schemeClr val="accent1"/>
-          </a:effectRef>
-          <a:fontRef idx="minor">
-            <a:schemeClr val="lt1"/>
-          </a:fontRef>
-        </p:style>
-        <p:txBody>
-          <a:bodyPr rtlCol="0" anchor="ctr"/>
-          <a:lstStyle/>
-          <a:p>
-            <a:pPr algn="ctr"/>
-          </a:p>
-        </p:txBody>
-      </p:sp>
-      <p:sp>
-        <p:nvSpPr>
-          <p:cNvPr id="3" name="TextBox 2"/>
-          <p:cNvSpPr txBox="1"/>
-          <p:nvPr/>
-        </p:nvSpPr>
-        <p:spPr>
-          <a:xfrm>
-            <a:off x="457200" y="164592"/>
-            <a:ext cx="7772400" cy="228600"/>
-          </a:xfrm>
-          <a:prstGeom prst="rect">
-            <a:avLst/>
-          </a:prstGeom>
-          <a:noFill/>
-        </p:spPr>
-        <p:txBody>
-          <a:bodyPr wrap="square" lIns="0" rIns="0" tIns="0" bIns="0">
-            <a:spAutoFit/>
-          </a:bodyPr>
-          <a:lstStyle/>
-          <a:p>
-            <a:pPr algn="l"/>
-            <a:r>
-              <a:rPr sz="900" b="1">
-                <a:solidFill>
-                  <a:srgbClr val="14B8A6"/>
-                </a:solidFill>
-                <a:latin typeface="Calibri"/>
-              </a:rPr>
-              <a:t>TOWARDS 2 AUGUST 2026</a:t>
-            </a:r>
-          </a:p>
-        </p:txBody>
-      </p:sp>
-      <p:sp>
-        <p:nvSpPr>
-          <p:cNvPr id="4" name="TextBox 3"/>
-          <p:cNvSpPr txBox="1"/>
-          <p:nvPr/>
-        </p:nvSpPr>
-        <p:spPr>
-          <a:xfrm>
-            <a:off x="457200" y="384048"/>
-            <a:ext cx="7772400" cy="502920"/>
-          </a:xfrm>
-          <a:prstGeom prst="rect">
-            <a:avLst/>
-          </a:prstGeom>
-          <a:noFill/>
-        </p:spPr>
-        <p:txBody>
-          <a:bodyPr wrap="square" lIns="0" rIns="0" tIns="0" bIns="0">
-            <a:spAutoFit/>
-          </a:bodyPr>
-          <a:lstStyle/>
-          <a:p>
-            <a:pPr algn="l"/>
-            <a:r>
-              <a:rPr sz="2400" b="1">
-                <a:solidFill>
-                  <a:srgbClr val="FFFFFF"/>
-                </a:solidFill>
-                <a:latin typeface="Calibri"/>
-              </a:rPr>
-              <a:t>Long-term roadmap</a:t>
-            </a:r>
-          </a:p>
-        </p:txBody>
-      </p:sp>
-      <p:sp>
-        <p:nvSpPr>
-          <p:cNvPr id="5" name="Rectangle 4"/>
-          <p:cNvSpPr/>
-          <p:nvPr/>
-        </p:nvSpPr>
-        <p:spPr>
-          <a:xfrm>
-            <a:off x="457200" y="1234440"/>
-            <a:ext cx="8229600" cy="594360"/>
-          </a:xfrm>
-          <a:prstGeom prst="rect">
-            <a:avLst/>
-          </a:prstGeom>
-          <a:solidFill>
-            <a:srgbClr val="F7FAFC"/>
-          </a:solidFill>
-          <a:ln w="6350">
-            <a:solidFill>
-              <a:srgbClr val="E2E8F0"/>
-            </a:solidFill>
-          </a:ln>
-        </p:spPr>
-        <p:style>
-          <a:lnRef idx="1">
-            <a:schemeClr val="accent1"/>
-          </a:lnRef>
-          <a:fillRef idx="3">
-            <a:schemeClr val="accent1"/>
-          </a:fillRef>
-          <a:effectRef idx="2">
-            <a:schemeClr val="accent1"/>
-          </a:effectRef>
-          <a:fontRef idx="minor">
-            <a:schemeClr val="lt1"/>
-          </a:fontRef>
-        </p:style>
-        <p:txBody>
-          <a:bodyPr rtlCol="0" anchor="ctr"/>
-          <a:lstStyle/>
-          <a:p>
-            <a:pPr algn="ctr"/>
-          </a:p>
-        </p:txBody>
-      </p:sp>
-      <p:sp>
-        <p:nvSpPr>
-          <p:cNvPr id="6" name="Oval 5"/>
-          <p:cNvSpPr/>
-          <p:nvPr/>
-        </p:nvSpPr>
-        <p:spPr>
-          <a:xfrm>
-            <a:off x="640080" y="1303020"/>
-            <a:ext cx="457200" cy="457200"/>
-          </a:xfrm>
-          <a:prstGeom prst="ellipse">
-            <a:avLst/>
-          </a:prstGeom>
-          <a:solidFill>
-            <a:srgbClr val="1A202C"/>
-          </a:solidFill>
-          <a:ln>
-            <a:noFill/>
-          </a:ln>
-        </p:spPr>
-        <p:style>
-          <a:lnRef idx="1">
-            <a:schemeClr val="accent1"/>
-          </a:lnRef>
-          <a:fillRef idx="3">
-            <a:schemeClr val="accent1"/>
-          </a:fillRef>
-          <a:effectRef idx="2">
-            <a:schemeClr val="accent1"/>
-          </a:effectRef>
-          <a:fontRef idx="minor">
-            <a:schemeClr val="lt1"/>
-          </a:fontRef>
-        </p:style>
-        <p:txBody>
-          <a:bodyPr rtlCol="0" anchor="ctr"/>
-          <a:lstStyle/>
-          <a:p>
-            <a:pPr algn="ctr"/>
-            <a:r>
-              <a:rPr sz="1600" b="1">
-                <a:solidFill>
-                  <a:srgbClr val="FFFFFF"/>
-                </a:solidFill>
-                <a:latin typeface="Calibri"/>
-              </a:rPr>
-              <a:t>1</a:t>
-            </a:r>
-          </a:p>
-        </p:txBody>
-      </p:sp>
-      <p:sp>
-        <p:nvSpPr>
-          <p:cNvPr id="7" name="TextBox 6"/>
-          <p:cNvSpPr txBox="1"/>
-          <p:nvPr/>
-        </p:nvSpPr>
-        <p:spPr>
-          <a:xfrm>
-            <a:off x="1234440" y="1399032"/>
-            <a:ext cx="7223760" cy="274320"/>
-          </a:xfrm>
-          <a:prstGeom prst="rect">
-            <a:avLst/>
-          </a:prstGeom>
-          <a:noFill/>
-        </p:spPr>
-        <p:txBody>
-          <a:bodyPr wrap="square" lIns="0" rIns="0" tIns="0" bIns="0">
-            <a:spAutoFit/>
-          </a:bodyPr>
-          <a:lstStyle/>
-          <a:p>
-            <a:pPr algn="l"/>
-            <a:r>
-              <a:rPr sz="1300" b="1">
-                <a:solidFill>
-                  <a:srgbClr val="1A202C"/>
-                </a:solidFill>
-                <a:latin typeface="Calibri"/>
-              </a:rPr>
-              <a:t>Phase B — six countries</a:t>
-            </a:r>
-          </a:p>
-        </p:txBody>
-      </p:sp>
-      <p:sp>
-        <p:nvSpPr>
-          <p:cNvPr id="8" name="TextBox 7"/>
-          <p:cNvSpPr txBox="1"/>
-          <p:nvPr/>
-        </p:nvSpPr>
-        <p:spPr>
-          <a:xfrm>
-            <a:off x="1234440" y="1691640"/>
-            <a:ext cx="7223760" cy="45720"/>
-          </a:xfrm>
-          <a:prstGeom prst="rect">
-            <a:avLst/>
-          </a:prstGeom>
-          <a:noFill/>
-        </p:spPr>
-        <p:txBody>
-          <a:bodyPr wrap="square" lIns="0" rIns="0" tIns="0" bIns="0">
-            <a:spAutoFit/>
-          </a:bodyPr>
-          <a:lstStyle/>
-          <a:p>
-            <a:pPr algn="l"/>
-            <a:r>
-              <a:rPr sz="1050" b="0">
-                <a:solidFill>
-                  <a:srgbClr val="2D3748"/>
-                </a:solidFill>
-                <a:latin typeface="Calibri"/>
-              </a:rPr>
-              <a:t>FR, DE, NL, RO, HU, EE. Hand-marks re-run per country. Verifier strategy comparison saturated.</a:t>
-            </a:r>
-          </a:p>
-        </p:txBody>
-      </p:sp>
-      <p:sp>
-        <p:nvSpPr>
-          <p:cNvPr id="9" name="TextBox 8"/>
-          <p:cNvSpPr txBox="1"/>
-          <p:nvPr/>
-        </p:nvSpPr>
-        <p:spPr>
-          <a:xfrm>
-            <a:off x="7909560" y="1399032"/>
-            <a:ext cx="640080" cy="228600"/>
-          </a:xfrm>
-          <a:prstGeom prst="rect">
-            <a:avLst/>
-          </a:prstGeom>
-          <a:noFill/>
-        </p:spPr>
-        <p:txBody>
-          <a:bodyPr wrap="square" lIns="0" rIns="0" tIns="0" bIns="0">
-            <a:spAutoFit/>
-          </a:bodyPr>
-          <a:lstStyle/>
-          <a:p>
-            <a:pPr algn="r"/>
-            <a:r>
-              <a:rPr sz="900" b="1">
-                <a:solidFill>
-                  <a:srgbClr val="1E3A5F"/>
-                </a:solidFill>
-                <a:latin typeface="Calibri"/>
-              </a:rPr>
-              <a:t>JUN</a:t>
-            </a:r>
-          </a:p>
-        </p:txBody>
-      </p:sp>
-      <p:sp>
-        <p:nvSpPr>
-          <p:cNvPr id="10" name="Rectangle 9"/>
-          <p:cNvSpPr/>
-          <p:nvPr/>
-        </p:nvSpPr>
-        <p:spPr>
-          <a:xfrm>
-            <a:off x="457200" y="1920240"/>
-            <a:ext cx="8229600" cy="594360"/>
-          </a:xfrm>
-          <a:prstGeom prst="rect">
-            <a:avLst/>
-          </a:prstGeom>
-          <a:solidFill>
-            <a:srgbClr val="F7FAFC"/>
-          </a:solidFill>
-          <a:ln w="6350">
-            <a:solidFill>
-              <a:srgbClr val="E2E8F0"/>
-            </a:solidFill>
-          </a:ln>
-        </p:spPr>
-        <p:style>
-          <a:lnRef idx="1">
-            <a:schemeClr val="accent1"/>
-          </a:lnRef>
-          <a:fillRef idx="3">
-            <a:schemeClr val="accent1"/>
-          </a:fillRef>
-          <a:effectRef idx="2">
-            <a:schemeClr val="accent1"/>
-          </a:effectRef>
-          <a:fontRef idx="minor">
-            <a:schemeClr val="lt1"/>
-          </a:fontRef>
-        </p:style>
-        <p:txBody>
-          <a:bodyPr rtlCol="0" anchor="ctr"/>
-          <a:lstStyle/>
-          <a:p>
-            <a:pPr algn="ctr"/>
-          </a:p>
-        </p:txBody>
-      </p:sp>
-      <p:sp>
-        <p:nvSpPr>
-          <p:cNvPr id="11" name="Oval 10"/>
-          <p:cNvSpPr/>
-          <p:nvPr/>
-        </p:nvSpPr>
-        <p:spPr>
-          <a:xfrm>
-            <a:off x="640080" y="1988820"/>
-            <a:ext cx="457200" cy="457200"/>
-          </a:xfrm>
-          <a:prstGeom prst="ellipse">
-            <a:avLst/>
-          </a:prstGeom>
-          <a:solidFill>
-            <a:srgbClr val="1A202C"/>
-          </a:solidFill>
-          <a:ln>
-            <a:noFill/>
-          </a:ln>
-        </p:spPr>
-        <p:style>
-          <a:lnRef idx="1">
-            <a:schemeClr val="accent1"/>
-          </a:lnRef>
-          <a:fillRef idx="3">
-            <a:schemeClr val="accent1"/>
-          </a:fillRef>
-          <a:effectRef idx="2">
-            <a:schemeClr val="accent1"/>
-          </a:effectRef>
-          <a:fontRef idx="minor">
-            <a:schemeClr val="lt1"/>
-          </a:fontRef>
-        </p:style>
-        <p:txBody>
-          <a:bodyPr rtlCol="0" anchor="ctr"/>
-          <a:lstStyle/>
-          <a:p>
-            <a:pPr algn="ctr"/>
-            <a:r>
-              <a:rPr sz="1600" b="1">
-                <a:solidFill>
-                  <a:srgbClr val="FFFFFF"/>
-                </a:solidFill>
-                <a:latin typeface="Calibri"/>
-              </a:rPr>
-              <a:t>2</a:t>
-            </a:r>
-          </a:p>
-        </p:txBody>
-      </p:sp>
-      <p:sp>
-        <p:nvSpPr>
-          <p:cNvPr id="12" name="TextBox 11"/>
-          <p:cNvSpPr txBox="1"/>
-          <p:nvPr/>
-        </p:nvSpPr>
-        <p:spPr>
-          <a:xfrm>
-            <a:off x="1234440" y="2084832"/>
-            <a:ext cx="7223760" cy="274320"/>
-          </a:xfrm>
-          <a:prstGeom prst="rect">
-            <a:avLst/>
-          </a:prstGeom>
-          <a:noFill/>
-        </p:spPr>
-        <p:txBody>
-          <a:bodyPr wrap="square" lIns="0" rIns="0" tIns="0" bIns="0">
-            <a:spAutoFit/>
-          </a:bodyPr>
-          <a:lstStyle/>
-          <a:p>
-            <a:pPr algn="l"/>
-            <a:r>
-              <a:rPr sz="1300" b="1">
-                <a:solidFill>
-                  <a:srgbClr val="1A202C"/>
-                </a:solidFill>
-                <a:latin typeface="Calibri"/>
-              </a:rPr>
-              <a:t>Family-3 model variants</a:t>
-            </a:r>
-          </a:p>
-        </p:txBody>
-      </p:sp>
-      <p:sp>
-        <p:nvSpPr>
-          <p:cNvPr id="13" name="TextBox 12"/>
-          <p:cNvSpPr txBox="1"/>
-          <p:nvPr/>
-        </p:nvSpPr>
-        <p:spPr>
-          <a:xfrm>
-            <a:off x="1234440" y="2377440"/>
-            <a:ext cx="7223760" cy="45720"/>
-          </a:xfrm>
-          <a:prstGeom prst="rect">
-            <a:avLst/>
-          </a:prstGeom>
-          <a:noFill/>
-        </p:spPr>
-        <p:txBody>
-          <a:bodyPr wrap="square" lIns="0" rIns="0" tIns="0" bIns="0">
-            <a:spAutoFit/>
-          </a:bodyPr>
-          <a:lstStyle/>
-          <a:p>
-            <a:pPr algn="l"/>
-            <a:r>
-              <a:rPr sz="1050" b="0">
-                <a:solidFill>
-                  <a:srgbClr val="2D3748"/>
-                </a:solidFill>
-                <a:latin typeface="Calibri"/>
-              </a:rPr>
-              <a:t>Pure Haiku / pure Sonnet / pure Opus / tiered. The headline cost–accuracy surface comes out of this experiment.</a:t>
-            </a:r>
-          </a:p>
-        </p:txBody>
-      </p:sp>
-      <p:sp>
-        <p:nvSpPr>
-          <p:cNvPr id="14" name="TextBox 13"/>
-          <p:cNvSpPr txBox="1"/>
-          <p:nvPr/>
-        </p:nvSpPr>
-        <p:spPr>
-          <a:xfrm>
-            <a:off x="7909560" y="2084832"/>
-            <a:ext cx="640080" cy="228600"/>
-          </a:xfrm>
-          <a:prstGeom prst="rect">
-            <a:avLst/>
-          </a:prstGeom>
-          <a:noFill/>
-        </p:spPr>
-        <p:txBody>
-          <a:bodyPr wrap="square" lIns="0" rIns="0" tIns="0" bIns="0">
-            <a:spAutoFit/>
-          </a:bodyPr>
-          <a:lstStyle/>
-          <a:p>
-            <a:pPr algn="r"/>
-            <a:r>
-              <a:rPr sz="900" b="1">
-                <a:solidFill>
-                  <a:srgbClr val="1E3A5F"/>
-                </a:solidFill>
-                <a:latin typeface="Calibri"/>
-              </a:rPr>
-              <a:t>JUN</a:t>
-            </a:r>
-          </a:p>
-        </p:txBody>
-      </p:sp>
-      <p:sp>
-        <p:nvSpPr>
-          <p:cNvPr id="15" name="Rectangle 14"/>
-          <p:cNvSpPr/>
-          <p:nvPr/>
-        </p:nvSpPr>
-        <p:spPr>
-          <a:xfrm>
-            <a:off x="457200" y="2606040"/>
-            <a:ext cx="8229600" cy="594360"/>
-          </a:xfrm>
-          <a:prstGeom prst="rect">
-            <a:avLst/>
-          </a:prstGeom>
-          <a:solidFill>
-            <a:srgbClr val="F7FAFC"/>
-          </a:solidFill>
-          <a:ln w="6350">
-            <a:solidFill>
-              <a:srgbClr val="E2E8F0"/>
-            </a:solidFill>
-          </a:ln>
-        </p:spPr>
-        <p:style>
-          <a:lnRef idx="1">
-            <a:schemeClr val="accent1"/>
-          </a:lnRef>
-          <a:fillRef idx="3">
-            <a:schemeClr val="accent1"/>
-          </a:fillRef>
-          <a:effectRef idx="2">
-            <a:schemeClr val="accent1"/>
-          </a:effectRef>
-          <a:fontRef idx="minor">
-            <a:schemeClr val="lt1"/>
-          </a:fontRef>
-        </p:style>
-        <p:txBody>
-          <a:bodyPr rtlCol="0" anchor="ctr"/>
-          <a:lstStyle/>
-          <a:p>
-            <a:pPr algn="ctr"/>
-          </a:p>
-        </p:txBody>
-      </p:sp>
-      <p:sp>
-        <p:nvSpPr>
-          <p:cNvPr id="16" name="Oval 15"/>
-          <p:cNvSpPr/>
-          <p:nvPr/>
-        </p:nvSpPr>
-        <p:spPr>
-          <a:xfrm>
-            <a:off x="640080" y="2674620"/>
-            <a:ext cx="457200" cy="457200"/>
-          </a:xfrm>
-          <a:prstGeom prst="ellipse">
-            <a:avLst/>
-          </a:prstGeom>
-          <a:solidFill>
-            <a:srgbClr val="1A202C"/>
-          </a:solidFill>
-          <a:ln>
-            <a:noFill/>
-          </a:ln>
-        </p:spPr>
-        <p:style>
-          <a:lnRef idx="1">
-            <a:schemeClr val="accent1"/>
-          </a:lnRef>
-          <a:fillRef idx="3">
-            <a:schemeClr val="accent1"/>
-          </a:fillRef>
-          <a:effectRef idx="2">
-            <a:schemeClr val="accent1"/>
-          </a:effectRef>
-          <a:fontRef idx="minor">
-            <a:schemeClr val="lt1"/>
-          </a:fontRef>
-        </p:style>
-        <p:txBody>
-          <a:bodyPr rtlCol="0" anchor="ctr"/>
-          <a:lstStyle/>
-          <a:p>
-            <a:pPr algn="ctr"/>
-            <a:r>
-              <a:rPr sz="1600" b="1">
-                <a:solidFill>
-                  <a:srgbClr val="FFFFFF"/>
-                </a:solidFill>
-                <a:latin typeface="Calibri"/>
-              </a:rPr>
-              <a:t>3</a:t>
-            </a:r>
-          </a:p>
-        </p:txBody>
-      </p:sp>
-      <p:sp>
-        <p:nvSpPr>
-          <p:cNvPr id="17" name="TextBox 16"/>
-          <p:cNvSpPr txBox="1"/>
-          <p:nvPr/>
-        </p:nvSpPr>
-        <p:spPr>
-          <a:xfrm>
-            <a:off x="1234440" y="2770632"/>
-            <a:ext cx="7223760" cy="274320"/>
-          </a:xfrm>
-          <a:prstGeom prst="rect">
-            <a:avLst/>
-          </a:prstGeom>
-          <a:noFill/>
-        </p:spPr>
-        <p:txBody>
-          <a:bodyPr wrap="square" lIns="0" rIns="0" tIns="0" bIns="0">
-            <a:spAutoFit/>
-          </a:bodyPr>
-          <a:lstStyle/>
-          <a:p>
-            <a:pPr algn="l"/>
-            <a:r>
-              <a:rPr sz="1300" b="1">
-                <a:solidFill>
-                  <a:srgbClr val="1A202C"/>
-                </a:solidFill>
-                <a:latin typeface="Calibri"/>
-              </a:rPr>
-              <a:t>External validity test</a:t>
-            </a:r>
-          </a:p>
-        </p:txBody>
-      </p:sp>
-      <p:sp>
-        <p:nvSpPr>
-          <p:cNvPr id="18" name="TextBox 17"/>
-          <p:cNvSpPr txBox="1"/>
-          <p:nvPr/>
-        </p:nvSpPr>
-        <p:spPr>
-          <a:xfrm>
-            <a:off x="1234440" y="3063240"/>
-            <a:ext cx="7223760" cy="45720"/>
-          </a:xfrm>
-          <a:prstGeom prst="rect">
-            <a:avLst/>
-          </a:prstGeom>
-          <a:noFill/>
-        </p:spPr>
-        <p:txBody>
-          <a:bodyPr wrap="square" lIns="0" rIns="0" tIns="0" bIns="0">
-            <a:spAutoFit/>
-          </a:bodyPr>
-          <a:lstStyle/>
-          <a:p>
-            <a:pPr algn="l"/>
-            <a:r>
-              <a:rPr sz="1050" b="0">
-                <a:solidFill>
-                  <a:srgbClr val="2D3748"/>
-                </a:solidFill>
-                <a:latin typeface="Calibri"/>
-              </a:rPr>
-              <a:t>Pipeline frozen, then run against 2024 ODMI cycle as the held-out set. Delta against 2025 is itself a result.</a:t>
-            </a:r>
-          </a:p>
-        </p:txBody>
-      </p:sp>
-      <p:sp>
-        <p:nvSpPr>
-          <p:cNvPr id="19" name="TextBox 18"/>
-          <p:cNvSpPr txBox="1"/>
-          <p:nvPr/>
-        </p:nvSpPr>
-        <p:spPr>
-          <a:xfrm>
-            <a:off x="7909560" y="2770632"/>
-            <a:ext cx="640080" cy="228600"/>
-          </a:xfrm>
-          <a:prstGeom prst="rect">
-            <a:avLst/>
-          </a:prstGeom>
-          <a:noFill/>
-        </p:spPr>
-        <p:txBody>
-          <a:bodyPr wrap="square" lIns="0" rIns="0" tIns="0" bIns="0">
-            <a:spAutoFit/>
-          </a:bodyPr>
-          <a:lstStyle/>
-          <a:p>
-            <a:pPr algn="r"/>
-            <a:r>
-              <a:rPr sz="900" b="1">
-                <a:solidFill>
-                  <a:srgbClr val="0F766E"/>
-                </a:solidFill>
-                <a:latin typeface="Calibri"/>
-              </a:rPr>
-              <a:t>JUL</a:t>
-            </a:r>
-          </a:p>
-        </p:txBody>
-      </p:sp>
-      <p:sp>
-        <p:nvSpPr>
-          <p:cNvPr id="20" name="Rectangle 19"/>
-          <p:cNvSpPr/>
-          <p:nvPr/>
-        </p:nvSpPr>
-        <p:spPr>
-          <a:xfrm>
-            <a:off x="457200" y="3291840"/>
-            <a:ext cx="8229600" cy="594360"/>
-          </a:xfrm>
-          <a:prstGeom prst="rect">
-            <a:avLst/>
-          </a:prstGeom>
-          <a:solidFill>
-            <a:srgbClr val="F7FAFC"/>
-          </a:solidFill>
-          <a:ln w="6350">
-            <a:solidFill>
-              <a:srgbClr val="E2E8F0"/>
-            </a:solidFill>
-          </a:ln>
-        </p:spPr>
-        <p:style>
-          <a:lnRef idx="1">
-            <a:schemeClr val="accent1"/>
-          </a:lnRef>
-          <a:fillRef idx="3">
-            <a:schemeClr val="accent1"/>
-          </a:fillRef>
-          <a:effectRef idx="2">
-            <a:schemeClr val="accent1"/>
-          </a:effectRef>
-          <a:fontRef idx="minor">
-            <a:schemeClr val="lt1"/>
-          </a:fontRef>
-        </p:style>
-        <p:txBody>
-          <a:bodyPr rtlCol="0" anchor="ctr"/>
-          <a:lstStyle/>
-          <a:p>
-            <a:pPr algn="ctr"/>
-          </a:p>
-        </p:txBody>
-      </p:sp>
-      <p:sp>
-        <p:nvSpPr>
-          <p:cNvPr id="21" name="Oval 20"/>
-          <p:cNvSpPr/>
-          <p:nvPr/>
-        </p:nvSpPr>
-        <p:spPr>
-          <a:xfrm>
-            <a:off x="640080" y="3360420"/>
-            <a:ext cx="457200" cy="457200"/>
-          </a:xfrm>
-          <a:prstGeom prst="ellipse">
-            <a:avLst/>
-          </a:prstGeom>
-          <a:solidFill>
-            <a:srgbClr val="1A202C"/>
-          </a:solidFill>
-          <a:ln>
-            <a:noFill/>
-          </a:ln>
-        </p:spPr>
-        <p:style>
-          <a:lnRef idx="1">
-            <a:schemeClr val="accent1"/>
-          </a:lnRef>
-          <a:fillRef idx="3">
-            <a:schemeClr val="accent1"/>
-          </a:fillRef>
-          <a:effectRef idx="2">
-            <a:schemeClr val="accent1"/>
-          </a:effectRef>
-          <a:fontRef idx="minor">
-            <a:schemeClr val="lt1"/>
-          </a:fontRef>
-        </p:style>
-        <p:txBody>
-          <a:bodyPr rtlCol="0" anchor="ctr"/>
-          <a:lstStyle/>
-          <a:p>
-            <a:pPr algn="ctr"/>
-            <a:r>
-              <a:rPr sz="1600" b="1">
-                <a:solidFill>
-                  <a:srgbClr val="FFFFFF"/>
-                </a:solidFill>
-                <a:latin typeface="Calibri"/>
-              </a:rPr>
-              <a:t>4</a:t>
-            </a:r>
-          </a:p>
-        </p:txBody>
-      </p:sp>
-      <p:sp>
-        <p:nvSpPr>
-          <p:cNvPr id="22" name="TextBox 21"/>
-          <p:cNvSpPr txBox="1"/>
-          <p:nvPr/>
-        </p:nvSpPr>
-        <p:spPr>
-          <a:xfrm>
-            <a:off x="1234440" y="3456432"/>
-            <a:ext cx="7223760" cy="274320"/>
-          </a:xfrm>
-          <a:prstGeom prst="rect">
-            <a:avLst/>
-          </a:prstGeom>
-          <a:noFill/>
-        </p:spPr>
-        <p:txBody>
-          <a:bodyPr wrap="square" lIns="0" rIns="0" tIns="0" bIns="0">
-            <a:spAutoFit/>
-          </a:bodyPr>
-          <a:lstStyle/>
-          <a:p>
-            <a:pPr algn="l"/>
-            <a:r>
-              <a:rPr sz="1300" b="1">
-                <a:solidFill>
-                  <a:srgbClr val="1A202C"/>
-                </a:solidFill>
-                <a:latin typeface="Calibri"/>
-              </a:rPr>
-              <a:t>Phase C and live 2026 cycle</a:t>
-            </a:r>
-          </a:p>
-        </p:txBody>
-      </p:sp>
-      <p:sp>
-        <p:nvSpPr>
-          <p:cNvPr id="23" name="TextBox 22"/>
-          <p:cNvSpPr txBox="1"/>
-          <p:nvPr/>
-        </p:nvSpPr>
-        <p:spPr>
-          <a:xfrm>
-            <a:off x="1234440" y="3749040"/>
-            <a:ext cx="7223760" cy="45720"/>
-          </a:xfrm>
-          <a:prstGeom prst="rect">
-            <a:avLst/>
-          </a:prstGeom>
-          <a:noFill/>
-        </p:spPr>
-        <p:txBody>
-          <a:bodyPr wrap="square" lIns="0" rIns="0" tIns="0" bIns="0">
-            <a:spAutoFit/>
-          </a:bodyPr>
-          <a:lstStyle/>
-          <a:p>
-            <a:pPr algn="l"/>
-            <a:r>
-              <a:rPr sz="1050" b="0">
-                <a:solidFill>
-                  <a:srgbClr val="2D3748"/>
-                </a:solidFill>
-                <a:latin typeface="Calibri"/>
-              </a:rPr>
-              <a:t>Stretch: all 36 EU countries. Live 2026 indicators submitted to human review; acceptance rate is the headline metric.</a:t>
-            </a:r>
-          </a:p>
-        </p:txBody>
-      </p:sp>
-      <p:sp>
-        <p:nvSpPr>
-          <p:cNvPr id="24" name="TextBox 23"/>
-          <p:cNvSpPr txBox="1"/>
-          <p:nvPr/>
-        </p:nvSpPr>
-        <p:spPr>
-          <a:xfrm>
-            <a:off x="7909560" y="3456432"/>
-            <a:ext cx="640080" cy="228600"/>
-          </a:xfrm>
-          <a:prstGeom prst="rect">
-            <a:avLst/>
-          </a:prstGeom>
-          <a:noFill/>
-        </p:spPr>
-        <p:txBody>
-          <a:bodyPr wrap="square" lIns="0" rIns="0" tIns="0" bIns="0">
-            <a:spAutoFit/>
-          </a:bodyPr>
-          <a:lstStyle/>
-          <a:p>
-            <a:pPr algn="r"/>
-            <a:r>
-              <a:rPr sz="900" b="1">
-                <a:solidFill>
-                  <a:srgbClr val="0F766E"/>
-                </a:solidFill>
-                <a:latin typeface="Calibri"/>
-              </a:rPr>
-              <a:t>JUL</a:t>
-            </a:r>
-          </a:p>
-        </p:txBody>
-      </p:sp>
-      <p:sp>
-        <p:nvSpPr>
-          <p:cNvPr id="25" name="Rectangle 24"/>
-          <p:cNvSpPr/>
-          <p:nvPr/>
-        </p:nvSpPr>
-        <p:spPr>
-          <a:xfrm>
-            <a:off x="457200" y="3977640"/>
-            <a:ext cx="8229600" cy="594360"/>
-          </a:xfrm>
-          <a:prstGeom prst="rect">
-            <a:avLst/>
-          </a:prstGeom>
-          <a:solidFill>
-            <a:srgbClr val="F7FAFC"/>
-          </a:solidFill>
-          <a:ln w="6350">
-            <a:solidFill>
-              <a:srgbClr val="E2E8F0"/>
-            </a:solidFill>
-          </a:ln>
-        </p:spPr>
-        <p:style>
-          <a:lnRef idx="1">
-            <a:schemeClr val="accent1"/>
-          </a:lnRef>
-          <a:fillRef idx="3">
-            <a:schemeClr val="accent1"/>
-          </a:fillRef>
-          <a:effectRef idx="2">
-            <a:schemeClr val="accent1"/>
-          </a:effectRef>
-          <a:fontRef idx="minor">
-            <a:schemeClr val="lt1"/>
-          </a:fontRef>
-        </p:style>
-        <p:txBody>
-          <a:bodyPr rtlCol="0" anchor="ctr"/>
-          <a:lstStyle/>
-          <a:p>
-            <a:pPr algn="ctr"/>
-          </a:p>
-        </p:txBody>
-      </p:sp>
-      <p:sp>
-        <p:nvSpPr>
-          <p:cNvPr id="26" name="Oval 25"/>
-          <p:cNvSpPr/>
-          <p:nvPr/>
-        </p:nvSpPr>
-        <p:spPr>
-          <a:xfrm>
-            <a:off x="640080" y="4046220"/>
-            <a:ext cx="457200" cy="457200"/>
-          </a:xfrm>
-          <a:prstGeom prst="ellipse">
-            <a:avLst/>
-          </a:prstGeom>
-          <a:solidFill>
-            <a:srgbClr val="1A202C"/>
-          </a:solidFill>
-          <a:ln>
-            <a:noFill/>
-          </a:ln>
-        </p:spPr>
-        <p:style>
-          <a:lnRef idx="1">
-            <a:schemeClr val="accent1"/>
-          </a:lnRef>
-          <a:fillRef idx="3">
-            <a:schemeClr val="accent1"/>
-          </a:fillRef>
-          <a:effectRef idx="2">
-            <a:schemeClr val="accent1"/>
-          </a:effectRef>
-          <a:fontRef idx="minor">
-            <a:schemeClr val="lt1"/>
-          </a:fontRef>
-        </p:style>
-        <p:txBody>
-          <a:bodyPr rtlCol="0" anchor="ctr"/>
-          <a:lstStyle/>
-          <a:p>
-            <a:pPr algn="ctr"/>
-            <a:r>
-              <a:rPr sz="1600" b="1">
-                <a:solidFill>
-                  <a:srgbClr val="FFFFFF"/>
-                </a:solidFill>
-                <a:latin typeface="Calibri"/>
-              </a:rPr>
-              <a:t>5</a:t>
-            </a:r>
-          </a:p>
-        </p:txBody>
-      </p:sp>
-      <p:sp>
-        <p:nvSpPr>
-          <p:cNvPr id="27" name="TextBox 26"/>
-          <p:cNvSpPr txBox="1"/>
-          <p:nvPr/>
-        </p:nvSpPr>
-        <p:spPr>
-          <a:xfrm>
-            <a:off x="1234440" y="4142232"/>
-            <a:ext cx="7223760" cy="274320"/>
-          </a:xfrm>
-          <a:prstGeom prst="rect">
-            <a:avLst/>
-          </a:prstGeom>
-          <a:noFill/>
-        </p:spPr>
-        <p:txBody>
-          <a:bodyPr wrap="square" lIns="0" rIns="0" tIns="0" bIns="0">
-            <a:spAutoFit/>
-          </a:bodyPr>
-          <a:lstStyle/>
-          <a:p>
-            <a:pPr algn="l"/>
-            <a:r>
-              <a:rPr sz="1300" b="1">
-                <a:solidFill>
-                  <a:srgbClr val="1A202C"/>
-                </a:solidFill>
-                <a:latin typeface="Calibri"/>
-              </a:rPr>
-              <a:t>Dissertation submission</a:t>
-            </a:r>
-          </a:p>
-        </p:txBody>
-      </p:sp>
-      <p:sp>
-        <p:nvSpPr>
-          <p:cNvPr id="28" name="TextBox 27"/>
-          <p:cNvSpPr txBox="1"/>
-          <p:nvPr/>
-        </p:nvSpPr>
-        <p:spPr>
-          <a:xfrm>
-            <a:off x="1234440" y="4434840"/>
-            <a:ext cx="7223760" cy="45720"/>
-          </a:xfrm>
-          <a:prstGeom prst="rect">
-            <a:avLst/>
-          </a:prstGeom>
-          <a:noFill/>
-        </p:spPr>
-        <p:txBody>
-          <a:bodyPr wrap="square" lIns="0" rIns="0" tIns="0" bIns="0">
-            <a:spAutoFit/>
-          </a:bodyPr>
-          <a:lstStyle/>
-          <a:p>
-            <a:pPr algn="l"/>
-            <a:r>
-              <a:rPr sz="1050" b="0">
-                <a:solidFill>
-                  <a:srgbClr val="2D3748"/>
-                </a:solidFill>
-                <a:latin typeface="Calibri"/>
-              </a:rPr>
-              <a:t>Failure mode taxonomy and accuracy–cost surface as primary contributions. Final manuscript due 2 August 2026.</a:t>
-            </a:r>
-          </a:p>
-        </p:txBody>
-      </p:sp>
-      <p:sp>
-        <p:nvSpPr>
-          <p:cNvPr id="29" name="TextBox 28"/>
-          <p:cNvSpPr txBox="1"/>
-          <p:nvPr/>
-        </p:nvSpPr>
-        <p:spPr>
-          <a:xfrm>
-            <a:off x="7909560" y="4142232"/>
-            <a:ext cx="640080" cy="228600"/>
-          </a:xfrm>
-          <a:prstGeom prst="rect">
-            <a:avLst/>
-          </a:prstGeom>
-          <a:noFill/>
-        </p:spPr>
-        <p:txBody>
-          <a:bodyPr wrap="square" lIns="0" rIns="0" tIns="0" bIns="0">
-            <a:spAutoFit/>
-          </a:bodyPr>
-          <a:lstStyle/>
-          <a:p>
-            <a:pPr algn="r"/>
-            <a:r>
-              <a:rPr sz="900" b="1">
-                <a:solidFill>
-                  <a:srgbClr val="0D9488"/>
-                </a:solidFill>
-                <a:latin typeface="Calibri"/>
-              </a:rPr>
-              <a:t>AUG</a:t>
-            </a:r>
-          </a:p>
-        </p:txBody>
-      </p:sp>
-      <p:sp>
-        <p:nvSpPr>
-          <p:cNvPr id="30" name="TextBox 29"/>
-          <p:cNvSpPr txBox="1"/>
-          <p:nvPr/>
-        </p:nvSpPr>
-        <p:spPr>
-          <a:xfrm>
-            <a:off x="457200" y="4850892"/>
-            <a:ext cx="8229600" cy="182880"/>
-          </a:xfrm>
-          <a:prstGeom prst="rect">
-            <a:avLst/>
-          </a:prstGeom>
-          <a:noFill/>
-        </p:spPr>
-        <p:txBody>
-          <a:bodyPr wrap="square" lIns="0" rIns="0" tIns="0" bIns="0">
-            <a:spAutoFit/>
-          </a:bodyPr>
-          <a:lstStyle/>
-          <a:p>
-            <a:pPr algn="l"/>
-            <a:r>
-              <a:rPr sz="800" b="0">
-                <a:solidFill>
-                  <a:srgbClr val="718096"/>
-                </a:solidFill>
-                <a:latin typeface="Calibri"/>
-              </a:rPr>
-              <a:t>ODMI Agent Swarm  ·  Benjy Bream  ·  King's College London  ·  8 / 9</a:t>
-            </a:r>
-          </a:p>
-        </p:txBody>
-      </p:sp>
-    </p:spTree>
-  </p:cSld>
-  <p:clrMapOvr>
-    <a:masterClrMapping/>
-  </p:clrMapOvr>
-</p:sld>
-</file>
-
-<file path=ppt/slides/slide9.xml><?xml version="1.0" encoding="utf-8"?>
-<p:sld xmlns:a="http://schemas.openxmlformats.org/drawingml/2006/main" xmlns:p="http://schemas.openxmlformats.org/presentationml/2006/main" xmlns:r="http://schemas.openxmlformats.org/officeDocument/2006/relationships">
-  <p:cSld>
-    <p:spTree>
-      <p:nvGrpSpPr>
-        <p:cNvPr id="1" name=""/>
-        <p:cNvGrpSpPr/>
-        <p:nvPr/>
-      </p:nvGrpSpPr>
-      <p:grpSpPr/>
-      <p:sp>
-        <p:nvSpPr>
-          <p:cNvPr id="2" name="Rectangle 1"/>
-          <p:cNvSpPr/>
-          <p:nvPr/>
-        </p:nvSpPr>
-        <p:spPr>
-          <a:xfrm>
-            <a:off x="0" y="0"/>
-            <a:ext cx="9144000" cy="960120"/>
-          </a:xfrm>
-          <a:prstGeom prst="rect">
-            <a:avLst/>
-          </a:prstGeom>
-          <a:solidFill>
-            <a:srgbClr val="1A202C"/>
-          </a:solidFill>
-          <a:ln>
-            <a:noFill/>
-          </a:ln>
-        </p:spPr>
-        <p:style>
-          <a:lnRef idx="1">
-            <a:schemeClr val="accent1"/>
-          </a:lnRef>
-          <a:fillRef idx="3">
-            <a:schemeClr val="accent1"/>
-          </a:fillRef>
-          <a:effectRef idx="2">
-            <a:schemeClr val="accent1"/>
-          </a:effectRef>
-          <a:fontRef idx="minor">
-            <a:schemeClr val="lt1"/>
-          </a:fontRef>
-        </p:style>
-        <p:txBody>
-          <a:bodyPr rtlCol="0" anchor="ctr"/>
-          <a:lstStyle/>
-          <a:p>
-            <a:pPr algn="ctr"/>
-          </a:p>
-        </p:txBody>
-      </p:sp>
-      <p:sp>
-        <p:nvSpPr>
-          <p:cNvPr id="3" name="TextBox 2"/>
-          <p:cNvSpPr txBox="1"/>
-          <p:nvPr/>
-        </p:nvSpPr>
-        <p:spPr>
-          <a:xfrm>
-            <a:off x="457200" y="164592"/>
-            <a:ext cx="7772400" cy="228600"/>
-          </a:xfrm>
-          <a:prstGeom prst="rect">
-            <a:avLst/>
-          </a:prstGeom>
-          <a:noFill/>
-        </p:spPr>
-        <p:txBody>
-          <a:bodyPr wrap="square" lIns="0" rIns="0" tIns="0" bIns="0">
-            <a:spAutoFit/>
-          </a:bodyPr>
-          <a:lstStyle/>
-          <a:p>
-            <a:pPr algn="l"/>
-            <a:r>
-              <a:rPr sz="900" b="1">
-                <a:solidFill>
-                  <a:srgbClr val="14B8A6"/>
-                </a:solidFill>
-                <a:latin typeface="Calibri"/>
-              </a:rPr>
-              <a:t>NUMBERS AS OF GENERATION</a:t>
-            </a:r>
-          </a:p>
-        </p:txBody>
-      </p:sp>
-      <p:sp>
-        <p:nvSpPr>
-          <p:cNvPr id="4" name="TextBox 3"/>
-          <p:cNvSpPr txBox="1"/>
-          <p:nvPr/>
-        </p:nvSpPr>
-        <p:spPr>
-          <a:xfrm>
-            <a:off x="457200" y="384048"/>
-            <a:ext cx="7772400" cy="502920"/>
-          </a:xfrm>
-          <a:prstGeom prst="rect">
-            <a:avLst/>
-          </a:prstGeom>
-          <a:noFill/>
-        </p:spPr>
-        <p:txBody>
-          <a:bodyPr wrap="square" lIns="0" rIns="0" tIns="0" bIns="0">
-            <a:spAutoFit/>
-          </a:bodyPr>
-          <a:lstStyle/>
-          <a:p>
-            <a:pPr algn="l"/>
-            <a:r>
-              <a:rPr sz="2400" b="1">
-                <a:solidFill>
-                  <a:srgbClr val="FFFFFF"/>
-                </a:solidFill>
-                <a:latin typeface="Calibri"/>
-              </a:rPr>
-              <a:t>Snapshot today</a:t>
-            </a:r>
-          </a:p>
-        </p:txBody>
-      </p:sp>
-      <p:sp>
-        <p:nvSpPr>
-          <p:cNvPr id="5" name="Rectangle 4"/>
-          <p:cNvSpPr/>
-          <p:nvPr/>
-        </p:nvSpPr>
-        <p:spPr>
-          <a:xfrm>
-            <a:off x="457200" y="1234440"/>
-            <a:ext cx="2034540" cy="1325880"/>
-          </a:xfrm>
-          <a:prstGeom prst="rect">
-            <a:avLst/>
-          </a:prstGeom>
-          <a:solidFill>
-            <a:srgbClr val="F7FAFC"/>
-          </a:solidFill>
-          <a:ln w="6350">
-            <a:solidFill>
-              <a:srgbClr val="E2E8F0"/>
-            </a:solidFill>
-          </a:ln>
-        </p:spPr>
-        <p:style>
-          <a:lnRef idx="1">
-            <a:schemeClr val="accent1"/>
-          </a:lnRef>
-          <a:fillRef idx="3">
-            <a:schemeClr val="accent1"/>
-          </a:fillRef>
-          <a:effectRef idx="2">
-            <a:schemeClr val="accent1"/>
-          </a:effectRef>
-          <a:fontRef idx="minor">
-            <a:schemeClr val="lt1"/>
-          </a:fontRef>
-        </p:style>
-        <p:txBody>
-          <a:bodyPr rtlCol="0" anchor="ctr"/>
-          <a:lstStyle/>
-          <a:p>
-            <a:pPr algn="ctr"/>
-          </a:p>
-        </p:txBody>
-      </p:sp>
-      <p:sp>
-        <p:nvSpPr>
-          <p:cNvPr id="6" name="Rectangle 5"/>
-          <p:cNvSpPr/>
-          <p:nvPr/>
-        </p:nvSpPr>
-        <p:spPr>
-          <a:xfrm>
-            <a:off x="457200" y="1234440"/>
-            <a:ext cx="2034540" cy="54864"/>
+            <a:off x="4983480" y="1810512"/>
+            <a:ext cx="164592" cy="164592"/>
           </a:xfrm>
           <a:prstGeom prst="rect">
             <a:avLst/>
@@ -11837,14 +8379,14 @@
       </p:sp>
       <p:sp>
         <p:nvSpPr>
-          <p:cNvPr id="7" name="TextBox 6"/>
+          <p:cNvPr id="23" name="TextBox 22"/>
           <p:cNvSpPr txBox="1"/>
           <p:nvPr/>
         </p:nvSpPr>
         <p:spPr>
           <a:xfrm>
-            <a:off x="685800" y="1417320"/>
-            <a:ext cx="1577340" cy="228600"/>
+            <a:off x="5394960" y="2712720"/>
+            <a:ext cx="3520440" cy="256032"/>
           </a:xfrm>
           <a:prstGeom prst="rect">
             <a:avLst/>
@@ -11859,27 +8401,27 @@
           <a:p>
             <a:pPr algn="l"/>
             <a:r>
-              <a:rPr sz="900" b="1">
-                <a:solidFill>
-                  <a:srgbClr val="718096"/>
+              <a:rPr sz="1100" b="1">
+                <a:solidFill>
+                  <a:srgbClr val="1A202C"/>
                 </a:solidFill>
                 <a:latin typeface="Calibri"/>
               </a:rPr>
-              <a:t>QUESTIONS CATALOGUE</a:t>
-            </a:r>
-          </a:p>
-        </p:txBody>
-      </p:sp>
-      <p:sp>
-        <p:nvSpPr>
-          <p:cNvPr id="8" name="TextBox 7"/>
+              <a:t>External validity (2024 cycle)</a:t>
+            </a:r>
+          </a:p>
+        </p:txBody>
+      </p:sp>
+      <p:sp>
+        <p:nvSpPr>
+          <p:cNvPr id="24" name="TextBox 23"/>
           <p:cNvSpPr txBox="1"/>
           <p:nvPr/>
         </p:nvSpPr>
         <p:spPr>
           <a:xfrm>
-            <a:off x="685800" y="1645920"/>
-            <a:ext cx="1577340" cy="640080"/>
+            <a:off x="5394960" y="2968752"/>
+            <a:ext cx="3520440" cy="682752"/>
           </a:xfrm>
           <a:prstGeom prst="rect">
             <a:avLst/>
@@ -11894,627 +8436,13 @@
           <a:p>
             <a:pPr algn="l"/>
             <a:r>
-              <a:rPr sz="2800" b="1">
-                <a:solidFill>
-                  <a:srgbClr val="1A202C"/>
+              <a:rPr sz="1000" b="0">
+                <a:solidFill>
+                  <a:srgbClr val="2D3748"/>
                 </a:solidFill>
                 <a:latin typeface="Calibri"/>
               </a:rPr>
-              <a:t>143</a:t>
-            </a:r>
-          </a:p>
-        </p:txBody>
-      </p:sp>
-      <p:sp>
-        <p:nvSpPr>
-          <p:cNvPr id="9" name="TextBox 8"/>
-          <p:cNvSpPr txBox="1"/>
-          <p:nvPr/>
-        </p:nvSpPr>
-        <p:spPr>
-          <a:xfrm>
-            <a:off x="685800" y="2240280"/>
-            <a:ext cx="1577340" cy="228600"/>
-          </a:xfrm>
-          <a:prstGeom prst="rect">
-            <a:avLst/>
-          </a:prstGeom>
-          <a:noFill/>
-        </p:spPr>
-        <p:txBody>
-          <a:bodyPr wrap="square" lIns="0" rIns="0" tIns="0" bIns="0">
-            <a:spAutoFit/>
-          </a:bodyPr>
-          <a:lstStyle/>
-          <a:p>
-            <a:pPr algn="l"/>
-            <a:r>
-              <a:rPr sz="950" b="0">
-                <a:solidFill>
-                  <a:srgbClr val="2D3748"/>
-                </a:solidFill>
-                <a:latin typeface="Calibri"/>
-              </a:rPr>
-              <a:t>Loaded into SQLite.</a:t>
-            </a:r>
-          </a:p>
-        </p:txBody>
-      </p:sp>
-      <p:sp>
-        <p:nvSpPr>
-          <p:cNvPr id="10" name="Rectangle 9"/>
-          <p:cNvSpPr/>
-          <p:nvPr/>
-        </p:nvSpPr>
-        <p:spPr>
-          <a:xfrm>
-            <a:off x="2555748" y="1234440"/>
-            <a:ext cx="2034540" cy="1325880"/>
-          </a:xfrm>
-          <a:prstGeom prst="rect">
-            <a:avLst/>
-          </a:prstGeom>
-          <a:solidFill>
-            <a:srgbClr val="F7FAFC"/>
-          </a:solidFill>
-          <a:ln w="6350">
-            <a:solidFill>
-              <a:srgbClr val="E2E8F0"/>
-            </a:solidFill>
-          </a:ln>
-        </p:spPr>
-        <p:style>
-          <a:lnRef idx="1">
-            <a:schemeClr val="accent1"/>
-          </a:lnRef>
-          <a:fillRef idx="3">
-            <a:schemeClr val="accent1"/>
-          </a:fillRef>
-          <a:effectRef idx="2">
-            <a:schemeClr val="accent1"/>
-          </a:effectRef>
-          <a:fontRef idx="minor">
-            <a:schemeClr val="lt1"/>
-          </a:fontRef>
-        </p:style>
-        <p:txBody>
-          <a:bodyPr rtlCol="0" anchor="ctr"/>
-          <a:lstStyle/>
-          <a:p>
-            <a:pPr algn="ctr"/>
-          </a:p>
-        </p:txBody>
-      </p:sp>
-      <p:sp>
-        <p:nvSpPr>
-          <p:cNvPr id="11" name="Rectangle 10"/>
-          <p:cNvSpPr/>
-          <p:nvPr/>
-        </p:nvSpPr>
-        <p:spPr>
-          <a:xfrm>
-            <a:off x="2555748" y="1234440"/>
-            <a:ext cx="2034540" cy="54864"/>
-          </a:xfrm>
-          <a:prstGeom prst="rect">
-            <a:avLst/>
-          </a:prstGeom>
-          <a:solidFill>
-            <a:srgbClr val="1E3A5F"/>
-          </a:solidFill>
-          <a:ln>
-            <a:noFill/>
-          </a:ln>
-        </p:spPr>
-        <p:style>
-          <a:lnRef idx="1">
-            <a:schemeClr val="accent1"/>
-          </a:lnRef>
-          <a:fillRef idx="3">
-            <a:schemeClr val="accent1"/>
-          </a:fillRef>
-          <a:effectRef idx="2">
-            <a:schemeClr val="accent1"/>
-          </a:effectRef>
-          <a:fontRef idx="minor">
-            <a:schemeClr val="lt1"/>
-          </a:fontRef>
-        </p:style>
-        <p:txBody>
-          <a:bodyPr rtlCol="0" anchor="ctr"/>
-          <a:lstStyle/>
-          <a:p>
-            <a:pPr algn="ctr"/>
-          </a:p>
-        </p:txBody>
-      </p:sp>
-      <p:sp>
-        <p:nvSpPr>
-          <p:cNvPr id="12" name="TextBox 11"/>
-          <p:cNvSpPr txBox="1"/>
-          <p:nvPr/>
-        </p:nvSpPr>
-        <p:spPr>
-          <a:xfrm>
-            <a:off x="2784348" y="1417320"/>
-            <a:ext cx="1577340" cy="228600"/>
-          </a:xfrm>
-          <a:prstGeom prst="rect">
-            <a:avLst/>
-          </a:prstGeom>
-          <a:noFill/>
-        </p:spPr>
-        <p:txBody>
-          <a:bodyPr wrap="square" lIns="0" rIns="0" tIns="0" bIns="0">
-            <a:spAutoFit/>
-          </a:bodyPr>
-          <a:lstStyle/>
-          <a:p>
-            <a:pPr algn="l"/>
-            <a:r>
-              <a:rPr sz="900" b="1">
-                <a:solidFill>
-                  <a:srgbClr val="718096"/>
-                </a:solidFill>
-                <a:latin typeface="Calibri"/>
-              </a:rPr>
-              <a:t>HAND-MARKS LOCKED</a:t>
-            </a:r>
-          </a:p>
-        </p:txBody>
-      </p:sp>
-      <p:sp>
-        <p:nvSpPr>
-          <p:cNvPr id="13" name="TextBox 12"/>
-          <p:cNvSpPr txBox="1"/>
-          <p:nvPr/>
-        </p:nvSpPr>
-        <p:spPr>
-          <a:xfrm>
-            <a:off x="2784348" y="1645920"/>
-            <a:ext cx="1577340" cy="640080"/>
-          </a:xfrm>
-          <a:prstGeom prst="rect">
-            <a:avLst/>
-          </a:prstGeom>
-          <a:noFill/>
-        </p:spPr>
-        <p:txBody>
-          <a:bodyPr wrap="square" lIns="0" rIns="0" tIns="0" bIns="0">
-            <a:spAutoFit/>
-          </a:bodyPr>
-          <a:lstStyle/>
-          <a:p>
-            <a:pPr algn="l"/>
-            <a:r>
-              <a:rPr sz="2800" b="1">
-                <a:solidFill>
-                  <a:srgbClr val="1A202C"/>
-                </a:solidFill>
-                <a:latin typeface="Calibri"/>
-              </a:rPr>
-              <a:t>2</a:t>
-            </a:r>
-          </a:p>
-        </p:txBody>
-      </p:sp>
-      <p:sp>
-        <p:nvSpPr>
-          <p:cNvPr id="14" name="TextBox 13"/>
-          <p:cNvSpPr txBox="1"/>
-          <p:nvPr/>
-        </p:nvSpPr>
-        <p:spPr>
-          <a:xfrm>
-            <a:off x="2784348" y="2240280"/>
-            <a:ext cx="1577340" cy="228600"/>
-          </a:xfrm>
-          <a:prstGeom prst="rect">
-            <a:avLst/>
-          </a:prstGeom>
-          <a:noFill/>
-        </p:spPr>
-        <p:txBody>
-          <a:bodyPr wrap="square" lIns="0" rIns="0" tIns="0" bIns="0">
-            <a:spAutoFit/>
-          </a:bodyPr>
-          <a:lstStyle/>
-          <a:p>
-            <a:pPr algn="l"/>
-            <a:r>
-              <a:rPr sz="950" b="0">
-                <a:solidFill>
-                  <a:srgbClr val="2D3748"/>
-                </a:solidFill>
-                <a:latin typeface="Calibri"/>
-              </a:rPr>
-              <a:t>Stamped with commit SHA per D9.</a:t>
-            </a:r>
-          </a:p>
-        </p:txBody>
-      </p:sp>
-      <p:sp>
-        <p:nvSpPr>
-          <p:cNvPr id="15" name="Rectangle 14"/>
-          <p:cNvSpPr/>
-          <p:nvPr/>
-        </p:nvSpPr>
-        <p:spPr>
-          <a:xfrm>
-            <a:off x="4654296" y="1234440"/>
-            <a:ext cx="2034540" cy="1325880"/>
-          </a:xfrm>
-          <a:prstGeom prst="rect">
-            <a:avLst/>
-          </a:prstGeom>
-          <a:solidFill>
-            <a:srgbClr val="F7FAFC"/>
-          </a:solidFill>
-          <a:ln w="6350">
-            <a:solidFill>
-              <a:srgbClr val="E2E8F0"/>
-            </a:solidFill>
-          </a:ln>
-        </p:spPr>
-        <p:style>
-          <a:lnRef idx="1">
-            <a:schemeClr val="accent1"/>
-          </a:lnRef>
-          <a:fillRef idx="3">
-            <a:schemeClr val="accent1"/>
-          </a:fillRef>
-          <a:effectRef idx="2">
-            <a:schemeClr val="accent1"/>
-          </a:effectRef>
-          <a:fontRef idx="minor">
-            <a:schemeClr val="lt1"/>
-          </a:fontRef>
-        </p:style>
-        <p:txBody>
-          <a:bodyPr rtlCol="0" anchor="ctr"/>
-          <a:lstStyle/>
-          <a:p>
-            <a:pPr algn="ctr"/>
-          </a:p>
-        </p:txBody>
-      </p:sp>
-      <p:sp>
-        <p:nvSpPr>
-          <p:cNvPr id="16" name="Rectangle 15"/>
-          <p:cNvSpPr/>
-          <p:nvPr/>
-        </p:nvSpPr>
-        <p:spPr>
-          <a:xfrm>
-            <a:off x="4654296" y="1234440"/>
-            <a:ext cx="2034540" cy="54864"/>
-          </a:xfrm>
-          <a:prstGeom prst="rect">
-            <a:avLst/>
-          </a:prstGeom>
-          <a:solidFill>
-            <a:srgbClr val="38A169"/>
-          </a:solidFill>
-          <a:ln>
-            <a:noFill/>
-          </a:ln>
-        </p:spPr>
-        <p:style>
-          <a:lnRef idx="1">
-            <a:schemeClr val="accent1"/>
-          </a:lnRef>
-          <a:fillRef idx="3">
-            <a:schemeClr val="accent1"/>
-          </a:fillRef>
-          <a:effectRef idx="2">
-            <a:schemeClr val="accent1"/>
-          </a:effectRef>
-          <a:fontRef idx="minor">
-            <a:schemeClr val="lt1"/>
-          </a:fontRef>
-        </p:style>
-        <p:txBody>
-          <a:bodyPr rtlCol="0" anchor="ctr"/>
-          <a:lstStyle/>
-          <a:p>
-            <a:pPr algn="ctr"/>
-          </a:p>
-        </p:txBody>
-      </p:sp>
-      <p:sp>
-        <p:nvSpPr>
-          <p:cNvPr id="17" name="TextBox 16"/>
-          <p:cNvSpPr txBox="1"/>
-          <p:nvPr/>
-        </p:nvSpPr>
-        <p:spPr>
-          <a:xfrm>
-            <a:off x="4882896" y="1417320"/>
-            <a:ext cx="1577340" cy="228600"/>
-          </a:xfrm>
-          <a:prstGeom prst="rect">
-            <a:avLst/>
-          </a:prstGeom>
-          <a:noFill/>
-        </p:spPr>
-        <p:txBody>
-          <a:bodyPr wrap="square" lIns="0" rIns="0" tIns="0" bIns="0">
-            <a:spAutoFit/>
-          </a:bodyPr>
-          <a:lstStyle/>
-          <a:p>
-            <a:pPr algn="l"/>
-            <a:r>
-              <a:rPr sz="900" b="1">
-                <a:solidFill>
-                  <a:srgbClr val="718096"/>
-                </a:solidFill>
-                <a:latin typeface="Calibri"/>
-              </a:rPr>
-              <a:t>FINALISED PAIRS</a:t>
-            </a:r>
-          </a:p>
-        </p:txBody>
-      </p:sp>
-      <p:sp>
-        <p:nvSpPr>
-          <p:cNvPr id="18" name="TextBox 17"/>
-          <p:cNvSpPr txBox="1"/>
-          <p:nvPr/>
-        </p:nvSpPr>
-        <p:spPr>
-          <a:xfrm>
-            <a:off x="4882896" y="1645920"/>
-            <a:ext cx="1577340" cy="640080"/>
-          </a:xfrm>
-          <a:prstGeom prst="rect">
-            <a:avLst/>
-          </a:prstGeom>
-          <a:noFill/>
-        </p:spPr>
-        <p:txBody>
-          <a:bodyPr wrap="square" lIns="0" rIns="0" tIns="0" bIns="0">
-            <a:spAutoFit/>
-          </a:bodyPr>
-          <a:lstStyle/>
-          <a:p>
-            <a:pPr algn="l"/>
-            <a:r>
-              <a:rPr sz="2800" b="1">
-                <a:solidFill>
-                  <a:srgbClr val="1A202C"/>
-                </a:solidFill>
-                <a:latin typeface="Calibri"/>
-              </a:rPr>
-              <a:t>11</a:t>
-            </a:r>
-          </a:p>
-        </p:txBody>
-      </p:sp>
-      <p:sp>
-        <p:nvSpPr>
-          <p:cNvPr id="19" name="TextBox 18"/>
-          <p:cNvSpPr txBox="1"/>
-          <p:nvPr/>
-        </p:nvSpPr>
-        <p:spPr>
-          <a:xfrm>
-            <a:off x="4882896" y="2240280"/>
-            <a:ext cx="1577340" cy="228600"/>
-          </a:xfrm>
-          <a:prstGeom prst="rect">
-            <a:avLst/>
-          </a:prstGeom>
-          <a:noFill/>
-        </p:spPr>
-        <p:txBody>
-          <a:bodyPr wrap="square" lIns="0" rIns="0" tIns="0" bIns="0">
-            <a:spAutoFit/>
-          </a:bodyPr>
-          <a:lstStyle/>
-          <a:p>
-            <a:pPr algn="l"/>
-            <a:r>
-              <a:rPr sz="950" b="0">
-                <a:solidFill>
-                  <a:srgbClr val="2D3748"/>
-                </a:solidFill>
-                <a:latin typeface="Calibri"/>
-              </a:rPr>
-              <a:t>Avg runtime 79.5s.</a:t>
-            </a:r>
-          </a:p>
-        </p:txBody>
-      </p:sp>
-      <p:sp>
-        <p:nvSpPr>
-          <p:cNvPr id="20" name="Rectangle 19"/>
-          <p:cNvSpPr/>
-          <p:nvPr/>
-        </p:nvSpPr>
-        <p:spPr>
-          <a:xfrm>
-            <a:off x="6752844" y="1234440"/>
-            <a:ext cx="2034540" cy="1325880"/>
-          </a:xfrm>
-          <a:prstGeom prst="rect">
-            <a:avLst/>
-          </a:prstGeom>
-          <a:solidFill>
-            <a:srgbClr val="F7FAFC"/>
-          </a:solidFill>
-          <a:ln w="6350">
-            <a:solidFill>
-              <a:srgbClr val="E2E8F0"/>
-            </a:solidFill>
-          </a:ln>
-        </p:spPr>
-        <p:style>
-          <a:lnRef idx="1">
-            <a:schemeClr val="accent1"/>
-          </a:lnRef>
-          <a:fillRef idx="3">
-            <a:schemeClr val="accent1"/>
-          </a:fillRef>
-          <a:effectRef idx="2">
-            <a:schemeClr val="accent1"/>
-          </a:effectRef>
-          <a:fontRef idx="minor">
-            <a:schemeClr val="lt1"/>
-          </a:fontRef>
-        </p:style>
-        <p:txBody>
-          <a:bodyPr rtlCol="0" anchor="ctr"/>
-          <a:lstStyle/>
-          <a:p>
-            <a:pPr algn="ctr"/>
-          </a:p>
-        </p:txBody>
-      </p:sp>
-      <p:sp>
-        <p:nvSpPr>
-          <p:cNvPr id="21" name="Rectangle 20"/>
-          <p:cNvSpPr/>
-          <p:nvPr/>
-        </p:nvSpPr>
-        <p:spPr>
-          <a:xfrm>
-            <a:off x="6752844" y="1234440"/>
-            <a:ext cx="2034540" cy="54864"/>
-          </a:xfrm>
-          <a:prstGeom prst="rect">
-            <a:avLst/>
-          </a:prstGeom>
-          <a:solidFill>
-            <a:srgbClr val="14B8A6"/>
-          </a:solidFill>
-          <a:ln>
-            <a:noFill/>
-          </a:ln>
-        </p:spPr>
-        <p:style>
-          <a:lnRef idx="1">
-            <a:schemeClr val="accent1"/>
-          </a:lnRef>
-          <a:fillRef idx="3">
-            <a:schemeClr val="accent1"/>
-          </a:fillRef>
-          <a:effectRef idx="2">
-            <a:schemeClr val="accent1"/>
-          </a:effectRef>
-          <a:fontRef idx="minor">
-            <a:schemeClr val="lt1"/>
-          </a:fontRef>
-        </p:style>
-        <p:txBody>
-          <a:bodyPr rtlCol="0" anchor="ctr"/>
-          <a:lstStyle/>
-          <a:p>
-            <a:pPr algn="ctr"/>
-          </a:p>
-        </p:txBody>
-      </p:sp>
-      <p:sp>
-        <p:nvSpPr>
-          <p:cNvPr id="22" name="TextBox 21"/>
-          <p:cNvSpPr txBox="1"/>
-          <p:nvPr/>
-        </p:nvSpPr>
-        <p:spPr>
-          <a:xfrm>
-            <a:off x="6981444" y="1417320"/>
-            <a:ext cx="1577340" cy="228600"/>
-          </a:xfrm>
-          <a:prstGeom prst="rect">
-            <a:avLst/>
-          </a:prstGeom>
-          <a:noFill/>
-        </p:spPr>
-        <p:txBody>
-          <a:bodyPr wrap="square" lIns="0" rIns="0" tIns="0" bIns="0">
-            <a:spAutoFit/>
-          </a:bodyPr>
-          <a:lstStyle/>
-          <a:p>
-            <a:pPr algn="l"/>
-            <a:r>
-              <a:rPr sz="900" b="1">
-                <a:solidFill>
-                  <a:srgbClr val="718096"/>
-                </a:solidFill>
-                <a:latin typeface="Calibri"/>
-              </a:rPr>
-              <a:t>LLM SPEND</a:t>
-            </a:r>
-          </a:p>
-        </p:txBody>
-      </p:sp>
-      <p:sp>
-        <p:nvSpPr>
-          <p:cNvPr id="23" name="TextBox 22"/>
-          <p:cNvSpPr txBox="1"/>
-          <p:nvPr/>
-        </p:nvSpPr>
-        <p:spPr>
-          <a:xfrm>
-            <a:off x="6981444" y="1645920"/>
-            <a:ext cx="1577340" cy="640080"/>
-          </a:xfrm>
-          <a:prstGeom prst="rect">
-            <a:avLst/>
-          </a:prstGeom>
-          <a:noFill/>
-        </p:spPr>
-        <p:txBody>
-          <a:bodyPr wrap="square" lIns="0" rIns="0" tIns="0" bIns="0">
-            <a:spAutoFit/>
-          </a:bodyPr>
-          <a:lstStyle/>
-          <a:p>
-            <a:pPr algn="l"/>
-            <a:r>
-              <a:rPr sz="2800" b="1">
-                <a:solidFill>
-                  <a:srgbClr val="1A202C"/>
-                </a:solidFill>
-                <a:latin typeface="Calibri"/>
-              </a:rPr>
-              <a:t>$1.02</a:t>
-            </a:r>
-          </a:p>
-        </p:txBody>
-      </p:sp>
-      <p:sp>
-        <p:nvSpPr>
-          <p:cNvPr id="24" name="TextBox 23"/>
-          <p:cNvSpPr txBox="1"/>
-          <p:nvPr/>
-        </p:nvSpPr>
-        <p:spPr>
-          <a:xfrm>
-            <a:off x="6981444" y="2240280"/>
-            <a:ext cx="1577340" cy="228600"/>
-          </a:xfrm>
-          <a:prstGeom prst="rect">
-            <a:avLst/>
-          </a:prstGeom>
-          <a:noFill/>
-        </p:spPr>
-        <p:txBody>
-          <a:bodyPr wrap="square" lIns="0" rIns="0" tIns="0" bIns="0">
-            <a:spAutoFit/>
-          </a:bodyPr>
-          <a:lstStyle/>
-          <a:p>
-            <a:pPr algn="l"/>
-            <a:r>
-              <a:rPr sz="950" b="0">
-                <a:solidFill>
-                  <a:srgbClr val="2D3748"/>
-                </a:solidFill>
-                <a:latin typeface="Calibri"/>
-              </a:rPr>
-              <a:t>Across all live runs to date.</a:t>
+              <a:t>Pipeline frozen, then run against the 2024 ODMI cycle as a held-out test. Delta against 2025 is itself a result.</a:t>
             </a:r>
           </a:p>
         </p:txBody>
@@ -12527,8 +8455,8 @@
         </p:nvSpPr>
         <p:spPr>
           <a:xfrm>
-            <a:off x="457200" y="3017520"/>
-            <a:ext cx="73152" cy="731520"/>
+            <a:off x="4983480" y="2785872"/>
+            <a:ext cx="164592" cy="164592"/>
           </a:xfrm>
           <a:prstGeom prst="rect">
             <a:avLst/>
@@ -12570,8 +8498,8 @@
         </p:nvSpPr>
         <p:spPr>
           <a:xfrm>
-            <a:off x="640080" y="3017520"/>
-            <a:ext cx="8046720" cy="777240"/>
+            <a:off x="5394960" y="3688080"/>
+            <a:ext cx="3520440" cy="256032"/>
           </a:xfrm>
           <a:prstGeom prst="rect">
             <a:avLst/>
@@ -12584,23 +8512,15 @@
           </a:bodyPr>
           <a:lstStyle/>
           <a:p>
-            <a:r>
-              <a:rPr sz="1300" b="1">
+            <a:pPr algn="l"/>
+            <a:r>
+              <a:rPr sz="1100" b="1">
                 <a:solidFill>
                   <a:srgbClr val="1A202C"/>
                 </a:solidFill>
                 <a:latin typeface="Calibri"/>
               </a:rPr>
-              <a:t>All nine dashboard pages live. </a:t>
-            </a:r>
-            <a:r>
-              <a:rPr sz="1200">
-                <a:solidFill>
-                  <a:srgbClr val="2D3748"/>
-                </a:solidFill>
-                <a:latin typeface="Calibri"/>
-              </a:rPr>
-              <a:t>Hand-marking, swarm dispatch, results scanning, cost tracking, and prompt versioning all controllable from the Streamlit UI. Next supervisor checkpoint: harder questions, harder countries, and the first real Verifier-rejection on record.</a:t>
+              <a:t>Dissertation by 2 August 2026</a:t>
             </a:r>
           </a:p>
         </p:txBody>
@@ -12613,8 +8533,8 @@
         </p:nvSpPr>
         <p:spPr>
           <a:xfrm>
-            <a:off x="457200" y="4850892"/>
-            <a:ext cx="8229600" cy="182880"/>
+            <a:off x="5394960" y="3944112"/>
+            <a:ext cx="3520440" cy="682752"/>
           </a:xfrm>
           <a:prstGeom prst="rect">
             <a:avLst/>
@@ -12629,13 +8549,91 @@
           <a:p>
             <a:pPr algn="l"/>
             <a:r>
-              <a:rPr sz="800" b="0">
-                <a:solidFill>
-                  <a:srgbClr val="718096"/>
+              <a:rPr sz="1000" b="0">
+                <a:solidFill>
+                  <a:srgbClr val="2D3748"/>
                 </a:solidFill>
                 <a:latin typeface="Calibri"/>
               </a:rPr>
-              <a:t>ODMI Agent Swarm  ·  Benjy Bream  ·  King's College London  ·  9 / 9</a:t>
+              <a:t>Failure-mode taxonomy and accuracy–cost surface as the two primary contributions. Phase C as a stretch.</a:t>
+            </a:r>
+          </a:p>
+        </p:txBody>
+      </p:sp>
+      <p:sp>
+        <p:nvSpPr>
+          <p:cNvPr id="28" name="Rectangle 27"/>
+          <p:cNvSpPr/>
+          <p:nvPr/>
+        </p:nvSpPr>
+        <p:spPr>
+          <a:xfrm>
+            <a:off x="4983480" y="3761232"/>
+            <a:ext cx="164592" cy="164592"/>
+          </a:xfrm>
+          <a:prstGeom prst="rect">
+            <a:avLst/>
+          </a:prstGeom>
+          <a:solidFill>
+            <a:srgbClr val="0D9488"/>
+          </a:solidFill>
+          <a:ln>
+            <a:noFill/>
+          </a:ln>
+        </p:spPr>
+        <p:style>
+          <a:lnRef idx="1">
+            <a:schemeClr val="accent1"/>
+          </a:lnRef>
+          <a:fillRef idx="3">
+            <a:schemeClr val="accent1"/>
+          </a:fillRef>
+          <a:effectRef idx="2">
+            <a:schemeClr val="accent1"/>
+          </a:effectRef>
+          <a:fontRef idx="minor">
+            <a:schemeClr val="lt1"/>
+          </a:fontRef>
+        </p:style>
+        <p:txBody>
+          <a:bodyPr rtlCol="0" anchor="ctr"/>
+          <a:lstStyle/>
+          <a:p>
+            <a:pPr algn="ctr"/>
+          </a:p>
+        </p:txBody>
+      </p:sp>
+      <p:sp>
+        <p:nvSpPr>
+          <p:cNvPr id="29" name="TextBox 28"/>
+          <p:cNvSpPr txBox="1"/>
+          <p:nvPr/>
+        </p:nvSpPr>
+        <p:spPr>
+          <a:xfrm>
+            <a:off x="457200" y="4850892"/>
+            <a:ext cx="8229600" cy="182880"/>
+          </a:xfrm>
+          <a:prstGeom prst="rect">
+            <a:avLst/>
+          </a:prstGeom>
+          <a:noFill/>
+        </p:spPr>
+        <p:txBody>
+          <a:bodyPr wrap="square" lIns="0" rIns="0" tIns="0" bIns="0">
+            <a:spAutoFit/>
+          </a:bodyPr>
+          <a:lstStyle/>
+          <a:p>
+            <a:pPr algn="l"/>
+            <a:r>
+              <a:rPr sz="800" b="0">
+                <a:solidFill>
+                  <a:srgbClr val="718096"/>
+                </a:solidFill>
+                <a:latin typeface="Calibri"/>
+              </a:rPr>
+              <a:t>ODMI Agent Swarm  ·  Benjy Bream  ·  King's College London  ·  6 / 6</a:t>
             </a:r>
           </a:p>
         </p:txBody>

--- a/docs/PROGRESS_SLIDES_2026-05-13.pptx
+++ b/docs/PROGRESS_SLIDES_2026-05-13.pptx
@@ -3479,8 +3479,8 @@
         </p:nvSpPr>
         <p:spPr>
           <a:xfrm>
-            <a:off x="457200" y="1234440"/>
-            <a:ext cx="2034540" cy="960120"/>
+            <a:off x="457200" y="1143000"/>
+            <a:ext cx="2034540" cy="1371600"/>
           </a:xfrm>
           <a:prstGeom prst="rect">
             <a:avLst/>
@@ -3524,7 +3524,7 @@
         </p:nvSpPr>
         <p:spPr>
           <a:xfrm>
-            <a:off x="457200" y="1234440"/>
+            <a:off x="457200" y="1143000"/>
             <a:ext cx="2034540" cy="54864"/>
           </a:xfrm>
           <a:prstGeom prst="rect">
@@ -3567,8 +3567,8 @@
         </p:nvSpPr>
         <p:spPr>
           <a:xfrm>
-            <a:off x="685800" y="1417320"/>
-            <a:ext cx="1577340" cy="228600"/>
+            <a:off x="658368" y="1307592"/>
+            <a:ext cx="1632204" cy="201168"/>
           </a:xfrm>
           <a:prstGeom prst="rect">
             <a:avLst/>
@@ -3602,8 +3602,8 @@
         </p:nvSpPr>
         <p:spPr>
           <a:xfrm>
-            <a:off x="685800" y="1645920"/>
-            <a:ext cx="1577340" cy="640080"/>
+            <a:off x="658368" y="1563624"/>
+            <a:ext cx="1632204" cy="548640"/>
           </a:xfrm>
           <a:prstGeom prst="rect">
             <a:avLst/>
@@ -3618,7 +3618,7 @@
           <a:p>
             <a:pPr algn="l"/>
             <a:r>
-              <a:rPr sz="2800" b="1">
+              <a:rPr sz="2200" b="1">
                 <a:solidFill>
                   <a:srgbClr val="1A202C"/>
                 </a:solidFill>
@@ -3637,8 +3637,8 @@
         </p:nvSpPr>
         <p:spPr>
           <a:xfrm>
-            <a:off x="685800" y="1874520"/>
-            <a:ext cx="1577340" cy="228600"/>
+            <a:off x="658368" y="2148840"/>
+            <a:ext cx="1632204" cy="274320"/>
           </a:xfrm>
           <a:prstGeom prst="rect">
             <a:avLst/>
@@ -3672,8 +3672,8 @@
         </p:nvSpPr>
         <p:spPr>
           <a:xfrm>
-            <a:off x="2555748" y="1234440"/>
-            <a:ext cx="2034540" cy="960120"/>
+            <a:off x="2555748" y="1143000"/>
+            <a:ext cx="2034540" cy="1371600"/>
           </a:xfrm>
           <a:prstGeom prst="rect">
             <a:avLst/>
@@ -3717,7 +3717,7 @@
         </p:nvSpPr>
         <p:spPr>
           <a:xfrm>
-            <a:off x="2555748" y="1234440"/>
+            <a:off x="2555748" y="1143000"/>
             <a:ext cx="2034540" cy="54864"/>
           </a:xfrm>
           <a:prstGeom prst="rect">
@@ -3760,8 +3760,8 @@
         </p:nvSpPr>
         <p:spPr>
           <a:xfrm>
-            <a:off x="2784348" y="1417320"/>
-            <a:ext cx="1577340" cy="228600"/>
+            <a:off x="2756916" y="1307592"/>
+            <a:ext cx="1632204" cy="201168"/>
           </a:xfrm>
           <a:prstGeom prst="rect">
             <a:avLst/>
@@ -3795,8 +3795,8 @@
         </p:nvSpPr>
         <p:spPr>
           <a:xfrm>
-            <a:off x="2784348" y="1645920"/>
-            <a:ext cx="1577340" cy="640080"/>
+            <a:off x="2756916" y="1563624"/>
+            <a:ext cx="1632204" cy="548640"/>
           </a:xfrm>
           <a:prstGeom prst="rect">
             <a:avLst/>
@@ -3811,7 +3811,7 @@
           <a:p>
             <a:pPr algn="l"/>
             <a:r>
-              <a:rPr sz="2800" b="1">
+              <a:rPr sz="2200" b="1">
                 <a:solidFill>
                   <a:srgbClr val="1A202C"/>
                 </a:solidFill>
@@ -3830,8 +3830,8 @@
         </p:nvSpPr>
         <p:spPr>
           <a:xfrm>
-            <a:off x="2784348" y="1874520"/>
-            <a:ext cx="1577340" cy="228600"/>
+            <a:off x="2756916" y="2148840"/>
+            <a:ext cx="1632204" cy="274320"/>
           </a:xfrm>
           <a:prstGeom prst="rect">
             <a:avLst/>
@@ -3865,8 +3865,8 @@
         </p:nvSpPr>
         <p:spPr>
           <a:xfrm>
-            <a:off x="4654296" y="1234440"/>
-            <a:ext cx="2034540" cy="960120"/>
+            <a:off x="4654296" y="1143000"/>
+            <a:ext cx="2034540" cy="1371600"/>
           </a:xfrm>
           <a:prstGeom prst="rect">
             <a:avLst/>
@@ -3910,7 +3910,7 @@
         </p:nvSpPr>
         <p:spPr>
           <a:xfrm>
-            <a:off x="4654296" y="1234440"/>
+            <a:off x="4654296" y="1143000"/>
             <a:ext cx="2034540" cy="54864"/>
           </a:xfrm>
           <a:prstGeom prst="rect">
@@ -3953,8 +3953,8 @@
         </p:nvSpPr>
         <p:spPr>
           <a:xfrm>
-            <a:off x="4882896" y="1417320"/>
-            <a:ext cx="1577340" cy="228600"/>
+            <a:off x="4855464" y="1307592"/>
+            <a:ext cx="1632204" cy="201168"/>
           </a:xfrm>
           <a:prstGeom prst="rect">
             <a:avLst/>
@@ -3988,8 +3988,8 @@
         </p:nvSpPr>
         <p:spPr>
           <a:xfrm>
-            <a:off x="4882896" y="1645920"/>
-            <a:ext cx="1577340" cy="640080"/>
+            <a:off x="4855464" y="1563624"/>
+            <a:ext cx="1632204" cy="548640"/>
           </a:xfrm>
           <a:prstGeom prst="rect">
             <a:avLst/>
@@ -4004,7 +4004,7 @@
           <a:p>
             <a:pPr algn="l"/>
             <a:r>
-              <a:rPr sz="2800" b="1">
+              <a:rPr sz="2200" b="1">
                 <a:solidFill>
                   <a:srgbClr val="1A202C"/>
                 </a:solidFill>
@@ -4023,8 +4023,8 @@
         </p:nvSpPr>
         <p:spPr>
           <a:xfrm>
-            <a:off x="4882896" y="1874520"/>
-            <a:ext cx="1577340" cy="228600"/>
+            <a:off x="4855464" y="2148840"/>
+            <a:ext cx="1632204" cy="274320"/>
           </a:xfrm>
           <a:prstGeom prst="rect">
             <a:avLst/>
@@ -4058,8 +4058,8 @@
         </p:nvSpPr>
         <p:spPr>
           <a:xfrm>
-            <a:off x="6752844" y="1234440"/>
-            <a:ext cx="2034540" cy="960120"/>
+            <a:off x="6752844" y="1143000"/>
+            <a:ext cx="2034540" cy="1371600"/>
           </a:xfrm>
           <a:prstGeom prst="rect">
             <a:avLst/>
@@ -4103,7 +4103,7 @@
         </p:nvSpPr>
         <p:spPr>
           <a:xfrm>
-            <a:off x="6752844" y="1234440"/>
+            <a:off x="6752844" y="1143000"/>
             <a:ext cx="2034540" cy="54864"/>
           </a:xfrm>
           <a:prstGeom prst="rect">
@@ -4146,8 +4146,8 @@
         </p:nvSpPr>
         <p:spPr>
           <a:xfrm>
-            <a:off x="6981444" y="1417320"/>
-            <a:ext cx="1577340" cy="228600"/>
+            <a:off x="6954012" y="1307592"/>
+            <a:ext cx="1632204" cy="201168"/>
           </a:xfrm>
           <a:prstGeom prst="rect">
             <a:avLst/>
@@ -4181,8 +4181,8 @@
         </p:nvSpPr>
         <p:spPr>
           <a:xfrm>
-            <a:off x="6981444" y="1645920"/>
-            <a:ext cx="1577340" cy="640080"/>
+            <a:off x="6954012" y="1563624"/>
+            <a:ext cx="1632204" cy="548640"/>
           </a:xfrm>
           <a:prstGeom prst="rect">
             <a:avLst/>
@@ -4197,7 +4197,7 @@
           <a:p>
             <a:pPr algn="l"/>
             <a:r>
-              <a:rPr sz="2800" b="1">
+              <a:rPr sz="2200" b="1">
                 <a:solidFill>
                   <a:srgbClr val="1A202C"/>
                 </a:solidFill>
@@ -4216,8 +4216,8 @@
         </p:nvSpPr>
         <p:spPr>
           <a:xfrm>
-            <a:off x="6981444" y="1874520"/>
-            <a:ext cx="1577340" cy="228600"/>
+            <a:off x="6954012" y="2148840"/>
+            <a:ext cx="1632204" cy="274320"/>
           </a:xfrm>
           <a:prstGeom prst="rect">
             <a:avLst/>
@@ -4251,8 +4251,8 @@
         </p:nvSpPr>
         <p:spPr>
           <a:xfrm>
-            <a:off x="457200" y="2514600"/>
-            <a:ext cx="4160520" cy="1508760"/>
+            <a:off x="457200" y="2697480"/>
+            <a:ext cx="4160520" cy="1417320"/>
           </a:xfrm>
           <a:prstGeom prst="rect">
             <a:avLst/>
@@ -4296,8 +4296,8 @@
         </p:nvSpPr>
         <p:spPr>
           <a:xfrm>
-            <a:off x="457200" y="2514600"/>
-            <a:ext cx="73152" cy="1508760"/>
+            <a:off x="457200" y="2697480"/>
+            <a:ext cx="73152" cy="1417320"/>
           </a:xfrm>
           <a:prstGeom prst="rect">
             <a:avLst/>
@@ -4339,7 +4339,7 @@
         </p:nvSpPr>
         <p:spPr>
           <a:xfrm>
-            <a:off x="850392" y="2651760"/>
+            <a:off x="850392" y="2834640"/>
             <a:ext cx="3538728" cy="320040"/>
           </a:xfrm>
           <a:prstGeom prst="rect">
@@ -4374,8 +4374,8 @@
         </p:nvSpPr>
         <p:spPr>
           <a:xfrm>
-            <a:off x="850392" y="2971800"/>
-            <a:ext cx="3538728" cy="1005840"/>
+            <a:off x="850392" y="3154680"/>
+            <a:ext cx="3538728" cy="914400"/>
           </a:xfrm>
           <a:prstGeom prst="rect">
             <a:avLst/>
@@ -4409,8 +4409,8 @@
         </p:nvSpPr>
         <p:spPr>
           <a:xfrm>
-            <a:off x="4754880" y="2514600"/>
-            <a:ext cx="4160520" cy="1508760"/>
+            <a:off x="4754880" y="2697480"/>
+            <a:ext cx="4160520" cy="1417320"/>
           </a:xfrm>
           <a:prstGeom prst="rect">
             <a:avLst/>
@@ -4454,8 +4454,8 @@
         </p:nvSpPr>
         <p:spPr>
           <a:xfrm>
-            <a:off x="4754880" y="2514600"/>
-            <a:ext cx="73152" cy="1508760"/>
+            <a:off x="4754880" y="2697480"/>
+            <a:ext cx="73152" cy="1417320"/>
           </a:xfrm>
           <a:prstGeom prst="rect">
             <a:avLst/>
@@ -4497,7 +4497,7 @@
         </p:nvSpPr>
         <p:spPr>
           <a:xfrm>
-            <a:off x="5148072" y="2651760"/>
+            <a:off x="5148072" y="2834640"/>
             <a:ext cx="3538728" cy="320040"/>
           </a:xfrm>
           <a:prstGeom prst="rect">
@@ -4532,8 +4532,8 @@
         </p:nvSpPr>
         <p:spPr>
           <a:xfrm>
-            <a:off x="5148072" y="2971800"/>
-            <a:ext cx="3538728" cy="1005840"/>
+            <a:off x="5148072" y="3154680"/>
+            <a:ext cx="3538728" cy="914400"/>
           </a:xfrm>
           <a:prstGeom prst="rect">
             <a:avLst/>
@@ -5574,8 +5574,8 @@
         </p:nvSpPr>
         <p:spPr>
           <a:xfrm>
-            <a:off x="457200" y="1280160"/>
-            <a:ext cx="8229600" cy="3108960"/>
+            <a:off x="457200" y="1188720"/>
+            <a:ext cx="8229600" cy="2468880"/>
           </a:xfrm>
           <a:prstGeom prst="rect">
             <a:avLst/>
@@ -5619,8 +5619,8 @@
         </p:nvCxnSpPr>
         <p:spPr>
           <a:xfrm>
-            <a:off x="1143000" y="1645920"/>
-            <a:ext cx="0" cy="2194560"/>
+            <a:off x="1143000" y="1463040"/>
+            <a:ext cx="0" cy="1600200"/>
           </a:xfrm>
           <a:prstGeom prst="line">
             <a:avLst/>
@@ -5654,7 +5654,7 @@
         </p:nvCxnSpPr>
         <p:spPr>
           <a:xfrm>
-            <a:off x="1143000" y="3840480"/>
+            <a:off x="1143000" y="3063240"/>
             <a:ext cx="7086600" cy="0"/>
           </a:xfrm>
           <a:prstGeom prst="line">
@@ -5689,7 +5689,7 @@
         </p:nvSpPr>
         <p:spPr>
           <a:xfrm>
-            <a:off x="685800" y="3749040"/>
+            <a:off x="685800" y="2971800"/>
             <a:ext cx="411480" cy="182880"/>
           </a:xfrm>
           <a:prstGeom prst="rect">
@@ -5724,7 +5724,7 @@
         </p:nvSpPr>
         <p:spPr>
           <a:xfrm>
-            <a:off x="685800" y="3017520"/>
+            <a:off x="685800" y="2438400"/>
             <a:ext cx="411480" cy="182880"/>
           </a:xfrm>
           <a:prstGeom prst="rect">
@@ -5759,7 +5759,7 @@
         </p:nvSpPr>
         <p:spPr>
           <a:xfrm>
-            <a:off x="685800" y="2286000"/>
+            <a:off x="685800" y="1905000"/>
             <a:ext cx="411480" cy="182880"/>
           </a:xfrm>
           <a:prstGeom prst="rect">
@@ -5794,7 +5794,7 @@
         </p:nvSpPr>
         <p:spPr>
           <a:xfrm>
-            <a:off x="685800" y="1554480"/>
+            <a:off x="685800" y="1371600"/>
             <a:ext cx="411480" cy="182880"/>
           </a:xfrm>
           <a:prstGeom prst="rect">
@@ -5829,8 +5829,8 @@
         </p:nvSpPr>
         <p:spPr>
           <a:xfrm>
-            <a:off x="1584769" y="1645920"/>
-            <a:ext cx="968121" cy="2194560"/>
+            <a:off x="1584769" y="1463040"/>
+            <a:ext cx="968121" cy="1600200"/>
           </a:xfrm>
           <a:prstGeom prst="rect">
             <a:avLst/>
@@ -5872,7 +5872,7 @@
         </p:nvSpPr>
         <p:spPr>
           <a:xfrm>
-            <a:off x="1219009" y="3913632"/>
+            <a:off x="1219009" y="3136392"/>
             <a:ext cx="1699641" cy="228600"/>
           </a:xfrm>
           <a:prstGeom prst="rect">
@@ -5907,7 +5907,7 @@
         </p:nvSpPr>
         <p:spPr>
           <a:xfrm>
-            <a:off x="1219009" y="4114800"/>
+            <a:off x="1219009" y="3337560"/>
             <a:ext cx="1699641" cy="201168"/>
           </a:xfrm>
           <a:prstGeom prst="rect">
@@ -5942,8 +5942,8 @@
         </p:nvSpPr>
         <p:spPr>
           <a:xfrm>
-            <a:off x="3344989" y="1645920"/>
-            <a:ext cx="968121" cy="2194560"/>
+            <a:off x="3344989" y="1463040"/>
+            <a:ext cx="968121" cy="1600200"/>
           </a:xfrm>
           <a:prstGeom prst="rect">
             <a:avLst/>
@@ -5985,7 +5985,7 @@
         </p:nvSpPr>
         <p:spPr>
           <a:xfrm>
-            <a:off x="2979229" y="3913632"/>
+            <a:off x="2979229" y="3136392"/>
             <a:ext cx="1699641" cy="228600"/>
           </a:xfrm>
           <a:prstGeom prst="rect">
@@ -6020,7 +6020,7 @@
         </p:nvSpPr>
         <p:spPr>
           <a:xfrm>
-            <a:off x="2979229" y="4114800"/>
+            <a:off x="2979229" y="3337560"/>
             <a:ext cx="1699641" cy="201168"/>
           </a:xfrm>
           <a:prstGeom prst="rect">
@@ -6055,8 +6055,8 @@
         </p:nvSpPr>
         <p:spPr>
           <a:xfrm>
-            <a:off x="5105209" y="1645920"/>
-            <a:ext cx="968121" cy="2194560"/>
+            <a:off x="5105209" y="1463040"/>
+            <a:ext cx="968121" cy="1600200"/>
           </a:xfrm>
           <a:prstGeom prst="rect">
             <a:avLst/>
@@ -6098,7 +6098,7 @@
         </p:nvSpPr>
         <p:spPr>
           <a:xfrm>
-            <a:off x="4739449" y="3913632"/>
+            <a:off x="4739449" y="3136392"/>
             <a:ext cx="1699641" cy="228600"/>
           </a:xfrm>
           <a:prstGeom prst="rect">
@@ -6133,7 +6133,7 @@
         </p:nvSpPr>
         <p:spPr>
           <a:xfrm>
-            <a:off x="4739449" y="4114800"/>
+            <a:off x="4739449" y="3337560"/>
             <a:ext cx="1699641" cy="201168"/>
           </a:xfrm>
           <a:prstGeom prst="rect">
@@ -6168,8 +6168,8 @@
         </p:nvSpPr>
         <p:spPr>
           <a:xfrm>
-            <a:off x="6865429" y="2377440"/>
-            <a:ext cx="968121" cy="1463040"/>
+            <a:off x="6865429" y="1996440"/>
+            <a:ext cx="968121" cy="1066800"/>
           </a:xfrm>
           <a:prstGeom prst="rect">
             <a:avLst/>
@@ -6211,7 +6211,7 @@
         </p:nvSpPr>
         <p:spPr>
           <a:xfrm>
-            <a:off x="6499669" y="3913632"/>
+            <a:off x="6499669" y="3136392"/>
             <a:ext cx="1699641" cy="228600"/>
           </a:xfrm>
           <a:prstGeom prst="rect">
@@ -6246,7 +6246,7 @@
         </p:nvSpPr>
         <p:spPr>
           <a:xfrm>
-            <a:off x="6499669" y="4114800"/>
+            <a:off x="6499669" y="3337560"/>
             <a:ext cx="1699641" cy="201168"/>
           </a:xfrm>
           <a:prstGeom prst="rect">
@@ -6281,7 +6281,7 @@
         </p:nvSpPr>
         <p:spPr>
           <a:xfrm>
-            <a:off x="1188720" y="4069080"/>
+            <a:off x="548640" y="3822192"/>
             <a:ext cx="164592" cy="164592"/>
           </a:xfrm>
           <a:prstGeom prst="rect">
@@ -6324,7 +6324,7 @@
         </p:nvSpPr>
         <p:spPr>
           <a:xfrm>
-            <a:off x="1417320" y="4050792"/>
+            <a:off x="804672" y="3794760"/>
             <a:ext cx="3291840" cy="228600"/>
           </a:xfrm>
           <a:prstGeom prst="rect">
@@ -6359,7 +6359,7 @@
         </p:nvSpPr>
         <p:spPr>
           <a:xfrm>
-            <a:off x="4389120" y="4069080"/>
+            <a:off x="3840480" y="3822192"/>
             <a:ext cx="164592" cy="164592"/>
           </a:xfrm>
           <a:prstGeom prst="rect">
@@ -6402,7 +6402,7 @@
         </p:nvSpPr>
         <p:spPr>
           <a:xfrm>
-            <a:off x="4617720" y="4050792"/>
+            <a:off x="4096512" y="3794760"/>
             <a:ext cx="3657600" cy="228600"/>
           </a:xfrm>
           <a:prstGeom prst="rect">
@@ -6437,7 +6437,7 @@
         </p:nvSpPr>
         <p:spPr>
           <a:xfrm>
-            <a:off x="457200" y="4553712"/>
+            <a:off x="457200" y="4233672"/>
             <a:ext cx="73152" cy="548640"/>
           </a:xfrm>
           <a:prstGeom prst="rect">
@@ -6480,7 +6480,7 @@
         </p:nvSpPr>
         <p:spPr>
           <a:xfrm>
-            <a:off x="640080" y="4590288"/>
+            <a:off x="640080" y="4270248"/>
             <a:ext cx="7955280" cy="502920"/>
           </a:xfrm>
           <a:prstGeom prst="rect">

--- a/docs/PROGRESS_SLIDES_2026-05-13.pptx
+++ b/docs/PROGRESS_SLIDES_2026-05-13.pptx
@@ -3589,7 +3589,7 @@
                 </a:solidFill>
                 <a:latin typeface="Calibri"/>
               </a:rPr>
-              <a:t>QUESTIONS LOADED</a:t>
+              <a:t>PAIRS FINALISED</a:t>
             </a:r>
           </a:p>
         </p:txBody>
@@ -3624,7 +3624,7 @@
                 </a:solidFill>
                 <a:latin typeface="Calibri"/>
               </a:rPr>
-              <a:t>143</a:t>
+              <a:t>11</a:t>
             </a:r>
           </a:p>
         </p:txBody>
@@ -3659,7 +3659,7 @@
                 </a:solidFill>
                 <a:latin typeface="Calibri"/>
               </a:rPr>
-              <a:t>ODMI 2025 catalogue, all four dimensions.</a:t>
+              <a:t>19 R · 17 V · 2 A.</a:t>
             </a:r>
           </a:p>
         </p:txBody>
@@ -3724,7 +3724,7 @@
             <a:avLst/>
           </a:prstGeom>
           <a:solidFill>
-            <a:srgbClr val="1E3A5F"/>
+            <a:srgbClr val="38A169"/>
           </a:solidFill>
           <a:ln>
             <a:noFill/>
@@ -3782,7 +3782,7 @@
                 </a:solidFill>
                 <a:latin typeface="Calibri"/>
               </a:rPr>
-              <a:t>HAND-MARKS LOCKED</a:t>
+              <a:t>ACCURACY VS ODMI</a:t>
             </a:r>
           </a:p>
         </p:txBody>
@@ -3817,7 +3817,7 @@
                 </a:solidFill>
                 <a:latin typeface="Calibri"/>
               </a:rPr>
-              <a:t>2 / 2</a:t>
+              <a:t>100%</a:t>
             </a:r>
           </a:p>
         </p:txBody>
@@ -3852,7 +3852,7 @@
                 </a:solidFill>
                 <a:latin typeface="Calibri"/>
               </a:rPr>
-              <a:t>Stamped with the commit SHA per D9.</a:t>
+              <a:t>11 / 11 match against ODMI 2025.</a:t>
             </a:r>
           </a:p>
         </p:txBody>
@@ -3917,7 +3917,7 @@
             <a:avLst/>
           </a:prstGeom>
           <a:solidFill>
-            <a:srgbClr val="38A169"/>
+            <a:srgbClr val="1E3A5F"/>
           </a:solidFill>
           <a:ln>
             <a:noFill/>
@@ -3975,7 +3975,7 @@
                 </a:solidFill>
                 <a:latin typeface="Calibri"/>
               </a:rPr>
-              <a:t>FINALISED PAIRS</a:t>
+              <a:t>GROUND-TRUTH COVERAGE</a:t>
             </a:r>
           </a:p>
         </p:txBody>
@@ -4010,7 +4010,7 @@
                 </a:solidFill>
                 <a:latin typeface="Calibri"/>
               </a:rPr>
-              <a:t>11</a:t>
+              <a:t>5,148</a:t>
             </a:r>
           </a:p>
         </p:txBody>
@@ -4045,7 +4045,7 @@
                 </a:solidFill>
                 <a:latin typeface="Calibri"/>
               </a:rPr>
-              <a:t>19 R · 17 V · 2 A.</a:t>
+              <a:t>ODMI answers loaded (36 countries × 143 questions).</a:t>
             </a:r>
           </a:p>
         </p:txBody>
@@ -4519,7 +4519,7 @@
                 </a:solidFill>
                 <a:latin typeface="Calibri"/>
               </a:rPr>
-              <a:t>Live dashboard with full audit trail</a:t>
+              <a:t>Live dashboard with ODMI ground truth</a:t>
             </a:r>
           </a:p>
         </p:txBody>
@@ -4554,7 +4554,7 @@
                 </a:solidFill>
                 <a:latin typeface="Calibri"/>
               </a:rPr>
-              <a:t>Nine Streamlit pages over the SQLite store. Every LLM call logs tokens, latency, cost, prompt version. Hand-marks lock to a commit SHA so D9 is automatic.</a:t>
+              <a:t>Streamlit app over SQLite. Every LLM call logs tokens, latency, cost, prompt version. Each finalised swarm pair is compared to ODMI's recorded answer automatically (5,148 ground-truth rows loaded).</a:t>
             </a:r>
           </a:p>
         </p:txBody>
@@ -6346,7 +6346,7 @@
                 </a:solidFill>
                 <a:latin typeface="Calibri"/>
               </a:rPr>
-              <a:t>Accepted (Verifier or Adjudicator)</a:t>
+              <a:t>Matches ODMI 2025</a:t>
             </a:r>
           </a:p>
         </p:txBody>
@@ -6424,7 +6424,7 @@
                 </a:solidFill>
                 <a:latin typeface="Calibri"/>
               </a:rPr>
-              <a:t>Rejected or escalated</a:t>
+              <a:t>Differs from ODMI 2025</a:t>
             </a:r>
           </a:p>
         </p:txBody>
@@ -6502,7 +6502,7 @@
                 </a:solidFill>
                 <a:latin typeface="Calibri"/>
               </a:rPr>
-              <a:t>Caveat: every pair so far is a Policy-dimension question on a high-resource country. The Verifier has not yet been asked to disprove a known-wrong Researcher answer. The 100% accept rate is consistent with the swarm working — and with it being too lenient.</a:t>
+              <a:t>Comparison is to ODMI's 2025 merged_responses. The current sample is small and Policy-dimension heavy. ODMI's assessments are one cycle old, so where the swarm differs that does not automatically mean the swarm is wrong: the country may have changed since the assessment. Each disagreement is worth a human glance.</a:t>
             </a:r>
           </a:p>
         </p:txBody>
@@ -7053,7 +7053,7 @@
                 </a:solidFill>
                 <a:latin typeface="Calibri"/>
               </a:rPr>
-              <a:t>Results · Cards view</a:t>
+              <a:t>Results · Cards view with ODMI side-by-side</a:t>
             </a:r>
           </a:p>
         </p:txBody>
@@ -7088,7 +7088,7 @@
                 </a:solidFill>
                 <a:latin typeface="Calibri"/>
               </a:rPr>
-              <a:t>One bordered card per finalised pair. Question, answer, evidence quote, and a clickable source URL — all on the same screen, scannable.</a:t>
+              <a:t>One card per finalised pair: question, swarm answer with evidence quote, clickable source URL, plus ODMI's recorded answer and explanation. Match / differ badge at a glance.</a:t>
             </a:r>
           </a:p>
         </p:txBody>
@@ -7153,7 +7153,7 @@
             <a:avLst/>
           </a:prstGeom>
           <a:solidFill>
-            <a:srgbClr val="0F766E"/>
+            <a:srgbClr val="38A169"/>
           </a:solidFill>
           <a:ln>
             <a:noFill/>
@@ -7196,7 +7196,7 @@
             <a:avLst/>
           </a:prstGeom>
           <a:solidFill>
-            <a:srgbClr val="0F766E"/>
+            <a:srgbClr val="38A169"/>
           </a:solidFill>
           <a:ln>
             <a:noFill/>
@@ -7228,7 +7228,7 @@
                 </a:solidFill>
                 <a:latin typeface="Calibri"/>
               </a:rPr>
-              <a:t>✍</a:t>
+              <a:t>📊</a:t>
             </a:r>
           </a:p>
         </p:txBody>
@@ -7263,7 +7263,7 @@
                 </a:solidFill>
                 <a:latin typeface="Calibri"/>
               </a:rPr>
-              <a:t>In-app hand-marking</a:t>
+              <a:t>Accuracy chart vs ODMI</a:t>
             </a:r>
           </a:p>
         </p:txBody>
@@ -7298,7 +7298,7 @@
                 </a:solidFill>
                 <a:latin typeface="Calibri"/>
               </a:rPr>
-              <a:t>Pick a question, slide three score sliders, hit Save. The page writes the CSV, commits it, and stamps the SHA into the DB so D9 is automatic.</a:t>
+              <a:t>Per-country stacked bar of pairs that match ODMI 2025 versus those that differ. Headline accuracy KPI is read straight off the comparison.</a:t>
             </a:r>
           </a:p>
         </p:txBody>
@@ -7363,7 +7363,7 @@
             <a:avLst/>
           </a:prstGeom>
           <a:solidFill>
-            <a:srgbClr val="38A169"/>
+            <a:srgbClr val="0F766E"/>
           </a:solidFill>
           <a:ln>
             <a:noFill/>
@@ -7406,7 +7406,7 @@
             <a:avLst/>
           </a:prstGeom>
           <a:solidFill>
-            <a:srgbClr val="38A169"/>
+            <a:srgbClr val="0F766E"/>
           </a:solidFill>
           <a:ln>
             <a:noFill/>
@@ -7438,7 +7438,7 @@
                 </a:solidFill>
                 <a:latin typeface="Calibri"/>
               </a:rPr>
-              <a:t>📊</a:t>
+              <a:t>💷</a:t>
             </a:r>
           </a:p>
         </p:txBody>
@@ -7473,7 +7473,7 @@
                 </a:solidFill>
                 <a:latin typeface="Calibri"/>
               </a:rPr>
-              <a:t>Country chart + cost tracking</a:t>
+              <a:t>Cost tracking and rolling budget</a:t>
             </a:r>
           </a:p>
         </p:txBody>
@@ -7508,7 +7508,7 @@
                 </a:solidFill>
                 <a:latin typeface="Calibri"/>
               </a:rPr>
-              <a:t>Live stacked bar of accept vs reject per country on the Home page. Costs page shows the rolling 5-hour spend and the per-model breakdown.</a:t>
+              <a:t>Costs page shows the 5-hour rolling spend, per-model breakdown, and per-strategy averages. Rate-limit hits and soft-limit progress on every page's sidebar.</a:t>
             </a:r>
           </a:p>
         </p:txBody>
@@ -7832,7 +7832,7 @@
                 </a:solidFill>
                 <a:latin typeface="Calibri"/>
               </a:rPr>
-              <a:t>Hand-mark the Phase A pilot</a:t>
+              <a:t>Scale to harder questions</a:t>
             </a:r>
           </a:p>
         </p:txBody>
@@ -7867,7 +7867,7 @@
                 </a:solidFill>
                 <a:latin typeface="Calibri"/>
               </a:rPr>
-              <a:t>10 France questions across all four rubric tiers. Submit from the dashboard; D9 lock happens on save.</a:t>
+              <a:t>Run the swarm beyond Policy on the easy four countries: Portal, Quality, and Impact dimensions. Track where accuracy starts to fall.</a:t>
             </a:r>
           </a:p>
         </p:txBody>
@@ -7945,7 +7945,7 @@
                 </a:solidFill>
                 <a:latin typeface="Calibri"/>
               </a:rPr>
-              <a:t>Baseline + strategy comparison</a:t>
+              <a:t>Add the lower-resource countries</a:t>
             </a:r>
           </a:p>
         </p:txBody>
@@ -7980,7 +7980,7 @@
                 </a:solidFill>
                 <a:latin typeface="Calibri"/>
               </a:rPr>
-              <a:t>Run the swarm on the locked 10 with all four Verifier strategies. First real accuracy and rejection numbers.</a:t>
+              <a:t>Bring Hungary and Estonia into the regular sweep. Country-language fetch is the biggest unknown.</a:t>
             </a:r>
           </a:p>
         </p:txBody>
@@ -8058,7 +8058,7 @@
                 </a:solidFill>
                 <a:latin typeface="Calibri"/>
               </a:rPr>
-              <a:t>First analysis pass</a:t>
+              <a:t>Verifier strategy comparison</a:t>
             </a:r>
           </a:p>
         </p:txBody>
@@ -8093,7 +8093,7 @@
                 </a:solidFill>
                 <a:latin typeface="Calibri"/>
               </a:rPr>
-              <a:t>Accuracy and cost stratified by rubric tier × ODMI dimension. Draft methodology + early-results in the dissertation.</a:t>
+              <a:t>Four strategies on the same Researcher rows. Hallucination catch rate, false rejection rate, tokens per Verifier run.</a:t>
             </a:r>
           </a:p>
         </p:txBody>
@@ -8294,7 +8294,7 @@
                 </a:solidFill>
                 <a:latin typeface="Calibri"/>
               </a:rPr>
-              <a:t>Phase B — six-country matrix</a:t>
+              <a:t>Phase B saturation, six countries</a:t>
             </a:r>
           </a:p>
         </p:txBody>
@@ -8329,7 +8329,7 @@
                 </a:solidFill>
                 <a:latin typeface="Calibri"/>
               </a:rPr>
-              <a:t>FR, DE, NL, RO, HU, EE. Cost–accuracy surface comes out of the Haiku / Sonnet / Opus / tiered model experiments.</a:t>
+              <a:t>FR, DE, NL, RO, HU, EE × all 143 questions. Cost–accuracy surface across the Haiku / Sonnet / Opus / tiered model mix.</a:t>
             </a:r>
           </a:p>
         </p:txBody>
@@ -8555,7 +8555,7 @@
                 </a:solidFill>
                 <a:latin typeface="Calibri"/>
               </a:rPr>
-              <a:t>Failure-mode taxonomy and accuracy–cost surface as the two primary contributions. Phase C as a stretch.</a:t>
+              <a:t>Failure-mode taxonomy and accuracy–cost surface as the two primary contributions. Phase C (36 countries) as a stretch.</a:t>
             </a:r>
           </a:p>
         </p:txBody>

--- a/docs/PROGRESS_SLIDES_2026-05-13.pptx
+++ b/docs/PROGRESS_SLIDES_2026-05-13.pptx
@@ -3724,7 +3724,7 @@
             <a:avLst/>
           </a:prstGeom>
           <a:solidFill>
-            <a:srgbClr val="38A169"/>
+            <a:srgbClr val="1E3A5F"/>
           </a:solidFill>
           <a:ln>
             <a:noFill/>
@@ -3782,7 +3782,7 @@
                 </a:solidFill>
                 <a:latin typeface="Calibri"/>
               </a:rPr>
-              <a:t>ACCURACY VS ODMI</a:t>
+              <a:t>GROUND-TRUTH COVERAGE</a:t>
             </a:r>
           </a:p>
         </p:txBody>
@@ -3817,7 +3817,7 @@
                 </a:solidFill>
                 <a:latin typeface="Calibri"/>
               </a:rPr>
-              <a:t>100%</a:t>
+              <a:t>5,148</a:t>
             </a:r>
           </a:p>
         </p:txBody>
@@ -3852,7 +3852,7 @@
                 </a:solidFill>
                 <a:latin typeface="Calibri"/>
               </a:rPr>
-              <a:t>11 / 11 match against ODMI 2025.</a:t>
+              <a:t>ODMI answers loaded (36 countries × 143 questions).</a:t>
             </a:r>
           </a:p>
         </p:txBody>
@@ -3917,7 +3917,7 @@
             <a:avLst/>
           </a:prstGeom>
           <a:solidFill>
-            <a:srgbClr val="1E3A5F"/>
+            <a:srgbClr val="38A169"/>
           </a:solidFill>
           <a:ln>
             <a:noFill/>
@@ -3975,7 +3975,7 @@
                 </a:solidFill>
                 <a:latin typeface="Calibri"/>
               </a:rPr>
-              <a:t>GROUND-TRUTH COVERAGE</a:t>
+              <a:t>ACCURACY VS ODMI</a:t>
             </a:r>
           </a:p>
         </p:txBody>
@@ -4010,7 +4010,7 @@
                 </a:solidFill>
                 <a:latin typeface="Calibri"/>
               </a:rPr>
-              <a:t>5,148</a:t>
+              <a:t>100%</a:t>
             </a:r>
           </a:p>
         </p:txBody>
@@ -4045,7 +4045,7 @@
                 </a:solidFill>
                 <a:latin typeface="Calibri"/>
               </a:rPr>
-              <a:t>ODMI answers loaded (36 countries × 143 questions).</a:t>
+              <a:t>11 / 11 match against ODMI 2025.</a:t>
             </a:r>
           </a:p>
         </p:txBody>

--- a/docs/PROGRESS_SLIDES_2026-05-13.pptx
+++ b/docs/PROGRESS_SLIDES_2026-05-13.pptx
@@ -5,14 +5,15 @@
     <p:sldMasterId id="2147483648" r:id="rId1"/>
   </p:sldMasterIdLst>
   <p:sldIdLst>
-    <p:sldId id="256" r:id="rId7"/>
-    <p:sldId id="257" r:id="rId8"/>
-    <p:sldId id="258" r:id="rId9"/>
-    <p:sldId id="259" r:id="rId10"/>
-    <p:sldId id="260" r:id="rId11"/>
-    <p:sldId id="261" r:id="rId12"/>
+    <p:sldId id="256" r:id="rId2"/>
+    <p:sldId id="257" r:id="rId3"/>
+    <p:sldId id="258" r:id="rId4"/>
+    <p:sldId id="259" r:id="rId5"/>
+    <p:sldId id="260" r:id="rId6"/>
+    <p:sldId id="262" r:id="rId7"/>
+    <p:sldId id="261" r:id="rId8"/>
   </p:sldIdLst>
-  <p:sldSz cx="9144000" cy="5143500" type="screen4x3"/>
+  <p:sldSz cx="9144000" cy="5143500" type="screen16x9"/>
   <p:notesSz cx="6858000" cy="9144000"/>
   <p:defaultTextStyle>
     <a:defPPr>
@@ -109,6 +110,22 @@
       </a:defRPr>
     </a:lvl9pPr>
   </p:defaultTextStyle>
+  <p:extLst>
+    <p:ext uri="{EFAFB233-063F-42B5-8137-9DF3F51BA10A}">
+      <p15:sldGuideLst xmlns:p15="http://schemas.microsoft.com/office/powerpoint/2012/main">
+        <p15:guide id="1" orient="horz" pos="2160">
+          <p15:clr>
+            <a:srgbClr val="A4A3A4"/>
+          </p15:clr>
+        </p15:guide>
+        <p15:guide id="2" pos="2880">
+          <p15:clr>
+            <a:srgbClr val="A4A3A4"/>
+          </p15:clr>
+        </p15:guide>
+      </p15:sldGuideLst>
+    </p:ext>
+  </p:extLst>
 </p:presentation>
 </file>
 
@@ -150,10 +167,9 @@
           <a:lstStyle/>
           <a:p>
             <a:r>
-              <a:rPr lang="en-US" smtClean="0"/>
+              <a:rPr lang="en-US"/>
               <a:t>Click to edit Master title style</a:t>
             </a:r>
-            <a:endParaRPr lang="en-US"/>
           </a:p>
         </p:txBody>
       </p:sp>
@@ -269,10 +285,9 @@
           </a:lstStyle>
           <a:p>
             <a:r>
-              <a:rPr lang="en-US" smtClean="0"/>
+              <a:rPr lang="en-US"/>
               <a:t>Click to edit Master subtitle style</a:t>
             </a:r>
-            <a:endParaRPr lang="en-US"/>
           </a:p>
         </p:txBody>
       </p:sp>
@@ -293,7 +308,7 @@
           <a:p>
             <a:fld id="{5BCAD085-E8A6-8845-BD4E-CB4CCA059FC4}" type="datetimeFigureOut">
               <a:rPr lang="en-US" smtClean="0"/>
-              <a:t>1/27/13</a:t>
+              <a:t>5/13/26</a:t>
             </a:fld>
             <a:endParaRPr lang="en-US"/>
           </a:p>
@@ -387,10 +402,9 @@
           <a:lstStyle/>
           <a:p>
             <a:r>
-              <a:rPr lang="en-US" smtClean="0"/>
+              <a:rPr lang="en-US"/>
               <a:t>Click to edit Master title style</a:t>
             </a:r>
-            <a:endParaRPr lang="en-US"/>
           </a:p>
         </p:txBody>
       </p:sp>
@@ -411,38 +425,37 @@
           <a:p>
             <a:pPr lvl="0"/>
             <a:r>
-              <a:rPr lang="en-US" smtClean="0"/>
+              <a:rPr lang="en-US"/>
               <a:t>Click to edit Master text styles</a:t>
             </a:r>
           </a:p>
           <a:p>
             <a:pPr lvl="1"/>
             <a:r>
-              <a:rPr lang="en-US" smtClean="0"/>
+              <a:rPr lang="en-US"/>
               <a:t>Second level</a:t>
             </a:r>
           </a:p>
           <a:p>
             <a:pPr lvl="2"/>
             <a:r>
-              <a:rPr lang="en-US" smtClean="0"/>
+              <a:rPr lang="en-US"/>
               <a:t>Third level</a:t>
             </a:r>
           </a:p>
           <a:p>
             <a:pPr lvl="3"/>
             <a:r>
-              <a:rPr lang="en-US" smtClean="0"/>
+              <a:rPr lang="en-US"/>
               <a:t>Fourth level</a:t>
             </a:r>
           </a:p>
           <a:p>
             <a:pPr lvl="4"/>
             <a:r>
-              <a:rPr lang="en-US" smtClean="0"/>
+              <a:rPr lang="en-US"/>
               <a:t>Fifth level</a:t>
             </a:r>
-            <a:endParaRPr lang="en-US"/>
           </a:p>
         </p:txBody>
       </p:sp>
@@ -463,7 +476,7 @@
           <a:p>
             <a:fld id="{5BCAD085-E8A6-8845-BD4E-CB4CCA059FC4}" type="datetimeFigureOut">
               <a:rPr lang="en-US" smtClean="0"/>
-              <a:t>1/27/13</a:t>
+              <a:t>5/13/26</a:t>
             </a:fld>
             <a:endParaRPr lang="en-US"/>
           </a:p>
@@ -562,10 +575,9 @@
           <a:lstStyle/>
           <a:p>
             <a:r>
-              <a:rPr lang="en-US" smtClean="0"/>
+              <a:rPr lang="en-US"/>
               <a:t>Click to edit Master title style</a:t>
             </a:r>
-            <a:endParaRPr lang="en-US"/>
           </a:p>
         </p:txBody>
       </p:sp>
@@ -591,38 +603,37 @@
           <a:p>
             <a:pPr lvl="0"/>
             <a:r>
-              <a:rPr lang="en-US" smtClean="0"/>
+              <a:rPr lang="en-US"/>
               <a:t>Click to edit Master text styles</a:t>
             </a:r>
           </a:p>
           <a:p>
             <a:pPr lvl="1"/>
             <a:r>
-              <a:rPr lang="en-US" smtClean="0"/>
+              <a:rPr lang="en-US"/>
               <a:t>Second level</a:t>
             </a:r>
           </a:p>
           <a:p>
             <a:pPr lvl="2"/>
             <a:r>
-              <a:rPr lang="en-US" smtClean="0"/>
+              <a:rPr lang="en-US"/>
               <a:t>Third level</a:t>
             </a:r>
           </a:p>
           <a:p>
             <a:pPr lvl="3"/>
             <a:r>
-              <a:rPr lang="en-US" smtClean="0"/>
+              <a:rPr lang="en-US"/>
               <a:t>Fourth level</a:t>
             </a:r>
           </a:p>
           <a:p>
             <a:pPr lvl="4"/>
             <a:r>
-              <a:rPr lang="en-US" smtClean="0"/>
+              <a:rPr lang="en-US"/>
               <a:t>Fifth level</a:t>
             </a:r>
-            <a:endParaRPr lang="en-US"/>
           </a:p>
         </p:txBody>
       </p:sp>
@@ -643,7 +654,7 @@
           <a:p>
             <a:fld id="{5BCAD085-E8A6-8845-BD4E-CB4CCA059FC4}" type="datetimeFigureOut">
               <a:rPr lang="en-US" smtClean="0"/>
-              <a:t>1/27/13</a:t>
+              <a:t>5/13/26</a:t>
             </a:fld>
             <a:endParaRPr lang="en-US"/>
           </a:p>
@@ -737,10 +748,9 @@
           <a:lstStyle/>
           <a:p>
             <a:r>
-              <a:rPr lang="en-US" smtClean="0"/>
+              <a:rPr lang="en-US"/>
               <a:t>Click to edit Master title style</a:t>
             </a:r>
-            <a:endParaRPr lang="en-US"/>
           </a:p>
         </p:txBody>
       </p:sp>
@@ -761,38 +771,37 @@
           <a:p>
             <a:pPr lvl="0"/>
             <a:r>
-              <a:rPr lang="en-US" smtClean="0"/>
+              <a:rPr lang="en-US"/>
               <a:t>Click to edit Master text styles</a:t>
             </a:r>
           </a:p>
           <a:p>
             <a:pPr lvl="1"/>
             <a:r>
-              <a:rPr lang="en-US" smtClean="0"/>
+              <a:rPr lang="en-US"/>
               <a:t>Second level</a:t>
             </a:r>
           </a:p>
           <a:p>
             <a:pPr lvl="2"/>
             <a:r>
-              <a:rPr lang="en-US" smtClean="0"/>
+              <a:rPr lang="en-US"/>
               <a:t>Third level</a:t>
             </a:r>
           </a:p>
           <a:p>
             <a:pPr lvl="3"/>
             <a:r>
-              <a:rPr lang="en-US" smtClean="0"/>
+              <a:rPr lang="en-US"/>
               <a:t>Fourth level</a:t>
             </a:r>
           </a:p>
           <a:p>
             <a:pPr lvl="4"/>
             <a:r>
-              <a:rPr lang="en-US" smtClean="0"/>
+              <a:rPr lang="en-US"/>
               <a:t>Fifth level</a:t>
             </a:r>
-            <a:endParaRPr lang="en-US"/>
           </a:p>
         </p:txBody>
       </p:sp>
@@ -813,7 +822,7 @@
           <a:p>
             <a:fld id="{5BCAD085-E8A6-8845-BD4E-CB4CCA059FC4}" type="datetimeFigureOut">
               <a:rPr lang="en-US" smtClean="0"/>
-              <a:t>1/27/13</a:t>
+              <a:t>5/13/26</a:t>
             </a:fld>
             <a:endParaRPr lang="en-US"/>
           </a:p>
@@ -916,10 +925,9 @@
           </a:lstStyle>
           <a:p>
             <a:r>
-              <a:rPr lang="en-US" smtClean="0"/>
+              <a:rPr lang="en-US"/>
               <a:t>Click to edit Master title style</a:t>
             </a:r>
-            <a:endParaRPr lang="en-US"/>
           </a:p>
         </p:txBody>
       </p:sp>
@@ -1036,7 +1044,7 @@
           <a:p>
             <a:pPr lvl="0"/>
             <a:r>
-              <a:rPr lang="en-US" smtClean="0"/>
+              <a:rPr lang="en-US"/>
               <a:t>Click to edit Master text styles</a:t>
             </a:r>
           </a:p>
@@ -1059,7 +1067,7 @@
           <a:p>
             <a:fld id="{5BCAD085-E8A6-8845-BD4E-CB4CCA059FC4}" type="datetimeFigureOut">
               <a:rPr lang="en-US" smtClean="0"/>
-              <a:t>1/27/13</a:t>
+              <a:t>5/13/26</a:t>
             </a:fld>
             <a:endParaRPr lang="en-US"/>
           </a:p>
@@ -1153,10 +1161,9 @@
           <a:lstStyle/>
           <a:p>
             <a:r>
-              <a:rPr lang="en-US" smtClean="0"/>
+              <a:rPr lang="en-US"/>
               <a:t>Click to edit Master title style</a:t>
             </a:r>
-            <a:endParaRPr lang="en-US"/>
           </a:p>
         </p:txBody>
       </p:sp>
@@ -1210,38 +1217,37 @@
           <a:p>
             <a:pPr lvl="0"/>
             <a:r>
-              <a:rPr lang="en-US" smtClean="0"/>
+              <a:rPr lang="en-US"/>
               <a:t>Click to edit Master text styles</a:t>
             </a:r>
           </a:p>
           <a:p>
             <a:pPr lvl="1"/>
             <a:r>
-              <a:rPr lang="en-US" smtClean="0"/>
+              <a:rPr lang="en-US"/>
               <a:t>Second level</a:t>
             </a:r>
           </a:p>
           <a:p>
             <a:pPr lvl="2"/>
             <a:r>
-              <a:rPr lang="en-US" smtClean="0"/>
+              <a:rPr lang="en-US"/>
               <a:t>Third level</a:t>
             </a:r>
           </a:p>
           <a:p>
             <a:pPr lvl="3"/>
             <a:r>
-              <a:rPr lang="en-US" smtClean="0"/>
+              <a:rPr lang="en-US"/>
               <a:t>Fourth level</a:t>
             </a:r>
           </a:p>
           <a:p>
             <a:pPr lvl="4"/>
             <a:r>
-              <a:rPr lang="en-US" smtClean="0"/>
+              <a:rPr lang="en-US"/>
               <a:t>Fifth level</a:t>
             </a:r>
-            <a:endParaRPr lang="en-US"/>
           </a:p>
         </p:txBody>
       </p:sp>
@@ -1295,38 +1301,37 @@
           <a:p>
             <a:pPr lvl="0"/>
             <a:r>
-              <a:rPr lang="en-US" smtClean="0"/>
+              <a:rPr lang="en-US"/>
               <a:t>Click to edit Master text styles</a:t>
             </a:r>
           </a:p>
           <a:p>
             <a:pPr lvl="1"/>
             <a:r>
-              <a:rPr lang="en-US" smtClean="0"/>
+              <a:rPr lang="en-US"/>
               <a:t>Second level</a:t>
             </a:r>
           </a:p>
           <a:p>
             <a:pPr lvl="2"/>
             <a:r>
-              <a:rPr lang="en-US" smtClean="0"/>
+              <a:rPr lang="en-US"/>
               <a:t>Third level</a:t>
             </a:r>
           </a:p>
           <a:p>
             <a:pPr lvl="3"/>
             <a:r>
-              <a:rPr lang="en-US" smtClean="0"/>
+              <a:rPr lang="en-US"/>
               <a:t>Fourth level</a:t>
             </a:r>
           </a:p>
           <a:p>
             <a:pPr lvl="4"/>
             <a:r>
-              <a:rPr lang="en-US" smtClean="0"/>
+              <a:rPr lang="en-US"/>
               <a:t>Fifth level</a:t>
             </a:r>
-            <a:endParaRPr lang="en-US"/>
           </a:p>
         </p:txBody>
       </p:sp>
@@ -1347,7 +1352,7 @@
           <a:p>
             <a:fld id="{5BCAD085-E8A6-8845-BD4E-CB4CCA059FC4}" type="datetimeFigureOut">
               <a:rPr lang="en-US" smtClean="0"/>
-              <a:t>1/27/13</a:t>
+              <a:t>5/13/26</a:t>
             </a:fld>
             <a:endParaRPr lang="en-US"/>
           </a:p>
@@ -1445,10 +1450,9 @@
           </a:lstStyle>
           <a:p>
             <a:r>
-              <a:rPr lang="en-US" smtClean="0"/>
+              <a:rPr lang="en-US"/>
               <a:t>Click to edit Master title style</a:t>
             </a:r>
-            <a:endParaRPr lang="en-US"/>
           </a:p>
         </p:txBody>
       </p:sp>
@@ -1511,7 +1515,7 @@
           <a:p>
             <a:pPr lvl="0"/>
             <a:r>
-              <a:rPr lang="en-US" smtClean="0"/>
+              <a:rPr lang="en-US"/>
               <a:t>Click to edit Master text styles</a:t>
             </a:r>
           </a:p>
@@ -1567,38 +1571,37 @@
           <a:p>
             <a:pPr lvl="0"/>
             <a:r>
-              <a:rPr lang="en-US" smtClean="0"/>
+              <a:rPr lang="en-US"/>
               <a:t>Click to edit Master text styles</a:t>
             </a:r>
           </a:p>
           <a:p>
             <a:pPr lvl="1"/>
             <a:r>
-              <a:rPr lang="en-US" smtClean="0"/>
+              <a:rPr lang="en-US"/>
               <a:t>Second level</a:t>
             </a:r>
           </a:p>
           <a:p>
             <a:pPr lvl="2"/>
             <a:r>
-              <a:rPr lang="en-US" smtClean="0"/>
+              <a:rPr lang="en-US"/>
               <a:t>Third level</a:t>
             </a:r>
           </a:p>
           <a:p>
             <a:pPr lvl="3"/>
             <a:r>
-              <a:rPr lang="en-US" smtClean="0"/>
+              <a:rPr lang="en-US"/>
               <a:t>Fourth level</a:t>
             </a:r>
           </a:p>
           <a:p>
             <a:pPr lvl="4"/>
             <a:r>
-              <a:rPr lang="en-US" smtClean="0"/>
+              <a:rPr lang="en-US"/>
               <a:t>Fifth level</a:t>
             </a:r>
-            <a:endParaRPr lang="en-US"/>
           </a:p>
         </p:txBody>
       </p:sp>
@@ -1661,7 +1664,7 @@
           <a:p>
             <a:pPr lvl="0"/>
             <a:r>
-              <a:rPr lang="en-US" smtClean="0"/>
+              <a:rPr lang="en-US"/>
               <a:t>Click to edit Master text styles</a:t>
             </a:r>
           </a:p>
@@ -1717,38 +1720,37 @@
           <a:p>
             <a:pPr lvl="0"/>
             <a:r>
-              <a:rPr lang="en-US" smtClean="0"/>
+              <a:rPr lang="en-US"/>
               <a:t>Click to edit Master text styles</a:t>
             </a:r>
           </a:p>
           <a:p>
             <a:pPr lvl="1"/>
             <a:r>
-              <a:rPr lang="en-US" smtClean="0"/>
+              <a:rPr lang="en-US"/>
               <a:t>Second level</a:t>
             </a:r>
           </a:p>
           <a:p>
             <a:pPr lvl="2"/>
             <a:r>
-              <a:rPr lang="en-US" smtClean="0"/>
+              <a:rPr lang="en-US"/>
               <a:t>Third level</a:t>
             </a:r>
           </a:p>
           <a:p>
             <a:pPr lvl="3"/>
             <a:r>
-              <a:rPr lang="en-US" smtClean="0"/>
+              <a:rPr lang="en-US"/>
               <a:t>Fourth level</a:t>
             </a:r>
           </a:p>
           <a:p>
             <a:pPr lvl="4"/>
             <a:r>
-              <a:rPr lang="en-US" smtClean="0"/>
+              <a:rPr lang="en-US"/>
               <a:t>Fifth level</a:t>
             </a:r>
-            <a:endParaRPr lang="en-US"/>
           </a:p>
         </p:txBody>
       </p:sp>
@@ -1769,7 +1771,7 @@
           <a:p>
             <a:fld id="{5BCAD085-E8A6-8845-BD4E-CB4CCA059FC4}" type="datetimeFigureOut">
               <a:rPr lang="en-US" smtClean="0"/>
-              <a:t>1/27/13</a:t>
+              <a:t>5/13/26</a:t>
             </a:fld>
             <a:endParaRPr lang="en-US"/>
           </a:p>
@@ -1863,10 +1865,9 @@
           <a:lstStyle/>
           <a:p>
             <a:r>
-              <a:rPr lang="en-US" smtClean="0"/>
+              <a:rPr lang="en-US"/>
               <a:t>Click to edit Master title style</a:t>
             </a:r>
-            <a:endParaRPr lang="en-US"/>
           </a:p>
         </p:txBody>
       </p:sp>
@@ -1887,7 +1888,7 @@
           <a:p>
             <a:fld id="{5BCAD085-E8A6-8845-BD4E-CB4CCA059FC4}" type="datetimeFigureOut">
               <a:rPr lang="en-US" smtClean="0"/>
-              <a:t>1/27/13</a:t>
+              <a:t>5/13/26</a:t>
             </a:fld>
             <a:endParaRPr lang="en-US"/>
           </a:p>
@@ -1982,7 +1983,7 @@
           <a:p>
             <a:fld id="{5BCAD085-E8A6-8845-BD4E-CB4CCA059FC4}" type="datetimeFigureOut">
               <a:rPr lang="en-US" smtClean="0"/>
-              <a:t>1/27/13</a:t>
+              <a:t>5/13/26</a:t>
             </a:fld>
             <a:endParaRPr lang="en-US"/>
           </a:p>
@@ -2085,10 +2086,9 @@
           </a:lstStyle>
           <a:p>
             <a:r>
-              <a:rPr lang="en-US" smtClean="0"/>
+              <a:rPr lang="en-US"/>
               <a:t>Click to edit Master title style</a:t>
             </a:r>
-            <a:endParaRPr lang="en-US"/>
           </a:p>
         </p:txBody>
       </p:sp>
@@ -2142,38 +2142,37 @@
           <a:p>
             <a:pPr lvl="0"/>
             <a:r>
-              <a:rPr lang="en-US" smtClean="0"/>
+              <a:rPr lang="en-US"/>
               <a:t>Click to edit Master text styles</a:t>
             </a:r>
           </a:p>
           <a:p>
             <a:pPr lvl="1"/>
             <a:r>
-              <a:rPr lang="en-US" smtClean="0"/>
+              <a:rPr lang="en-US"/>
               <a:t>Second level</a:t>
             </a:r>
           </a:p>
           <a:p>
             <a:pPr lvl="2"/>
             <a:r>
-              <a:rPr lang="en-US" smtClean="0"/>
+              <a:rPr lang="en-US"/>
               <a:t>Third level</a:t>
             </a:r>
           </a:p>
           <a:p>
             <a:pPr lvl="3"/>
             <a:r>
-              <a:rPr lang="en-US" smtClean="0"/>
+              <a:rPr lang="en-US"/>
               <a:t>Fourth level</a:t>
             </a:r>
           </a:p>
           <a:p>
             <a:pPr lvl="4"/>
             <a:r>
-              <a:rPr lang="en-US" smtClean="0"/>
+              <a:rPr lang="en-US"/>
               <a:t>Fifth level</a:t>
             </a:r>
-            <a:endParaRPr lang="en-US"/>
           </a:p>
         </p:txBody>
       </p:sp>
@@ -2236,7 +2235,7 @@
           <a:p>
             <a:pPr lvl="0"/>
             <a:r>
-              <a:rPr lang="en-US" smtClean="0"/>
+              <a:rPr lang="en-US"/>
               <a:t>Click to edit Master text styles</a:t>
             </a:r>
           </a:p>
@@ -2259,7 +2258,7 @@
           <a:p>
             <a:fld id="{5BCAD085-E8A6-8845-BD4E-CB4CCA059FC4}" type="datetimeFigureOut">
               <a:rPr lang="en-US" smtClean="0"/>
-              <a:t>1/27/13</a:t>
+              <a:t>5/13/26</a:t>
             </a:fld>
             <a:endParaRPr lang="en-US"/>
           </a:p>
@@ -2362,10 +2361,9 @@
           </a:lstStyle>
           <a:p>
             <a:r>
-              <a:rPr lang="en-US" smtClean="0"/>
+              <a:rPr lang="en-US"/>
               <a:t>Click to edit Master title style</a:t>
             </a:r>
-            <a:endParaRPr lang="en-US"/>
           </a:p>
         </p:txBody>
       </p:sp>
@@ -2489,7 +2487,7 @@
           <a:p>
             <a:pPr lvl="0"/>
             <a:r>
-              <a:rPr lang="en-US" smtClean="0"/>
+              <a:rPr lang="en-US"/>
               <a:t>Click to edit Master text styles</a:t>
             </a:r>
           </a:p>
@@ -2512,7 +2510,7 @@
           <a:p>
             <a:fld id="{5BCAD085-E8A6-8845-BD4E-CB4CCA059FC4}" type="datetimeFigureOut">
               <a:rPr lang="en-US" smtClean="0"/>
-              <a:t>1/27/13</a:t>
+              <a:t>5/13/26</a:t>
             </a:fld>
             <a:endParaRPr lang="en-US"/>
           </a:p>
@@ -2621,10 +2619,9 @@
           <a:lstStyle/>
           <a:p>
             <a:r>
-              <a:rPr lang="en-US" smtClean="0"/>
+              <a:rPr lang="en-US"/>
               <a:t>Click to edit Master title style</a:t>
             </a:r>
-            <a:endParaRPr lang="en-US"/>
           </a:p>
         </p:txBody>
       </p:sp>
@@ -2655,38 +2652,37 @@
           <a:p>
             <a:pPr lvl="0"/>
             <a:r>
-              <a:rPr lang="en-US" smtClean="0"/>
+              <a:rPr lang="en-US"/>
               <a:t>Click to edit Master text styles</a:t>
             </a:r>
           </a:p>
           <a:p>
             <a:pPr lvl="1"/>
             <a:r>
-              <a:rPr lang="en-US" smtClean="0"/>
+              <a:rPr lang="en-US"/>
               <a:t>Second level</a:t>
             </a:r>
           </a:p>
           <a:p>
             <a:pPr lvl="2"/>
             <a:r>
-              <a:rPr lang="en-US" smtClean="0"/>
+              <a:rPr lang="en-US"/>
               <a:t>Third level</a:t>
             </a:r>
           </a:p>
           <a:p>
             <a:pPr lvl="3"/>
             <a:r>
-              <a:rPr lang="en-US" smtClean="0"/>
+              <a:rPr lang="en-US"/>
               <a:t>Fourth level</a:t>
             </a:r>
           </a:p>
           <a:p>
             <a:pPr lvl="4"/>
             <a:r>
-              <a:rPr lang="en-US" smtClean="0"/>
+              <a:rPr lang="en-US"/>
               <a:t>Fifth level</a:t>
             </a:r>
-            <a:endParaRPr lang="en-US"/>
           </a:p>
         </p:txBody>
       </p:sp>
@@ -2725,7 +2721,7 @@
           <a:p>
             <a:fld id="{5BCAD085-E8A6-8845-BD4E-CB4CCA059FC4}" type="datetimeFigureOut">
               <a:rPr lang="en-US" smtClean="0"/>
-              <a:t>1/27/13</a:t>
+              <a:t>5/13/26</a:t>
             </a:fld>
             <a:endParaRPr lang="en-US"/>
           </a:p>
@@ -3084,7 +3080,7 @@
 </file>
 
 <file path=ppt/slides/slide1.xml><?xml version="1.0" encoding="utf-8"?>
-<p:sld xmlns:a="http://schemas.openxmlformats.org/drawingml/2006/main" xmlns:p="http://schemas.openxmlformats.org/presentationml/2006/main" xmlns:r="http://schemas.openxmlformats.org/officeDocument/2006/relationships">
+<p:sld xmlns:a="http://schemas.openxmlformats.org/drawingml/2006/main" xmlns:r="http://schemas.openxmlformats.org/officeDocument/2006/relationships" xmlns:p="http://schemas.openxmlformats.org/presentationml/2006/main">
   <p:cSld>
     <p:spTree>
       <p:nvGrpSpPr>
@@ -3092,7 +3088,14 @@
         <p:cNvGrpSpPr/>
         <p:nvPr/>
       </p:nvGrpSpPr>
-      <p:grpSpPr/>
+      <p:grpSpPr>
+        <a:xfrm>
+          <a:off x="0" y="0"/>
+          <a:ext cx="0" cy="0"/>
+          <a:chOff x="0" y="0"/>
+          <a:chExt cx="0" cy="0"/>
+        </a:xfrm>
+      </p:grpSpPr>
       <p:sp>
         <p:nvSpPr>
           <p:cNvPr id="2" name="Rectangle 1"/>
@@ -3133,6 +3136,7 @@
           <a:lstStyle/>
           <a:p>
             <a:pPr algn="ctr"/>
+            <a:endParaRPr/>
           </a:p>
         </p:txBody>
       </p:sp>
@@ -3176,6 +3180,7 @@
           <a:lstStyle/>
           <a:p>
             <a:pPr algn="ctr"/>
+            <a:endParaRPr/>
           </a:p>
         </p:txBody>
       </p:sp>
@@ -3196,7 +3201,7 @@
           <a:noFill/>
         </p:spPr>
         <p:txBody>
-          <a:bodyPr wrap="square" lIns="0" rIns="0" tIns="0" bIns="0">
+          <a:bodyPr wrap="square" lIns="0" tIns="0" rIns="0" bIns="0">
             <a:spAutoFit/>
           </a:bodyPr>
           <a:lstStyle/>
@@ -3231,7 +3236,7 @@
           <a:noFill/>
         </p:spPr>
         <p:txBody>
-          <a:bodyPr wrap="square" lIns="0" rIns="0" tIns="0" bIns="0">
+          <a:bodyPr wrap="square" lIns="0" tIns="0" rIns="0" bIns="0">
             <a:spAutoFit/>
           </a:bodyPr>
           <a:lstStyle/>
@@ -3287,7 +3292,7 @@
           <a:noFill/>
         </p:spPr>
         <p:txBody>
-          <a:bodyPr wrap="square" lIns="0" rIns="0" tIns="0" bIns="0">
+          <a:bodyPr wrap="square" lIns="0" tIns="0" rIns="0" bIns="0">
             <a:spAutoFit/>
           </a:bodyPr>
           <a:lstStyle/>
@@ -3322,7 +3327,7 @@
           <a:noFill/>
         </p:spPr>
         <p:txBody>
-          <a:bodyPr wrap="square" lIns="0" rIns="0" tIns="0" bIns="0">
+          <a:bodyPr wrap="square" lIns="0" tIns="0" rIns="0" bIns="0">
             <a:spAutoFit/>
           </a:bodyPr>
           <a:lstStyle/>
@@ -3349,7 +3354,7 @@
 </file>
 
 <file path=ppt/slides/slide2.xml><?xml version="1.0" encoding="utf-8"?>
-<p:sld xmlns:a="http://schemas.openxmlformats.org/drawingml/2006/main" xmlns:p="http://schemas.openxmlformats.org/presentationml/2006/main" xmlns:r="http://schemas.openxmlformats.org/officeDocument/2006/relationships">
+<p:sld xmlns:a="http://schemas.openxmlformats.org/drawingml/2006/main" xmlns:r="http://schemas.openxmlformats.org/officeDocument/2006/relationships" xmlns:p="http://schemas.openxmlformats.org/presentationml/2006/main">
   <p:cSld>
     <p:spTree>
       <p:nvGrpSpPr>
@@ -3357,7 +3362,14 @@
         <p:cNvGrpSpPr/>
         <p:nvPr/>
       </p:nvGrpSpPr>
-      <p:grpSpPr/>
+      <p:grpSpPr>
+        <a:xfrm>
+          <a:off x="0" y="0"/>
+          <a:ext cx="0" cy="0"/>
+          <a:chOff x="0" y="0"/>
+          <a:chExt cx="0" cy="0"/>
+        </a:xfrm>
+      </p:grpSpPr>
       <p:sp>
         <p:nvSpPr>
           <p:cNvPr id="2" name="Rectangle 1"/>
@@ -3398,6 +3410,7 @@
           <a:lstStyle/>
           <a:p>
             <a:pPr algn="ctr"/>
+            <a:endParaRPr/>
           </a:p>
         </p:txBody>
       </p:sp>
@@ -3418,7 +3431,7 @@
           <a:noFill/>
         </p:spPr>
         <p:txBody>
-          <a:bodyPr wrap="square" lIns="0" rIns="0" tIns="0" bIns="0">
+          <a:bodyPr wrap="square" lIns="0" tIns="0" rIns="0" bIns="0">
             <a:spAutoFit/>
           </a:bodyPr>
           <a:lstStyle/>
@@ -3453,7 +3466,7 @@
           <a:noFill/>
         </p:spPr>
         <p:txBody>
-          <a:bodyPr wrap="square" lIns="0" rIns="0" tIns="0" bIns="0">
+          <a:bodyPr wrap="square" lIns="0" tIns="0" rIns="0" bIns="0">
             <a:spAutoFit/>
           </a:bodyPr>
           <a:lstStyle/>
@@ -3513,6 +3526,7 @@
           <a:lstStyle/>
           <a:p>
             <a:pPr algn="ctr"/>
+            <a:endParaRPr/>
           </a:p>
         </p:txBody>
       </p:sp>
@@ -3556,6 +3570,7 @@
           <a:lstStyle/>
           <a:p>
             <a:pPr algn="ctr"/>
+            <a:endParaRPr/>
           </a:p>
         </p:txBody>
       </p:sp>
@@ -3576,7 +3591,7 @@
           <a:noFill/>
         </p:spPr>
         <p:txBody>
-          <a:bodyPr wrap="square" lIns="0" rIns="0" tIns="0" bIns="0">
+          <a:bodyPr wrap="square" lIns="0" tIns="0" rIns="0" bIns="0">
             <a:spAutoFit/>
           </a:bodyPr>
           <a:lstStyle/>
@@ -3611,7 +3626,7 @@
           <a:noFill/>
         </p:spPr>
         <p:txBody>
-          <a:bodyPr wrap="square" lIns="0" rIns="0" tIns="0" bIns="0">
+          <a:bodyPr wrap="square" lIns="0" tIns="0" rIns="0" bIns="0">
             <a:spAutoFit/>
           </a:bodyPr>
           <a:lstStyle/>
@@ -3646,7 +3661,7 @@
           <a:noFill/>
         </p:spPr>
         <p:txBody>
-          <a:bodyPr wrap="square" lIns="0" rIns="0" tIns="0" bIns="0">
+          <a:bodyPr wrap="square" lIns="0" tIns="0" rIns="0" bIns="0">
             <a:spAutoFit/>
           </a:bodyPr>
           <a:lstStyle/>
@@ -3706,6 +3721,7 @@
           <a:lstStyle/>
           <a:p>
             <a:pPr algn="ctr"/>
+            <a:endParaRPr/>
           </a:p>
         </p:txBody>
       </p:sp>
@@ -3749,6 +3765,7 @@
           <a:lstStyle/>
           <a:p>
             <a:pPr algn="ctr"/>
+            <a:endParaRPr/>
           </a:p>
         </p:txBody>
       </p:sp>
@@ -3769,7 +3786,7 @@
           <a:noFill/>
         </p:spPr>
         <p:txBody>
-          <a:bodyPr wrap="square" lIns="0" rIns="0" tIns="0" bIns="0">
+          <a:bodyPr wrap="square" lIns="0" tIns="0" rIns="0" bIns="0">
             <a:spAutoFit/>
           </a:bodyPr>
           <a:lstStyle/>
@@ -3804,7 +3821,7 @@
           <a:noFill/>
         </p:spPr>
         <p:txBody>
-          <a:bodyPr wrap="square" lIns="0" rIns="0" tIns="0" bIns="0">
+          <a:bodyPr wrap="square" lIns="0" tIns="0" rIns="0" bIns="0">
             <a:spAutoFit/>
           </a:bodyPr>
           <a:lstStyle/>
@@ -3839,7 +3856,7 @@
           <a:noFill/>
         </p:spPr>
         <p:txBody>
-          <a:bodyPr wrap="square" lIns="0" rIns="0" tIns="0" bIns="0">
+          <a:bodyPr wrap="square" lIns="0" tIns="0" rIns="0" bIns="0">
             <a:spAutoFit/>
           </a:bodyPr>
           <a:lstStyle/>
@@ -3899,6 +3916,7 @@
           <a:lstStyle/>
           <a:p>
             <a:pPr algn="ctr"/>
+            <a:endParaRPr/>
           </a:p>
         </p:txBody>
       </p:sp>
@@ -3942,6 +3960,7 @@
           <a:lstStyle/>
           <a:p>
             <a:pPr algn="ctr"/>
+            <a:endParaRPr/>
           </a:p>
         </p:txBody>
       </p:sp>
@@ -3962,7 +3981,7 @@
           <a:noFill/>
         </p:spPr>
         <p:txBody>
-          <a:bodyPr wrap="square" lIns="0" rIns="0" tIns="0" bIns="0">
+          <a:bodyPr wrap="square" lIns="0" tIns="0" rIns="0" bIns="0">
             <a:spAutoFit/>
           </a:bodyPr>
           <a:lstStyle/>
@@ -3997,7 +4016,7 @@
           <a:noFill/>
         </p:spPr>
         <p:txBody>
-          <a:bodyPr wrap="square" lIns="0" rIns="0" tIns="0" bIns="0">
+          <a:bodyPr wrap="square" lIns="0" tIns="0" rIns="0" bIns="0">
             <a:spAutoFit/>
           </a:bodyPr>
           <a:lstStyle/>
@@ -4032,7 +4051,7 @@
           <a:noFill/>
         </p:spPr>
         <p:txBody>
-          <a:bodyPr wrap="square" lIns="0" rIns="0" tIns="0" bIns="0">
+          <a:bodyPr wrap="square" lIns="0" tIns="0" rIns="0" bIns="0">
             <a:spAutoFit/>
           </a:bodyPr>
           <a:lstStyle/>
@@ -4092,6 +4111,7 @@
           <a:lstStyle/>
           <a:p>
             <a:pPr algn="ctr"/>
+            <a:endParaRPr/>
           </a:p>
         </p:txBody>
       </p:sp>
@@ -4135,6 +4155,7 @@
           <a:lstStyle/>
           <a:p>
             <a:pPr algn="ctr"/>
+            <a:endParaRPr/>
           </a:p>
         </p:txBody>
       </p:sp>
@@ -4155,7 +4176,7 @@
           <a:noFill/>
         </p:spPr>
         <p:txBody>
-          <a:bodyPr wrap="square" lIns="0" rIns="0" tIns="0" bIns="0">
+          <a:bodyPr wrap="square" lIns="0" tIns="0" rIns="0" bIns="0">
             <a:spAutoFit/>
           </a:bodyPr>
           <a:lstStyle/>
@@ -4190,7 +4211,7 @@
           <a:noFill/>
         </p:spPr>
         <p:txBody>
-          <a:bodyPr wrap="square" lIns="0" rIns="0" tIns="0" bIns="0">
+          <a:bodyPr wrap="square" lIns="0" tIns="0" rIns="0" bIns="0">
             <a:spAutoFit/>
           </a:bodyPr>
           <a:lstStyle/>
@@ -4225,7 +4246,7 @@
           <a:noFill/>
         </p:spPr>
         <p:txBody>
-          <a:bodyPr wrap="square" lIns="0" rIns="0" tIns="0" bIns="0">
+          <a:bodyPr wrap="square" lIns="0" tIns="0" rIns="0" bIns="0">
             <a:spAutoFit/>
           </a:bodyPr>
           <a:lstStyle/>
@@ -4285,6 +4306,7 @@
           <a:lstStyle/>
           <a:p>
             <a:pPr algn="ctr"/>
+            <a:endParaRPr/>
           </a:p>
         </p:txBody>
       </p:sp>
@@ -4328,6 +4350,7 @@
           <a:lstStyle/>
           <a:p>
             <a:pPr algn="ctr"/>
+            <a:endParaRPr/>
           </a:p>
         </p:txBody>
       </p:sp>
@@ -4348,7 +4371,7 @@
           <a:noFill/>
         </p:spPr>
         <p:txBody>
-          <a:bodyPr wrap="square" lIns="0" rIns="0" tIns="0" bIns="0">
+          <a:bodyPr wrap="square" lIns="0" tIns="0" rIns="0" bIns="0">
             <a:spAutoFit/>
           </a:bodyPr>
           <a:lstStyle/>
@@ -4383,7 +4406,7 @@
           <a:noFill/>
         </p:spPr>
         <p:txBody>
-          <a:bodyPr wrap="square" lIns="0" rIns="0" tIns="0" bIns="0">
+          <a:bodyPr wrap="square" lIns="0" tIns="0" rIns="0" bIns="0">
             <a:spAutoFit/>
           </a:bodyPr>
           <a:lstStyle/>
@@ -4443,6 +4466,7 @@
           <a:lstStyle/>
           <a:p>
             <a:pPr algn="ctr"/>
+            <a:endParaRPr/>
           </a:p>
         </p:txBody>
       </p:sp>
@@ -4486,6 +4510,7 @@
           <a:lstStyle/>
           <a:p>
             <a:pPr algn="ctr"/>
+            <a:endParaRPr/>
           </a:p>
         </p:txBody>
       </p:sp>
@@ -4506,7 +4531,7 @@
           <a:noFill/>
         </p:spPr>
         <p:txBody>
-          <a:bodyPr wrap="square" lIns="0" rIns="0" tIns="0" bIns="0">
+          <a:bodyPr wrap="square" lIns="0" tIns="0" rIns="0" bIns="0">
             <a:spAutoFit/>
           </a:bodyPr>
           <a:lstStyle/>
@@ -4541,7 +4566,7 @@
           <a:noFill/>
         </p:spPr>
         <p:txBody>
-          <a:bodyPr wrap="square" lIns="0" rIns="0" tIns="0" bIns="0">
+          <a:bodyPr wrap="square" lIns="0" tIns="0" rIns="0" bIns="0">
             <a:spAutoFit/>
           </a:bodyPr>
           <a:lstStyle/>
@@ -4576,7 +4601,7 @@
           <a:noFill/>
         </p:spPr>
         <p:txBody>
-          <a:bodyPr wrap="square" lIns="0" rIns="0" tIns="0" bIns="0">
+          <a:bodyPr wrap="square" lIns="0" tIns="0" rIns="0" bIns="0">
             <a:spAutoFit/>
           </a:bodyPr>
           <a:lstStyle/>
@@ -4603,7 +4628,7 @@
 </file>
 
 <file path=ppt/slides/slide3.xml><?xml version="1.0" encoding="utf-8"?>
-<p:sld xmlns:a="http://schemas.openxmlformats.org/drawingml/2006/main" xmlns:p="http://schemas.openxmlformats.org/presentationml/2006/main" xmlns:r="http://schemas.openxmlformats.org/officeDocument/2006/relationships">
+<p:sld xmlns:a="http://schemas.openxmlformats.org/drawingml/2006/main" xmlns:r="http://schemas.openxmlformats.org/officeDocument/2006/relationships" xmlns:p="http://schemas.openxmlformats.org/presentationml/2006/main">
   <p:cSld>
     <p:spTree>
       <p:nvGrpSpPr>
@@ -4611,7 +4636,14 @@
         <p:cNvGrpSpPr/>
         <p:nvPr/>
       </p:nvGrpSpPr>
-      <p:grpSpPr/>
+      <p:grpSpPr>
+        <a:xfrm>
+          <a:off x="0" y="0"/>
+          <a:ext cx="0" cy="0"/>
+          <a:chOff x="0" y="0"/>
+          <a:chExt cx="0" cy="0"/>
+        </a:xfrm>
+      </p:grpSpPr>
       <p:sp>
         <p:nvSpPr>
           <p:cNvPr id="2" name="Rectangle 1"/>
@@ -4652,6 +4684,7 @@
           <a:lstStyle/>
           <a:p>
             <a:pPr algn="ctr"/>
+            <a:endParaRPr/>
           </a:p>
         </p:txBody>
       </p:sp>
@@ -4672,7 +4705,7 @@
           <a:noFill/>
         </p:spPr>
         <p:txBody>
-          <a:bodyPr wrap="square" lIns="0" rIns="0" tIns="0" bIns="0">
+          <a:bodyPr wrap="square" lIns="0" tIns="0" rIns="0" bIns="0">
             <a:spAutoFit/>
           </a:bodyPr>
           <a:lstStyle/>
@@ -4707,7 +4740,7 @@
           <a:noFill/>
         </p:spPr>
         <p:txBody>
-          <a:bodyPr wrap="square" lIns="0" rIns="0" tIns="0" bIns="0">
+          <a:bodyPr wrap="square" lIns="0" tIns="0" rIns="0" bIns="0">
             <a:spAutoFit/>
           </a:bodyPr>
           <a:lstStyle/>
@@ -4767,6 +4800,7 @@
           <a:lstStyle/>
           <a:p>
             <a:pPr algn="ctr"/>
+            <a:endParaRPr/>
           </a:p>
         </p:txBody>
       </p:sp>
@@ -4810,6 +4844,7 @@
           <a:lstStyle/>
           <a:p>
             <a:pPr algn="ctr"/>
+            <a:endParaRPr/>
           </a:p>
         </p:txBody>
       </p:sp>
@@ -4830,7 +4865,7 @@
           <a:noFill/>
         </p:spPr>
         <p:txBody>
-          <a:bodyPr wrap="square" lIns="0" rIns="0" tIns="0" bIns="0">
+          <a:bodyPr wrap="square" lIns="0" tIns="0" rIns="0" bIns="0">
             <a:spAutoFit/>
           </a:bodyPr>
           <a:lstStyle/>
@@ -4865,7 +4900,7 @@
           <a:noFill/>
         </p:spPr>
         <p:txBody>
-          <a:bodyPr wrap="square" lIns="0" rIns="0" tIns="0" bIns="0">
+          <a:bodyPr wrap="square" lIns="0" tIns="0" rIns="0" bIns="0">
             <a:spAutoFit/>
           </a:bodyPr>
           <a:lstStyle/>
@@ -4925,6 +4960,7 @@
           <a:lstStyle/>
           <a:p>
             <a:pPr algn="ctr"/>
+            <a:endParaRPr/>
           </a:p>
         </p:txBody>
       </p:sp>
@@ -4968,6 +5004,7 @@
           <a:lstStyle/>
           <a:p>
             <a:pPr algn="ctr"/>
+            <a:endParaRPr/>
           </a:p>
         </p:txBody>
       </p:sp>
@@ -4988,7 +5025,7 @@
           <a:noFill/>
         </p:spPr>
         <p:txBody>
-          <a:bodyPr wrap="square" lIns="0" rIns="0" tIns="0" bIns="0">
+          <a:bodyPr wrap="square" lIns="0" tIns="0" rIns="0" bIns="0">
             <a:spAutoFit/>
           </a:bodyPr>
           <a:lstStyle/>
@@ -5023,7 +5060,7 @@
           <a:noFill/>
         </p:spPr>
         <p:txBody>
-          <a:bodyPr wrap="square" lIns="0" rIns="0" tIns="0" bIns="0">
+          <a:bodyPr wrap="square" lIns="0" tIns="0" rIns="0" bIns="0">
             <a:spAutoFit/>
           </a:bodyPr>
           <a:lstStyle/>
@@ -5083,6 +5120,7 @@
           <a:lstStyle/>
           <a:p>
             <a:pPr algn="ctr"/>
+            <a:endParaRPr/>
           </a:p>
         </p:txBody>
       </p:sp>
@@ -5126,6 +5164,7 @@
           <a:lstStyle/>
           <a:p>
             <a:pPr algn="ctr"/>
+            <a:endParaRPr/>
           </a:p>
         </p:txBody>
       </p:sp>
@@ -5146,7 +5185,7 @@
           <a:noFill/>
         </p:spPr>
         <p:txBody>
-          <a:bodyPr wrap="square" lIns="0" rIns="0" tIns="0" bIns="0">
+          <a:bodyPr wrap="square" lIns="0" tIns="0" rIns="0" bIns="0">
             <a:spAutoFit/>
           </a:bodyPr>
           <a:lstStyle/>
@@ -5181,7 +5220,7 @@
           <a:noFill/>
         </p:spPr>
         <p:txBody>
-          <a:bodyPr wrap="square" lIns="0" rIns="0" tIns="0" bIns="0">
+          <a:bodyPr wrap="square" lIns="0" tIns="0" rIns="0" bIns="0">
             <a:spAutoFit/>
           </a:bodyPr>
           <a:lstStyle/>
@@ -5239,6 +5278,7 @@
           <a:lstStyle/>
           <a:p>
             <a:pPr algn="ctr"/>
+            <a:endParaRPr/>
           </a:p>
         </p:txBody>
       </p:sp>
@@ -5282,6 +5322,7 @@
           <a:lstStyle/>
           <a:p>
             <a:pPr algn="ctr"/>
+            <a:endParaRPr/>
           </a:p>
         </p:txBody>
       </p:sp>
@@ -5327,6 +5368,7 @@
           <a:lstStyle/>
           <a:p>
             <a:pPr algn="ctr"/>
+            <a:endParaRPr/>
           </a:p>
         </p:txBody>
       </p:sp>
@@ -5347,7 +5389,7 @@
           <a:noFill/>
         </p:spPr>
         <p:txBody>
-          <a:bodyPr wrap="square" lIns="0" rIns="0" tIns="0" bIns="0">
+          <a:bodyPr wrap="square" lIns="0" tIns="0" rIns="0" bIns="0">
             <a:spAutoFit/>
           </a:bodyPr>
           <a:lstStyle/>
@@ -5382,7 +5424,7 @@
           <a:noFill/>
         </p:spPr>
         <p:txBody>
-          <a:bodyPr wrap="square" lIns="0" rIns="0" tIns="0" bIns="0">
+          <a:bodyPr wrap="square" lIns="0" tIns="0" rIns="0" bIns="0">
             <a:spAutoFit/>
           </a:bodyPr>
           <a:lstStyle/>
@@ -5417,7 +5459,7 @@
           <a:noFill/>
         </p:spPr>
         <p:txBody>
-          <a:bodyPr wrap="square" lIns="0" rIns="0" tIns="0" bIns="0">
+          <a:bodyPr wrap="square" lIns="0" tIns="0" rIns="0" bIns="0">
             <a:spAutoFit/>
           </a:bodyPr>
           <a:lstStyle/>
@@ -5444,7 +5486,7 @@
 </file>
 
 <file path=ppt/slides/slide4.xml><?xml version="1.0" encoding="utf-8"?>
-<p:sld xmlns:a="http://schemas.openxmlformats.org/drawingml/2006/main" xmlns:p="http://schemas.openxmlformats.org/presentationml/2006/main" xmlns:r="http://schemas.openxmlformats.org/officeDocument/2006/relationships">
+<p:sld xmlns:a="http://schemas.openxmlformats.org/drawingml/2006/main" xmlns:r="http://schemas.openxmlformats.org/officeDocument/2006/relationships" xmlns:p="http://schemas.openxmlformats.org/presentationml/2006/main">
   <p:cSld>
     <p:spTree>
       <p:nvGrpSpPr>
@@ -5452,7 +5494,14 @@
         <p:cNvGrpSpPr/>
         <p:nvPr/>
       </p:nvGrpSpPr>
-      <p:grpSpPr/>
+      <p:grpSpPr>
+        <a:xfrm>
+          <a:off x="0" y="0"/>
+          <a:ext cx="0" cy="0"/>
+          <a:chOff x="0" y="0"/>
+          <a:chExt cx="0" cy="0"/>
+        </a:xfrm>
+      </p:grpSpPr>
       <p:sp>
         <p:nvSpPr>
           <p:cNvPr id="2" name="Rectangle 1"/>
@@ -5493,6 +5542,7 @@
           <a:lstStyle/>
           <a:p>
             <a:pPr algn="ctr"/>
+            <a:endParaRPr/>
           </a:p>
         </p:txBody>
       </p:sp>
@@ -5513,7 +5563,7 @@
           <a:noFill/>
         </p:spPr>
         <p:txBody>
-          <a:bodyPr wrap="square" lIns="0" rIns="0" tIns="0" bIns="0">
+          <a:bodyPr wrap="square" lIns="0" tIns="0" rIns="0" bIns="0">
             <a:spAutoFit/>
           </a:bodyPr>
           <a:lstStyle/>
@@ -5548,7 +5598,7 @@
           <a:noFill/>
         </p:spPr>
         <p:txBody>
-          <a:bodyPr wrap="square" lIns="0" rIns="0" tIns="0" bIns="0">
+          <a:bodyPr wrap="square" lIns="0" tIns="0" rIns="0" bIns="0">
             <a:spAutoFit/>
           </a:bodyPr>
           <a:lstStyle/>
@@ -5608,6 +5658,7 @@
           <a:lstStyle/>
           <a:p>
             <a:pPr algn="ctr"/>
+            <a:endParaRPr/>
           </a:p>
         </p:txBody>
       </p:sp>
@@ -5698,7 +5749,7 @@
           <a:noFill/>
         </p:spPr>
         <p:txBody>
-          <a:bodyPr wrap="square" lIns="0" rIns="0" tIns="0" bIns="0">
+          <a:bodyPr wrap="square" lIns="0" tIns="0" rIns="0" bIns="0">
             <a:spAutoFit/>
           </a:bodyPr>
           <a:lstStyle/>
@@ -5733,7 +5784,7 @@
           <a:noFill/>
         </p:spPr>
         <p:txBody>
-          <a:bodyPr wrap="square" lIns="0" rIns="0" tIns="0" bIns="0">
+          <a:bodyPr wrap="square" lIns="0" tIns="0" rIns="0" bIns="0">
             <a:spAutoFit/>
           </a:bodyPr>
           <a:lstStyle/>
@@ -5768,7 +5819,7 @@
           <a:noFill/>
         </p:spPr>
         <p:txBody>
-          <a:bodyPr wrap="square" lIns="0" rIns="0" tIns="0" bIns="0">
+          <a:bodyPr wrap="square" lIns="0" tIns="0" rIns="0" bIns="0">
             <a:spAutoFit/>
           </a:bodyPr>
           <a:lstStyle/>
@@ -5803,7 +5854,7 @@
           <a:noFill/>
         </p:spPr>
         <p:txBody>
-          <a:bodyPr wrap="square" lIns="0" rIns="0" tIns="0" bIns="0">
+          <a:bodyPr wrap="square" lIns="0" tIns="0" rIns="0" bIns="0">
             <a:spAutoFit/>
           </a:bodyPr>
           <a:lstStyle/>
@@ -5861,6 +5912,7 @@
           <a:lstStyle/>
           <a:p>
             <a:pPr algn="ctr"/>
+            <a:endParaRPr/>
           </a:p>
         </p:txBody>
       </p:sp>
@@ -5881,7 +5933,7 @@
           <a:noFill/>
         </p:spPr>
         <p:txBody>
-          <a:bodyPr wrap="square" lIns="0" rIns="0" tIns="0" bIns="0">
+          <a:bodyPr wrap="square" lIns="0" tIns="0" rIns="0" bIns="0">
             <a:spAutoFit/>
           </a:bodyPr>
           <a:lstStyle/>
@@ -5916,7 +5968,7 @@
           <a:noFill/>
         </p:spPr>
         <p:txBody>
-          <a:bodyPr wrap="square" lIns="0" rIns="0" tIns="0" bIns="0">
+          <a:bodyPr wrap="square" lIns="0" tIns="0" rIns="0" bIns="0">
             <a:spAutoFit/>
           </a:bodyPr>
           <a:lstStyle/>
@@ -5974,6 +6026,7 @@
           <a:lstStyle/>
           <a:p>
             <a:pPr algn="ctr"/>
+            <a:endParaRPr/>
           </a:p>
         </p:txBody>
       </p:sp>
@@ -5994,7 +6047,7 @@
           <a:noFill/>
         </p:spPr>
         <p:txBody>
-          <a:bodyPr wrap="square" lIns="0" rIns="0" tIns="0" bIns="0">
+          <a:bodyPr wrap="square" lIns="0" tIns="0" rIns="0" bIns="0">
             <a:spAutoFit/>
           </a:bodyPr>
           <a:lstStyle/>
@@ -6029,7 +6082,7 @@
           <a:noFill/>
         </p:spPr>
         <p:txBody>
-          <a:bodyPr wrap="square" lIns="0" rIns="0" tIns="0" bIns="0">
+          <a:bodyPr wrap="square" lIns="0" tIns="0" rIns="0" bIns="0">
             <a:spAutoFit/>
           </a:bodyPr>
           <a:lstStyle/>
@@ -6087,6 +6140,7 @@
           <a:lstStyle/>
           <a:p>
             <a:pPr algn="ctr"/>
+            <a:endParaRPr/>
           </a:p>
         </p:txBody>
       </p:sp>
@@ -6107,7 +6161,7 @@
           <a:noFill/>
         </p:spPr>
         <p:txBody>
-          <a:bodyPr wrap="square" lIns="0" rIns="0" tIns="0" bIns="0">
+          <a:bodyPr wrap="square" lIns="0" tIns="0" rIns="0" bIns="0">
             <a:spAutoFit/>
           </a:bodyPr>
           <a:lstStyle/>
@@ -6142,7 +6196,7 @@
           <a:noFill/>
         </p:spPr>
         <p:txBody>
-          <a:bodyPr wrap="square" lIns="0" rIns="0" tIns="0" bIns="0">
+          <a:bodyPr wrap="square" lIns="0" tIns="0" rIns="0" bIns="0">
             <a:spAutoFit/>
           </a:bodyPr>
           <a:lstStyle/>
@@ -6200,6 +6254,7 @@
           <a:lstStyle/>
           <a:p>
             <a:pPr algn="ctr"/>
+            <a:endParaRPr/>
           </a:p>
         </p:txBody>
       </p:sp>
@@ -6220,7 +6275,7 @@
           <a:noFill/>
         </p:spPr>
         <p:txBody>
-          <a:bodyPr wrap="square" lIns="0" rIns="0" tIns="0" bIns="0">
+          <a:bodyPr wrap="square" lIns="0" tIns="0" rIns="0" bIns="0">
             <a:spAutoFit/>
           </a:bodyPr>
           <a:lstStyle/>
@@ -6255,7 +6310,7 @@
           <a:noFill/>
         </p:spPr>
         <p:txBody>
-          <a:bodyPr wrap="square" lIns="0" rIns="0" tIns="0" bIns="0">
+          <a:bodyPr wrap="square" lIns="0" tIns="0" rIns="0" bIns="0">
             <a:spAutoFit/>
           </a:bodyPr>
           <a:lstStyle/>
@@ -6313,6 +6368,7 @@
           <a:lstStyle/>
           <a:p>
             <a:pPr algn="ctr"/>
+            <a:endParaRPr/>
           </a:p>
         </p:txBody>
       </p:sp>
@@ -6333,7 +6389,7 @@
           <a:noFill/>
         </p:spPr>
         <p:txBody>
-          <a:bodyPr wrap="square" lIns="0" rIns="0" tIns="0" bIns="0">
+          <a:bodyPr wrap="square" lIns="0" tIns="0" rIns="0" bIns="0">
             <a:spAutoFit/>
           </a:bodyPr>
           <a:lstStyle/>
@@ -6391,6 +6447,7 @@
           <a:lstStyle/>
           <a:p>
             <a:pPr algn="ctr"/>
+            <a:endParaRPr/>
           </a:p>
         </p:txBody>
       </p:sp>
@@ -6411,7 +6468,7 @@
           <a:noFill/>
         </p:spPr>
         <p:txBody>
-          <a:bodyPr wrap="square" lIns="0" rIns="0" tIns="0" bIns="0">
+          <a:bodyPr wrap="square" lIns="0" tIns="0" rIns="0" bIns="0">
             <a:spAutoFit/>
           </a:bodyPr>
           <a:lstStyle/>
@@ -6469,6 +6526,7 @@
           <a:lstStyle/>
           <a:p>
             <a:pPr algn="ctr"/>
+            <a:endParaRPr/>
           </a:p>
         </p:txBody>
       </p:sp>
@@ -6489,7 +6547,7 @@
           <a:noFill/>
         </p:spPr>
         <p:txBody>
-          <a:bodyPr wrap="square" lIns="0" rIns="0" tIns="0" bIns="0">
+          <a:bodyPr wrap="square" lIns="0" tIns="0" rIns="0" bIns="0">
             <a:spAutoFit/>
           </a:bodyPr>
           <a:lstStyle/>
@@ -6524,7 +6582,7 @@
           <a:noFill/>
         </p:spPr>
         <p:txBody>
-          <a:bodyPr wrap="square" lIns="0" rIns="0" tIns="0" bIns="0">
+          <a:bodyPr wrap="square" lIns="0" tIns="0" rIns="0" bIns="0">
             <a:spAutoFit/>
           </a:bodyPr>
           <a:lstStyle/>
@@ -6551,7 +6609,7 @@
 </file>
 
 <file path=ppt/slides/slide5.xml><?xml version="1.0" encoding="utf-8"?>
-<p:sld xmlns:a="http://schemas.openxmlformats.org/drawingml/2006/main" xmlns:p="http://schemas.openxmlformats.org/presentationml/2006/main" xmlns:r="http://schemas.openxmlformats.org/officeDocument/2006/relationships">
+<p:sld xmlns:a="http://schemas.openxmlformats.org/drawingml/2006/main" xmlns:r="http://schemas.openxmlformats.org/officeDocument/2006/relationships" xmlns:p="http://schemas.openxmlformats.org/presentationml/2006/main">
   <p:cSld>
     <p:spTree>
       <p:nvGrpSpPr>
@@ -6559,7 +6617,14 @@
         <p:cNvGrpSpPr/>
         <p:nvPr/>
       </p:nvGrpSpPr>
-      <p:grpSpPr/>
+      <p:grpSpPr>
+        <a:xfrm>
+          <a:off x="0" y="0"/>
+          <a:ext cx="0" cy="0"/>
+          <a:chOff x="0" y="0"/>
+          <a:chExt cx="0" cy="0"/>
+        </a:xfrm>
+      </p:grpSpPr>
       <p:sp>
         <p:nvSpPr>
           <p:cNvPr id="2" name="Rectangle 1"/>
@@ -6600,6 +6665,7 @@
           <a:lstStyle/>
           <a:p>
             <a:pPr algn="ctr"/>
+            <a:endParaRPr/>
           </a:p>
         </p:txBody>
       </p:sp>
@@ -6620,7 +6686,7 @@
           <a:noFill/>
         </p:spPr>
         <p:txBody>
-          <a:bodyPr wrap="square" lIns="0" rIns="0" tIns="0" bIns="0">
+          <a:bodyPr wrap="square" lIns="0" tIns="0" rIns="0" bIns="0">
             <a:spAutoFit/>
           </a:bodyPr>
           <a:lstStyle/>
@@ -6655,7 +6721,7 @@
           <a:noFill/>
         </p:spPr>
         <p:txBody>
-          <a:bodyPr wrap="square" lIns="0" rIns="0" tIns="0" bIns="0">
+          <a:bodyPr wrap="square" lIns="0" tIns="0" rIns="0" bIns="0">
             <a:spAutoFit/>
           </a:bodyPr>
           <a:lstStyle/>
@@ -6715,6 +6781,7 @@
           <a:lstStyle/>
           <a:p>
             <a:pPr algn="ctr"/>
+            <a:endParaRPr/>
           </a:p>
         </p:txBody>
       </p:sp>
@@ -6758,6 +6825,7 @@
           <a:lstStyle/>
           <a:p>
             <a:pPr algn="ctr"/>
+            <a:endParaRPr/>
           </a:p>
         </p:txBody>
       </p:sp>
@@ -6830,7 +6898,7 @@
           <a:noFill/>
         </p:spPr>
         <p:txBody>
-          <a:bodyPr wrap="square" lIns="0" rIns="0" tIns="0" bIns="0">
+          <a:bodyPr wrap="square" lIns="0" tIns="0" rIns="0" bIns="0">
             <a:spAutoFit/>
           </a:bodyPr>
           <a:lstStyle/>
@@ -6865,7 +6933,7 @@
           <a:noFill/>
         </p:spPr>
         <p:txBody>
-          <a:bodyPr wrap="square" lIns="0" rIns="0" tIns="0" bIns="0">
+          <a:bodyPr wrap="square" lIns="0" tIns="0" rIns="0" bIns="0">
             <a:spAutoFit/>
           </a:bodyPr>
           <a:lstStyle/>
@@ -6925,6 +6993,7 @@
           <a:lstStyle/>
           <a:p>
             <a:pPr algn="ctr"/>
+            <a:endParaRPr/>
           </a:p>
         </p:txBody>
       </p:sp>
@@ -6968,6 +7037,7 @@
           <a:lstStyle/>
           <a:p>
             <a:pPr algn="ctr"/>
+            <a:endParaRPr/>
           </a:p>
         </p:txBody>
       </p:sp>
@@ -7040,7 +7110,7 @@
           <a:noFill/>
         </p:spPr>
         <p:txBody>
-          <a:bodyPr wrap="square" lIns="0" rIns="0" tIns="0" bIns="0">
+          <a:bodyPr wrap="square" lIns="0" tIns="0" rIns="0" bIns="0">
             <a:spAutoFit/>
           </a:bodyPr>
           <a:lstStyle/>
@@ -7075,7 +7145,7 @@
           <a:noFill/>
         </p:spPr>
         <p:txBody>
-          <a:bodyPr wrap="square" lIns="0" rIns="0" tIns="0" bIns="0">
+          <a:bodyPr wrap="square" lIns="0" tIns="0" rIns="0" bIns="0">
             <a:spAutoFit/>
           </a:bodyPr>
           <a:lstStyle/>
@@ -7135,6 +7205,7 @@
           <a:lstStyle/>
           <a:p>
             <a:pPr algn="ctr"/>
+            <a:endParaRPr/>
           </a:p>
         </p:txBody>
       </p:sp>
@@ -7178,6 +7249,7 @@
           <a:lstStyle/>
           <a:p>
             <a:pPr algn="ctr"/>
+            <a:endParaRPr/>
           </a:p>
         </p:txBody>
       </p:sp>
@@ -7250,7 +7322,7 @@
           <a:noFill/>
         </p:spPr>
         <p:txBody>
-          <a:bodyPr wrap="square" lIns="0" rIns="0" tIns="0" bIns="0">
+          <a:bodyPr wrap="square" lIns="0" tIns="0" rIns="0" bIns="0">
             <a:spAutoFit/>
           </a:bodyPr>
           <a:lstStyle/>
@@ -7285,7 +7357,7 @@
           <a:noFill/>
         </p:spPr>
         <p:txBody>
-          <a:bodyPr wrap="square" lIns="0" rIns="0" tIns="0" bIns="0">
+          <a:bodyPr wrap="square" lIns="0" tIns="0" rIns="0" bIns="0">
             <a:spAutoFit/>
           </a:bodyPr>
           <a:lstStyle/>
@@ -7345,6 +7417,7 @@
           <a:lstStyle/>
           <a:p>
             <a:pPr algn="ctr"/>
+            <a:endParaRPr/>
           </a:p>
         </p:txBody>
       </p:sp>
@@ -7388,6 +7461,7 @@
           <a:lstStyle/>
           <a:p>
             <a:pPr algn="ctr"/>
+            <a:endParaRPr/>
           </a:p>
         </p:txBody>
       </p:sp>
@@ -7460,7 +7534,7 @@
           <a:noFill/>
         </p:spPr>
         <p:txBody>
-          <a:bodyPr wrap="square" lIns="0" rIns="0" tIns="0" bIns="0">
+          <a:bodyPr wrap="square" lIns="0" tIns="0" rIns="0" bIns="0">
             <a:spAutoFit/>
           </a:bodyPr>
           <a:lstStyle/>
@@ -7495,7 +7569,7 @@
           <a:noFill/>
         </p:spPr>
         <p:txBody>
-          <a:bodyPr wrap="square" lIns="0" rIns="0" tIns="0" bIns="0">
+          <a:bodyPr wrap="square" lIns="0" tIns="0" rIns="0" bIns="0">
             <a:spAutoFit/>
           </a:bodyPr>
           <a:lstStyle/>
@@ -7530,7 +7604,7 @@
           <a:noFill/>
         </p:spPr>
         <p:txBody>
-          <a:bodyPr wrap="square" lIns="0" rIns="0" tIns="0" bIns="0">
+          <a:bodyPr wrap="square" lIns="0" tIns="0" rIns="0" bIns="0">
             <a:spAutoFit/>
           </a:bodyPr>
           <a:lstStyle/>
@@ -7557,7 +7631,7 @@
 </file>
 
 <file path=ppt/slides/slide6.xml><?xml version="1.0" encoding="utf-8"?>
-<p:sld xmlns:a="http://schemas.openxmlformats.org/drawingml/2006/main" xmlns:p="http://schemas.openxmlformats.org/presentationml/2006/main" xmlns:r="http://schemas.openxmlformats.org/officeDocument/2006/relationships">
+<p:sld xmlns:a="http://schemas.openxmlformats.org/drawingml/2006/main" xmlns:r="http://schemas.openxmlformats.org/officeDocument/2006/relationships" xmlns:p="http://schemas.openxmlformats.org/presentationml/2006/main">
   <p:cSld>
     <p:spTree>
       <p:nvGrpSpPr>
@@ -7565,10 +7639,17 @@
         <p:cNvGrpSpPr/>
         <p:nvPr/>
       </p:nvGrpSpPr>
-      <p:grpSpPr/>
-      <p:sp>
-        <p:nvSpPr>
-          <p:cNvPr id="2" name="Rectangle 1"/>
+      <p:grpSpPr>
+        <a:xfrm>
+          <a:off x="0" y="0"/>
+          <a:ext cx="0" cy="0"/>
+          <a:chOff x="0" y="0"/>
+          <a:chExt cx="0" cy="0"/>
+        </a:xfrm>
+      </p:grpSpPr>
+      <p:sp>
+        <p:nvSpPr>
+          <p:cNvPr id="99" name="bg"/>
           <p:cNvSpPr/>
           <p:nvPr/>
         </p:nvSpPr>
@@ -7587,6 +7668,188 @@
             <a:noFill/>
           </a:ln>
         </p:spPr>
+        <p:txBody>
+          <a:bodyPr/>
+          <a:lstStyle/>
+          <a:p>
+            <a:endParaRPr/>
+          </a:p>
+        </p:txBody>
+      </p:sp>
+      <p:sp>
+        <p:nvSpPr>
+          <p:cNvPr id="100" name="TextBox 99"/>
+          <p:cNvSpPr txBox="1"/>
+          <p:nvPr/>
+        </p:nvSpPr>
+        <p:spPr>
+          <a:xfrm>
+            <a:off x="457200" y="164592"/>
+            <a:ext cx="7772400" cy="228600"/>
+          </a:xfrm>
+          <a:prstGeom prst="rect">
+            <a:avLst/>
+          </a:prstGeom>
+          <a:noFill/>
+        </p:spPr>
+        <p:txBody>
+          <a:bodyPr wrap="none">
+            <a:spAutoFit/>
+          </a:bodyPr>
+          <a:lstStyle/>
+          <a:p>
+            <a:pPr algn="l"/>
+            <a:r>
+              <a:rPr sz="900" b="1">
+                <a:solidFill>
+                  <a:srgbClr val="14B8A6"/>
+                </a:solidFill>
+                <a:latin typeface="Calibri"/>
+              </a:rPr>
+              <a:t>SWARM IN ACTION</a:t>
+            </a:r>
+          </a:p>
+        </p:txBody>
+      </p:sp>
+      <p:sp>
+        <p:nvSpPr>
+          <p:cNvPr id="101" name="TextBox 100"/>
+          <p:cNvSpPr txBox="1"/>
+          <p:nvPr/>
+        </p:nvSpPr>
+        <p:spPr>
+          <a:xfrm>
+            <a:off x="457200" y="384048"/>
+            <a:ext cx="7772400" cy="502920"/>
+          </a:xfrm>
+          <a:prstGeom prst="rect">
+            <a:avLst/>
+          </a:prstGeom>
+          <a:noFill/>
+        </p:spPr>
+        <p:txBody>
+          <a:bodyPr wrap="none">
+            <a:spAutoFit/>
+          </a:bodyPr>
+          <a:lstStyle/>
+          <a:p>
+            <a:pPr algn="l"/>
+            <a:r>
+              <a:rPr sz="2400" b="1">
+                <a:solidFill>
+                  <a:srgbClr val="FFFFFF"/>
+                </a:solidFill>
+                <a:latin typeface="Calibri"/>
+              </a:rPr>
+              <a:t>Run Console — live view while the swarm runs</a:t>
+            </a:r>
+          </a:p>
+        </p:txBody>
+      </p:sp>
+      <p:pic>
+        <p:nvPicPr>
+          <p:cNvPr id="102" name="Picture 101" descr="download.png"/>
+          <p:cNvPicPr>
+            <a:picLocks noChangeAspect="1"/>
+          </p:cNvPicPr>
+          <p:nvPr/>
+        </p:nvPicPr>
+        <p:blipFill>
+          <a:blip r:embed="rId2"/>
+          <a:stretch>
+            <a:fillRect/>
+          </a:stretch>
+        </p:blipFill>
+        <p:spPr>
+          <a:xfrm>
+            <a:off x="993371" y="1007021"/>
+            <a:ext cx="6700058" cy="3907879"/>
+          </a:xfrm>
+          <a:prstGeom prst="rect">
+            <a:avLst/>
+          </a:prstGeom>
+        </p:spPr>
+      </p:pic>
+      <p:sp>
+        <p:nvSpPr>
+          <p:cNvPr id="103" name="TextBox 102"/>
+          <p:cNvSpPr txBox="1"/>
+          <p:nvPr/>
+        </p:nvSpPr>
+        <p:spPr>
+          <a:xfrm>
+            <a:off x="457200" y="4914900"/>
+            <a:ext cx="8229600" cy="182880"/>
+          </a:xfrm>
+          <a:prstGeom prst="rect">
+            <a:avLst/>
+          </a:prstGeom>
+          <a:noFill/>
+        </p:spPr>
+        <p:txBody>
+          <a:bodyPr wrap="none">
+            <a:spAutoFit/>
+          </a:bodyPr>
+          <a:lstStyle/>
+          <a:p>
+            <a:r>
+              <a:rPr sz="800">
+                <a:solidFill>
+                  <a:srgbClr val="718096"/>
+                </a:solidFill>
+                <a:latin typeface="Calibri"/>
+              </a:rPr>
+              <a:t>ODMI Agent Swarm  ·  Benjy Bream  ·  King’s College London  ·  6 / 7</a:t>
+            </a:r>
+          </a:p>
+        </p:txBody>
+      </p:sp>
+    </p:spTree>
+  </p:cSld>
+  <p:clrMapOvr>
+    <a:masterClrMapping/>
+  </p:clrMapOvr>
+</p:sld>
+</file>
+
+<file path=ppt/slides/slide7.xml><?xml version="1.0" encoding="utf-8"?>
+<p:sld xmlns:a="http://schemas.openxmlformats.org/drawingml/2006/main" xmlns:r="http://schemas.openxmlformats.org/officeDocument/2006/relationships" xmlns:p="http://schemas.openxmlformats.org/presentationml/2006/main">
+  <p:cSld>
+    <p:spTree>
+      <p:nvGrpSpPr>
+        <p:cNvPr id="1" name=""/>
+        <p:cNvGrpSpPr/>
+        <p:nvPr/>
+      </p:nvGrpSpPr>
+      <p:grpSpPr>
+        <a:xfrm>
+          <a:off x="0" y="0"/>
+          <a:ext cx="0" cy="0"/>
+          <a:chOff x="0" y="0"/>
+          <a:chExt cx="0" cy="0"/>
+        </a:xfrm>
+      </p:grpSpPr>
+      <p:sp>
+        <p:nvSpPr>
+          <p:cNvPr id="2" name="Rectangle 1"/>
+          <p:cNvSpPr/>
+          <p:nvPr/>
+        </p:nvSpPr>
+        <p:spPr>
+          <a:xfrm>
+            <a:off x="0" y="0"/>
+            <a:ext cx="9144000" cy="960120"/>
+          </a:xfrm>
+          <a:prstGeom prst="rect">
+            <a:avLst/>
+          </a:prstGeom>
+          <a:solidFill>
+            <a:srgbClr val="1A202C"/>
+          </a:solidFill>
+          <a:ln>
+            <a:noFill/>
+          </a:ln>
+        </p:spPr>
         <p:style>
           <a:lnRef idx="1">
             <a:schemeClr val="accent1"/>
@@ -7606,6 +7869,7 @@
           <a:lstStyle/>
           <a:p>
             <a:pPr algn="ctr"/>
+            <a:endParaRPr/>
           </a:p>
         </p:txBody>
       </p:sp>
@@ -7626,7 +7890,7 @@
           <a:noFill/>
         </p:spPr>
         <p:txBody>
-          <a:bodyPr wrap="square" lIns="0" rIns="0" tIns="0" bIns="0">
+          <a:bodyPr wrap="square" lIns="0" tIns="0" rIns="0" bIns="0">
             <a:spAutoFit/>
           </a:bodyPr>
           <a:lstStyle/>
@@ -7661,7 +7925,7 @@
           <a:noFill/>
         </p:spPr>
         <p:txBody>
-          <a:bodyPr wrap="square" lIns="0" rIns="0" tIns="0" bIns="0">
+          <a:bodyPr wrap="square" lIns="0" tIns="0" rIns="0" bIns="0">
             <a:spAutoFit/>
           </a:bodyPr>
           <a:lstStyle/>
@@ -7721,6 +7985,7 @@
           <a:lstStyle/>
           <a:p>
             <a:pPr algn="ctr"/>
+            <a:endParaRPr/>
           </a:p>
         </p:txBody>
       </p:sp>
@@ -7764,6 +8029,7 @@
           <a:lstStyle/>
           <a:p>
             <a:pPr algn="ctr"/>
+            <a:endParaRPr/>
           </a:p>
         </p:txBody>
       </p:sp>
@@ -7784,7 +8050,7 @@
           <a:noFill/>
         </p:spPr>
         <p:txBody>
-          <a:bodyPr wrap="square" lIns="0" rIns="0" tIns="0" bIns="0">
+          <a:bodyPr wrap="square" lIns="0" tIns="0" rIns="0" bIns="0">
             <a:spAutoFit/>
           </a:bodyPr>
           <a:lstStyle/>
@@ -7819,7 +8085,7 @@
           <a:noFill/>
         </p:spPr>
         <p:txBody>
-          <a:bodyPr wrap="square" lIns="0" rIns="0" tIns="0" bIns="0">
+          <a:bodyPr wrap="square" lIns="0" tIns="0" rIns="0" bIns="0">
             <a:spAutoFit/>
           </a:bodyPr>
           <a:lstStyle/>
@@ -7854,7 +8120,7 @@
           <a:noFill/>
         </p:spPr>
         <p:txBody>
-          <a:bodyPr wrap="square" lIns="0" rIns="0" tIns="0" bIns="0">
+          <a:bodyPr wrap="square" lIns="0" tIns="0" rIns="0" bIns="0">
             <a:spAutoFit/>
           </a:bodyPr>
           <a:lstStyle/>
@@ -7912,6 +8178,7 @@
           <a:lstStyle/>
           <a:p>
             <a:pPr algn="ctr"/>
+            <a:endParaRPr/>
           </a:p>
         </p:txBody>
       </p:sp>
@@ -7932,7 +8199,7 @@
           <a:noFill/>
         </p:spPr>
         <p:txBody>
-          <a:bodyPr wrap="square" lIns="0" rIns="0" tIns="0" bIns="0">
+          <a:bodyPr wrap="square" lIns="0" tIns="0" rIns="0" bIns="0">
             <a:spAutoFit/>
           </a:bodyPr>
           <a:lstStyle/>
@@ -7967,7 +8234,7 @@
           <a:noFill/>
         </p:spPr>
         <p:txBody>
-          <a:bodyPr wrap="square" lIns="0" rIns="0" tIns="0" bIns="0">
+          <a:bodyPr wrap="square" lIns="0" tIns="0" rIns="0" bIns="0">
             <a:spAutoFit/>
           </a:bodyPr>
           <a:lstStyle/>
@@ -8025,6 +8292,7 @@
           <a:lstStyle/>
           <a:p>
             <a:pPr algn="ctr"/>
+            <a:endParaRPr/>
           </a:p>
         </p:txBody>
       </p:sp>
@@ -8045,7 +8313,7 @@
           <a:noFill/>
         </p:spPr>
         <p:txBody>
-          <a:bodyPr wrap="square" lIns="0" rIns="0" tIns="0" bIns="0">
+          <a:bodyPr wrap="square" lIns="0" tIns="0" rIns="0" bIns="0">
             <a:spAutoFit/>
           </a:bodyPr>
           <a:lstStyle/>
@@ -8080,7 +8348,7 @@
           <a:noFill/>
         </p:spPr>
         <p:txBody>
-          <a:bodyPr wrap="square" lIns="0" rIns="0" tIns="0" bIns="0">
+          <a:bodyPr wrap="square" lIns="0" tIns="0" rIns="0" bIns="0">
             <a:spAutoFit/>
           </a:bodyPr>
           <a:lstStyle/>
@@ -8138,6 +8406,7 @@
           <a:lstStyle/>
           <a:p>
             <a:pPr algn="ctr"/>
+            <a:endParaRPr/>
           </a:p>
         </p:txBody>
       </p:sp>
@@ -8183,6 +8452,7 @@
           <a:lstStyle/>
           <a:p>
             <a:pPr algn="ctr"/>
+            <a:endParaRPr/>
           </a:p>
         </p:txBody>
       </p:sp>
@@ -8226,6 +8496,7 @@
           <a:lstStyle/>
           <a:p>
             <a:pPr algn="ctr"/>
+            <a:endParaRPr/>
           </a:p>
         </p:txBody>
       </p:sp>
@@ -8246,7 +8517,7 @@
           <a:noFill/>
         </p:spPr>
         <p:txBody>
-          <a:bodyPr wrap="square" lIns="0" rIns="0" tIns="0" bIns="0">
+          <a:bodyPr wrap="square" lIns="0" tIns="0" rIns="0" bIns="0">
             <a:spAutoFit/>
           </a:bodyPr>
           <a:lstStyle/>
@@ -8281,7 +8552,7 @@
           <a:noFill/>
         </p:spPr>
         <p:txBody>
-          <a:bodyPr wrap="square" lIns="0" rIns="0" tIns="0" bIns="0">
+          <a:bodyPr wrap="square" lIns="0" tIns="0" rIns="0" bIns="0">
             <a:spAutoFit/>
           </a:bodyPr>
           <a:lstStyle/>
@@ -8316,7 +8587,7 @@
           <a:noFill/>
         </p:spPr>
         <p:txBody>
-          <a:bodyPr wrap="square" lIns="0" rIns="0" tIns="0" bIns="0">
+          <a:bodyPr wrap="square" lIns="0" tIns="0" rIns="0" bIns="0">
             <a:spAutoFit/>
           </a:bodyPr>
           <a:lstStyle/>
@@ -8374,6 +8645,7 @@
           <a:lstStyle/>
           <a:p>
             <a:pPr algn="ctr"/>
+            <a:endParaRPr/>
           </a:p>
         </p:txBody>
       </p:sp>
@@ -8394,7 +8666,7 @@
           <a:noFill/>
         </p:spPr>
         <p:txBody>
-          <a:bodyPr wrap="square" lIns="0" rIns="0" tIns="0" bIns="0">
+          <a:bodyPr wrap="square" lIns="0" tIns="0" rIns="0" bIns="0">
             <a:spAutoFit/>
           </a:bodyPr>
           <a:lstStyle/>
@@ -8429,7 +8701,7 @@
           <a:noFill/>
         </p:spPr>
         <p:txBody>
-          <a:bodyPr wrap="square" lIns="0" rIns="0" tIns="0" bIns="0">
+          <a:bodyPr wrap="square" lIns="0" tIns="0" rIns="0" bIns="0">
             <a:spAutoFit/>
           </a:bodyPr>
           <a:lstStyle/>
@@ -8487,6 +8759,7 @@
           <a:lstStyle/>
           <a:p>
             <a:pPr algn="ctr"/>
+            <a:endParaRPr/>
           </a:p>
         </p:txBody>
       </p:sp>
@@ -8507,7 +8780,7 @@
           <a:noFill/>
         </p:spPr>
         <p:txBody>
-          <a:bodyPr wrap="square" lIns="0" rIns="0" tIns="0" bIns="0">
+          <a:bodyPr wrap="square" lIns="0" tIns="0" rIns="0" bIns="0">
             <a:spAutoFit/>
           </a:bodyPr>
           <a:lstStyle/>
@@ -8542,7 +8815,7 @@
           <a:noFill/>
         </p:spPr>
         <p:txBody>
-          <a:bodyPr wrap="square" lIns="0" rIns="0" tIns="0" bIns="0">
+          <a:bodyPr wrap="square" lIns="0" tIns="0" rIns="0" bIns="0">
             <a:spAutoFit/>
           </a:bodyPr>
           <a:lstStyle/>
@@ -8600,6 +8873,7 @@
           <a:lstStyle/>
           <a:p>
             <a:pPr algn="ctr"/>
+            <a:endParaRPr/>
           </a:p>
         </p:txBody>
       </p:sp>
@@ -8620,7 +8894,7 @@
           <a:noFill/>
         </p:spPr>
         <p:txBody>
-          <a:bodyPr wrap="square" lIns="0" rIns="0" tIns="0" bIns="0">
+          <a:bodyPr wrap="square" lIns="0" tIns="0" rIns="0" bIns="0">
             <a:spAutoFit/>
           </a:bodyPr>
           <a:lstStyle/>

--- a/docs/PROGRESS_SLIDES_2026-05-13.pptx
+++ b/docs/PROGRESS_SLIDES_2026-05-13.pptx
@@ -4,14 +4,17 @@
   <p:sldMasterIdLst>
     <p:sldMasterId id="2147483648" r:id="rId1"/>
   </p:sldMasterIdLst>
+  <p:notesMasterIdLst>
+    <p:notesMasterId r:id="rId9"/>
+  </p:notesMasterIdLst>
   <p:sldIdLst>
     <p:sldId id="256" r:id="rId2"/>
     <p:sldId id="257" r:id="rId3"/>
     <p:sldId id="258" r:id="rId4"/>
     <p:sldId id="259" r:id="rId5"/>
     <p:sldId id="260" r:id="rId6"/>
-    <p:sldId id="262" r:id="rId7"/>
-    <p:sldId id="261" r:id="rId8"/>
+    <p:sldId id="261" r:id="rId7"/>
+    <p:sldId id="262" r:id="rId8"/>
   </p:sldIdLst>
   <p:sldSz cx="9144000" cy="5143500" type="screen16x9"/>
   <p:notesSz cx="6858000" cy="9144000"/>
@@ -127,6 +130,439 @@
     </p:ext>
   </p:extLst>
 </p:presentation>
+</file>
+
+<file path=ppt/notesMasters/notesMaster1.xml><?xml version="1.0" encoding="utf-8"?>
+<p:notesMaster xmlns:a="http://schemas.openxmlformats.org/drawingml/2006/main" xmlns:r="http://schemas.openxmlformats.org/officeDocument/2006/relationships" xmlns:p="http://schemas.openxmlformats.org/presentationml/2006/main">
+  <p:cSld>
+    <p:bg>
+      <p:bgRef idx="1001">
+        <a:schemeClr val="bg1"/>
+      </p:bgRef>
+    </p:bg>
+    <p:spTree>
+      <p:nvGrpSpPr>
+        <p:cNvPr id="1" name=""/>
+        <p:cNvGrpSpPr/>
+        <p:nvPr/>
+      </p:nvGrpSpPr>
+      <p:grpSpPr>
+        <a:xfrm>
+          <a:off x="0" y="0"/>
+          <a:ext cx="0" cy="0"/>
+          <a:chOff x="0" y="0"/>
+          <a:chExt cx="0" cy="0"/>
+        </a:xfrm>
+      </p:grpSpPr>
+      <p:sp>
+        <p:nvSpPr>
+          <p:cNvPr id="2" name="Header Placeholder 1"/>
+          <p:cNvSpPr>
+            <a:spLocks noGrp="1"/>
+          </p:cNvSpPr>
+          <p:nvPr>
+            <p:ph type="hdr" sz="quarter"/>
+          </p:nvPr>
+        </p:nvSpPr>
+        <p:spPr>
+          <a:xfrm>
+            <a:off x="0" y="0"/>
+            <a:ext cx="2971800" cy="458788"/>
+          </a:xfrm>
+          <a:prstGeom prst="rect">
+            <a:avLst/>
+          </a:prstGeom>
+        </p:spPr>
+        <p:txBody>
+          <a:bodyPr vert="horz" lIns="91440" tIns="45720" rIns="91440" bIns="45720" rtlCol="0"/>
+          <a:lstStyle>
+            <a:lvl1pPr algn="l">
+              <a:defRPr sz="1200"/>
+            </a:lvl1pPr>
+          </a:lstStyle>
+          <a:p>
+            <a:endParaRPr lang="en-GB"/>
+          </a:p>
+        </p:txBody>
+      </p:sp>
+      <p:sp>
+        <p:nvSpPr>
+          <p:cNvPr id="3" name="Date Placeholder 2"/>
+          <p:cNvSpPr>
+            <a:spLocks noGrp="1"/>
+          </p:cNvSpPr>
+          <p:nvPr>
+            <p:ph type="dt" idx="1"/>
+          </p:nvPr>
+        </p:nvSpPr>
+        <p:spPr>
+          <a:xfrm>
+            <a:off x="3884613" y="0"/>
+            <a:ext cx="2971800" cy="458788"/>
+          </a:xfrm>
+          <a:prstGeom prst="rect">
+            <a:avLst/>
+          </a:prstGeom>
+        </p:spPr>
+        <p:txBody>
+          <a:bodyPr vert="horz" lIns="91440" tIns="45720" rIns="91440" bIns="45720" rtlCol="0"/>
+          <a:lstStyle>
+            <a:lvl1pPr algn="r">
+              <a:defRPr sz="1200"/>
+            </a:lvl1pPr>
+          </a:lstStyle>
+          <a:p>
+            <a:fld id="{E7A2F446-5536-9D4D-9761-025E5330F58F}" type="datetimeFigureOut">
+              <a:rPr lang="en-GB" smtClean="0"/>
+              <a:t>13/05/2026</a:t>
+            </a:fld>
+            <a:endParaRPr lang="en-GB"/>
+          </a:p>
+        </p:txBody>
+      </p:sp>
+      <p:sp>
+        <p:nvSpPr>
+          <p:cNvPr id="4" name="Slide Image Placeholder 3"/>
+          <p:cNvSpPr>
+            <a:spLocks noGrp="1" noRot="1" noChangeAspect="1"/>
+          </p:cNvSpPr>
+          <p:nvPr>
+            <p:ph type="sldImg" idx="2"/>
+          </p:nvPr>
+        </p:nvSpPr>
+        <p:spPr>
+          <a:xfrm>
+            <a:off x="685800" y="1143000"/>
+            <a:ext cx="5486400" cy="3086100"/>
+          </a:xfrm>
+          <a:prstGeom prst="rect">
+            <a:avLst/>
+          </a:prstGeom>
+          <a:noFill/>
+          <a:ln w="12700">
+            <a:solidFill>
+              <a:prstClr val="black"/>
+            </a:solidFill>
+          </a:ln>
+        </p:spPr>
+        <p:txBody>
+          <a:bodyPr vert="horz" lIns="91440" tIns="45720" rIns="91440" bIns="45720" rtlCol="0" anchor="ctr"/>
+          <a:lstStyle/>
+          <a:p>
+            <a:endParaRPr lang="en-GB"/>
+          </a:p>
+        </p:txBody>
+      </p:sp>
+      <p:sp>
+        <p:nvSpPr>
+          <p:cNvPr id="5" name="Notes Placeholder 4"/>
+          <p:cNvSpPr>
+            <a:spLocks noGrp="1"/>
+          </p:cNvSpPr>
+          <p:nvPr>
+            <p:ph type="body" sz="quarter" idx="3"/>
+          </p:nvPr>
+        </p:nvSpPr>
+        <p:spPr>
+          <a:xfrm>
+            <a:off x="685800" y="4400550"/>
+            <a:ext cx="5486400" cy="3600450"/>
+          </a:xfrm>
+          <a:prstGeom prst="rect">
+            <a:avLst/>
+          </a:prstGeom>
+        </p:spPr>
+        <p:txBody>
+          <a:bodyPr vert="horz" lIns="91440" tIns="45720" rIns="91440" bIns="45720" rtlCol="0"/>
+          <a:lstStyle/>
+          <a:p>
+            <a:pPr lvl="0"/>
+            <a:r>
+              <a:rPr lang="en-GB"/>
+              <a:t>Click to edit Master text styles</a:t>
+            </a:r>
+          </a:p>
+          <a:p>
+            <a:pPr lvl="1"/>
+            <a:r>
+              <a:rPr lang="en-GB"/>
+              <a:t>Second level</a:t>
+            </a:r>
+          </a:p>
+          <a:p>
+            <a:pPr lvl="2"/>
+            <a:r>
+              <a:rPr lang="en-GB"/>
+              <a:t>Third level</a:t>
+            </a:r>
+          </a:p>
+          <a:p>
+            <a:pPr lvl="3"/>
+            <a:r>
+              <a:rPr lang="en-GB"/>
+              <a:t>Fourth level</a:t>
+            </a:r>
+          </a:p>
+          <a:p>
+            <a:pPr lvl="4"/>
+            <a:r>
+              <a:rPr lang="en-GB"/>
+              <a:t>Fifth level</a:t>
+            </a:r>
+          </a:p>
+        </p:txBody>
+      </p:sp>
+      <p:sp>
+        <p:nvSpPr>
+          <p:cNvPr id="6" name="Footer Placeholder 5"/>
+          <p:cNvSpPr>
+            <a:spLocks noGrp="1"/>
+          </p:cNvSpPr>
+          <p:nvPr>
+            <p:ph type="ftr" sz="quarter" idx="4"/>
+          </p:nvPr>
+        </p:nvSpPr>
+        <p:spPr>
+          <a:xfrm>
+            <a:off x="0" y="8685213"/>
+            <a:ext cx="2971800" cy="458787"/>
+          </a:xfrm>
+          <a:prstGeom prst="rect">
+            <a:avLst/>
+          </a:prstGeom>
+        </p:spPr>
+        <p:txBody>
+          <a:bodyPr vert="horz" lIns="91440" tIns="45720" rIns="91440" bIns="45720" rtlCol="0" anchor="b"/>
+          <a:lstStyle>
+            <a:lvl1pPr algn="l">
+              <a:defRPr sz="1200"/>
+            </a:lvl1pPr>
+          </a:lstStyle>
+          <a:p>
+            <a:endParaRPr lang="en-GB"/>
+          </a:p>
+        </p:txBody>
+      </p:sp>
+      <p:sp>
+        <p:nvSpPr>
+          <p:cNvPr id="7" name="Slide Number Placeholder 6"/>
+          <p:cNvSpPr>
+            <a:spLocks noGrp="1"/>
+          </p:cNvSpPr>
+          <p:nvPr>
+            <p:ph type="sldNum" sz="quarter" idx="5"/>
+          </p:nvPr>
+        </p:nvSpPr>
+        <p:spPr>
+          <a:xfrm>
+            <a:off x="3884613" y="8685213"/>
+            <a:ext cx="2971800" cy="458787"/>
+          </a:xfrm>
+          <a:prstGeom prst="rect">
+            <a:avLst/>
+          </a:prstGeom>
+        </p:spPr>
+        <p:txBody>
+          <a:bodyPr vert="horz" lIns="91440" tIns="45720" rIns="91440" bIns="45720" rtlCol="0" anchor="b"/>
+          <a:lstStyle>
+            <a:lvl1pPr algn="r">
+              <a:defRPr sz="1200"/>
+            </a:lvl1pPr>
+          </a:lstStyle>
+          <a:p>
+            <a:fld id="{41B0EB74-DB58-084A-BD23-95A31DA1C717}" type="slidenum">
+              <a:rPr lang="en-GB" smtClean="0"/>
+              <a:t>‹#›</a:t>
+            </a:fld>
+            <a:endParaRPr lang="en-GB"/>
+          </a:p>
+        </p:txBody>
+      </p:sp>
+    </p:spTree>
+    <p:extLst>
+      <p:ext uri="{BB962C8B-B14F-4D97-AF65-F5344CB8AC3E}">
+        <p14:creationId xmlns:p14="http://schemas.microsoft.com/office/powerpoint/2010/main" val="2970040045"/>
+      </p:ext>
+    </p:extLst>
+  </p:cSld>
+  <p:clrMap bg1="lt1" tx1="dk1" bg2="lt2" tx2="dk2" accent1="accent1" accent2="accent2" accent3="accent3" accent4="accent4" accent5="accent5" accent6="accent6" hlink="hlink" folHlink="folHlink"/>
+  <p:notesStyle>
+    <a:lvl1pPr marL="0" algn="l" defTabSz="914400" rtl="0" eaLnBrk="1" latinLnBrk="0" hangingPunct="1">
+      <a:defRPr sz="1200" kern="1200">
+        <a:solidFill>
+          <a:schemeClr val="tx1"/>
+        </a:solidFill>
+        <a:latin typeface="+mn-lt"/>
+        <a:ea typeface="+mn-ea"/>
+        <a:cs typeface="+mn-cs"/>
+      </a:defRPr>
+    </a:lvl1pPr>
+    <a:lvl2pPr marL="457200" algn="l" defTabSz="914400" rtl="0" eaLnBrk="1" latinLnBrk="0" hangingPunct="1">
+      <a:defRPr sz="1200" kern="1200">
+        <a:solidFill>
+          <a:schemeClr val="tx1"/>
+        </a:solidFill>
+        <a:latin typeface="+mn-lt"/>
+        <a:ea typeface="+mn-ea"/>
+        <a:cs typeface="+mn-cs"/>
+      </a:defRPr>
+    </a:lvl2pPr>
+    <a:lvl3pPr marL="914400" algn="l" defTabSz="914400" rtl="0" eaLnBrk="1" latinLnBrk="0" hangingPunct="1">
+      <a:defRPr sz="1200" kern="1200">
+        <a:solidFill>
+          <a:schemeClr val="tx1"/>
+        </a:solidFill>
+        <a:latin typeface="+mn-lt"/>
+        <a:ea typeface="+mn-ea"/>
+        <a:cs typeface="+mn-cs"/>
+      </a:defRPr>
+    </a:lvl3pPr>
+    <a:lvl4pPr marL="1371600" algn="l" defTabSz="914400" rtl="0" eaLnBrk="1" latinLnBrk="0" hangingPunct="1">
+      <a:defRPr sz="1200" kern="1200">
+        <a:solidFill>
+          <a:schemeClr val="tx1"/>
+        </a:solidFill>
+        <a:latin typeface="+mn-lt"/>
+        <a:ea typeface="+mn-ea"/>
+        <a:cs typeface="+mn-cs"/>
+      </a:defRPr>
+    </a:lvl4pPr>
+    <a:lvl5pPr marL="1828800" algn="l" defTabSz="914400" rtl="0" eaLnBrk="1" latinLnBrk="0" hangingPunct="1">
+      <a:defRPr sz="1200" kern="1200">
+        <a:solidFill>
+          <a:schemeClr val="tx1"/>
+        </a:solidFill>
+        <a:latin typeface="+mn-lt"/>
+        <a:ea typeface="+mn-ea"/>
+        <a:cs typeface="+mn-cs"/>
+      </a:defRPr>
+    </a:lvl5pPr>
+    <a:lvl6pPr marL="2286000" algn="l" defTabSz="914400" rtl="0" eaLnBrk="1" latinLnBrk="0" hangingPunct="1">
+      <a:defRPr sz="1200" kern="1200">
+        <a:solidFill>
+          <a:schemeClr val="tx1"/>
+        </a:solidFill>
+        <a:latin typeface="+mn-lt"/>
+        <a:ea typeface="+mn-ea"/>
+        <a:cs typeface="+mn-cs"/>
+      </a:defRPr>
+    </a:lvl6pPr>
+    <a:lvl7pPr marL="2743200" algn="l" defTabSz="914400" rtl="0" eaLnBrk="1" latinLnBrk="0" hangingPunct="1">
+      <a:defRPr sz="1200" kern="1200">
+        <a:solidFill>
+          <a:schemeClr val="tx1"/>
+        </a:solidFill>
+        <a:latin typeface="+mn-lt"/>
+        <a:ea typeface="+mn-ea"/>
+        <a:cs typeface="+mn-cs"/>
+      </a:defRPr>
+    </a:lvl7pPr>
+    <a:lvl8pPr marL="3200400" algn="l" defTabSz="914400" rtl="0" eaLnBrk="1" latinLnBrk="0" hangingPunct="1">
+      <a:defRPr sz="1200" kern="1200">
+        <a:solidFill>
+          <a:schemeClr val="tx1"/>
+        </a:solidFill>
+        <a:latin typeface="+mn-lt"/>
+        <a:ea typeface="+mn-ea"/>
+        <a:cs typeface="+mn-cs"/>
+      </a:defRPr>
+    </a:lvl8pPr>
+    <a:lvl9pPr marL="3657600" algn="l" defTabSz="914400" rtl="0" eaLnBrk="1" latinLnBrk="0" hangingPunct="1">
+      <a:defRPr sz="1200" kern="1200">
+        <a:solidFill>
+          <a:schemeClr val="tx1"/>
+        </a:solidFill>
+        <a:latin typeface="+mn-lt"/>
+        <a:ea typeface="+mn-ea"/>
+        <a:cs typeface="+mn-cs"/>
+      </a:defRPr>
+    </a:lvl9pPr>
+  </p:notesStyle>
+</p:notesMaster>
+</file>
+
+<file path=ppt/notesSlides/notesSlide1.xml><?xml version="1.0" encoding="utf-8"?>
+<p:notes xmlns:a="http://schemas.openxmlformats.org/drawingml/2006/main" xmlns:r="http://schemas.openxmlformats.org/officeDocument/2006/relationships" xmlns:p="http://schemas.openxmlformats.org/presentationml/2006/main">
+  <p:cSld>
+    <p:spTree>
+      <p:nvGrpSpPr>
+        <p:cNvPr id="1" name=""/>
+        <p:cNvGrpSpPr/>
+        <p:nvPr/>
+      </p:nvGrpSpPr>
+      <p:grpSpPr>
+        <a:xfrm>
+          <a:off x="0" y="0"/>
+          <a:ext cx="0" cy="0"/>
+          <a:chOff x="0" y="0"/>
+          <a:chExt cx="0" cy="0"/>
+        </a:xfrm>
+      </p:grpSpPr>
+      <p:sp>
+        <p:nvSpPr>
+          <p:cNvPr id="2" name="Slide Image Placeholder 1"/>
+          <p:cNvSpPr>
+            <a:spLocks noGrp="1" noRot="1" noChangeAspect="1"/>
+          </p:cNvSpPr>
+          <p:nvPr>
+            <p:ph type="sldImg"/>
+          </p:nvPr>
+        </p:nvSpPr>
+        <p:spPr/>
+      </p:sp>
+      <p:sp>
+        <p:nvSpPr>
+          <p:cNvPr id="3" name="Notes Placeholder 2"/>
+          <p:cNvSpPr>
+            <a:spLocks noGrp="1"/>
+          </p:cNvSpPr>
+          <p:nvPr>
+            <p:ph type="body" idx="1"/>
+          </p:nvPr>
+        </p:nvSpPr>
+        <p:spPr/>
+        <p:txBody>
+          <a:bodyPr/>
+          <a:lstStyle/>
+          <a:p>
+            <a:endParaRPr lang="en-GB"/>
+          </a:p>
+        </p:txBody>
+      </p:sp>
+      <p:sp>
+        <p:nvSpPr>
+          <p:cNvPr id="4" name="Slide Number Placeholder 3"/>
+          <p:cNvSpPr>
+            <a:spLocks noGrp="1"/>
+          </p:cNvSpPr>
+          <p:nvPr>
+            <p:ph type="sldNum" sz="quarter" idx="5"/>
+          </p:nvPr>
+        </p:nvSpPr>
+        <p:spPr/>
+        <p:txBody>
+          <a:bodyPr/>
+          <a:lstStyle/>
+          <a:p>
+            <a:fld id="{41B0EB74-DB58-084A-BD23-95A31DA1C717}" type="slidenum">
+              <a:rPr lang="en-GB" smtClean="0"/>
+              <a:t>1</a:t>
+            </a:fld>
+            <a:endParaRPr lang="en-GB"/>
+          </a:p>
+        </p:txBody>
+      </p:sp>
+    </p:spTree>
+    <p:extLst>
+      <p:ext uri="{BB962C8B-B14F-4D97-AF65-F5344CB8AC3E}">
+        <p14:creationId xmlns:p14="http://schemas.microsoft.com/office/powerpoint/2010/main" val="2420086243"/>
+      </p:ext>
+    </p:extLst>
+  </p:cSld>
+  <p:clrMapOvr>
+    <a:masterClrMapping/>
+  </p:clrMapOvr>
+</p:notes>
 </file>
 
 <file path=ppt/slideLayouts/slideLayout1.xml><?xml version="1.0" encoding="utf-8"?>
@@ -3284,7 +3720,7 @@
         <p:spPr>
           <a:xfrm>
             <a:off x="914400" y="3657600"/>
-            <a:ext cx="7772400" cy="548640"/>
+            <a:ext cx="7772400" cy="215444"/>
           </a:xfrm>
           <a:prstGeom prst="rect">
             <a:avLst/>
@@ -3299,13 +3735,13 @@
           <a:p>
             <a:pPr algn="l"/>
             <a:r>
-              <a:rPr sz="1400" b="0">
+              <a:rPr sz="1400" b="0" dirty="0">
                 <a:solidFill>
                   <a:srgbClr val="CBD5E0"/>
                 </a:solidFill>
                 <a:latin typeface="Calibri"/>
               </a:rPr>
-              <a:t>Status snapshot and next steps for supervisor review</a:t>
+              <a:t>Status snapshot and next steps for review</a:t>
             </a:r>
           </a:p>
         </p:txBody>
@@ -3639,7 +4075,7 @@
                 </a:solidFill>
                 <a:latin typeface="Calibri"/>
               </a:rPr>
-              <a:t>11</a:t>
+              <a:t>44</a:t>
             </a:r>
           </a:p>
         </p:txBody>
@@ -3674,7 +4110,7 @@
                 </a:solidFill>
                 <a:latin typeface="Calibri"/>
               </a:rPr>
-              <a:t>19 R · 17 V · 2 A.</a:t>
+              <a:t>81 Researcher · 79 Verifier · 10 Adjudicator.</a:t>
             </a:r>
           </a:p>
         </p:txBody>
@@ -4029,7 +4465,7 @@
                 </a:solidFill>
                 <a:latin typeface="Calibri"/>
               </a:rPr>
-              <a:t>100%</a:t>
+              <a:t>84%</a:t>
             </a:r>
           </a:p>
         </p:txBody>
@@ -4064,7 +4500,7 @@
                 </a:solidFill>
                 <a:latin typeface="Calibri"/>
               </a:rPr>
-              <a:t>11 / 11 match against ODMI 2025.</a:t>
+              <a:t>37 / 44 match against ODMI 2025.</a:t>
             </a:r>
           </a:p>
         </p:txBody>
@@ -4203,7 +4639,7 @@
         <p:spPr>
           <a:xfrm>
             <a:off x="6954012" y="1563624"/>
-            <a:ext cx="1632204" cy="548640"/>
+            <a:ext cx="1632204" cy="338554"/>
           </a:xfrm>
           <a:prstGeom prst="rect">
             <a:avLst/>
@@ -4218,13 +4654,13 @@
           <a:p>
             <a:pPr algn="l"/>
             <a:r>
-              <a:rPr sz="2200" b="1">
+              <a:rPr sz="2200" b="1" dirty="0">
                 <a:solidFill>
                   <a:srgbClr val="1A202C"/>
                 </a:solidFill>
                 <a:latin typeface="Calibri"/>
               </a:rPr>
-              <a:t>$1.02</a:t>
+              <a:t>£4.17</a:t>
             </a:r>
           </a:p>
         </p:txBody>
@@ -4419,7 +4855,7 @@
                 </a:solidFill>
                 <a:latin typeface="Calibri"/>
               </a:rPr>
-              <a:t>Researcher proposes, Verifier tries to disprove, Adjudicator decides on retry exhaustion. One pair (P2/NL) has needed the Adjudicator. Average runtime ~32s.</a:t>
+              <a:t>Researcher proposes, Verifier tries to disprove, Adjudicator steps in when retries are exhausted. Average runtime ~106s.</a:t>
             </a:r>
           </a:p>
         </p:txBody>
@@ -4614,7 +5050,7 @@
                 </a:solidFill>
                 <a:latin typeface="Calibri"/>
               </a:rPr>
-              <a:t>ODMI Agent Swarm  ·  Benjy Bream  ·  King's College London  ·  2 / 6</a:t>
+              <a:t>ODMI Agent Swarm  ·  Benjy Bream  ·  King's College London  ·  2 / 7</a:t>
             </a:r>
           </a:p>
         </p:txBody>
@@ -5472,7 +5908,7 @@
                 </a:solidFill>
                 <a:latin typeface="Calibri"/>
               </a:rPr>
-              <a:t>ODMI Agent Swarm  ·  Benjy Bream  ·  King's College London  ·  3 / 6</a:t>
+              <a:t>ODMI Agent Swarm  ·  Benjy Bream  ·  King's College London  ·  3 / 7</a:t>
             </a:r>
           </a:p>
         </p:txBody>
@@ -5775,6 +6211,391 @@
         </p:nvSpPr>
         <p:spPr>
           <a:xfrm>
+            <a:off x="685800" y="2927350"/>
+            <a:ext cx="411480" cy="182880"/>
+          </a:xfrm>
+          <a:prstGeom prst="rect">
+            <a:avLst/>
+          </a:prstGeom>
+          <a:noFill/>
+        </p:spPr>
+        <p:txBody>
+          <a:bodyPr wrap="square" lIns="0" tIns="0" rIns="0" bIns="0">
+            <a:spAutoFit/>
+          </a:bodyPr>
+          <a:lstStyle/>
+          <a:p>
+            <a:pPr algn="r"/>
+            <a:r>
+              <a:rPr sz="900" b="0">
+                <a:solidFill>
+                  <a:srgbClr val="718096"/>
+                </a:solidFill>
+                <a:latin typeface="Calibri"/>
+              </a:rPr>
+              <a:t>1</a:t>
+            </a:r>
+          </a:p>
+        </p:txBody>
+      </p:sp>
+      <p:sp>
+        <p:nvSpPr>
+          <p:cNvPr id="10" name="TextBox 9"/>
+          <p:cNvSpPr txBox="1"/>
+          <p:nvPr/>
+        </p:nvSpPr>
+        <p:spPr>
+          <a:xfrm>
+            <a:off x="685800" y="2882900"/>
+            <a:ext cx="411480" cy="182880"/>
+          </a:xfrm>
+          <a:prstGeom prst="rect">
+            <a:avLst/>
+          </a:prstGeom>
+          <a:noFill/>
+        </p:spPr>
+        <p:txBody>
+          <a:bodyPr wrap="square" lIns="0" tIns="0" rIns="0" bIns="0">
+            <a:spAutoFit/>
+          </a:bodyPr>
+          <a:lstStyle/>
+          <a:p>
+            <a:pPr algn="r"/>
+            <a:r>
+              <a:rPr sz="900" b="0">
+                <a:solidFill>
+                  <a:srgbClr val="718096"/>
+                </a:solidFill>
+                <a:latin typeface="Calibri"/>
+              </a:rPr>
+              <a:t>2</a:t>
+            </a:r>
+          </a:p>
+        </p:txBody>
+      </p:sp>
+      <p:sp>
+        <p:nvSpPr>
+          <p:cNvPr id="11" name="TextBox 10"/>
+          <p:cNvSpPr txBox="1"/>
+          <p:nvPr/>
+        </p:nvSpPr>
+        <p:spPr>
+          <a:xfrm>
+            <a:off x="685800" y="2838450"/>
+            <a:ext cx="411480" cy="182880"/>
+          </a:xfrm>
+          <a:prstGeom prst="rect">
+            <a:avLst/>
+          </a:prstGeom>
+          <a:noFill/>
+        </p:spPr>
+        <p:txBody>
+          <a:bodyPr wrap="square" lIns="0" tIns="0" rIns="0" bIns="0">
+            <a:spAutoFit/>
+          </a:bodyPr>
+          <a:lstStyle/>
+          <a:p>
+            <a:pPr algn="r"/>
+            <a:r>
+              <a:rPr sz="900" b="0">
+                <a:solidFill>
+                  <a:srgbClr val="718096"/>
+                </a:solidFill>
+                <a:latin typeface="Calibri"/>
+              </a:rPr>
+              <a:t>3</a:t>
+            </a:r>
+          </a:p>
+        </p:txBody>
+      </p:sp>
+      <p:sp>
+        <p:nvSpPr>
+          <p:cNvPr id="12" name="TextBox 11"/>
+          <p:cNvSpPr txBox="1"/>
+          <p:nvPr/>
+        </p:nvSpPr>
+        <p:spPr>
+          <a:xfrm>
+            <a:off x="685800" y="2794000"/>
+            <a:ext cx="411480" cy="182880"/>
+          </a:xfrm>
+          <a:prstGeom prst="rect">
+            <a:avLst/>
+          </a:prstGeom>
+          <a:noFill/>
+        </p:spPr>
+        <p:txBody>
+          <a:bodyPr wrap="square" lIns="0" tIns="0" rIns="0" bIns="0">
+            <a:spAutoFit/>
+          </a:bodyPr>
+          <a:lstStyle/>
+          <a:p>
+            <a:pPr algn="r"/>
+            <a:r>
+              <a:rPr sz="900" b="0">
+                <a:solidFill>
+                  <a:srgbClr val="718096"/>
+                </a:solidFill>
+                <a:latin typeface="Calibri"/>
+              </a:rPr>
+              <a:t>4</a:t>
+            </a:r>
+          </a:p>
+        </p:txBody>
+      </p:sp>
+      <p:sp>
+        <p:nvSpPr>
+          <p:cNvPr id="13" name="TextBox 12"/>
+          <p:cNvSpPr txBox="1"/>
+          <p:nvPr/>
+        </p:nvSpPr>
+        <p:spPr>
+          <a:xfrm>
+            <a:off x="685800" y="2749550"/>
+            <a:ext cx="411480" cy="182880"/>
+          </a:xfrm>
+          <a:prstGeom prst="rect">
+            <a:avLst/>
+          </a:prstGeom>
+          <a:noFill/>
+        </p:spPr>
+        <p:txBody>
+          <a:bodyPr wrap="square" lIns="0" tIns="0" rIns="0" bIns="0">
+            <a:spAutoFit/>
+          </a:bodyPr>
+          <a:lstStyle/>
+          <a:p>
+            <a:pPr algn="r"/>
+            <a:r>
+              <a:rPr sz="900" b="0">
+                <a:solidFill>
+                  <a:srgbClr val="718096"/>
+                </a:solidFill>
+                <a:latin typeface="Calibri"/>
+              </a:rPr>
+              <a:t>5</a:t>
+            </a:r>
+          </a:p>
+        </p:txBody>
+      </p:sp>
+      <p:sp>
+        <p:nvSpPr>
+          <p:cNvPr id="14" name="TextBox 13"/>
+          <p:cNvSpPr txBox="1"/>
+          <p:nvPr/>
+        </p:nvSpPr>
+        <p:spPr>
+          <a:xfrm>
+            <a:off x="685800" y="2705100"/>
+            <a:ext cx="411480" cy="182880"/>
+          </a:xfrm>
+          <a:prstGeom prst="rect">
+            <a:avLst/>
+          </a:prstGeom>
+          <a:noFill/>
+        </p:spPr>
+        <p:txBody>
+          <a:bodyPr wrap="square" lIns="0" tIns="0" rIns="0" bIns="0">
+            <a:spAutoFit/>
+          </a:bodyPr>
+          <a:lstStyle/>
+          <a:p>
+            <a:pPr algn="r"/>
+            <a:r>
+              <a:rPr sz="900" b="0">
+                <a:solidFill>
+                  <a:srgbClr val="718096"/>
+                </a:solidFill>
+                <a:latin typeface="Calibri"/>
+              </a:rPr>
+              <a:t>6</a:t>
+            </a:r>
+          </a:p>
+        </p:txBody>
+      </p:sp>
+      <p:sp>
+        <p:nvSpPr>
+          <p:cNvPr id="15" name="TextBox 14"/>
+          <p:cNvSpPr txBox="1"/>
+          <p:nvPr/>
+        </p:nvSpPr>
+        <p:spPr>
+          <a:xfrm>
+            <a:off x="685800" y="2660650"/>
+            <a:ext cx="411480" cy="182880"/>
+          </a:xfrm>
+          <a:prstGeom prst="rect">
+            <a:avLst/>
+          </a:prstGeom>
+          <a:noFill/>
+        </p:spPr>
+        <p:txBody>
+          <a:bodyPr wrap="square" lIns="0" tIns="0" rIns="0" bIns="0">
+            <a:spAutoFit/>
+          </a:bodyPr>
+          <a:lstStyle/>
+          <a:p>
+            <a:pPr algn="r"/>
+            <a:r>
+              <a:rPr sz="900" b="0">
+                <a:solidFill>
+                  <a:srgbClr val="718096"/>
+                </a:solidFill>
+                <a:latin typeface="Calibri"/>
+              </a:rPr>
+              <a:t>7</a:t>
+            </a:r>
+          </a:p>
+        </p:txBody>
+      </p:sp>
+      <p:sp>
+        <p:nvSpPr>
+          <p:cNvPr id="16" name="TextBox 15"/>
+          <p:cNvSpPr txBox="1"/>
+          <p:nvPr/>
+        </p:nvSpPr>
+        <p:spPr>
+          <a:xfrm>
+            <a:off x="685800" y="2616200"/>
+            <a:ext cx="411480" cy="182880"/>
+          </a:xfrm>
+          <a:prstGeom prst="rect">
+            <a:avLst/>
+          </a:prstGeom>
+          <a:noFill/>
+        </p:spPr>
+        <p:txBody>
+          <a:bodyPr wrap="square" lIns="0" tIns="0" rIns="0" bIns="0">
+            <a:spAutoFit/>
+          </a:bodyPr>
+          <a:lstStyle/>
+          <a:p>
+            <a:pPr algn="r"/>
+            <a:r>
+              <a:rPr sz="900" b="0">
+                <a:solidFill>
+                  <a:srgbClr val="718096"/>
+                </a:solidFill>
+                <a:latin typeface="Calibri"/>
+              </a:rPr>
+              <a:t>8</a:t>
+            </a:r>
+          </a:p>
+        </p:txBody>
+      </p:sp>
+      <p:sp>
+        <p:nvSpPr>
+          <p:cNvPr id="17" name="TextBox 16"/>
+          <p:cNvSpPr txBox="1"/>
+          <p:nvPr/>
+        </p:nvSpPr>
+        <p:spPr>
+          <a:xfrm>
+            <a:off x="685800" y="2571750"/>
+            <a:ext cx="411480" cy="182880"/>
+          </a:xfrm>
+          <a:prstGeom prst="rect">
+            <a:avLst/>
+          </a:prstGeom>
+          <a:noFill/>
+        </p:spPr>
+        <p:txBody>
+          <a:bodyPr wrap="square" lIns="0" tIns="0" rIns="0" bIns="0">
+            <a:spAutoFit/>
+          </a:bodyPr>
+          <a:lstStyle/>
+          <a:p>
+            <a:pPr algn="r"/>
+            <a:r>
+              <a:rPr sz="900" b="0">
+                <a:solidFill>
+                  <a:srgbClr val="718096"/>
+                </a:solidFill>
+                <a:latin typeface="Calibri"/>
+              </a:rPr>
+              <a:t>9</a:t>
+            </a:r>
+          </a:p>
+        </p:txBody>
+      </p:sp>
+      <p:sp>
+        <p:nvSpPr>
+          <p:cNvPr id="18" name="TextBox 17"/>
+          <p:cNvSpPr txBox="1"/>
+          <p:nvPr/>
+        </p:nvSpPr>
+        <p:spPr>
+          <a:xfrm>
+            <a:off x="685800" y="2527300"/>
+            <a:ext cx="411480" cy="182880"/>
+          </a:xfrm>
+          <a:prstGeom prst="rect">
+            <a:avLst/>
+          </a:prstGeom>
+          <a:noFill/>
+        </p:spPr>
+        <p:txBody>
+          <a:bodyPr wrap="square" lIns="0" tIns="0" rIns="0" bIns="0">
+            <a:spAutoFit/>
+          </a:bodyPr>
+          <a:lstStyle/>
+          <a:p>
+            <a:pPr algn="r"/>
+            <a:r>
+              <a:rPr sz="900" b="0">
+                <a:solidFill>
+                  <a:srgbClr val="718096"/>
+                </a:solidFill>
+                <a:latin typeface="Calibri"/>
+              </a:rPr>
+              <a:t>10</a:t>
+            </a:r>
+          </a:p>
+        </p:txBody>
+      </p:sp>
+      <p:sp>
+        <p:nvSpPr>
+          <p:cNvPr id="19" name="TextBox 18"/>
+          <p:cNvSpPr txBox="1"/>
+          <p:nvPr/>
+        </p:nvSpPr>
+        <p:spPr>
+          <a:xfrm>
+            <a:off x="685800" y="2482850"/>
+            <a:ext cx="411480" cy="182880"/>
+          </a:xfrm>
+          <a:prstGeom prst="rect">
+            <a:avLst/>
+          </a:prstGeom>
+          <a:noFill/>
+        </p:spPr>
+        <p:txBody>
+          <a:bodyPr wrap="square" lIns="0" tIns="0" rIns="0" bIns="0">
+            <a:spAutoFit/>
+          </a:bodyPr>
+          <a:lstStyle/>
+          <a:p>
+            <a:pPr algn="r"/>
+            <a:r>
+              <a:rPr sz="900" b="0">
+                <a:solidFill>
+                  <a:srgbClr val="718096"/>
+                </a:solidFill>
+                <a:latin typeface="Calibri"/>
+              </a:rPr>
+              <a:t>11</a:t>
+            </a:r>
+          </a:p>
+        </p:txBody>
+      </p:sp>
+      <p:sp>
+        <p:nvSpPr>
+          <p:cNvPr id="20" name="TextBox 19"/>
+          <p:cNvSpPr txBox="1"/>
+          <p:nvPr/>
+        </p:nvSpPr>
+        <p:spPr>
+          <a:xfrm>
             <a:off x="685800" y="2438400"/>
             <a:ext cx="411480" cy="182880"/>
           </a:xfrm>
@@ -5797,14 +6618,399 @@
                 </a:solidFill>
                 <a:latin typeface="Calibri"/>
               </a:rPr>
-              <a:t>1</a:t>
-            </a:r>
-          </a:p>
-        </p:txBody>
-      </p:sp>
-      <p:sp>
-        <p:nvSpPr>
-          <p:cNvPr id="10" name="TextBox 9"/>
+              <a:t>12</a:t>
+            </a:r>
+          </a:p>
+        </p:txBody>
+      </p:sp>
+      <p:sp>
+        <p:nvSpPr>
+          <p:cNvPr id="21" name="TextBox 20"/>
+          <p:cNvSpPr txBox="1"/>
+          <p:nvPr/>
+        </p:nvSpPr>
+        <p:spPr>
+          <a:xfrm>
+            <a:off x="685800" y="2393950"/>
+            <a:ext cx="411480" cy="182880"/>
+          </a:xfrm>
+          <a:prstGeom prst="rect">
+            <a:avLst/>
+          </a:prstGeom>
+          <a:noFill/>
+        </p:spPr>
+        <p:txBody>
+          <a:bodyPr wrap="square" lIns="0" tIns="0" rIns="0" bIns="0">
+            <a:spAutoFit/>
+          </a:bodyPr>
+          <a:lstStyle/>
+          <a:p>
+            <a:pPr algn="r"/>
+            <a:r>
+              <a:rPr sz="900" b="0">
+                <a:solidFill>
+                  <a:srgbClr val="718096"/>
+                </a:solidFill>
+                <a:latin typeface="Calibri"/>
+              </a:rPr>
+              <a:t>13</a:t>
+            </a:r>
+          </a:p>
+        </p:txBody>
+      </p:sp>
+      <p:sp>
+        <p:nvSpPr>
+          <p:cNvPr id="22" name="TextBox 21"/>
+          <p:cNvSpPr txBox="1"/>
+          <p:nvPr/>
+        </p:nvSpPr>
+        <p:spPr>
+          <a:xfrm>
+            <a:off x="685800" y="2349500"/>
+            <a:ext cx="411480" cy="182880"/>
+          </a:xfrm>
+          <a:prstGeom prst="rect">
+            <a:avLst/>
+          </a:prstGeom>
+          <a:noFill/>
+        </p:spPr>
+        <p:txBody>
+          <a:bodyPr wrap="square" lIns="0" tIns="0" rIns="0" bIns="0">
+            <a:spAutoFit/>
+          </a:bodyPr>
+          <a:lstStyle/>
+          <a:p>
+            <a:pPr algn="r"/>
+            <a:r>
+              <a:rPr sz="900" b="0">
+                <a:solidFill>
+                  <a:srgbClr val="718096"/>
+                </a:solidFill>
+                <a:latin typeface="Calibri"/>
+              </a:rPr>
+              <a:t>14</a:t>
+            </a:r>
+          </a:p>
+        </p:txBody>
+      </p:sp>
+      <p:sp>
+        <p:nvSpPr>
+          <p:cNvPr id="23" name="TextBox 22"/>
+          <p:cNvSpPr txBox="1"/>
+          <p:nvPr/>
+        </p:nvSpPr>
+        <p:spPr>
+          <a:xfrm>
+            <a:off x="685800" y="2305050"/>
+            <a:ext cx="411480" cy="182880"/>
+          </a:xfrm>
+          <a:prstGeom prst="rect">
+            <a:avLst/>
+          </a:prstGeom>
+          <a:noFill/>
+        </p:spPr>
+        <p:txBody>
+          <a:bodyPr wrap="square" lIns="0" tIns="0" rIns="0" bIns="0">
+            <a:spAutoFit/>
+          </a:bodyPr>
+          <a:lstStyle/>
+          <a:p>
+            <a:pPr algn="r"/>
+            <a:r>
+              <a:rPr sz="900" b="0">
+                <a:solidFill>
+                  <a:srgbClr val="718096"/>
+                </a:solidFill>
+                <a:latin typeface="Calibri"/>
+              </a:rPr>
+              <a:t>15</a:t>
+            </a:r>
+          </a:p>
+        </p:txBody>
+      </p:sp>
+      <p:sp>
+        <p:nvSpPr>
+          <p:cNvPr id="24" name="TextBox 23"/>
+          <p:cNvSpPr txBox="1"/>
+          <p:nvPr/>
+        </p:nvSpPr>
+        <p:spPr>
+          <a:xfrm>
+            <a:off x="685800" y="2260600"/>
+            <a:ext cx="411480" cy="182880"/>
+          </a:xfrm>
+          <a:prstGeom prst="rect">
+            <a:avLst/>
+          </a:prstGeom>
+          <a:noFill/>
+        </p:spPr>
+        <p:txBody>
+          <a:bodyPr wrap="square" lIns="0" tIns="0" rIns="0" bIns="0">
+            <a:spAutoFit/>
+          </a:bodyPr>
+          <a:lstStyle/>
+          <a:p>
+            <a:pPr algn="r"/>
+            <a:r>
+              <a:rPr sz="900" b="0">
+                <a:solidFill>
+                  <a:srgbClr val="718096"/>
+                </a:solidFill>
+                <a:latin typeface="Calibri"/>
+              </a:rPr>
+              <a:t>16</a:t>
+            </a:r>
+          </a:p>
+        </p:txBody>
+      </p:sp>
+      <p:sp>
+        <p:nvSpPr>
+          <p:cNvPr id="25" name="TextBox 24"/>
+          <p:cNvSpPr txBox="1"/>
+          <p:nvPr/>
+        </p:nvSpPr>
+        <p:spPr>
+          <a:xfrm>
+            <a:off x="685800" y="2216150"/>
+            <a:ext cx="411480" cy="182880"/>
+          </a:xfrm>
+          <a:prstGeom prst="rect">
+            <a:avLst/>
+          </a:prstGeom>
+          <a:noFill/>
+        </p:spPr>
+        <p:txBody>
+          <a:bodyPr wrap="square" lIns="0" tIns="0" rIns="0" bIns="0">
+            <a:spAutoFit/>
+          </a:bodyPr>
+          <a:lstStyle/>
+          <a:p>
+            <a:pPr algn="r"/>
+            <a:r>
+              <a:rPr sz="900" b="0">
+                <a:solidFill>
+                  <a:srgbClr val="718096"/>
+                </a:solidFill>
+                <a:latin typeface="Calibri"/>
+              </a:rPr>
+              <a:t>17</a:t>
+            </a:r>
+          </a:p>
+        </p:txBody>
+      </p:sp>
+      <p:sp>
+        <p:nvSpPr>
+          <p:cNvPr id="26" name="TextBox 25"/>
+          <p:cNvSpPr txBox="1"/>
+          <p:nvPr/>
+        </p:nvSpPr>
+        <p:spPr>
+          <a:xfrm>
+            <a:off x="685800" y="2171700"/>
+            <a:ext cx="411480" cy="182880"/>
+          </a:xfrm>
+          <a:prstGeom prst="rect">
+            <a:avLst/>
+          </a:prstGeom>
+          <a:noFill/>
+        </p:spPr>
+        <p:txBody>
+          <a:bodyPr wrap="square" lIns="0" tIns="0" rIns="0" bIns="0">
+            <a:spAutoFit/>
+          </a:bodyPr>
+          <a:lstStyle/>
+          <a:p>
+            <a:pPr algn="r"/>
+            <a:r>
+              <a:rPr sz="900" b="0">
+                <a:solidFill>
+                  <a:srgbClr val="718096"/>
+                </a:solidFill>
+                <a:latin typeface="Calibri"/>
+              </a:rPr>
+              <a:t>18</a:t>
+            </a:r>
+          </a:p>
+        </p:txBody>
+      </p:sp>
+      <p:sp>
+        <p:nvSpPr>
+          <p:cNvPr id="27" name="TextBox 26"/>
+          <p:cNvSpPr txBox="1"/>
+          <p:nvPr/>
+        </p:nvSpPr>
+        <p:spPr>
+          <a:xfrm>
+            <a:off x="685800" y="2127250"/>
+            <a:ext cx="411480" cy="182880"/>
+          </a:xfrm>
+          <a:prstGeom prst="rect">
+            <a:avLst/>
+          </a:prstGeom>
+          <a:noFill/>
+        </p:spPr>
+        <p:txBody>
+          <a:bodyPr wrap="square" lIns="0" tIns="0" rIns="0" bIns="0">
+            <a:spAutoFit/>
+          </a:bodyPr>
+          <a:lstStyle/>
+          <a:p>
+            <a:pPr algn="r"/>
+            <a:r>
+              <a:rPr sz="900" b="0">
+                <a:solidFill>
+                  <a:srgbClr val="718096"/>
+                </a:solidFill>
+                <a:latin typeface="Calibri"/>
+              </a:rPr>
+              <a:t>19</a:t>
+            </a:r>
+          </a:p>
+        </p:txBody>
+      </p:sp>
+      <p:sp>
+        <p:nvSpPr>
+          <p:cNvPr id="28" name="TextBox 27"/>
+          <p:cNvSpPr txBox="1"/>
+          <p:nvPr/>
+        </p:nvSpPr>
+        <p:spPr>
+          <a:xfrm>
+            <a:off x="685800" y="2082800"/>
+            <a:ext cx="411480" cy="182880"/>
+          </a:xfrm>
+          <a:prstGeom prst="rect">
+            <a:avLst/>
+          </a:prstGeom>
+          <a:noFill/>
+        </p:spPr>
+        <p:txBody>
+          <a:bodyPr wrap="square" lIns="0" tIns="0" rIns="0" bIns="0">
+            <a:spAutoFit/>
+          </a:bodyPr>
+          <a:lstStyle/>
+          <a:p>
+            <a:pPr algn="r"/>
+            <a:r>
+              <a:rPr sz="900" b="0">
+                <a:solidFill>
+                  <a:srgbClr val="718096"/>
+                </a:solidFill>
+                <a:latin typeface="Calibri"/>
+              </a:rPr>
+              <a:t>20</a:t>
+            </a:r>
+          </a:p>
+        </p:txBody>
+      </p:sp>
+      <p:sp>
+        <p:nvSpPr>
+          <p:cNvPr id="29" name="TextBox 28"/>
+          <p:cNvSpPr txBox="1"/>
+          <p:nvPr/>
+        </p:nvSpPr>
+        <p:spPr>
+          <a:xfrm>
+            <a:off x="685800" y="2038350"/>
+            <a:ext cx="411480" cy="182880"/>
+          </a:xfrm>
+          <a:prstGeom prst="rect">
+            <a:avLst/>
+          </a:prstGeom>
+          <a:noFill/>
+        </p:spPr>
+        <p:txBody>
+          <a:bodyPr wrap="square" lIns="0" tIns="0" rIns="0" bIns="0">
+            <a:spAutoFit/>
+          </a:bodyPr>
+          <a:lstStyle/>
+          <a:p>
+            <a:pPr algn="r"/>
+            <a:r>
+              <a:rPr sz="900" b="0">
+                <a:solidFill>
+                  <a:srgbClr val="718096"/>
+                </a:solidFill>
+                <a:latin typeface="Calibri"/>
+              </a:rPr>
+              <a:t>21</a:t>
+            </a:r>
+          </a:p>
+        </p:txBody>
+      </p:sp>
+      <p:sp>
+        <p:nvSpPr>
+          <p:cNvPr id="30" name="TextBox 29"/>
+          <p:cNvSpPr txBox="1"/>
+          <p:nvPr/>
+        </p:nvSpPr>
+        <p:spPr>
+          <a:xfrm>
+            <a:off x="685800" y="1993900"/>
+            <a:ext cx="411480" cy="182880"/>
+          </a:xfrm>
+          <a:prstGeom prst="rect">
+            <a:avLst/>
+          </a:prstGeom>
+          <a:noFill/>
+        </p:spPr>
+        <p:txBody>
+          <a:bodyPr wrap="square" lIns="0" tIns="0" rIns="0" bIns="0">
+            <a:spAutoFit/>
+          </a:bodyPr>
+          <a:lstStyle/>
+          <a:p>
+            <a:pPr algn="r"/>
+            <a:r>
+              <a:rPr sz="900" b="0">
+                <a:solidFill>
+                  <a:srgbClr val="718096"/>
+                </a:solidFill>
+                <a:latin typeface="Calibri"/>
+              </a:rPr>
+              <a:t>22</a:t>
+            </a:r>
+          </a:p>
+        </p:txBody>
+      </p:sp>
+      <p:sp>
+        <p:nvSpPr>
+          <p:cNvPr id="31" name="TextBox 30"/>
+          <p:cNvSpPr txBox="1"/>
+          <p:nvPr/>
+        </p:nvSpPr>
+        <p:spPr>
+          <a:xfrm>
+            <a:off x="685800" y="1949451"/>
+            <a:ext cx="411480" cy="182880"/>
+          </a:xfrm>
+          <a:prstGeom prst="rect">
+            <a:avLst/>
+          </a:prstGeom>
+          <a:noFill/>
+        </p:spPr>
+        <p:txBody>
+          <a:bodyPr wrap="square" lIns="0" tIns="0" rIns="0" bIns="0">
+            <a:spAutoFit/>
+          </a:bodyPr>
+          <a:lstStyle/>
+          <a:p>
+            <a:pPr algn="r"/>
+            <a:r>
+              <a:rPr sz="900" b="0">
+                <a:solidFill>
+                  <a:srgbClr val="718096"/>
+                </a:solidFill>
+                <a:latin typeface="Calibri"/>
+              </a:rPr>
+              <a:t>23</a:t>
+            </a:r>
+          </a:p>
+        </p:txBody>
+      </p:sp>
+      <p:sp>
+        <p:nvSpPr>
+          <p:cNvPr id="32" name="TextBox 31"/>
           <p:cNvSpPr txBox="1"/>
           <p:nvPr/>
         </p:nvSpPr>
@@ -5832,14 +7038,399 @@
                 </a:solidFill>
                 <a:latin typeface="Calibri"/>
               </a:rPr>
-              <a:t>2</a:t>
-            </a:r>
-          </a:p>
-        </p:txBody>
-      </p:sp>
-      <p:sp>
-        <p:nvSpPr>
-          <p:cNvPr id="11" name="TextBox 10"/>
+              <a:t>24</a:t>
+            </a:r>
+          </a:p>
+        </p:txBody>
+      </p:sp>
+      <p:sp>
+        <p:nvSpPr>
+          <p:cNvPr id="33" name="TextBox 32"/>
+          <p:cNvSpPr txBox="1"/>
+          <p:nvPr/>
+        </p:nvSpPr>
+        <p:spPr>
+          <a:xfrm>
+            <a:off x="685800" y="1860550"/>
+            <a:ext cx="411480" cy="182880"/>
+          </a:xfrm>
+          <a:prstGeom prst="rect">
+            <a:avLst/>
+          </a:prstGeom>
+          <a:noFill/>
+        </p:spPr>
+        <p:txBody>
+          <a:bodyPr wrap="square" lIns="0" tIns="0" rIns="0" bIns="0">
+            <a:spAutoFit/>
+          </a:bodyPr>
+          <a:lstStyle/>
+          <a:p>
+            <a:pPr algn="r"/>
+            <a:r>
+              <a:rPr sz="900" b="0">
+                <a:solidFill>
+                  <a:srgbClr val="718096"/>
+                </a:solidFill>
+                <a:latin typeface="Calibri"/>
+              </a:rPr>
+              <a:t>25</a:t>
+            </a:r>
+          </a:p>
+        </p:txBody>
+      </p:sp>
+      <p:sp>
+        <p:nvSpPr>
+          <p:cNvPr id="34" name="TextBox 33"/>
+          <p:cNvSpPr txBox="1"/>
+          <p:nvPr/>
+        </p:nvSpPr>
+        <p:spPr>
+          <a:xfrm>
+            <a:off x="685800" y="1816100"/>
+            <a:ext cx="411480" cy="182880"/>
+          </a:xfrm>
+          <a:prstGeom prst="rect">
+            <a:avLst/>
+          </a:prstGeom>
+          <a:noFill/>
+        </p:spPr>
+        <p:txBody>
+          <a:bodyPr wrap="square" lIns="0" tIns="0" rIns="0" bIns="0">
+            <a:spAutoFit/>
+          </a:bodyPr>
+          <a:lstStyle/>
+          <a:p>
+            <a:pPr algn="r"/>
+            <a:r>
+              <a:rPr sz="900" b="0">
+                <a:solidFill>
+                  <a:srgbClr val="718096"/>
+                </a:solidFill>
+                <a:latin typeface="Calibri"/>
+              </a:rPr>
+              <a:t>26</a:t>
+            </a:r>
+          </a:p>
+        </p:txBody>
+      </p:sp>
+      <p:sp>
+        <p:nvSpPr>
+          <p:cNvPr id="35" name="TextBox 34"/>
+          <p:cNvSpPr txBox="1"/>
+          <p:nvPr/>
+        </p:nvSpPr>
+        <p:spPr>
+          <a:xfrm>
+            <a:off x="685800" y="1771650"/>
+            <a:ext cx="411480" cy="182880"/>
+          </a:xfrm>
+          <a:prstGeom prst="rect">
+            <a:avLst/>
+          </a:prstGeom>
+          <a:noFill/>
+        </p:spPr>
+        <p:txBody>
+          <a:bodyPr wrap="square" lIns="0" tIns="0" rIns="0" bIns="0">
+            <a:spAutoFit/>
+          </a:bodyPr>
+          <a:lstStyle/>
+          <a:p>
+            <a:pPr algn="r"/>
+            <a:r>
+              <a:rPr sz="900" b="0">
+                <a:solidFill>
+                  <a:srgbClr val="718096"/>
+                </a:solidFill>
+                <a:latin typeface="Calibri"/>
+              </a:rPr>
+              <a:t>27</a:t>
+            </a:r>
+          </a:p>
+        </p:txBody>
+      </p:sp>
+      <p:sp>
+        <p:nvSpPr>
+          <p:cNvPr id="36" name="TextBox 35"/>
+          <p:cNvSpPr txBox="1"/>
+          <p:nvPr/>
+        </p:nvSpPr>
+        <p:spPr>
+          <a:xfrm>
+            <a:off x="685800" y="1727200"/>
+            <a:ext cx="411480" cy="182880"/>
+          </a:xfrm>
+          <a:prstGeom prst="rect">
+            <a:avLst/>
+          </a:prstGeom>
+          <a:noFill/>
+        </p:spPr>
+        <p:txBody>
+          <a:bodyPr wrap="square" lIns="0" tIns="0" rIns="0" bIns="0">
+            <a:spAutoFit/>
+          </a:bodyPr>
+          <a:lstStyle/>
+          <a:p>
+            <a:pPr algn="r"/>
+            <a:r>
+              <a:rPr sz="900" b="0">
+                <a:solidFill>
+                  <a:srgbClr val="718096"/>
+                </a:solidFill>
+                <a:latin typeface="Calibri"/>
+              </a:rPr>
+              <a:t>28</a:t>
+            </a:r>
+          </a:p>
+        </p:txBody>
+      </p:sp>
+      <p:sp>
+        <p:nvSpPr>
+          <p:cNvPr id="37" name="TextBox 36"/>
+          <p:cNvSpPr txBox="1"/>
+          <p:nvPr/>
+        </p:nvSpPr>
+        <p:spPr>
+          <a:xfrm>
+            <a:off x="685800" y="1682750"/>
+            <a:ext cx="411480" cy="182880"/>
+          </a:xfrm>
+          <a:prstGeom prst="rect">
+            <a:avLst/>
+          </a:prstGeom>
+          <a:noFill/>
+        </p:spPr>
+        <p:txBody>
+          <a:bodyPr wrap="square" lIns="0" tIns="0" rIns="0" bIns="0">
+            <a:spAutoFit/>
+          </a:bodyPr>
+          <a:lstStyle/>
+          <a:p>
+            <a:pPr algn="r"/>
+            <a:r>
+              <a:rPr sz="900" b="0">
+                <a:solidFill>
+                  <a:srgbClr val="718096"/>
+                </a:solidFill>
+                <a:latin typeface="Calibri"/>
+              </a:rPr>
+              <a:t>29</a:t>
+            </a:r>
+          </a:p>
+        </p:txBody>
+      </p:sp>
+      <p:sp>
+        <p:nvSpPr>
+          <p:cNvPr id="38" name="TextBox 37"/>
+          <p:cNvSpPr txBox="1"/>
+          <p:nvPr/>
+        </p:nvSpPr>
+        <p:spPr>
+          <a:xfrm>
+            <a:off x="685800" y="1638300"/>
+            <a:ext cx="411480" cy="182880"/>
+          </a:xfrm>
+          <a:prstGeom prst="rect">
+            <a:avLst/>
+          </a:prstGeom>
+          <a:noFill/>
+        </p:spPr>
+        <p:txBody>
+          <a:bodyPr wrap="square" lIns="0" tIns="0" rIns="0" bIns="0">
+            <a:spAutoFit/>
+          </a:bodyPr>
+          <a:lstStyle/>
+          <a:p>
+            <a:pPr algn="r"/>
+            <a:r>
+              <a:rPr sz="900" b="0">
+                <a:solidFill>
+                  <a:srgbClr val="718096"/>
+                </a:solidFill>
+                <a:latin typeface="Calibri"/>
+              </a:rPr>
+              <a:t>30</a:t>
+            </a:r>
+          </a:p>
+        </p:txBody>
+      </p:sp>
+      <p:sp>
+        <p:nvSpPr>
+          <p:cNvPr id="39" name="TextBox 38"/>
+          <p:cNvSpPr txBox="1"/>
+          <p:nvPr/>
+        </p:nvSpPr>
+        <p:spPr>
+          <a:xfrm>
+            <a:off x="685800" y="1593850"/>
+            <a:ext cx="411480" cy="182880"/>
+          </a:xfrm>
+          <a:prstGeom prst="rect">
+            <a:avLst/>
+          </a:prstGeom>
+          <a:noFill/>
+        </p:spPr>
+        <p:txBody>
+          <a:bodyPr wrap="square" lIns="0" tIns="0" rIns="0" bIns="0">
+            <a:spAutoFit/>
+          </a:bodyPr>
+          <a:lstStyle/>
+          <a:p>
+            <a:pPr algn="r"/>
+            <a:r>
+              <a:rPr sz="900" b="0">
+                <a:solidFill>
+                  <a:srgbClr val="718096"/>
+                </a:solidFill>
+                <a:latin typeface="Calibri"/>
+              </a:rPr>
+              <a:t>31</a:t>
+            </a:r>
+          </a:p>
+        </p:txBody>
+      </p:sp>
+      <p:sp>
+        <p:nvSpPr>
+          <p:cNvPr id="40" name="TextBox 39"/>
+          <p:cNvSpPr txBox="1"/>
+          <p:nvPr/>
+        </p:nvSpPr>
+        <p:spPr>
+          <a:xfrm>
+            <a:off x="685800" y="1549400"/>
+            <a:ext cx="411480" cy="182880"/>
+          </a:xfrm>
+          <a:prstGeom prst="rect">
+            <a:avLst/>
+          </a:prstGeom>
+          <a:noFill/>
+        </p:spPr>
+        <p:txBody>
+          <a:bodyPr wrap="square" lIns="0" tIns="0" rIns="0" bIns="0">
+            <a:spAutoFit/>
+          </a:bodyPr>
+          <a:lstStyle/>
+          <a:p>
+            <a:pPr algn="r"/>
+            <a:r>
+              <a:rPr sz="900" b="0">
+                <a:solidFill>
+                  <a:srgbClr val="718096"/>
+                </a:solidFill>
+                <a:latin typeface="Calibri"/>
+              </a:rPr>
+              <a:t>32</a:t>
+            </a:r>
+          </a:p>
+        </p:txBody>
+      </p:sp>
+      <p:sp>
+        <p:nvSpPr>
+          <p:cNvPr id="41" name="TextBox 40"/>
+          <p:cNvSpPr txBox="1"/>
+          <p:nvPr/>
+        </p:nvSpPr>
+        <p:spPr>
+          <a:xfrm>
+            <a:off x="685800" y="1504950"/>
+            <a:ext cx="411480" cy="182880"/>
+          </a:xfrm>
+          <a:prstGeom prst="rect">
+            <a:avLst/>
+          </a:prstGeom>
+          <a:noFill/>
+        </p:spPr>
+        <p:txBody>
+          <a:bodyPr wrap="square" lIns="0" tIns="0" rIns="0" bIns="0">
+            <a:spAutoFit/>
+          </a:bodyPr>
+          <a:lstStyle/>
+          <a:p>
+            <a:pPr algn="r"/>
+            <a:r>
+              <a:rPr sz="900" b="0">
+                <a:solidFill>
+                  <a:srgbClr val="718096"/>
+                </a:solidFill>
+                <a:latin typeface="Calibri"/>
+              </a:rPr>
+              <a:t>33</a:t>
+            </a:r>
+          </a:p>
+        </p:txBody>
+      </p:sp>
+      <p:sp>
+        <p:nvSpPr>
+          <p:cNvPr id="42" name="TextBox 41"/>
+          <p:cNvSpPr txBox="1"/>
+          <p:nvPr/>
+        </p:nvSpPr>
+        <p:spPr>
+          <a:xfrm>
+            <a:off x="685800" y="1460500"/>
+            <a:ext cx="411480" cy="182880"/>
+          </a:xfrm>
+          <a:prstGeom prst="rect">
+            <a:avLst/>
+          </a:prstGeom>
+          <a:noFill/>
+        </p:spPr>
+        <p:txBody>
+          <a:bodyPr wrap="square" lIns="0" tIns="0" rIns="0" bIns="0">
+            <a:spAutoFit/>
+          </a:bodyPr>
+          <a:lstStyle/>
+          <a:p>
+            <a:pPr algn="r"/>
+            <a:r>
+              <a:rPr sz="900" b="0">
+                <a:solidFill>
+                  <a:srgbClr val="718096"/>
+                </a:solidFill>
+                <a:latin typeface="Calibri"/>
+              </a:rPr>
+              <a:t>34</a:t>
+            </a:r>
+          </a:p>
+        </p:txBody>
+      </p:sp>
+      <p:sp>
+        <p:nvSpPr>
+          <p:cNvPr id="43" name="TextBox 42"/>
+          <p:cNvSpPr txBox="1"/>
+          <p:nvPr/>
+        </p:nvSpPr>
+        <p:spPr>
+          <a:xfrm>
+            <a:off x="685800" y="1416050"/>
+            <a:ext cx="411480" cy="182880"/>
+          </a:xfrm>
+          <a:prstGeom prst="rect">
+            <a:avLst/>
+          </a:prstGeom>
+          <a:noFill/>
+        </p:spPr>
+        <p:txBody>
+          <a:bodyPr wrap="square" lIns="0" tIns="0" rIns="0" bIns="0">
+            <a:spAutoFit/>
+          </a:bodyPr>
+          <a:lstStyle/>
+          <a:p>
+            <a:pPr algn="r"/>
+            <a:r>
+              <a:rPr sz="900" b="0">
+                <a:solidFill>
+                  <a:srgbClr val="718096"/>
+                </a:solidFill>
+                <a:latin typeface="Calibri"/>
+              </a:rPr>
+              <a:t>35</a:t>
+            </a:r>
+          </a:p>
+        </p:txBody>
+      </p:sp>
+      <p:sp>
+        <p:nvSpPr>
+          <p:cNvPr id="44" name="TextBox 43"/>
           <p:cNvSpPr txBox="1"/>
           <p:nvPr/>
         </p:nvSpPr>
@@ -5867,21 +7458,21 @@
                 </a:solidFill>
                 <a:latin typeface="Calibri"/>
               </a:rPr>
-              <a:t>3</a:t>
-            </a:r>
-          </a:p>
-        </p:txBody>
-      </p:sp>
-      <p:sp>
-        <p:nvSpPr>
-          <p:cNvPr id="12" name="Rectangle 11"/>
+              <a:t>36</a:t>
+            </a:r>
+          </a:p>
+        </p:txBody>
+      </p:sp>
+      <p:sp>
+        <p:nvSpPr>
+          <p:cNvPr id="45" name="Rectangle 44"/>
           <p:cNvSpPr/>
           <p:nvPr/>
         </p:nvSpPr>
         <p:spPr>
           <a:xfrm>
-            <a:off x="1584769" y="1463040"/>
-            <a:ext cx="968121" cy="1600200"/>
+            <a:off x="1584769" y="2929890"/>
+            <a:ext cx="968121" cy="133350"/>
           </a:xfrm>
           <a:prstGeom prst="rect">
             <a:avLst/>
@@ -5918,7 +7509,7 @@
       </p:sp>
       <p:sp>
         <p:nvSpPr>
-          <p:cNvPr id="13" name="TextBox 12"/>
+          <p:cNvPr id="46" name="TextBox 45"/>
           <p:cNvSpPr txBox="1"/>
           <p:nvPr/>
         </p:nvSpPr>
@@ -5953,7 +7544,7 @@
       </p:sp>
       <p:sp>
         <p:nvSpPr>
-          <p:cNvPr id="14" name="TextBox 13"/>
+          <p:cNvPr id="47" name="TextBox 46"/>
           <p:cNvSpPr txBox="1"/>
           <p:nvPr/>
         </p:nvSpPr>
@@ -5988,14 +7579,58 @@
       </p:sp>
       <p:sp>
         <p:nvSpPr>
-          <p:cNvPr id="15" name="Rectangle 14"/>
+          <p:cNvPr id="48" name="Rectangle 47"/>
           <p:cNvSpPr/>
           <p:nvPr/>
         </p:nvSpPr>
         <p:spPr>
           <a:xfrm>
+            <a:off x="3344989" y="2752090"/>
+            <a:ext cx="968121" cy="311150"/>
+          </a:xfrm>
+          <a:prstGeom prst="rect">
+            <a:avLst/>
+          </a:prstGeom>
+          <a:solidFill>
+            <a:srgbClr val="C53030"/>
+          </a:solidFill>
+          <a:ln>
+            <a:noFill/>
+          </a:ln>
+        </p:spPr>
+        <p:style>
+          <a:lnRef idx="1">
+            <a:schemeClr val="accent1"/>
+          </a:lnRef>
+          <a:fillRef idx="3">
+            <a:schemeClr val="accent1"/>
+          </a:fillRef>
+          <a:effectRef idx="2">
+            <a:schemeClr val="accent1"/>
+          </a:effectRef>
+          <a:fontRef idx="minor">
+            <a:schemeClr val="lt1"/>
+          </a:fontRef>
+        </p:style>
+        <p:txBody>
+          <a:bodyPr rtlCol="0" anchor="ctr"/>
+          <a:lstStyle/>
+          <a:p>
+            <a:pPr algn="ctr"/>
+            <a:endParaRPr/>
+          </a:p>
+        </p:txBody>
+      </p:sp>
+      <p:sp>
+        <p:nvSpPr>
+          <p:cNvPr id="49" name="Rectangle 48"/>
+          <p:cNvSpPr/>
+          <p:nvPr/>
+        </p:nvSpPr>
+        <p:spPr>
+          <a:xfrm>
             <a:off x="3344989" y="1463040"/>
-            <a:ext cx="968121" cy="1600200"/>
+            <a:ext cx="968121" cy="1289050"/>
           </a:xfrm>
           <a:prstGeom prst="rect">
             <a:avLst/>
@@ -6032,7 +7667,7 @@
       </p:sp>
       <p:sp>
         <p:nvSpPr>
-          <p:cNvPr id="16" name="TextBox 15"/>
+          <p:cNvPr id="50" name="TextBox 49"/>
           <p:cNvSpPr txBox="1"/>
           <p:nvPr/>
         </p:nvSpPr>
@@ -6067,7 +7702,7 @@
       </p:sp>
       <p:sp>
         <p:nvSpPr>
-          <p:cNvPr id="17" name="TextBox 16"/>
+          <p:cNvPr id="51" name="TextBox 50"/>
           <p:cNvSpPr txBox="1"/>
           <p:nvPr/>
         </p:nvSpPr>
@@ -6095,21 +7730,21 @@
                 </a:solidFill>
                 <a:latin typeface="Calibri"/>
               </a:rPr>
-              <a:t>3 / 3</a:t>
-            </a:r>
-          </a:p>
-        </p:txBody>
-      </p:sp>
-      <p:sp>
-        <p:nvSpPr>
-          <p:cNvPr id="18" name="Rectangle 17"/>
+              <a:t>29 / 36</a:t>
+            </a:r>
+          </a:p>
+        </p:txBody>
+      </p:sp>
+      <p:sp>
+        <p:nvSpPr>
+          <p:cNvPr id="52" name="Rectangle 51"/>
           <p:cNvSpPr/>
           <p:nvPr/>
         </p:nvSpPr>
         <p:spPr>
           <a:xfrm>
-            <a:off x="5105209" y="1463040"/>
-            <a:ext cx="968121" cy="1600200"/>
+            <a:off x="5105209" y="2929890"/>
+            <a:ext cx="968121" cy="133350"/>
           </a:xfrm>
           <a:prstGeom prst="rect">
             <a:avLst/>
@@ -6146,7 +7781,7 @@
       </p:sp>
       <p:sp>
         <p:nvSpPr>
-          <p:cNvPr id="19" name="TextBox 18"/>
+          <p:cNvPr id="53" name="TextBox 52"/>
           <p:cNvSpPr txBox="1"/>
           <p:nvPr/>
         </p:nvSpPr>
@@ -6181,7 +7816,7 @@
       </p:sp>
       <p:sp>
         <p:nvSpPr>
-          <p:cNvPr id="20" name="TextBox 19"/>
+          <p:cNvPr id="54" name="TextBox 53"/>
           <p:cNvSpPr txBox="1"/>
           <p:nvPr/>
         </p:nvSpPr>
@@ -6216,14 +7851,14 @@
       </p:sp>
       <p:sp>
         <p:nvSpPr>
-          <p:cNvPr id="21" name="Rectangle 20"/>
+          <p:cNvPr id="55" name="Rectangle 54"/>
           <p:cNvSpPr/>
           <p:nvPr/>
         </p:nvSpPr>
         <p:spPr>
           <a:xfrm>
-            <a:off x="6865429" y="1996440"/>
-            <a:ext cx="968121" cy="1066800"/>
+            <a:off x="6865429" y="2974340"/>
+            <a:ext cx="968121" cy="88900"/>
           </a:xfrm>
           <a:prstGeom prst="rect">
             <a:avLst/>
@@ -6260,7 +7895,7 @@
       </p:sp>
       <p:sp>
         <p:nvSpPr>
-          <p:cNvPr id="22" name="TextBox 21"/>
+          <p:cNvPr id="56" name="TextBox 55"/>
           <p:cNvSpPr txBox="1"/>
           <p:nvPr/>
         </p:nvSpPr>
@@ -6295,7 +7930,7 @@
       </p:sp>
       <p:sp>
         <p:nvSpPr>
-          <p:cNvPr id="23" name="TextBox 22"/>
+          <p:cNvPr id="57" name="TextBox 56"/>
           <p:cNvSpPr txBox="1"/>
           <p:nvPr/>
         </p:nvSpPr>
@@ -6330,7 +7965,7 @@
       </p:sp>
       <p:sp>
         <p:nvSpPr>
-          <p:cNvPr id="24" name="Rectangle 23"/>
+          <p:cNvPr id="58" name="Rectangle 57"/>
           <p:cNvSpPr/>
           <p:nvPr/>
         </p:nvSpPr>
@@ -6374,7 +8009,7 @@
       </p:sp>
       <p:sp>
         <p:nvSpPr>
-          <p:cNvPr id="25" name="TextBox 24"/>
+          <p:cNvPr id="59" name="TextBox 58"/>
           <p:cNvSpPr txBox="1"/>
           <p:nvPr/>
         </p:nvSpPr>
@@ -6409,7 +8044,7 @@
       </p:sp>
       <p:sp>
         <p:nvSpPr>
-          <p:cNvPr id="26" name="Rectangle 25"/>
+          <p:cNvPr id="60" name="Rectangle 59"/>
           <p:cNvSpPr/>
           <p:nvPr/>
         </p:nvSpPr>
@@ -6453,7 +8088,7 @@
       </p:sp>
       <p:sp>
         <p:nvSpPr>
-          <p:cNvPr id="27" name="TextBox 26"/>
+          <p:cNvPr id="61" name="TextBox 60"/>
           <p:cNvSpPr txBox="1"/>
           <p:nvPr/>
         </p:nvSpPr>
@@ -6488,7 +8123,7 @@
       </p:sp>
       <p:sp>
         <p:nvSpPr>
-          <p:cNvPr id="28" name="Rectangle 27"/>
+          <p:cNvPr id="62" name="Rectangle 61"/>
           <p:cNvSpPr/>
           <p:nvPr/>
         </p:nvSpPr>
@@ -6532,7 +8167,7 @@
       </p:sp>
       <p:sp>
         <p:nvSpPr>
-          <p:cNvPr id="29" name="TextBox 28"/>
+          <p:cNvPr id="63" name="TextBox 62"/>
           <p:cNvSpPr txBox="1"/>
           <p:nvPr/>
         </p:nvSpPr>
@@ -6567,7 +8202,7 @@
       </p:sp>
       <p:sp>
         <p:nvSpPr>
-          <p:cNvPr id="30" name="TextBox 29"/>
+          <p:cNvPr id="64" name="TextBox 63"/>
           <p:cNvSpPr txBox="1"/>
           <p:nvPr/>
         </p:nvSpPr>
@@ -6595,7 +8230,7 @@
                 </a:solidFill>
                 <a:latin typeface="Calibri"/>
               </a:rPr>
-              <a:t>ODMI Agent Swarm  ·  Benjy Bream  ·  King's College London  ·  4 / 6</a:t>
+              <a:t>ODMI Agent Swarm  ·  Benjy Bream  ·  King's College London  ·  4 / 7</a:t>
             </a:r>
           </a:p>
         </p:txBody>
@@ -7617,7 +9252,7 @@
                 </a:solidFill>
                 <a:latin typeface="Calibri"/>
               </a:rPr>
-              <a:t>ODMI Agent Swarm  ·  Benjy Bream  ·  King's College London  ·  5 / 6</a:t>
+              <a:t>ODMI Agent Swarm  ·  Benjy Bream  ·  King's College London  ·  5 / 7</a:t>
             </a:r>
           </a:p>
         </p:txBody>
@@ -7649,7 +9284,7 @@
       </p:grpSpPr>
       <p:sp>
         <p:nvSpPr>
-          <p:cNvPr id="99" name="bg"/>
+          <p:cNvPr id="2" name="Rectangle 1"/>
           <p:cNvSpPr/>
           <p:nvPr/>
         </p:nvSpPr>
@@ -7668,17 +9303,32 @@
             <a:noFill/>
           </a:ln>
         </p:spPr>
-        <p:txBody>
-          <a:bodyPr/>
-          <a:lstStyle/>
-          <a:p>
+        <p:style>
+          <a:lnRef idx="1">
+            <a:schemeClr val="accent1"/>
+          </a:lnRef>
+          <a:fillRef idx="3">
+            <a:schemeClr val="accent1"/>
+          </a:fillRef>
+          <a:effectRef idx="2">
+            <a:schemeClr val="accent1"/>
+          </a:effectRef>
+          <a:fontRef idx="minor">
+            <a:schemeClr val="lt1"/>
+          </a:fontRef>
+        </p:style>
+        <p:txBody>
+          <a:bodyPr rtlCol="0" anchor="ctr"/>
+          <a:lstStyle/>
+          <a:p>
+            <a:pPr algn="ctr"/>
             <a:endParaRPr/>
           </a:p>
         </p:txBody>
       </p:sp>
       <p:sp>
         <p:nvSpPr>
-          <p:cNvPr id="100" name="TextBox 99"/>
+          <p:cNvPr id="3" name="TextBox 2"/>
           <p:cNvSpPr txBox="1"/>
           <p:nvPr/>
         </p:nvSpPr>
@@ -7693,7 +9343,7 @@
           <a:noFill/>
         </p:spPr>
         <p:txBody>
-          <a:bodyPr wrap="none">
+          <a:bodyPr wrap="square" lIns="0" tIns="0" rIns="0" bIns="0">
             <a:spAutoFit/>
           </a:bodyPr>
           <a:lstStyle/>
@@ -7713,7 +9363,7 @@
       </p:sp>
       <p:sp>
         <p:nvSpPr>
-          <p:cNvPr id="101" name="TextBox 100"/>
+          <p:cNvPr id="4" name="TextBox 3"/>
           <p:cNvSpPr txBox="1"/>
           <p:nvPr/>
         </p:nvSpPr>
@@ -7728,7 +9378,7 @@
           <a:noFill/>
         </p:spPr>
         <p:txBody>
-          <a:bodyPr wrap="none">
+          <a:bodyPr wrap="square" lIns="0" tIns="0" rIns="0" bIns="0">
             <a:spAutoFit/>
           </a:bodyPr>
           <a:lstStyle/>
@@ -7748,7 +9398,7 @@
       </p:sp>
       <p:pic>
         <p:nvPicPr>
-          <p:cNvPr id="102" name="Picture 101" descr="download.png"/>
+          <p:cNvPr id="5" name="Picture 4" descr="swarm_in_action.png"/>
           <p:cNvPicPr>
             <a:picLocks noChangeAspect="1"/>
           </p:cNvPicPr>
@@ -7762,8 +9412,8 @@
         </p:blipFill>
         <p:spPr>
           <a:xfrm>
-            <a:off x="993371" y="1007021"/>
-            <a:ext cx="6700058" cy="3907879"/>
+            <a:off x="457200" y="1051560"/>
+            <a:ext cx="8229600" cy="3794760"/>
           </a:xfrm>
           <a:prstGeom prst="rect">
             <a:avLst/>
@@ -7772,13 +9422,13 @@
       </p:pic>
       <p:sp>
         <p:nvSpPr>
-          <p:cNvPr id="103" name="TextBox 102"/>
-          <p:cNvSpPr txBox="1"/>
-          <p:nvPr/>
-        </p:nvSpPr>
-        <p:spPr>
-          <a:xfrm>
-            <a:off x="457200" y="4914900"/>
+          <p:cNvPr id="6" name="TextBox 5"/>
+          <p:cNvSpPr txBox="1"/>
+          <p:nvPr/>
+        </p:nvSpPr>
+        <p:spPr>
+          <a:xfrm>
+            <a:off x="457200" y="4850892"/>
             <a:ext cx="8229600" cy="182880"/>
           </a:xfrm>
           <a:prstGeom prst="rect">
@@ -7787,19 +9437,20 @@
           <a:noFill/>
         </p:spPr>
         <p:txBody>
-          <a:bodyPr wrap="none">
-            <a:spAutoFit/>
-          </a:bodyPr>
-          <a:lstStyle/>
-          <a:p>
-            <a:r>
-              <a:rPr sz="800">
+          <a:bodyPr wrap="square" lIns="0" tIns="0" rIns="0" bIns="0">
+            <a:spAutoFit/>
+          </a:bodyPr>
+          <a:lstStyle/>
+          <a:p>
+            <a:pPr algn="l"/>
+            <a:r>
+              <a:rPr sz="800" b="0">
                 <a:solidFill>
                   <a:srgbClr val="718096"/>
                 </a:solidFill>
                 <a:latin typeface="Calibri"/>
               </a:rPr>
-              <a:t>ODMI Agent Swarm  ·  Benjy Bream  ·  King’s College London  ·  6 / 7</a:t>
+              <a:t>ODMI Agent Swarm  ·  Benjy Bream  ·  King's College London  ·  6 / 7</a:t>
             </a:r>
           </a:p>
         </p:txBody>
@@ -8530,7 +10181,7 @@
                 </a:solidFill>
                 <a:latin typeface="Calibri"/>
               </a:rPr>
-              <a:t>TOWARDS 2 AUGUST 2026</a:t>
+              <a:t>JUNE AND JULY</a:t>
             </a:r>
           </a:p>
         </p:txBody>
@@ -8565,7 +10216,7 @@
                 </a:solidFill>
                 <a:latin typeface="Calibri"/>
               </a:rPr>
-              <a:t>Phase B saturation, six countries</a:t>
+              <a:t>Scale to all six countries</a:t>
             </a:r>
           </a:p>
         </p:txBody>
@@ -8579,7 +10230,7 @@
         <p:spPr>
           <a:xfrm>
             <a:off x="5394960" y="1993392"/>
-            <a:ext cx="3520440" cy="682752"/>
+            <a:ext cx="3520440" cy="615553"/>
           </a:xfrm>
           <a:prstGeom prst="rect">
             <a:avLst/>
@@ -8594,14 +10245,38 @@
           <a:p>
             <a:pPr algn="l"/>
             <a:r>
-              <a:rPr sz="1000" b="0">
+              <a:rPr sz="1000" b="0" dirty="0">
                 <a:solidFill>
                   <a:srgbClr val="2D3748"/>
                 </a:solidFill>
                 <a:latin typeface="Calibri"/>
               </a:rPr>
-              <a:t>FR, DE, NL, RO, HU, EE × all 143 questions. Cost–accuracy surface across the Haiku / Sonnet / Opus / tiered model mix.</a:t>
-            </a:r>
+              <a:t>Run all 143 questions across FR, DE, NL, RO, HU and EE — the full Phase B matrix.</a:t>
+            </a:r>
+            <a:endParaRPr lang="en-GB" sz="1000" b="0" dirty="0">
+              <a:solidFill>
+                <a:srgbClr val="2D3748"/>
+              </a:solidFill>
+              <a:latin typeface="Calibri"/>
+            </a:endParaRPr>
+          </a:p>
+          <a:p>
+            <a:pPr algn="l"/>
+            <a:r>
+              <a:rPr lang="en-GB" sz="1000" dirty="0">
+                <a:solidFill>
+                  <a:srgbClr val="2D3748"/>
+                </a:solidFill>
+                <a:latin typeface="Calibri"/>
+              </a:rPr>
+              <a:t>Either focus on where issues most often arise, or if spectacularly issue free across the board, push to full country list.</a:t>
+            </a:r>
+            <a:endParaRPr sz="1000" b="0" dirty="0">
+              <a:solidFill>
+                <a:srgbClr val="2D3748"/>
+              </a:solidFill>
+              <a:latin typeface="Calibri"/>
+            </a:endParaRPr>
           </a:p>
         </p:txBody>
       </p:sp>
@@ -8679,7 +10354,7 @@
                 </a:solidFill>
                 <a:latin typeface="Calibri"/>
               </a:rPr>
-              <a:t>External validity (2024 cycle)</a:t>
+              <a:t>Model cost-effectiveness experiments</a:t>
             </a:r>
           </a:p>
         </p:txBody>
@@ -8714,7 +10389,7 @@
                 </a:solidFill>
                 <a:latin typeface="Calibri"/>
               </a:rPr>
-              <a:t>Pipeline frozen, then run against the 2024 ODMI cycle as a held-out test. Delta against 2025 is itself a result.</a:t>
+              <a:t>Compare Haiku, Sonnet and Opus on accuracy and cost across the matrix. Build the cost-accuracy surface and identify the optimal strategy.</a:t>
             </a:r>
           </a:p>
         </p:txBody>
@@ -8772,7 +10447,7 @@
         <p:spPr>
           <a:xfrm>
             <a:off x="5394960" y="3688080"/>
-            <a:ext cx="3520440" cy="256032"/>
+            <a:ext cx="3520440" cy="169277"/>
           </a:xfrm>
           <a:prstGeom prst="rect">
             <a:avLst/>
@@ -8787,13 +10462,31 @@
           <a:p>
             <a:pPr algn="l"/>
             <a:r>
-              <a:rPr sz="1100" b="1">
+              <a:rPr sz="1100" b="1" dirty="0">
                 <a:solidFill>
                   <a:srgbClr val="1A202C"/>
                 </a:solidFill>
                 <a:latin typeface="Calibri"/>
               </a:rPr>
-              <a:t>Dissertation by 2 August 2026</a:t>
+              <a:t>July</a:t>
+            </a:r>
+            <a:r>
+              <a:rPr lang="en-GB" sz="1100" b="1" dirty="0">
+                <a:solidFill>
+                  <a:srgbClr val="1A202C"/>
+                </a:solidFill>
+                <a:latin typeface="Calibri"/>
+              </a:rPr>
+              <a:t>:</a:t>
+            </a:r>
+            <a:r>
+              <a:rPr sz="1100" b="1" dirty="0">
+                <a:solidFill>
+                  <a:srgbClr val="1A202C"/>
+                </a:solidFill>
+                <a:latin typeface="Calibri"/>
+              </a:rPr>
+              <a:t> dissertation write-up</a:t>
             </a:r>
           </a:p>
         </p:txBody>
@@ -8828,7 +10521,7 @@
                 </a:solidFill>
                 <a:latin typeface="Calibri"/>
               </a:rPr>
-              <a:t>Failure-mode taxonomy and accuracy–cost surface as the two primary contributions. Phase C (36 countries) as a stretch.</a:t>
+              <a:t>Analyse results, write methodology and findings chapters. Submission deadline: 2 August 2026.</a:t>
             </a:r>
           </a:p>
         </p:txBody>
@@ -8907,7 +10600,7 @@
                 </a:solidFill>
                 <a:latin typeface="Calibri"/>
               </a:rPr>
-              <a:t>ODMI Agent Swarm  ·  Benjy Bream  ·  King's College London  ·  6 / 6</a:t>
+              <a:t>ODMI Agent Swarm  ·  Benjy Bream  ·  King's College London  ·  7 / 7</a:t>
             </a:r>
           </a:p>
         </p:txBody>
@@ -9238,4 +10931,319 @@
   </a:objectDefaults>
   <a:extraClrSchemeLst/>
 </a:theme>
+</file>
+
+<file path=ppt/theme/theme2.xml><?xml version="1.0" encoding="utf-8"?>
+<a:theme xmlns:a="http://schemas.openxmlformats.org/drawingml/2006/main" name="Office Theme">
+  <a:themeElements>
+    <a:clrScheme name="Office">
+      <a:dk1>
+        <a:sysClr val="windowText" lastClr="000000"/>
+      </a:dk1>
+      <a:lt1>
+        <a:sysClr val="window" lastClr="FFFFFF"/>
+      </a:lt1>
+      <a:dk2>
+        <a:srgbClr val="0E2841"/>
+      </a:dk2>
+      <a:lt2>
+        <a:srgbClr val="E8E8E8"/>
+      </a:lt2>
+      <a:accent1>
+        <a:srgbClr val="156082"/>
+      </a:accent1>
+      <a:accent2>
+        <a:srgbClr val="E97132"/>
+      </a:accent2>
+      <a:accent3>
+        <a:srgbClr val="196B24"/>
+      </a:accent3>
+      <a:accent4>
+        <a:srgbClr val="0F9ED5"/>
+      </a:accent4>
+      <a:accent5>
+        <a:srgbClr val="A02B93"/>
+      </a:accent5>
+      <a:accent6>
+        <a:srgbClr val="4EA72E"/>
+      </a:accent6>
+      <a:hlink>
+        <a:srgbClr val="467886"/>
+      </a:hlink>
+      <a:folHlink>
+        <a:srgbClr val="96607D"/>
+      </a:folHlink>
+    </a:clrScheme>
+    <a:fontScheme name="Office">
+      <a:majorFont>
+        <a:latin typeface="Aptos Display" panose="02110004020202020204"/>
+        <a:ea typeface=""/>
+        <a:cs typeface=""/>
+        <a:font script="Jpan" typeface="游ゴシック Light"/>
+        <a:font script="Hang" typeface="맑은 고딕"/>
+        <a:font script="Hans" typeface="等线 Light"/>
+        <a:font script="Hant" typeface="新細明體"/>
+        <a:font script="Arab" typeface="Times New Roman"/>
+        <a:font script="Hebr" typeface="Times New Roman"/>
+        <a:font script="Thai" typeface="Angsana New"/>
+        <a:font script="Ethi" typeface="Nyala"/>
+        <a:font script="Beng" typeface="Vrinda"/>
+        <a:font script="Gujr" typeface="Shruti"/>
+        <a:font script="Khmr" typeface="MoolBoran"/>
+        <a:font script="Knda" typeface="Tunga"/>
+        <a:font script="Guru" typeface="Raavi"/>
+        <a:font script="Cans" typeface="Euphemia"/>
+        <a:font script="Cher" typeface="Plantagenet Cherokee"/>
+        <a:font script="Yiii" typeface="Microsoft Yi Baiti"/>
+        <a:font script="Tibt" typeface="Microsoft Himalaya"/>
+        <a:font script="Thaa" typeface="MV Boli"/>
+        <a:font script="Deva" typeface="Mangal"/>
+        <a:font script="Telu" typeface="Gautami"/>
+        <a:font script="Taml" typeface="Latha"/>
+        <a:font script="Syrc" typeface="Estrangelo Edessa"/>
+        <a:font script="Orya" typeface="Kalinga"/>
+        <a:font script="Mlym" typeface="Kartika"/>
+        <a:font script="Laoo" typeface="DokChampa"/>
+        <a:font script="Sinh" typeface="Iskoola Pota"/>
+        <a:font script="Mong" typeface="Mongolian Baiti"/>
+        <a:font script="Viet" typeface="Times New Roman"/>
+        <a:font script="Uigh" typeface="Microsoft Uighur"/>
+        <a:font script="Geor" typeface="Sylfaen"/>
+        <a:font script="Armn" typeface="Arial"/>
+        <a:font script="Bugi" typeface="Leelawadee UI"/>
+        <a:font script="Bopo" typeface="Microsoft JhengHei"/>
+        <a:font script="Java" typeface="Javanese Text"/>
+        <a:font script="Lisu" typeface="Segoe UI"/>
+        <a:font script="Mymr" typeface="Myanmar Text"/>
+        <a:font script="Nkoo" typeface="Ebrima"/>
+        <a:font script="Olck" typeface="Nirmala UI"/>
+        <a:font script="Osma" typeface="Ebrima"/>
+        <a:font script="Phag" typeface="Phagspa"/>
+        <a:font script="Syrn" typeface="Estrangelo Edessa"/>
+        <a:font script="Syrj" typeface="Estrangelo Edessa"/>
+        <a:font script="Syre" typeface="Estrangelo Edessa"/>
+        <a:font script="Sora" typeface="Nirmala UI"/>
+        <a:font script="Tale" typeface="Microsoft Tai Le"/>
+        <a:font script="Talu" typeface="Microsoft New Tai Lue"/>
+        <a:font script="Tfng" typeface="Ebrima"/>
+      </a:majorFont>
+      <a:minorFont>
+        <a:latin typeface="Aptos" panose="02110004020202020204"/>
+        <a:ea typeface=""/>
+        <a:cs typeface=""/>
+        <a:font script="Jpan" typeface="游ゴシック"/>
+        <a:font script="Hang" typeface="맑은 고딕"/>
+        <a:font script="Hans" typeface="等线"/>
+        <a:font script="Hant" typeface="新細明體"/>
+        <a:font script="Arab" typeface="Arial"/>
+        <a:font script="Hebr" typeface="Arial"/>
+        <a:font script="Thai" typeface="Cordia New"/>
+        <a:font script="Ethi" typeface="Nyala"/>
+        <a:font script="Beng" typeface="Vrinda"/>
+        <a:font script="Gujr" typeface="Shruti"/>
+        <a:font script="Khmr" typeface="DaunPenh"/>
+        <a:font script="Knda" typeface="Tunga"/>
+        <a:font script="Guru" typeface="Raavi"/>
+        <a:font script="Cans" typeface="Euphemia"/>
+        <a:font script="Cher" typeface="Plantagenet Cherokee"/>
+        <a:font script="Yiii" typeface="Microsoft Yi Baiti"/>
+        <a:font script="Tibt" typeface="Microsoft Himalaya"/>
+        <a:font script="Thaa" typeface="MV Boli"/>
+        <a:font script="Deva" typeface="Mangal"/>
+        <a:font script="Telu" typeface="Gautami"/>
+        <a:font script="Taml" typeface="Latha"/>
+        <a:font script="Syrc" typeface="Estrangelo Edessa"/>
+        <a:font script="Orya" typeface="Kalinga"/>
+        <a:font script="Mlym" typeface="Kartika"/>
+        <a:font script="Laoo" typeface="DokChampa"/>
+        <a:font script="Sinh" typeface="Iskoola Pota"/>
+        <a:font script="Mong" typeface="Mongolian Baiti"/>
+        <a:font script="Viet" typeface="Arial"/>
+        <a:font script="Uigh" typeface="Microsoft Uighur"/>
+        <a:font script="Geor" typeface="Sylfaen"/>
+        <a:font script="Armn" typeface="Arial"/>
+        <a:font script="Bugi" typeface="Leelawadee UI"/>
+        <a:font script="Bopo" typeface="Microsoft JhengHei"/>
+        <a:font script="Java" typeface="Javanese Text"/>
+        <a:font script="Lisu" typeface="Segoe UI"/>
+        <a:font script="Mymr" typeface="Myanmar Text"/>
+        <a:font script="Nkoo" typeface="Ebrima"/>
+        <a:font script="Olck" typeface="Nirmala UI"/>
+        <a:font script="Osma" typeface="Ebrima"/>
+        <a:font script="Phag" typeface="Phagspa"/>
+        <a:font script="Syrn" typeface="Estrangelo Edessa"/>
+        <a:font script="Syrj" typeface="Estrangelo Edessa"/>
+        <a:font script="Syre" typeface="Estrangelo Edessa"/>
+        <a:font script="Sora" typeface="Nirmala UI"/>
+        <a:font script="Tale" typeface="Microsoft Tai Le"/>
+        <a:font script="Talu" typeface="Microsoft New Tai Lue"/>
+        <a:font script="Tfng" typeface="Ebrima"/>
+      </a:minorFont>
+    </a:fontScheme>
+    <a:fmtScheme name="Office">
+      <a:fillStyleLst>
+        <a:solidFill>
+          <a:schemeClr val="phClr"/>
+        </a:solidFill>
+        <a:gradFill rotWithShape="1">
+          <a:gsLst>
+            <a:gs pos="0">
+              <a:schemeClr val="phClr">
+                <a:lumMod val="110000"/>
+                <a:satMod val="105000"/>
+                <a:tint val="67000"/>
+              </a:schemeClr>
+            </a:gs>
+            <a:gs pos="50000">
+              <a:schemeClr val="phClr">
+                <a:lumMod val="105000"/>
+                <a:satMod val="103000"/>
+                <a:tint val="73000"/>
+              </a:schemeClr>
+            </a:gs>
+            <a:gs pos="100000">
+              <a:schemeClr val="phClr">
+                <a:lumMod val="105000"/>
+                <a:satMod val="109000"/>
+                <a:tint val="81000"/>
+              </a:schemeClr>
+            </a:gs>
+          </a:gsLst>
+          <a:lin ang="5400000" scaled="0"/>
+        </a:gradFill>
+        <a:gradFill rotWithShape="1">
+          <a:gsLst>
+            <a:gs pos="0">
+              <a:schemeClr val="phClr">
+                <a:satMod val="103000"/>
+                <a:lumMod val="102000"/>
+                <a:tint val="94000"/>
+              </a:schemeClr>
+            </a:gs>
+            <a:gs pos="50000">
+              <a:schemeClr val="phClr">
+                <a:satMod val="110000"/>
+                <a:lumMod val="100000"/>
+                <a:shade val="100000"/>
+              </a:schemeClr>
+            </a:gs>
+            <a:gs pos="100000">
+              <a:schemeClr val="phClr">
+                <a:lumMod val="99000"/>
+                <a:satMod val="120000"/>
+                <a:shade val="78000"/>
+              </a:schemeClr>
+            </a:gs>
+          </a:gsLst>
+          <a:lin ang="5400000" scaled="0"/>
+        </a:gradFill>
+      </a:fillStyleLst>
+      <a:lnStyleLst>
+        <a:ln w="12700" cap="flat" cmpd="sng" algn="ctr">
+          <a:solidFill>
+            <a:schemeClr val="phClr"/>
+          </a:solidFill>
+          <a:prstDash val="solid"/>
+          <a:miter lim="800000"/>
+        </a:ln>
+        <a:ln w="19050" cap="flat" cmpd="sng" algn="ctr">
+          <a:solidFill>
+            <a:schemeClr val="phClr"/>
+          </a:solidFill>
+          <a:prstDash val="solid"/>
+          <a:miter lim="800000"/>
+        </a:ln>
+        <a:ln w="25400" cap="flat" cmpd="sng" algn="ctr">
+          <a:solidFill>
+            <a:schemeClr val="phClr"/>
+          </a:solidFill>
+          <a:prstDash val="solid"/>
+          <a:miter lim="800000"/>
+        </a:ln>
+      </a:lnStyleLst>
+      <a:effectStyleLst>
+        <a:effectStyle>
+          <a:effectLst/>
+        </a:effectStyle>
+        <a:effectStyle>
+          <a:effectLst/>
+        </a:effectStyle>
+        <a:effectStyle>
+          <a:effectLst>
+            <a:outerShdw blurRad="57150" dist="19050" dir="5400000" algn="ctr" rotWithShape="0">
+              <a:srgbClr val="000000">
+                <a:alpha val="63000"/>
+              </a:srgbClr>
+            </a:outerShdw>
+          </a:effectLst>
+        </a:effectStyle>
+      </a:effectStyleLst>
+      <a:bgFillStyleLst>
+        <a:solidFill>
+          <a:schemeClr val="phClr"/>
+        </a:solidFill>
+        <a:solidFill>
+          <a:schemeClr val="phClr">
+            <a:tint val="95000"/>
+            <a:satMod val="170000"/>
+          </a:schemeClr>
+        </a:solidFill>
+        <a:gradFill rotWithShape="1">
+          <a:gsLst>
+            <a:gs pos="0">
+              <a:schemeClr val="phClr">
+                <a:tint val="93000"/>
+                <a:satMod val="150000"/>
+                <a:shade val="98000"/>
+                <a:lumMod val="102000"/>
+              </a:schemeClr>
+            </a:gs>
+            <a:gs pos="50000">
+              <a:schemeClr val="phClr">
+                <a:tint val="98000"/>
+                <a:satMod val="130000"/>
+                <a:shade val="90000"/>
+                <a:lumMod val="103000"/>
+              </a:schemeClr>
+            </a:gs>
+            <a:gs pos="100000">
+              <a:schemeClr val="phClr">
+                <a:shade val="63000"/>
+                <a:satMod val="120000"/>
+              </a:schemeClr>
+            </a:gs>
+          </a:gsLst>
+          <a:lin ang="5400000" scaled="0"/>
+        </a:gradFill>
+      </a:bgFillStyleLst>
+    </a:fmtScheme>
+  </a:themeElements>
+  <a:objectDefaults>
+    <a:lnDef>
+      <a:spPr/>
+      <a:bodyPr/>
+      <a:lstStyle/>
+      <a:style>
+        <a:lnRef idx="2">
+          <a:schemeClr val="accent1"/>
+        </a:lnRef>
+        <a:fillRef idx="0">
+          <a:schemeClr val="accent1"/>
+        </a:fillRef>
+        <a:effectRef idx="1">
+          <a:schemeClr val="accent1"/>
+        </a:effectRef>
+        <a:fontRef idx="minor">
+          <a:schemeClr val="tx1"/>
+        </a:fontRef>
+      </a:style>
+    </a:lnDef>
+  </a:objectDefaults>
+  <a:extraClrSchemeLst/>
+  <a:extLst>
+    <a:ext uri="{05A4C25C-085E-4340-85A3-A5531E510DB2}">
+      <thm15:themeFamily xmlns:thm15="http://schemas.microsoft.com/office/thememl/2012/main" name="Office Theme" id="{2E142A2C-CD16-42D6-873A-C26D2A0506FA}" vid="{1BDDFF52-6CD6-40A5-AB3C-68EB2F1E4D0A}"/>
+    </a:ext>
+  </a:extLst>
+</a:theme>
 </file>